--- a/docs/presentations/Agent高可用加固.pptx
+++ b/docs/presentations/Agent高可用加固.pptx
@@ -2,13 +2,13 @@
 <file path=ppt/presentation.xml><?xml version="1.0" encoding="utf-8"?>
 <p:presentation xmlns:p="http://schemas.openxmlformats.org/presentationml/2006/main">
   <p:sldMasterIdLst>
-    <p:sldMasterId xmlns:r="http://schemas.openxmlformats.org/officeDocument/2006/relationships" id="2147483648" r:id="R29bb28e0ffa7414b"/>
+    <p:sldMasterId xmlns:r="http://schemas.openxmlformats.org/officeDocument/2006/relationships" id="2147483648" r:id="Ra38dafb9b9c04909"/>
   </p:sldMasterIdLst>
   <p:notesMasterIdLst>
-    <p:notesMasterId xmlns:r="http://schemas.openxmlformats.org/officeDocument/2006/relationships" r:id="Ra2a0872125d64542"/>
+    <p:notesMasterId xmlns:r="http://schemas.openxmlformats.org/officeDocument/2006/relationships" r:id="R39d0bb2c99054db6"/>
   </p:notesMasterIdLst>
   <p:sldIdLst>
-    <p:sldId xmlns:r="http://schemas.openxmlformats.org/officeDocument/2006/relationships" id="256" r:id="Rb9a25a1924a349d8"/>
+    <p:sldId xmlns:r="http://schemas.openxmlformats.org/officeDocument/2006/relationships" id="256" r:id="R9846a9ee71894317"/>
   </p:sldIdLst>
   <p:sldSz cx="15240000" cy="8572500"/>
   <p:notesSz cx="6858000" cy="9144000"/>
@@ -597,6 +597,56 @@
           </a:p>
           <a:p xmlns:a="http://schemas.openxmlformats.org/drawingml/2006/main">
             <a:r>
+              <a:t/>
+            </a:r>
+          </a:p>
+          <a:p xmlns:a="http://schemas.openxmlformats.org/drawingml/2006/main">
+            <a:r>
+              <a:t>超时设计的起止点与实施边界</a:t>
+            </a:r>
+          </a:p>
+          <a:p xmlns:a="http://schemas.openxmlformats.org/drawingml/2006/main">
+            <a:r>
+              <a:t>普通流和异步标记返回前使用同一组等待保护。目标总时限从调用前准备开始，覆盖取Token、并发准入、借用HTTP连接、域名解析、TCP建连、TLS握手、发送请求、等待有效响应及持续接收。每个阶段的有效等待时间取阶段上限与剩余总时间的较小值。图中为逻辑分组，连接复用时无需重复DNS/TLS。并发满直接拒绝仅指新调用准入，不取消后续有界数据处理队列。现有鉴权可能是同步调用，外层超时不保证停止底层阻塞，需把取消和期限传到鉴权实现并验证残留任务清理。</a:t>
+            </a:r>
+          </a:p>
+          <a:p xmlns:a="http://schemas.openxmlformats.org/drawingml/2006/main">
+            <a:r>
+              <a:t>首条有效响应由三方契约定义，不要求必须是首段正文。合法agent.async_started属于异步受理的有效响应，心跳与空字节不能替代。数据空闲时限限制相邻原始数据之间的停顿。单帧接收时限从该帧起始计算，收到零碎字节不能刷新它；最大帧字节数独立执行。从调用前起算的绝对总时限不因任何数据、心跳或重试重置。仅对双方协议允许的安全请求重试，重试也消费剩余总时限；未知副作用不得自动重放。自发背压暂停与网络空闲应分开计量，暂停期限独立限制且绝对总时限继续走时，避免误判下游责任。</a:t>
+            </a:r>
+          </a:p>
+          <a:p xmlns:a="http://schemas.openxmlformats.org/drawingml/2006/main">
+            <a:r>
+              <a:t>现有DomainAgent代码查询流的stream-idle-timeout仓库默认300s，基于原始DataBuffer首包与间隔；stream-total-timeout默认15m，从订阅时起算。旧FINANCEEX_DOMAIN_AGENT_TIMEOUT环境变量可作为两项兼容回退。它们不是已覆盖调用前鉴权的总预算，也不等同于首个有效业务事件时限，生产有效值必须另查。当前普通查询无应用自动重试。本页分阶段及前置总时限属于补齐设计，不把这些目标写成已上线。</a:t>
+            </a:r>
+          </a:p>
+          <a:p xmlns:a="http://schemas.openxmlformats.org/drawingml/2006/main">
+            <a:r>
+              <a:t>异步标记之前仍然执行普通流的全部适用期限。标记触发原始HTTP结束，同时后续应用事务完成本地挂起，不承诺两者原子或提交先于关闭。后台等待由当前runId/expiresAt记录与Watchdog治理，默认等待24h从挂起提交起算且异步默认关闭。到期提交本地超时终态，原HTTP早已释放。到期或Stop不证明远端停止，未知结果需核对，不能自动重新执行；原终态以后到达的结果按既有迟到回调语义处理，不覆盖终态。</a:t>
+            </a:r>
+          </a:p>
+          <a:p xmlns:a="http://schemas.openxmlformats.org/drawingml/2006/main">
+            <a:r>
+              <a:t>取消请求使用独立、有限的控制请求期限，包含获取必要鉴权、连接和确认响应，不能无限等，也不能仅继承已经到期的原业务请求期限。取消控制链预留有界并发，避免超时洪峰再次挤占普通业务资源。当前stop-path默认空，配置后cancel调用用timeout默认120s且异常记录后返回空结果，不代表已具备明确远端取消确认。本页的‘未确认则标记待核对’、远端状态查询及可靠取消确认仍是待建设能力，需下游契约与状态记录支持。返回取消接口HTTP成功是否证明后台已停止也须联合确认。</a:t>
+            </a:r>
+          </a:p>
+          <a:p xmlns:a="http://schemas.openxmlformats.org/drawingml/2006/main">
+            <a:r>
+              <a:t>异步回调是新的短请求，须限制接入、读取body、解析、事务及响应耗时；下游重试范围有界，早到409按契约退避重试，重复回调按runId幂等处理，不能把后台等待期限当成单次回调HTTP超时。具体各阶段数值按业务等待目标、下游承诺和压测结果确定，本页不设未经验证的固定阈值。</a:t>
+            </a:r>
+          </a:p>
+          <a:p xmlns:a="http://schemas.openxmlformats.org/drawingml/2006/main">
+            <a:r>
+              <a:t>超时验收不能只看收到TimeoutException。逐段注入阻塞，确认连接、许可、缓冲、定时器和处理任务回收，并观察远端仍运行或未知任务的数量。覆盖取Token阻塞、连接池耗尽、DNS/TLS或请求发送停顿、首有效事件迟到、零碎长帧、心跳延长、普通总期限、异步标记与挂起事务交错、异步到期/Stop/回调竞争、取消无响应及恢复后资源回落。ChatService到agentService和agentService到DomainAgent两跳分别配置，转发层不得用自动重试放大未知执行。</a:t>
+            </a:r>
+          </a:p>
+          <a:p xmlns:a="http://schemas.openxmlformats.org/drawingml/2006/main">
+            <a:r>
+              <a:t/>
+            </a:r>
+          </a:p>
+          <a:p xmlns:a="http://schemas.openxmlformats.org/drawingml/2006/main">
+            <a:r>
               <a:t>源码依据</a:t>
             </a:r>
           </a:p>
@@ -657,22 +707,22 @@
           </a:p>
           <a:p xmlns:a="http://schemas.openxmlformats.org/drawingml/2006/main">
             <a:r>
-              <a:t>01  限制同时调用数与等待时间</a:t>
-            </a:r>
-          </a:p>
-          <a:p xmlns:a="http://schemas.openxmlformats.org/drawingml/2006/main">
-            <a:r>
-              <a:t>整台实例和单个Agent分别限并发。</a:t>
-            </a:r>
-          </a:p>
-          <a:p xmlns:a="http://schemas.openxmlformats.org/drawingml/2006/main">
-            <a:r>
-              <a:t>超出并发上限，直接拒绝新调用。</a:t>
-            </a:r>
-          </a:p>
-          <a:p xmlns:a="http://schemas.openxmlformats.org/drawingml/2006/main">
-            <a:r>
-              <a:t>调用超时后释放本地连接和调用名额。</a:t>
+              <a:t>01  并发限制与普通流超时</a:t>
+            </a:r>
+          </a:p>
+          <a:p xmlns:a="http://schemas.openxmlformats.org/drawingml/2006/main">
+            <a:r>
+              <a:t>实例、单Agent分别限并发，满则拒绝。</a:t>
+            </a:r>
+          </a:p>
+          <a:p xmlns:a="http://schemas.openxmlformats.org/drawingml/2006/main">
+            <a:r>
+              <a:t>各阶段有超时，整次调用另设总时限。</a:t>
+            </a:r>
+          </a:p>
+          <a:p xmlns:a="http://schemas.openxmlformats.org/drawingml/2006/main">
+            <a:r>
+              <a:t>超时后停止等待，释放本地连接与名额。</a:t>
             </a:r>
           </a:p>
           <a:p xmlns:a="http://schemas.openxmlformats.org/drawingml/2006/main">
@@ -682,22 +732,27 @@
           </a:p>
           <a:p xmlns:a="http://schemas.openxmlformats.org/drawingml/2006/main">
             <a:r>
-              <a:t>02  长任务在后台继续执行</a:t>
-            </a:r>
-          </a:p>
-          <a:p xmlns:a="http://schemas.openxmlformats.org/drawingml/2006/main">
-            <a:r>
-              <a:t>Agent返回“后台处理中”，结束HTTP。</a:t>
-            </a:r>
-          </a:p>
-          <a:p xmlns:a="http://schemas.openxmlformats.org/drawingml/2006/main">
-            <a:r>
-              <a:t>ChatService记录runId及等待截止时间。</a:t>
-            </a:r>
-          </a:p>
-          <a:p xmlns:a="http://schemas.openxmlformats.org/drawingml/2006/main">
-            <a:r>
-              <a:t>Agent完成或失败后，按runId通知结果。</a:t>
+              <a:t>02  异步任务使用独立等待期限</a:t>
+            </a:r>
+          </a:p>
+          <a:p xmlns:a="http://schemas.openxmlformats.org/drawingml/2006/main">
+            <a:r>
+              <a:t>标记返回前，按普通流的期限等待。</a:t>
+            </a:r>
+          </a:p>
+          <a:p xmlns:a="http://schemas.openxmlformats.org/drawingml/2006/main">
+            <a:r>
+              <a:t>收到标记后结束HTTP，后台继续运行。</a:t>
+            </a:r>
+          </a:p>
+          <a:p xmlns:a="http://schemas.openxmlformats.org/drawingml/2006/main">
+            <a:r>
+              <a:t>单次回调处理限时，按runId匹配。</a:t>
+            </a:r>
+          </a:p>
+          <a:p xmlns:a="http://schemas.openxmlformats.org/drawingml/2006/main">
+            <a:r>
+              <a:t>到期结束本地任务，远端状态另确认。</a:t>
             </a:r>
           </a:p>
           <a:p xmlns:a="http://schemas.openxmlformats.org/drawingml/2006/main">
@@ -707,27 +762,22 @@
           </a:p>
           <a:p xmlns:a="http://schemas.openxmlformats.org/drawingml/2006/main">
             <a:r>
-              <a:t>03  后台任务限量，结果只记一次</a:t>
-            </a:r>
-          </a:p>
-          <a:p xmlns:a="http://schemas.openxmlformats.org/drawingml/2006/main">
-            <a:r>
-              <a:t>按用户、租户、Agent限制未完成任务数。</a:t>
-            </a:r>
-          </a:p>
-          <a:p xmlns:a="http://schemas.openxmlformats.org/drawingml/2006/main">
-            <a:r>
-              <a:t>状态未准备好时，通知下游稍后重试。</a:t>
-            </a:r>
-          </a:p>
-          <a:p xmlns:a="http://schemas.openxmlformats.org/drawingml/2006/main">
-            <a:r>
-              <a:t>重复通知、完成与超时同时发生，</a:t>
-            </a:r>
-          </a:p>
-          <a:p xmlns:a="http://schemas.openxmlformats.org/drawingml/2006/main">
-            <a:r>
-              <a:t>任务最终状态只写入一次。</a:t>
+              <a:t>03  后台任务限量与取消超时</a:t>
+            </a:r>
+          </a:p>
+          <a:p xmlns:a="http://schemas.openxmlformats.org/drawingml/2006/main">
+            <a:r>
+              <a:t>按用户、租户和Agent限制未完成任务数。</a:t>
+            </a:r>
+          </a:p>
+          <a:p xmlns:a="http://schemas.openxmlformats.org/drawingml/2006/main">
+            <a:r>
+              <a:t>达到上限，暂不发起新的后台任务。</a:t>
+            </a:r>
+          </a:p>
+          <a:p xmlns:a="http://schemas.openxmlformats.org/drawingml/2006/main">
+            <a:r>
+              <a:t>取消超时先查任务状态，不自动重跑。</a:t>
             </a:r>
           </a:p>
           <a:p xmlns:a="http://schemas.openxmlformats.org/drawingml/2006/main">
@@ -845,7 +895,7 @@
   </p:cSld>
   <p:clrMap bg1="lt1" tx1="dk1" bg2="lt2" tx2="dk2" accent1="accent1" accent2="accent2" accent3="accent3" accent4="accent4" accent5="accent5" accent6="accent6" hlink="hlink" folHlink="folHlink"/>
   <p:sldLayoutIdLst>
-    <p:sldLayoutId xmlns:r="http://schemas.openxmlformats.org/officeDocument/2006/relationships" id="2147483649" r:id="Ref5a55ec10a1499b"/>
+    <p:sldLayoutId xmlns:r="http://schemas.openxmlformats.org/officeDocument/2006/relationships" id="2147483649" r:id="Rc4cec6f1bee3463b"/>
   </p:sldLayoutIdLst>
   <p:txStyles>
     <p:titleStyle>
@@ -1393,10 +1443,10 @@
       </p:grpSpPr>
       <p:sp>
         <p:nvSpPr>
-          <p:cNvPr id="160" name="text-0">
-            <a:extLst xmlns:a="http://schemas.openxmlformats.org/drawingml/2006/main">
-              <a:ext uri="{FF2B5EF4-FFF2-40B4-BE49-F238E27FC236}">
-                <a16:creationId xmlns:a16="http://schemas.microsoft.com/office/drawing/2014/main" id="{371D3290-4A27-4E8F-8436-F78710A53422}"/>
+          <p:cNvPr id="183" name="text-0">
+            <a:extLst xmlns:a="http://schemas.openxmlformats.org/drawingml/2006/main">
+              <a:ext uri="{FF2B5EF4-FFF2-40B4-BE49-F238E27FC236}">
+                <a16:creationId xmlns:a16="http://schemas.microsoft.com/office/drawing/2014/main" id="{D8731943-8941-4542-89D0-D472045D5FF8}"/>
               </a:ext>
             </a:extLst>
           </p:cNvPr>
@@ -1453,7 +1503,7 @@
           <p:cNvPr id="2" name="text-1">
             <a:extLst xmlns:a="http://schemas.openxmlformats.org/drawingml/2006/main">
               <a:ext uri="{FF2B5EF4-FFF2-40B4-BE49-F238E27FC236}">
-                <a16:creationId xmlns:a16="http://schemas.microsoft.com/office/drawing/2014/main" id="{CCE4C8BC-0C2A-4165-BFB4-2DF0B8D33676}"/>
+                <a16:creationId xmlns:a16="http://schemas.microsoft.com/office/drawing/2014/main" id="{A3C57912-B511-4705-9179-F155916BF25F}"/>
               </a:ext>
             </a:extLst>
           </p:cNvPr>
@@ -1510,7 +1560,7 @@
           <p:cNvPr id="3" name="line-2">
             <a:extLst xmlns:a="http://schemas.openxmlformats.org/drawingml/2006/main">
               <a:ext uri="{FF2B5EF4-FFF2-40B4-BE49-F238E27FC236}">
-                <a16:creationId xmlns:a16="http://schemas.microsoft.com/office/drawing/2014/main" id="{6015C875-E2D7-4C6B-8CF0-27E7D8E1E9F1}"/>
+                <a16:creationId xmlns:a16="http://schemas.microsoft.com/office/drawing/2014/main" id="{6B0202CC-FB39-4A11-8AB7-17AD52AC123E}"/>
               </a:ext>
             </a:extLst>
           </p:cNvPr>
@@ -1541,7 +1591,7 @@
           <p:cNvPr id="4" name="text-3">
             <a:extLst xmlns:a="http://schemas.openxmlformats.org/drawingml/2006/main">
               <a:ext uri="{FF2B5EF4-FFF2-40B4-BE49-F238E27FC236}">
-                <a16:creationId xmlns:a16="http://schemas.microsoft.com/office/drawing/2014/main" id="{06F3B265-69E0-48C4-9686-59254F4891D4}"/>
+                <a16:creationId xmlns:a16="http://schemas.microsoft.com/office/drawing/2014/main" id="{E1B65885-6F0D-4A5C-811F-D4400F79E56C}"/>
               </a:ext>
             </a:extLst>
           </p:cNvPr>
@@ -1598,7 +1648,7 @@
           <p:cNvPr id="5" name="text-4">
             <a:extLst xmlns:a="http://schemas.openxmlformats.org/drawingml/2006/main">
               <a:ext uri="{FF2B5EF4-FFF2-40B4-BE49-F238E27FC236}">
-                <a16:creationId xmlns:a16="http://schemas.microsoft.com/office/drawing/2014/main" id="{8533FA1A-A7D9-4C96-8079-2A0D060C7865}"/>
+                <a16:creationId xmlns:a16="http://schemas.microsoft.com/office/drawing/2014/main" id="{DCA08936-A53D-4CEF-9034-B46353290E3B}"/>
               </a:ext>
             </a:extLst>
           </p:cNvPr>
@@ -1655,18 +1705,18 @@
           <p:cNvPr id="6" name="text-5">
             <a:extLst xmlns:a="http://schemas.openxmlformats.org/drawingml/2006/main">
               <a:ext uri="{FF2B5EF4-FFF2-40B4-BE49-F238E27FC236}">
-                <a16:creationId xmlns:a16="http://schemas.microsoft.com/office/drawing/2014/main" id="{9A713C34-8188-4BC4-98B4-7A164EFE0637}"/>
-              </a:ext>
-            </a:extLst>
-          </p:cNvPr>
-          <p:cNvSpPr>
-            <a:spLocks xmlns:a="http://schemas.openxmlformats.org/drawingml/2006/main" noGrp="1"/>
-          </p:cNvSpPr>
-          <p:nvPr/>
-        </p:nvSpPr>
-        <p:spPr>
-          <a:xfrm xmlns:a="http://schemas.openxmlformats.org/drawingml/2006/main">
-            <a:off x="523875" y="1990725"/>
+                <a16:creationId xmlns:a16="http://schemas.microsoft.com/office/drawing/2014/main" id="{D096432B-7367-4B20-8878-455638E26486}"/>
+              </a:ext>
+            </a:extLst>
+          </p:cNvPr>
+          <p:cNvSpPr>
+            <a:spLocks xmlns:a="http://schemas.openxmlformats.org/drawingml/2006/main" noGrp="1"/>
+          </p:cNvSpPr>
+          <p:nvPr/>
+        </p:nvSpPr>
+        <p:spPr>
+          <a:xfrm xmlns:a="http://schemas.openxmlformats.org/drawingml/2006/main">
+            <a:off x="523875" y="1952625"/>
             <a:ext cx="9429750" cy="304800"/>
           </a:xfrm>
           <a:prstGeom xmlns:a="http://schemas.openxmlformats.org/drawingml/2006/main" prst="rect">
@@ -1702,7 +1752,7 @@
                 <a:ea typeface="Hiragino Sans GB"/>
                 <a:cs typeface="Hiragino Sans GB"/>
               </a:rPr>
-              <a:t>① 连接与长任务：限制同时调用数，小时级任务后台执行</a:t>
+              <a:t>① 连接与长任务：分阶段设超时，后台任务独立计时</a:t>
             </a:r>
           </a:p>
         </p:txBody>
@@ -1712,19 +1762,19 @@
           <p:cNvPr id="7" name="glyph-roundRect-6">
             <a:extLst xmlns:a="http://schemas.openxmlformats.org/drawingml/2006/main">
               <a:ext uri="{FF2B5EF4-FFF2-40B4-BE49-F238E27FC236}">
-                <a16:creationId xmlns:a16="http://schemas.microsoft.com/office/drawing/2014/main" id="{549F9B9B-72C4-45D5-A8B6-BA2022E4AC18}"/>
-              </a:ext>
-            </a:extLst>
-          </p:cNvPr>
-          <p:cNvSpPr>
-            <a:spLocks xmlns:a="http://schemas.openxmlformats.org/drawingml/2006/main" noGrp="1"/>
-          </p:cNvSpPr>
-          <p:nvPr/>
-        </p:nvSpPr>
-        <p:spPr>
-          <a:xfrm xmlns:a="http://schemas.openxmlformats.org/drawingml/2006/main">
-            <a:off x="809625" y="2533650"/>
-            <a:ext cx="419100" cy="476250"/>
+                <a16:creationId xmlns:a16="http://schemas.microsoft.com/office/drawing/2014/main" id="{54D10700-D3D5-4ECD-A0DD-21E6BA7CB7DB}"/>
+              </a:ext>
+            </a:extLst>
+          </p:cNvPr>
+          <p:cNvSpPr>
+            <a:spLocks xmlns:a="http://schemas.openxmlformats.org/drawingml/2006/main" noGrp="1"/>
+          </p:cNvSpPr>
+          <p:nvPr/>
+        </p:nvSpPr>
+        <p:spPr>
+          <a:xfrm xmlns:a="http://schemas.openxmlformats.org/drawingml/2006/main">
+            <a:off x="809625" y="2343150"/>
+            <a:ext cx="419100" cy="428625"/>
           </a:xfrm>
           <a:prstGeom xmlns:a="http://schemas.openxmlformats.org/drawingml/2006/main" prst="roundRect">
             <a:avLst>
@@ -1746,19 +1796,19 @@
           <p:cNvPr id="8" name="glyph-rect-7">
             <a:extLst xmlns:a="http://schemas.openxmlformats.org/drawingml/2006/main">
               <a:ext uri="{FF2B5EF4-FFF2-40B4-BE49-F238E27FC236}">
-                <a16:creationId xmlns:a16="http://schemas.microsoft.com/office/drawing/2014/main" id="{8D83A326-27CE-4536-9E0C-1C966FCA065A}"/>
-              </a:ext>
-            </a:extLst>
-          </p:cNvPr>
-          <p:cNvSpPr>
-            <a:spLocks xmlns:a="http://schemas.openxmlformats.org/drawingml/2006/main" noGrp="1"/>
-          </p:cNvSpPr>
-          <p:nvPr/>
-        </p:nvSpPr>
-        <p:spPr>
-          <a:xfrm xmlns:a="http://schemas.openxmlformats.org/drawingml/2006/main">
-            <a:off x="859917" y="2600325"/>
-            <a:ext cx="318516" cy="76200"/>
+                <a16:creationId xmlns:a16="http://schemas.microsoft.com/office/drawing/2014/main" id="{933FCA4A-CA39-4160-8601-6D048AA3F8BA}"/>
+              </a:ext>
+            </a:extLst>
+          </p:cNvPr>
+          <p:cNvSpPr>
+            <a:spLocks xmlns:a="http://schemas.openxmlformats.org/drawingml/2006/main" noGrp="1"/>
+          </p:cNvSpPr>
+          <p:nvPr/>
+        </p:nvSpPr>
+        <p:spPr>
+          <a:xfrm xmlns:a="http://schemas.openxmlformats.org/drawingml/2006/main">
+            <a:off x="859917" y="2403158"/>
+            <a:ext cx="318516" cy="68580"/>
           </a:xfrm>
           <a:prstGeom xmlns:a="http://schemas.openxmlformats.org/drawingml/2006/main" prst="rect">
             <a:avLst/>
@@ -1778,18 +1828,18 @@
           <p:cNvPr id="9" name="glyph-ellipse-8">
             <a:extLst xmlns:a="http://schemas.openxmlformats.org/drawingml/2006/main">
               <a:ext uri="{FF2B5EF4-FFF2-40B4-BE49-F238E27FC236}">
-                <a16:creationId xmlns:a16="http://schemas.microsoft.com/office/drawing/2014/main" id="{721F952C-1B8F-4913-AE0C-E541E89351B7}"/>
-              </a:ext>
-            </a:extLst>
-          </p:cNvPr>
-          <p:cNvSpPr>
-            <a:spLocks xmlns:a="http://schemas.openxmlformats.org/drawingml/2006/main" noGrp="1"/>
-          </p:cNvSpPr>
-          <p:nvPr/>
-        </p:nvSpPr>
-        <p:spPr>
-          <a:xfrm xmlns:a="http://schemas.openxmlformats.org/drawingml/2006/main">
-            <a:off x="893445" y="2624138"/>
+                <a16:creationId xmlns:a16="http://schemas.microsoft.com/office/drawing/2014/main" id="{F62B6D20-EF66-4ABD-A163-0CF420FB8F68}"/>
+              </a:ext>
+            </a:extLst>
+          </p:cNvPr>
+          <p:cNvSpPr>
+            <a:spLocks xmlns:a="http://schemas.openxmlformats.org/drawingml/2006/main" noGrp="1"/>
+          </p:cNvSpPr>
+          <p:nvPr/>
+        </p:nvSpPr>
+        <p:spPr>
+          <a:xfrm xmlns:a="http://schemas.openxmlformats.org/drawingml/2006/main">
+            <a:off x="893445" y="2424589"/>
             <a:ext cx="23051" cy="23051"/>
           </a:xfrm>
           <a:prstGeom xmlns:a="http://schemas.openxmlformats.org/drawingml/2006/main" prst="ellipse">
@@ -1810,18 +1860,18 @@
           <p:cNvPr id="10" name="line-9">
             <a:extLst xmlns:a="http://schemas.openxmlformats.org/drawingml/2006/main">
               <a:ext uri="{FF2B5EF4-FFF2-40B4-BE49-F238E27FC236}">
-                <a16:creationId xmlns:a16="http://schemas.microsoft.com/office/drawing/2014/main" id="{F1485D1C-1097-4035-A61B-9D8A44940B91}"/>
-              </a:ext>
-            </a:extLst>
-          </p:cNvPr>
-          <p:cNvSpPr>
-            <a:spLocks xmlns:a="http://schemas.openxmlformats.org/drawingml/2006/main" noGrp="1"/>
-          </p:cNvSpPr>
-          <p:nvPr/>
-        </p:nvSpPr>
-        <p:spPr>
-          <a:xfrm xmlns:a="http://schemas.openxmlformats.org/drawingml/2006/main">
-            <a:off x="989838" y="2638425"/>
+                <a16:creationId xmlns:a16="http://schemas.microsoft.com/office/drawing/2014/main" id="{1D5DBB75-D661-4805-90BC-2463694840CD}"/>
+              </a:ext>
+            </a:extLst>
+          </p:cNvPr>
+          <p:cNvSpPr>
+            <a:spLocks xmlns:a="http://schemas.openxmlformats.org/drawingml/2006/main" noGrp="1"/>
+          </p:cNvSpPr>
+          <p:nvPr/>
+        </p:nvSpPr>
+        <p:spPr>
+          <a:xfrm xmlns:a="http://schemas.openxmlformats.org/drawingml/2006/main">
+            <a:off x="989838" y="2437448"/>
             <a:ext cx="138303" cy="0"/>
           </a:xfrm>
           <a:prstGeom xmlns:a="http://schemas.openxmlformats.org/drawingml/2006/main" prst="line">
@@ -1841,19 +1891,19 @@
           <p:cNvPr id="11" name="glyph-rect-10">
             <a:extLst xmlns:a="http://schemas.openxmlformats.org/drawingml/2006/main">
               <a:ext uri="{FF2B5EF4-FFF2-40B4-BE49-F238E27FC236}">
-                <a16:creationId xmlns:a16="http://schemas.microsoft.com/office/drawing/2014/main" id="{5544EC83-8820-4A8F-B30A-58BF442C34AC}"/>
-              </a:ext>
-            </a:extLst>
-          </p:cNvPr>
-          <p:cNvSpPr>
-            <a:spLocks xmlns:a="http://schemas.openxmlformats.org/drawingml/2006/main" noGrp="1"/>
-          </p:cNvSpPr>
-          <p:nvPr/>
-        </p:nvSpPr>
-        <p:spPr>
-          <a:xfrm xmlns:a="http://schemas.openxmlformats.org/drawingml/2006/main">
-            <a:off x="859917" y="2719388"/>
-            <a:ext cx="318516" cy="76200"/>
+                <a16:creationId xmlns:a16="http://schemas.microsoft.com/office/drawing/2014/main" id="{70F6DF79-4AE0-471E-80EF-9320F238F616}"/>
+              </a:ext>
+            </a:extLst>
+          </p:cNvPr>
+          <p:cNvSpPr>
+            <a:spLocks xmlns:a="http://schemas.openxmlformats.org/drawingml/2006/main" noGrp="1"/>
+          </p:cNvSpPr>
+          <p:nvPr/>
+        </p:nvSpPr>
+        <p:spPr>
+          <a:xfrm xmlns:a="http://schemas.openxmlformats.org/drawingml/2006/main">
+            <a:off x="859917" y="2510314"/>
+            <a:ext cx="318516" cy="68580"/>
           </a:xfrm>
           <a:prstGeom xmlns:a="http://schemas.openxmlformats.org/drawingml/2006/main" prst="rect">
             <a:avLst/>
@@ -1873,18 +1923,18 @@
           <p:cNvPr id="12" name="glyph-ellipse-11">
             <a:extLst xmlns:a="http://schemas.openxmlformats.org/drawingml/2006/main">
               <a:ext uri="{FF2B5EF4-FFF2-40B4-BE49-F238E27FC236}">
-                <a16:creationId xmlns:a16="http://schemas.microsoft.com/office/drawing/2014/main" id="{587FFFE7-AA0E-4F05-82E4-23BB038B7875}"/>
-              </a:ext>
-            </a:extLst>
-          </p:cNvPr>
-          <p:cNvSpPr>
-            <a:spLocks xmlns:a="http://schemas.openxmlformats.org/drawingml/2006/main" noGrp="1"/>
-          </p:cNvSpPr>
-          <p:nvPr/>
-        </p:nvSpPr>
-        <p:spPr>
-          <a:xfrm xmlns:a="http://schemas.openxmlformats.org/drawingml/2006/main">
-            <a:off x="893445" y="2743200"/>
+                <a16:creationId xmlns:a16="http://schemas.microsoft.com/office/drawing/2014/main" id="{FD2AC570-F6E3-49D8-8D5E-DAB59D4FD916}"/>
+              </a:ext>
+            </a:extLst>
+          </p:cNvPr>
+          <p:cNvSpPr>
+            <a:spLocks xmlns:a="http://schemas.openxmlformats.org/drawingml/2006/main" noGrp="1"/>
+          </p:cNvSpPr>
+          <p:nvPr/>
+        </p:nvSpPr>
+        <p:spPr>
+          <a:xfrm xmlns:a="http://schemas.openxmlformats.org/drawingml/2006/main">
+            <a:off x="893445" y="2531745"/>
             <a:ext cx="23051" cy="23051"/>
           </a:xfrm>
           <a:prstGeom xmlns:a="http://schemas.openxmlformats.org/drawingml/2006/main" prst="ellipse">
@@ -1905,18 +1955,18 @@
           <p:cNvPr id="13" name="line-12">
             <a:extLst xmlns:a="http://schemas.openxmlformats.org/drawingml/2006/main">
               <a:ext uri="{FF2B5EF4-FFF2-40B4-BE49-F238E27FC236}">
-                <a16:creationId xmlns:a16="http://schemas.microsoft.com/office/drawing/2014/main" id="{EB06D924-02D7-4980-81B7-8BB3AE8B400B}"/>
-              </a:ext>
-            </a:extLst>
-          </p:cNvPr>
-          <p:cNvSpPr>
-            <a:spLocks xmlns:a="http://schemas.openxmlformats.org/drawingml/2006/main" noGrp="1"/>
-          </p:cNvSpPr>
-          <p:nvPr/>
-        </p:nvSpPr>
-        <p:spPr>
-          <a:xfrm xmlns:a="http://schemas.openxmlformats.org/drawingml/2006/main">
-            <a:off x="989838" y="2757488"/>
+                <a16:creationId xmlns:a16="http://schemas.microsoft.com/office/drawing/2014/main" id="{A24E81DD-202C-4CE1-8F51-D73034B91768}"/>
+              </a:ext>
+            </a:extLst>
+          </p:cNvPr>
+          <p:cNvSpPr>
+            <a:spLocks xmlns:a="http://schemas.openxmlformats.org/drawingml/2006/main" noGrp="1"/>
+          </p:cNvSpPr>
+          <p:nvPr/>
+        </p:nvSpPr>
+        <p:spPr>
+          <a:xfrm xmlns:a="http://schemas.openxmlformats.org/drawingml/2006/main">
+            <a:off x="989838" y="2544604"/>
             <a:ext cx="138303" cy="0"/>
           </a:xfrm>
           <a:prstGeom xmlns:a="http://schemas.openxmlformats.org/drawingml/2006/main" prst="line">
@@ -1936,19 +1986,19 @@
           <p:cNvPr id="14" name="glyph-rect-13">
             <a:extLst xmlns:a="http://schemas.openxmlformats.org/drawingml/2006/main">
               <a:ext uri="{FF2B5EF4-FFF2-40B4-BE49-F238E27FC236}">
-                <a16:creationId xmlns:a16="http://schemas.microsoft.com/office/drawing/2014/main" id="{30109CAF-F5BA-4D6A-B634-074C3366D87B}"/>
-              </a:ext>
-            </a:extLst>
-          </p:cNvPr>
-          <p:cNvSpPr>
-            <a:spLocks xmlns:a="http://schemas.openxmlformats.org/drawingml/2006/main" noGrp="1"/>
-          </p:cNvSpPr>
-          <p:nvPr/>
-        </p:nvSpPr>
-        <p:spPr>
-          <a:xfrm xmlns:a="http://schemas.openxmlformats.org/drawingml/2006/main">
-            <a:off x="859917" y="2838450"/>
-            <a:ext cx="318516" cy="76200"/>
+                <a16:creationId xmlns:a16="http://schemas.microsoft.com/office/drawing/2014/main" id="{596ACB8E-A4C0-4F20-BA96-93DB8446BACC}"/>
+              </a:ext>
+            </a:extLst>
+          </p:cNvPr>
+          <p:cNvSpPr>
+            <a:spLocks xmlns:a="http://schemas.openxmlformats.org/drawingml/2006/main" noGrp="1"/>
+          </p:cNvSpPr>
+          <p:nvPr/>
+        </p:nvSpPr>
+        <p:spPr>
+          <a:xfrm xmlns:a="http://schemas.openxmlformats.org/drawingml/2006/main">
+            <a:off x="859917" y="2617470"/>
+            <a:ext cx="318516" cy="68580"/>
           </a:xfrm>
           <a:prstGeom xmlns:a="http://schemas.openxmlformats.org/drawingml/2006/main" prst="rect">
             <a:avLst/>
@@ -1968,18 +2018,18 @@
           <p:cNvPr id="15" name="glyph-ellipse-14">
             <a:extLst xmlns:a="http://schemas.openxmlformats.org/drawingml/2006/main">
               <a:ext uri="{FF2B5EF4-FFF2-40B4-BE49-F238E27FC236}">
-                <a16:creationId xmlns:a16="http://schemas.microsoft.com/office/drawing/2014/main" id="{0DBEB04B-F0EB-443A-9022-0B11B334045F}"/>
-              </a:ext>
-            </a:extLst>
-          </p:cNvPr>
-          <p:cNvSpPr>
-            <a:spLocks xmlns:a="http://schemas.openxmlformats.org/drawingml/2006/main" noGrp="1"/>
-          </p:cNvSpPr>
-          <p:nvPr/>
-        </p:nvSpPr>
-        <p:spPr>
-          <a:xfrm xmlns:a="http://schemas.openxmlformats.org/drawingml/2006/main">
-            <a:off x="893445" y="2862263"/>
+                <a16:creationId xmlns:a16="http://schemas.microsoft.com/office/drawing/2014/main" id="{46C1C68D-2773-4D29-839E-2E31DA2673C6}"/>
+              </a:ext>
+            </a:extLst>
+          </p:cNvPr>
+          <p:cNvSpPr>
+            <a:spLocks xmlns:a="http://schemas.openxmlformats.org/drawingml/2006/main" noGrp="1"/>
+          </p:cNvSpPr>
+          <p:nvPr/>
+        </p:nvSpPr>
+        <p:spPr>
+          <a:xfrm xmlns:a="http://schemas.openxmlformats.org/drawingml/2006/main">
+            <a:off x="893445" y="2638901"/>
             <a:ext cx="23051" cy="23051"/>
           </a:xfrm>
           <a:prstGeom xmlns:a="http://schemas.openxmlformats.org/drawingml/2006/main" prst="ellipse">
@@ -2000,18 +2050,18 @@
           <p:cNvPr id="16" name="line-15">
             <a:extLst xmlns:a="http://schemas.openxmlformats.org/drawingml/2006/main">
               <a:ext uri="{FF2B5EF4-FFF2-40B4-BE49-F238E27FC236}">
-                <a16:creationId xmlns:a16="http://schemas.microsoft.com/office/drawing/2014/main" id="{6FEC6FA0-99B1-46D4-89BC-E0EF2F2E26CE}"/>
-              </a:ext>
-            </a:extLst>
-          </p:cNvPr>
-          <p:cNvSpPr>
-            <a:spLocks xmlns:a="http://schemas.openxmlformats.org/drawingml/2006/main" noGrp="1"/>
-          </p:cNvSpPr>
-          <p:nvPr/>
-        </p:nvSpPr>
-        <p:spPr>
-          <a:xfrm xmlns:a="http://schemas.openxmlformats.org/drawingml/2006/main">
-            <a:off x="989838" y="2876550"/>
+                <a16:creationId xmlns:a16="http://schemas.microsoft.com/office/drawing/2014/main" id="{620D46DF-54D0-4CC8-AEFC-36B4E7BE0FE5}"/>
+              </a:ext>
+            </a:extLst>
+          </p:cNvPr>
+          <p:cNvSpPr>
+            <a:spLocks xmlns:a="http://schemas.openxmlformats.org/drawingml/2006/main" noGrp="1"/>
+          </p:cNvSpPr>
+          <p:nvPr/>
+        </p:nvSpPr>
+        <p:spPr>
+          <a:xfrm xmlns:a="http://schemas.openxmlformats.org/drawingml/2006/main">
+            <a:off x="989838" y="2651760"/>
             <a:ext cx="138303" cy="0"/>
           </a:xfrm>
           <a:prstGeom xmlns:a="http://schemas.openxmlformats.org/drawingml/2006/main" prst="line">
@@ -2031,18 +2081,18 @@
           <p:cNvPr id="17" name="text-16">
             <a:extLst xmlns:a="http://schemas.openxmlformats.org/drawingml/2006/main">
               <a:ext uri="{FF2B5EF4-FFF2-40B4-BE49-F238E27FC236}">
-                <a16:creationId xmlns:a16="http://schemas.microsoft.com/office/drawing/2014/main" id="{415692F0-0B1B-41D7-8E8C-7F2735E3669B}"/>
-              </a:ext>
-            </a:extLst>
-          </p:cNvPr>
-          <p:cNvSpPr>
-            <a:spLocks xmlns:a="http://schemas.openxmlformats.org/drawingml/2006/main" noGrp="1"/>
-          </p:cNvSpPr>
-          <p:nvPr/>
-        </p:nvSpPr>
-        <p:spPr>
-          <a:xfrm xmlns:a="http://schemas.openxmlformats.org/drawingml/2006/main">
-            <a:off x="523875" y="3105150"/>
+                <a16:creationId xmlns:a16="http://schemas.microsoft.com/office/drawing/2014/main" id="{0992486C-3102-4BDA-864A-6F0699821E44}"/>
+              </a:ext>
+            </a:extLst>
+          </p:cNvPr>
+          <p:cNvSpPr>
+            <a:spLocks xmlns:a="http://schemas.openxmlformats.org/drawingml/2006/main" noGrp="1"/>
+          </p:cNvSpPr>
+          <p:nvPr/>
+        </p:nvSpPr>
+        <p:spPr>
+          <a:xfrm xmlns:a="http://schemas.openxmlformats.org/drawingml/2006/main">
+            <a:off x="523875" y="2838450"/>
             <a:ext cx="1609725" cy="266700"/>
           </a:xfrm>
           <a:prstGeom xmlns:a="http://schemas.openxmlformats.org/drawingml/2006/main" prst="rect">
@@ -2088,19 +2138,19 @@
           <p:cNvPr id="18" name="glyph-hexagon-17">
             <a:extLst xmlns:a="http://schemas.openxmlformats.org/drawingml/2006/main">
               <a:ext uri="{FF2B5EF4-FFF2-40B4-BE49-F238E27FC236}">
-                <a16:creationId xmlns:a16="http://schemas.microsoft.com/office/drawing/2014/main" id="{B3ECCC7E-6D0B-4625-9A1C-83D00FF6B4AB}"/>
-              </a:ext>
-            </a:extLst>
-          </p:cNvPr>
-          <p:cNvSpPr>
-            <a:spLocks xmlns:a="http://schemas.openxmlformats.org/drawingml/2006/main" noGrp="1"/>
-          </p:cNvSpPr>
-          <p:nvPr/>
-        </p:nvSpPr>
-        <p:spPr>
-          <a:xfrm xmlns:a="http://schemas.openxmlformats.org/drawingml/2006/main">
-            <a:off x="2343150" y="2514600"/>
-            <a:ext cx="1885950" cy="581025"/>
+                <a16:creationId xmlns:a16="http://schemas.microsoft.com/office/drawing/2014/main" id="{864E12D4-B6C0-40DA-A4A1-FA7D6C33E32C}"/>
+              </a:ext>
+            </a:extLst>
+          </p:cNvPr>
+          <p:cNvSpPr>
+            <a:spLocks xmlns:a="http://schemas.openxmlformats.org/drawingml/2006/main" noGrp="1"/>
+          </p:cNvSpPr>
+          <p:nvPr/>
+        </p:nvSpPr>
+        <p:spPr>
+          <a:xfrm xmlns:a="http://schemas.openxmlformats.org/drawingml/2006/main">
+            <a:off x="2343150" y="2324100"/>
+            <a:ext cx="1885950" cy="504825"/>
           </a:xfrm>
           <a:prstGeom xmlns:a="http://schemas.openxmlformats.org/drawingml/2006/main" prst="hexagon">
             <a:avLst/>
@@ -2120,19 +2170,19 @@
           <p:cNvPr id="19" name="text-18">
             <a:extLst xmlns:a="http://schemas.openxmlformats.org/drawingml/2006/main">
               <a:ext uri="{FF2B5EF4-FFF2-40B4-BE49-F238E27FC236}">
-                <a16:creationId xmlns:a16="http://schemas.microsoft.com/office/drawing/2014/main" id="{02F41C0D-4C09-4013-A9A3-D67412B17419}"/>
-              </a:ext>
-            </a:extLst>
-          </p:cNvPr>
-          <p:cNvSpPr>
-            <a:spLocks xmlns:a="http://schemas.openxmlformats.org/drawingml/2006/main" noGrp="1"/>
-          </p:cNvSpPr>
-          <p:nvPr/>
-        </p:nvSpPr>
-        <p:spPr>
-          <a:xfrm xmlns:a="http://schemas.openxmlformats.org/drawingml/2006/main">
-            <a:off x="2514600" y="2571750"/>
-            <a:ext cx="1552575" cy="476250"/>
+                <a16:creationId xmlns:a16="http://schemas.microsoft.com/office/drawing/2014/main" id="{6B8A216C-D75D-45E2-BE18-9F9C4D50A50B}"/>
+              </a:ext>
+            </a:extLst>
+          </p:cNvPr>
+          <p:cNvSpPr>
+            <a:spLocks xmlns:a="http://schemas.openxmlformats.org/drawingml/2006/main" noGrp="1"/>
+          </p:cNvSpPr>
+          <p:nvPr/>
+        </p:nvSpPr>
+        <p:spPr>
+          <a:xfrm xmlns:a="http://schemas.openxmlformats.org/drawingml/2006/main">
+            <a:off x="2514600" y="2352675"/>
+            <a:ext cx="1552575" cy="438150"/>
           </a:xfrm>
           <a:prstGeom xmlns:a="http://schemas.openxmlformats.org/drawingml/2006/main" prst="rect">
             <a:avLst/>
@@ -2200,18 +2250,18 @@
           <p:cNvPr id="20" name="shape-19">
             <a:extLst xmlns:a="http://schemas.openxmlformats.org/drawingml/2006/main">
               <a:ext uri="{FF2B5EF4-FFF2-40B4-BE49-F238E27FC236}">
-                <a16:creationId xmlns:a16="http://schemas.microsoft.com/office/drawing/2014/main" id="{C01BE4DF-3087-4FA9-8DC6-A8188739B887}"/>
-              </a:ext>
-            </a:extLst>
-          </p:cNvPr>
-          <p:cNvSpPr>
-            <a:spLocks xmlns:a="http://schemas.openxmlformats.org/drawingml/2006/main" noGrp="1"/>
-          </p:cNvSpPr>
-          <p:nvPr/>
-        </p:nvSpPr>
-        <p:spPr>
-          <a:xfrm xmlns:a="http://schemas.openxmlformats.org/drawingml/2006/main">
-            <a:off x="1228725" y="2781300"/>
+                <a16:creationId xmlns:a16="http://schemas.microsoft.com/office/drawing/2014/main" id="{9E505C75-F87E-4608-BFA2-5316B3E82B9C}"/>
+              </a:ext>
+            </a:extLst>
+          </p:cNvPr>
+          <p:cNvSpPr>
+            <a:spLocks xmlns:a="http://schemas.openxmlformats.org/drawingml/2006/main" noGrp="1"/>
+          </p:cNvSpPr>
+          <p:nvPr/>
+        </p:nvSpPr>
+        <p:spPr>
+          <a:xfrm xmlns:a="http://schemas.openxmlformats.org/drawingml/2006/main">
+            <a:off x="1228725" y="2562225"/>
             <a:ext cx="9525" cy="9525"/>
           </a:xfrm>
           <a:prstGeom xmlns:a="http://schemas.openxmlformats.org/drawingml/2006/main" prst="rect">
@@ -2228,18 +2278,18 @@
           <p:cNvPr id="21" name="shape-20">
             <a:extLst xmlns:a="http://schemas.openxmlformats.org/drawingml/2006/main">
               <a:ext uri="{FF2B5EF4-FFF2-40B4-BE49-F238E27FC236}">
-                <a16:creationId xmlns:a16="http://schemas.microsoft.com/office/drawing/2014/main" id="{3F902AE5-5CE1-44F1-8D45-403E64B589E7}"/>
-              </a:ext>
-            </a:extLst>
-          </p:cNvPr>
-          <p:cNvSpPr>
-            <a:spLocks xmlns:a="http://schemas.openxmlformats.org/drawingml/2006/main" noGrp="1"/>
-          </p:cNvSpPr>
-          <p:nvPr/>
-        </p:nvSpPr>
-        <p:spPr>
-          <a:xfrm xmlns:a="http://schemas.openxmlformats.org/drawingml/2006/main">
-            <a:off x="2343150" y="2781300"/>
+                <a16:creationId xmlns:a16="http://schemas.microsoft.com/office/drawing/2014/main" id="{B3AA891D-1A41-4FB9-A9AB-6B408ACBEC00}"/>
+              </a:ext>
+            </a:extLst>
+          </p:cNvPr>
+          <p:cNvSpPr>
+            <a:spLocks xmlns:a="http://schemas.openxmlformats.org/drawingml/2006/main" noGrp="1"/>
+          </p:cNvSpPr>
+          <p:nvPr/>
+        </p:nvSpPr>
+        <p:spPr>
+          <a:xfrm xmlns:a="http://schemas.openxmlformats.org/drawingml/2006/main">
+            <a:off x="2343150" y="2562225"/>
             <a:ext cx="9525" cy="9525"/>
           </a:xfrm>
           <a:prstGeom xmlns:a="http://schemas.openxmlformats.org/drawingml/2006/main" prst="rect">
@@ -2253,7 +2303,7 @@
       </p:sp>
       <p:cxnSp>
         <p:nvCxnSpPr>
-          <p:cNvPr id="181" name=""/>
+          <p:cNvPr id="204" name=""/>
           <p:cNvCxnSpPr>
             <a:stCxn xmlns:a="http://schemas.openxmlformats.org/drawingml/2006/main" id="20" idx="3"/>
             <a:endCxn xmlns:a="http://schemas.openxmlformats.org/drawingml/2006/main" id="21" idx="1"/>
@@ -2262,7 +2312,7 @@
         </p:nvCxnSpPr>
         <p:spPr>
           <a:xfrm xmlns:a="http://schemas.openxmlformats.org/drawingml/2006/main">
-            <a:off x="1238250" y="2786063"/>
+            <a:off x="1238250" y="2566988"/>
             <a:ext cx="1104900" cy="0"/>
           </a:xfrm>
           <a:prstGeom xmlns:a="http://schemas.openxmlformats.org/drawingml/2006/main" prst="straightConnector1">
@@ -2282,18 +2332,18 @@
           <p:cNvPr id="23" name="text-22">
             <a:extLst xmlns:a="http://schemas.openxmlformats.org/drawingml/2006/main">
               <a:ext uri="{FF2B5EF4-FFF2-40B4-BE49-F238E27FC236}">
-                <a16:creationId xmlns:a16="http://schemas.microsoft.com/office/drawing/2014/main" id="{BA7CFB29-A8A6-4C5B-A92D-2250531F3CF6}"/>
-              </a:ext>
-            </a:extLst>
-          </p:cNvPr>
-          <p:cNvSpPr>
-            <a:spLocks xmlns:a="http://schemas.openxmlformats.org/drawingml/2006/main" noGrp="1"/>
-          </p:cNvSpPr>
-          <p:nvPr/>
-        </p:nvSpPr>
-        <p:spPr>
-          <a:xfrm xmlns:a="http://schemas.openxmlformats.org/drawingml/2006/main">
-            <a:off x="2390775" y="3143250"/>
+                <a16:creationId xmlns:a16="http://schemas.microsoft.com/office/drawing/2014/main" id="{FC4D8139-1DAB-4CE1-93E4-9BD901187A64}"/>
+              </a:ext>
+            </a:extLst>
+          </p:cNvPr>
+          <p:cNvSpPr>
+            <a:spLocks xmlns:a="http://schemas.openxmlformats.org/drawingml/2006/main" noGrp="1"/>
+          </p:cNvSpPr>
+          <p:nvPr/>
+        </p:nvSpPr>
+        <p:spPr>
+          <a:xfrm xmlns:a="http://schemas.openxmlformats.org/drawingml/2006/main">
+            <a:off x="2390775" y="2876550"/>
             <a:ext cx="1790700" cy="238125"/>
           </a:xfrm>
           <a:prstGeom xmlns:a="http://schemas.openxmlformats.org/drawingml/2006/main" prst="rect">
@@ -2339,19 +2389,19 @@
           <p:cNvPr id="24" name="glyph-ellipse-23">
             <a:extLst xmlns:a="http://schemas.openxmlformats.org/drawingml/2006/main">
               <a:ext uri="{FF2B5EF4-FFF2-40B4-BE49-F238E27FC236}">
-                <a16:creationId xmlns:a16="http://schemas.microsoft.com/office/drawing/2014/main" id="{914D4790-7EC2-4D3A-AEA2-646F1770BF7A}"/>
-              </a:ext>
-            </a:extLst>
-          </p:cNvPr>
-          <p:cNvSpPr>
-            <a:spLocks xmlns:a="http://schemas.openxmlformats.org/drawingml/2006/main" noGrp="1"/>
-          </p:cNvSpPr>
-          <p:nvPr/>
-        </p:nvSpPr>
-        <p:spPr>
-          <a:xfrm xmlns:a="http://schemas.openxmlformats.org/drawingml/2006/main">
-            <a:off x="5019675" y="2581275"/>
-            <a:ext cx="409575" cy="409575"/>
+                <a16:creationId xmlns:a16="http://schemas.microsoft.com/office/drawing/2014/main" id="{C305AE03-7D8D-420C-A3B0-309B481E39CA}"/>
+              </a:ext>
+            </a:extLst>
+          </p:cNvPr>
+          <p:cNvSpPr>
+            <a:spLocks xmlns:a="http://schemas.openxmlformats.org/drawingml/2006/main" noGrp="1"/>
+          </p:cNvSpPr>
+          <p:nvPr/>
+        </p:nvSpPr>
+        <p:spPr>
+          <a:xfrm xmlns:a="http://schemas.openxmlformats.org/drawingml/2006/main">
+            <a:off x="5019675" y="2381250"/>
+            <a:ext cx="371475" cy="371475"/>
           </a:xfrm>
           <a:prstGeom xmlns:a="http://schemas.openxmlformats.org/drawingml/2006/main" prst="ellipse">
             <a:avLst/>
@@ -2371,19 +2421,19 @@
           <p:cNvPr id="25" name="line-24">
             <a:extLst xmlns:a="http://schemas.openxmlformats.org/drawingml/2006/main">
               <a:ext uri="{FF2B5EF4-FFF2-40B4-BE49-F238E27FC236}">
-                <a16:creationId xmlns:a16="http://schemas.microsoft.com/office/drawing/2014/main" id="{E67E4F41-CF46-4793-8FBD-BB0B5ED2F445}"/>
-              </a:ext>
-            </a:extLst>
-          </p:cNvPr>
-          <p:cNvSpPr>
-            <a:spLocks xmlns:a="http://schemas.openxmlformats.org/drawingml/2006/main" noGrp="1"/>
-          </p:cNvSpPr>
-          <p:nvPr/>
-        </p:nvSpPr>
-        <p:spPr>
-          <a:xfrm xmlns:a="http://schemas.openxmlformats.org/drawingml/2006/main">
-            <a:off x="5224463" y="2654999"/>
-            <a:ext cx="0" cy="131064"/>
+                <a16:creationId xmlns:a16="http://schemas.microsoft.com/office/drawing/2014/main" id="{440A1FF5-36B8-40BD-8AFB-345D210F4C43}"/>
+              </a:ext>
+            </a:extLst>
+          </p:cNvPr>
+          <p:cNvSpPr>
+            <a:spLocks xmlns:a="http://schemas.openxmlformats.org/drawingml/2006/main" noGrp="1"/>
+          </p:cNvSpPr>
+          <p:nvPr/>
+        </p:nvSpPr>
+        <p:spPr>
+          <a:xfrm xmlns:a="http://schemas.openxmlformats.org/drawingml/2006/main">
+            <a:off x="5205413" y="2448116"/>
+            <a:ext cx="0" cy="118872"/>
           </a:xfrm>
           <a:prstGeom xmlns:a="http://schemas.openxmlformats.org/drawingml/2006/main" prst="line">
             <a:avLst/>
@@ -2402,19 +2452,19 @@
           <p:cNvPr id="26" name="line-25">
             <a:extLst xmlns:a="http://schemas.openxmlformats.org/drawingml/2006/main">
               <a:ext uri="{FF2B5EF4-FFF2-40B4-BE49-F238E27FC236}">
-                <a16:creationId xmlns:a16="http://schemas.microsoft.com/office/drawing/2014/main" id="{4A3B9478-F21B-42A4-95FF-8F84BBED4F8B}"/>
-              </a:ext>
-            </a:extLst>
-          </p:cNvPr>
-          <p:cNvSpPr>
-            <a:spLocks xmlns:a="http://schemas.openxmlformats.org/drawingml/2006/main" noGrp="1"/>
-          </p:cNvSpPr>
-          <p:nvPr/>
-        </p:nvSpPr>
-        <p:spPr>
-          <a:xfrm xmlns:a="http://schemas.openxmlformats.org/drawingml/2006/main">
-            <a:off x="5224463" y="2786063"/>
-            <a:ext cx="106489" cy="61436"/>
+                <a16:creationId xmlns:a16="http://schemas.microsoft.com/office/drawing/2014/main" id="{CBECD202-7ED2-4C19-BC80-99DA3361F6F6}"/>
+              </a:ext>
+            </a:extLst>
+          </p:cNvPr>
+          <p:cNvSpPr>
+            <a:spLocks xmlns:a="http://schemas.openxmlformats.org/drawingml/2006/main" noGrp="1"/>
+          </p:cNvSpPr>
+          <p:nvPr/>
+        </p:nvSpPr>
+        <p:spPr>
+          <a:xfrm xmlns:a="http://schemas.openxmlformats.org/drawingml/2006/main">
+            <a:off x="5205413" y="2566988"/>
+            <a:ext cx="96583" cy="55721"/>
           </a:xfrm>
           <a:prstGeom xmlns:a="http://schemas.openxmlformats.org/drawingml/2006/main" prst="line">
             <a:avLst/>
@@ -2433,18 +2483,18 @@
           <p:cNvPr id="27" name="shape-26">
             <a:extLst xmlns:a="http://schemas.openxmlformats.org/drawingml/2006/main">
               <a:ext uri="{FF2B5EF4-FFF2-40B4-BE49-F238E27FC236}">
-                <a16:creationId xmlns:a16="http://schemas.microsoft.com/office/drawing/2014/main" id="{C4F4DD3F-71A6-40D9-ACBE-D6ABB7410C2C}"/>
-              </a:ext>
-            </a:extLst>
-          </p:cNvPr>
-          <p:cNvSpPr>
-            <a:spLocks xmlns:a="http://schemas.openxmlformats.org/drawingml/2006/main" noGrp="1"/>
-          </p:cNvSpPr>
-          <p:nvPr/>
-        </p:nvSpPr>
-        <p:spPr>
-          <a:xfrm xmlns:a="http://schemas.openxmlformats.org/drawingml/2006/main">
-            <a:off x="4229100" y="2781300"/>
+                <a16:creationId xmlns:a16="http://schemas.microsoft.com/office/drawing/2014/main" id="{11027C13-4CF3-43EA-94C0-648CA990F09C}"/>
+              </a:ext>
+            </a:extLst>
+          </p:cNvPr>
+          <p:cNvSpPr>
+            <a:spLocks xmlns:a="http://schemas.openxmlformats.org/drawingml/2006/main" noGrp="1"/>
+          </p:cNvSpPr>
+          <p:nvPr/>
+        </p:nvSpPr>
+        <p:spPr>
+          <a:xfrm xmlns:a="http://schemas.openxmlformats.org/drawingml/2006/main">
+            <a:off x="4229100" y="2562225"/>
             <a:ext cx="9525" cy="9525"/>
           </a:xfrm>
           <a:prstGeom xmlns:a="http://schemas.openxmlformats.org/drawingml/2006/main" prst="rect">
@@ -2461,18 +2511,18 @@
           <p:cNvPr id="28" name="shape-27">
             <a:extLst xmlns:a="http://schemas.openxmlformats.org/drawingml/2006/main">
               <a:ext uri="{FF2B5EF4-FFF2-40B4-BE49-F238E27FC236}">
-                <a16:creationId xmlns:a16="http://schemas.microsoft.com/office/drawing/2014/main" id="{67219507-4F0B-4511-91DD-B52E23832AB8}"/>
-              </a:ext>
-            </a:extLst>
-          </p:cNvPr>
-          <p:cNvSpPr>
-            <a:spLocks xmlns:a="http://schemas.openxmlformats.org/drawingml/2006/main" noGrp="1"/>
-          </p:cNvSpPr>
-          <p:nvPr/>
-        </p:nvSpPr>
-        <p:spPr>
-          <a:xfrm xmlns:a="http://schemas.openxmlformats.org/drawingml/2006/main">
-            <a:off x="5019675" y="2781300"/>
+                <a16:creationId xmlns:a16="http://schemas.microsoft.com/office/drawing/2014/main" id="{38ED1E98-A15E-4F87-BD0F-FC5770E5AC34}"/>
+              </a:ext>
+            </a:extLst>
+          </p:cNvPr>
+          <p:cNvSpPr>
+            <a:spLocks xmlns:a="http://schemas.openxmlformats.org/drawingml/2006/main" noGrp="1"/>
+          </p:cNvSpPr>
+          <p:nvPr/>
+        </p:nvSpPr>
+        <p:spPr>
+          <a:xfrm xmlns:a="http://schemas.openxmlformats.org/drawingml/2006/main">
+            <a:off x="5019675" y="2562225"/>
             <a:ext cx="9525" cy="9525"/>
           </a:xfrm>
           <a:prstGeom xmlns:a="http://schemas.openxmlformats.org/drawingml/2006/main" prst="rect">
@@ -2486,7 +2536,7 @@
       </p:sp>
       <p:cxnSp>
         <p:nvCxnSpPr>
-          <p:cNvPr id="188" name=""/>
+          <p:cNvPr id="211" name=""/>
           <p:cNvCxnSpPr>
             <a:stCxn xmlns:a="http://schemas.openxmlformats.org/drawingml/2006/main" id="27" idx="3"/>
             <a:endCxn xmlns:a="http://schemas.openxmlformats.org/drawingml/2006/main" id="28" idx="1"/>
@@ -2495,7 +2545,7 @@
         </p:nvCxnSpPr>
         <p:spPr>
           <a:xfrm xmlns:a="http://schemas.openxmlformats.org/drawingml/2006/main">
-            <a:off x="4238625" y="2786063"/>
+            <a:off x="4238625" y="2566988"/>
             <a:ext cx="781050" cy="0"/>
           </a:xfrm>
           <a:prstGeom xmlns:a="http://schemas.openxmlformats.org/drawingml/2006/main" prst="straightConnector1">
@@ -2515,19 +2565,19 @@
           <p:cNvPr id="30" name="text-29">
             <a:extLst xmlns:a="http://schemas.openxmlformats.org/drawingml/2006/main">
               <a:ext uri="{FF2B5EF4-FFF2-40B4-BE49-F238E27FC236}">
-                <a16:creationId xmlns:a16="http://schemas.microsoft.com/office/drawing/2014/main" id="{5702B575-1230-4ECC-BF23-4019DA35BA81}"/>
-              </a:ext>
-            </a:extLst>
-          </p:cNvPr>
-          <p:cNvSpPr>
-            <a:spLocks xmlns:a="http://schemas.openxmlformats.org/drawingml/2006/main" noGrp="1"/>
-          </p:cNvSpPr>
-          <p:nvPr/>
-        </p:nvSpPr>
-        <p:spPr>
-          <a:xfrm xmlns:a="http://schemas.openxmlformats.org/drawingml/2006/main">
-            <a:off x="4486275" y="3105150"/>
-            <a:ext cx="2057400" cy="266700"/>
+                <a16:creationId xmlns:a16="http://schemas.microsoft.com/office/drawing/2014/main" id="{530E760E-61AA-47C7-A126-2DEFCA6289BA}"/>
+              </a:ext>
+            </a:extLst>
+          </p:cNvPr>
+          <p:cNvSpPr>
+            <a:spLocks xmlns:a="http://schemas.openxmlformats.org/drawingml/2006/main" noGrp="1"/>
+          </p:cNvSpPr>
+          <p:nvPr/>
+        </p:nvSpPr>
+        <p:spPr>
+          <a:xfrm xmlns:a="http://schemas.openxmlformats.org/drawingml/2006/main">
+            <a:off x="4314825" y="2838450"/>
+            <a:ext cx="2228850" cy="266700"/>
           </a:xfrm>
           <a:prstGeom xmlns:a="http://schemas.openxmlformats.org/drawingml/2006/main" prst="rect">
             <a:avLst/>
@@ -2562,7 +2612,7 @@
                 <a:ea typeface="Hiragino Sans GB"/>
                 <a:cs typeface="Hiragino Sans GB"/>
               </a:rPr>
-              <a:t>每次调用设超时</a:t>
+              <a:t>各阶段与整体设期限</a:t>
             </a:r>
           </a:p>
         </p:txBody>
@@ -2572,19 +2622,19 @@
           <p:cNvPr id="31" name="glyph-roundRect-30">
             <a:extLst xmlns:a="http://schemas.openxmlformats.org/drawingml/2006/main">
               <a:ext uri="{FF2B5EF4-FFF2-40B4-BE49-F238E27FC236}">
-                <a16:creationId xmlns:a16="http://schemas.microsoft.com/office/drawing/2014/main" id="{C98D855C-19C3-4FCC-A701-C3454AEC8602}"/>
-              </a:ext>
-            </a:extLst>
-          </p:cNvPr>
-          <p:cNvSpPr>
-            <a:spLocks xmlns:a="http://schemas.openxmlformats.org/drawingml/2006/main" noGrp="1"/>
-          </p:cNvSpPr>
-          <p:nvPr/>
-        </p:nvSpPr>
-        <p:spPr>
-          <a:xfrm xmlns:a="http://schemas.openxmlformats.org/drawingml/2006/main">
-            <a:off x="6877050" y="2533650"/>
-            <a:ext cx="419100" cy="476250"/>
+                <a16:creationId xmlns:a16="http://schemas.microsoft.com/office/drawing/2014/main" id="{D3932FD9-5B38-49FE-8FCD-3ACF883A5B6B}"/>
+              </a:ext>
+            </a:extLst>
+          </p:cNvPr>
+          <p:cNvSpPr>
+            <a:spLocks xmlns:a="http://schemas.openxmlformats.org/drawingml/2006/main" noGrp="1"/>
+          </p:cNvSpPr>
+          <p:nvPr/>
+        </p:nvSpPr>
+        <p:spPr>
+          <a:xfrm xmlns:a="http://schemas.openxmlformats.org/drawingml/2006/main">
+            <a:off x="6877050" y="2343150"/>
+            <a:ext cx="419100" cy="428625"/>
           </a:xfrm>
           <a:prstGeom xmlns:a="http://schemas.openxmlformats.org/drawingml/2006/main" prst="roundRect">
             <a:avLst>
@@ -2606,19 +2656,19 @@
           <p:cNvPr id="32" name="glyph-rect-31">
             <a:extLst xmlns:a="http://schemas.openxmlformats.org/drawingml/2006/main">
               <a:ext uri="{FF2B5EF4-FFF2-40B4-BE49-F238E27FC236}">
-                <a16:creationId xmlns:a16="http://schemas.microsoft.com/office/drawing/2014/main" id="{9528225F-C0A5-47FD-8314-041413AEBC70}"/>
-              </a:ext>
-            </a:extLst>
-          </p:cNvPr>
-          <p:cNvSpPr>
-            <a:spLocks xmlns:a="http://schemas.openxmlformats.org/drawingml/2006/main" noGrp="1"/>
-          </p:cNvSpPr>
-          <p:nvPr/>
-        </p:nvSpPr>
-        <p:spPr>
-          <a:xfrm xmlns:a="http://schemas.openxmlformats.org/drawingml/2006/main">
-            <a:off x="6927342" y="2600325"/>
-            <a:ext cx="318516" cy="76200"/>
+                <a16:creationId xmlns:a16="http://schemas.microsoft.com/office/drawing/2014/main" id="{5D56C2C4-D654-4732-B885-A4F41667FAB8}"/>
+              </a:ext>
+            </a:extLst>
+          </p:cNvPr>
+          <p:cNvSpPr>
+            <a:spLocks xmlns:a="http://schemas.openxmlformats.org/drawingml/2006/main" noGrp="1"/>
+          </p:cNvSpPr>
+          <p:nvPr/>
+        </p:nvSpPr>
+        <p:spPr>
+          <a:xfrm xmlns:a="http://schemas.openxmlformats.org/drawingml/2006/main">
+            <a:off x="6927342" y="2403158"/>
+            <a:ext cx="318516" cy="68580"/>
           </a:xfrm>
           <a:prstGeom xmlns:a="http://schemas.openxmlformats.org/drawingml/2006/main" prst="rect">
             <a:avLst/>
@@ -2638,18 +2688,18 @@
           <p:cNvPr id="33" name="glyph-ellipse-32">
             <a:extLst xmlns:a="http://schemas.openxmlformats.org/drawingml/2006/main">
               <a:ext uri="{FF2B5EF4-FFF2-40B4-BE49-F238E27FC236}">
-                <a16:creationId xmlns:a16="http://schemas.microsoft.com/office/drawing/2014/main" id="{F1275CFD-FDDB-489D-999F-5DD0DE507B6F}"/>
-              </a:ext>
-            </a:extLst>
-          </p:cNvPr>
-          <p:cNvSpPr>
-            <a:spLocks xmlns:a="http://schemas.openxmlformats.org/drawingml/2006/main" noGrp="1"/>
-          </p:cNvSpPr>
-          <p:nvPr/>
-        </p:nvSpPr>
-        <p:spPr>
-          <a:xfrm xmlns:a="http://schemas.openxmlformats.org/drawingml/2006/main">
-            <a:off x="6960870" y="2624138"/>
+                <a16:creationId xmlns:a16="http://schemas.microsoft.com/office/drawing/2014/main" id="{B7DDE9CF-66F6-43E7-BF1F-9B4728792181}"/>
+              </a:ext>
+            </a:extLst>
+          </p:cNvPr>
+          <p:cNvSpPr>
+            <a:spLocks xmlns:a="http://schemas.openxmlformats.org/drawingml/2006/main" noGrp="1"/>
+          </p:cNvSpPr>
+          <p:nvPr/>
+        </p:nvSpPr>
+        <p:spPr>
+          <a:xfrm xmlns:a="http://schemas.openxmlformats.org/drawingml/2006/main">
+            <a:off x="6960870" y="2424589"/>
             <a:ext cx="23051" cy="23051"/>
           </a:xfrm>
           <a:prstGeom xmlns:a="http://schemas.openxmlformats.org/drawingml/2006/main" prst="ellipse">
@@ -2670,18 +2720,18 @@
           <p:cNvPr id="34" name="line-33">
             <a:extLst xmlns:a="http://schemas.openxmlformats.org/drawingml/2006/main">
               <a:ext uri="{FF2B5EF4-FFF2-40B4-BE49-F238E27FC236}">
-                <a16:creationId xmlns:a16="http://schemas.microsoft.com/office/drawing/2014/main" id="{7B439A4C-1D09-4FE0-8027-A5C2D618882F}"/>
-              </a:ext>
-            </a:extLst>
-          </p:cNvPr>
-          <p:cNvSpPr>
-            <a:spLocks xmlns:a="http://schemas.openxmlformats.org/drawingml/2006/main" noGrp="1"/>
-          </p:cNvSpPr>
-          <p:nvPr/>
-        </p:nvSpPr>
-        <p:spPr>
-          <a:xfrm xmlns:a="http://schemas.openxmlformats.org/drawingml/2006/main">
-            <a:off x="7057263" y="2638425"/>
+                <a16:creationId xmlns:a16="http://schemas.microsoft.com/office/drawing/2014/main" id="{3F9540B3-BD6F-477D-A015-AAF497A3F86B}"/>
+              </a:ext>
+            </a:extLst>
+          </p:cNvPr>
+          <p:cNvSpPr>
+            <a:spLocks xmlns:a="http://schemas.openxmlformats.org/drawingml/2006/main" noGrp="1"/>
+          </p:cNvSpPr>
+          <p:nvPr/>
+        </p:nvSpPr>
+        <p:spPr>
+          <a:xfrm xmlns:a="http://schemas.openxmlformats.org/drawingml/2006/main">
+            <a:off x="7057263" y="2437448"/>
             <a:ext cx="138303" cy="0"/>
           </a:xfrm>
           <a:prstGeom xmlns:a="http://schemas.openxmlformats.org/drawingml/2006/main" prst="line">
@@ -2701,19 +2751,19 @@
           <p:cNvPr id="35" name="glyph-rect-34">
             <a:extLst xmlns:a="http://schemas.openxmlformats.org/drawingml/2006/main">
               <a:ext uri="{FF2B5EF4-FFF2-40B4-BE49-F238E27FC236}">
-                <a16:creationId xmlns:a16="http://schemas.microsoft.com/office/drawing/2014/main" id="{5AD3677E-5135-4AC4-84F4-FB83ECB19D7A}"/>
-              </a:ext>
-            </a:extLst>
-          </p:cNvPr>
-          <p:cNvSpPr>
-            <a:spLocks xmlns:a="http://schemas.openxmlformats.org/drawingml/2006/main" noGrp="1"/>
-          </p:cNvSpPr>
-          <p:nvPr/>
-        </p:nvSpPr>
-        <p:spPr>
-          <a:xfrm xmlns:a="http://schemas.openxmlformats.org/drawingml/2006/main">
-            <a:off x="6927342" y="2719388"/>
-            <a:ext cx="318516" cy="76200"/>
+                <a16:creationId xmlns:a16="http://schemas.microsoft.com/office/drawing/2014/main" id="{2338CF88-BB8B-405E-99C4-B61F6D6875FA}"/>
+              </a:ext>
+            </a:extLst>
+          </p:cNvPr>
+          <p:cNvSpPr>
+            <a:spLocks xmlns:a="http://schemas.openxmlformats.org/drawingml/2006/main" noGrp="1"/>
+          </p:cNvSpPr>
+          <p:nvPr/>
+        </p:nvSpPr>
+        <p:spPr>
+          <a:xfrm xmlns:a="http://schemas.openxmlformats.org/drawingml/2006/main">
+            <a:off x="6927342" y="2510314"/>
+            <a:ext cx="318516" cy="68580"/>
           </a:xfrm>
           <a:prstGeom xmlns:a="http://schemas.openxmlformats.org/drawingml/2006/main" prst="rect">
             <a:avLst/>
@@ -2733,18 +2783,18 @@
           <p:cNvPr id="36" name="glyph-ellipse-35">
             <a:extLst xmlns:a="http://schemas.openxmlformats.org/drawingml/2006/main">
               <a:ext uri="{FF2B5EF4-FFF2-40B4-BE49-F238E27FC236}">
-                <a16:creationId xmlns:a16="http://schemas.microsoft.com/office/drawing/2014/main" id="{D4FDF483-BD5C-4257-9B59-2A9027C4207E}"/>
-              </a:ext>
-            </a:extLst>
-          </p:cNvPr>
-          <p:cNvSpPr>
-            <a:spLocks xmlns:a="http://schemas.openxmlformats.org/drawingml/2006/main" noGrp="1"/>
-          </p:cNvSpPr>
-          <p:nvPr/>
-        </p:nvSpPr>
-        <p:spPr>
-          <a:xfrm xmlns:a="http://schemas.openxmlformats.org/drawingml/2006/main">
-            <a:off x="6960870" y="2743200"/>
+                <a16:creationId xmlns:a16="http://schemas.microsoft.com/office/drawing/2014/main" id="{CF897487-DB65-49AA-B344-5D96C9AFF328}"/>
+              </a:ext>
+            </a:extLst>
+          </p:cNvPr>
+          <p:cNvSpPr>
+            <a:spLocks xmlns:a="http://schemas.openxmlformats.org/drawingml/2006/main" noGrp="1"/>
+          </p:cNvSpPr>
+          <p:nvPr/>
+        </p:nvSpPr>
+        <p:spPr>
+          <a:xfrm xmlns:a="http://schemas.openxmlformats.org/drawingml/2006/main">
+            <a:off x="6960870" y="2531745"/>
             <a:ext cx="23051" cy="23051"/>
           </a:xfrm>
           <a:prstGeom xmlns:a="http://schemas.openxmlformats.org/drawingml/2006/main" prst="ellipse">
@@ -2765,18 +2815,18 @@
           <p:cNvPr id="37" name="line-36">
             <a:extLst xmlns:a="http://schemas.openxmlformats.org/drawingml/2006/main">
               <a:ext uri="{FF2B5EF4-FFF2-40B4-BE49-F238E27FC236}">
-                <a16:creationId xmlns:a16="http://schemas.microsoft.com/office/drawing/2014/main" id="{1BCCDACA-16CA-4896-8082-3627C093CFD4}"/>
-              </a:ext>
-            </a:extLst>
-          </p:cNvPr>
-          <p:cNvSpPr>
-            <a:spLocks xmlns:a="http://schemas.openxmlformats.org/drawingml/2006/main" noGrp="1"/>
-          </p:cNvSpPr>
-          <p:nvPr/>
-        </p:nvSpPr>
-        <p:spPr>
-          <a:xfrm xmlns:a="http://schemas.openxmlformats.org/drawingml/2006/main">
-            <a:off x="7057263" y="2757488"/>
+                <a16:creationId xmlns:a16="http://schemas.microsoft.com/office/drawing/2014/main" id="{BC2DA59E-9265-4038-BAE5-3366A674DE07}"/>
+              </a:ext>
+            </a:extLst>
+          </p:cNvPr>
+          <p:cNvSpPr>
+            <a:spLocks xmlns:a="http://schemas.openxmlformats.org/drawingml/2006/main" noGrp="1"/>
+          </p:cNvSpPr>
+          <p:nvPr/>
+        </p:nvSpPr>
+        <p:spPr>
+          <a:xfrm xmlns:a="http://schemas.openxmlformats.org/drawingml/2006/main">
+            <a:off x="7057263" y="2544604"/>
             <a:ext cx="138303" cy="0"/>
           </a:xfrm>
           <a:prstGeom xmlns:a="http://schemas.openxmlformats.org/drawingml/2006/main" prst="line">
@@ -2796,19 +2846,19 @@
           <p:cNvPr id="38" name="glyph-rect-37">
             <a:extLst xmlns:a="http://schemas.openxmlformats.org/drawingml/2006/main">
               <a:ext uri="{FF2B5EF4-FFF2-40B4-BE49-F238E27FC236}">
-                <a16:creationId xmlns:a16="http://schemas.microsoft.com/office/drawing/2014/main" id="{C39B8FFD-C901-4027-BB8A-FE4E17BBB7DA}"/>
-              </a:ext>
-            </a:extLst>
-          </p:cNvPr>
-          <p:cNvSpPr>
-            <a:spLocks xmlns:a="http://schemas.openxmlformats.org/drawingml/2006/main" noGrp="1"/>
-          </p:cNvSpPr>
-          <p:nvPr/>
-        </p:nvSpPr>
-        <p:spPr>
-          <a:xfrm xmlns:a="http://schemas.openxmlformats.org/drawingml/2006/main">
-            <a:off x="6927342" y="2838450"/>
-            <a:ext cx="318516" cy="76200"/>
+                <a16:creationId xmlns:a16="http://schemas.microsoft.com/office/drawing/2014/main" id="{39C82C78-0003-4AB8-874B-45563479AED8}"/>
+              </a:ext>
+            </a:extLst>
+          </p:cNvPr>
+          <p:cNvSpPr>
+            <a:spLocks xmlns:a="http://schemas.openxmlformats.org/drawingml/2006/main" noGrp="1"/>
+          </p:cNvSpPr>
+          <p:nvPr/>
+        </p:nvSpPr>
+        <p:spPr>
+          <a:xfrm xmlns:a="http://schemas.openxmlformats.org/drawingml/2006/main">
+            <a:off x="6927342" y="2617470"/>
+            <a:ext cx="318516" cy="68580"/>
           </a:xfrm>
           <a:prstGeom xmlns:a="http://schemas.openxmlformats.org/drawingml/2006/main" prst="rect">
             <a:avLst/>
@@ -2828,18 +2878,18 @@
           <p:cNvPr id="39" name="glyph-ellipse-38">
             <a:extLst xmlns:a="http://schemas.openxmlformats.org/drawingml/2006/main">
               <a:ext uri="{FF2B5EF4-FFF2-40B4-BE49-F238E27FC236}">
-                <a16:creationId xmlns:a16="http://schemas.microsoft.com/office/drawing/2014/main" id="{9DEFCB37-D02D-45BC-8035-4E28ABB0B989}"/>
-              </a:ext>
-            </a:extLst>
-          </p:cNvPr>
-          <p:cNvSpPr>
-            <a:spLocks xmlns:a="http://schemas.openxmlformats.org/drawingml/2006/main" noGrp="1"/>
-          </p:cNvSpPr>
-          <p:nvPr/>
-        </p:nvSpPr>
-        <p:spPr>
-          <a:xfrm xmlns:a="http://schemas.openxmlformats.org/drawingml/2006/main">
-            <a:off x="6960870" y="2862263"/>
+                <a16:creationId xmlns:a16="http://schemas.microsoft.com/office/drawing/2014/main" id="{A49EADDE-7F4A-473C-96A0-D5DB2A110BF1}"/>
+              </a:ext>
+            </a:extLst>
+          </p:cNvPr>
+          <p:cNvSpPr>
+            <a:spLocks xmlns:a="http://schemas.openxmlformats.org/drawingml/2006/main" noGrp="1"/>
+          </p:cNvSpPr>
+          <p:nvPr/>
+        </p:nvSpPr>
+        <p:spPr>
+          <a:xfrm xmlns:a="http://schemas.openxmlformats.org/drawingml/2006/main">
+            <a:off x="6960870" y="2638901"/>
             <a:ext cx="23051" cy="23051"/>
           </a:xfrm>
           <a:prstGeom xmlns:a="http://schemas.openxmlformats.org/drawingml/2006/main" prst="ellipse">
@@ -2860,18 +2910,18 @@
           <p:cNvPr id="40" name="line-39">
             <a:extLst xmlns:a="http://schemas.openxmlformats.org/drawingml/2006/main">
               <a:ext uri="{FF2B5EF4-FFF2-40B4-BE49-F238E27FC236}">
-                <a16:creationId xmlns:a16="http://schemas.microsoft.com/office/drawing/2014/main" id="{724BF536-63B2-40F5-B4D8-D8F04D8F87BE}"/>
-              </a:ext>
-            </a:extLst>
-          </p:cNvPr>
-          <p:cNvSpPr>
-            <a:spLocks xmlns:a="http://schemas.openxmlformats.org/drawingml/2006/main" noGrp="1"/>
-          </p:cNvSpPr>
-          <p:nvPr/>
-        </p:nvSpPr>
-        <p:spPr>
-          <a:xfrm xmlns:a="http://schemas.openxmlformats.org/drawingml/2006/main">
-            <a:off x="7057263" y="2876550"/>
+                <a16:creationId xmlns:a16="http://schemas.microsoft.com/office/drawing/2014/main" id="{DEEA2990-0143-4FE1-BEF1-4D2239C1DADD}"/>
+              </a:ext>
+            </a:extLst>
+          </p:cNvPr>
+          <p:cNvSpPr>
+            <a:spLocks xmlns:a="http://schemas.openxmlformats.org/drawingml/2006/main" noGrp="1"/>
+          </p:cNvSpPr>
+          <p:nvPr/>
+        </p:nvSpPr>
+        <p:spPr>
+          <a:xfrm xmlns:a="http://schemas.openxmlformats.org/drawingml/2006/main">
+            <a:off x="7057263" y="2651760"/>
             <a:ext cx="138303" cy="0"/>
           </a:xfrm>
           <a:prstGeom xmlns:a="http://schemas.openxmlformats.org/drawingml/2006/main" prst="line">
@@ -2891,18 +2941,18 @@
           <p:cNvPr id="41" name="text-40">
             <a:extLst xmlns:a="http://schemas.openxmlformats.org/drawingml/2006/main">
               <a:ext uri="{FF2B5EF4-FFF2-40B4-BE49-F238E27FC236}">
-                <a16:creationId xmlns:a16="http://schemas.microsoft.com/office/drawing/2014/main" id="{53CCBB0E-B580-4B11-BD90-5D8A8EDF0691}"/>
-              </a:ext>
-            </a:extLst>
-          </p:cNvPr>
-          <p:cNvSpPr>
-            <a:spLocks xmlns:a="http://schemas.openxmlformats.org/drawingml/2006/main" noGrp="1"/>
-          </p:cNvSpPr>
-          <p:nvPr/>
-        </p:nvSpPr>
-        <p:spPr>
-          <a:xfrm xmlns:a="http://schemas.openxmlformats.org/drawingml/2006/main">
-            <a:off x="6429375" y="3105150"/>
+                <a16:creationId xmlns:a16="http://schemas.microsoft.com/office/drawing/2014/main" id="{AC61ECD6-17BC-48D9-A7A9-74BAB3F665B7}"/>
+              </a:ext>
+            </a:extLst>
+          </p:cNvPr>
+          <p:cNvSpPr>
+            <a:spLocks xmlns:a="http://schemas.openxmlformats.org/drawingml/2006/main" noGrp="1"/>
+          </p:cNvSpPr>
+          <p:nvPr/>
+        </p:nvSpPr>
+        <p:spPr>
+          <a:xfrm xmlns:a="http://schemas.openxmlformats.org/drawingml/2006/main">
+            <a:off x="6429375" y="2838450"/>
             <a:ext cx="1695450" cy="266700"/>
           </a:xfrm>
           <a:prstGeom xmlns:a="http://schemas.openxmlformats.org/drawingml/2006/main" prst="rect">
@@ -2948,18 +2998,18 @@
           <p:cNvPr id="42" name="shape-41">
             <a:extLst xmlns:a="http://schemas.openxmlformats.org/drawingml/2006/main">
               <a:ext uri="{FF2B5EF4-FFF2-40B4-BE49-F238E27FC236}">
-                <a16:creationId xmlns:a16="http://schemas.microsoft.com/office/drawing/2014/main" id="{BF99EB9F-54FB-4F0F-AAE7-B3ED67F259F6}"/>
-              </a:ext>
-            </a:extLst>
-          </p:cNvPr>
-          <p:cNvSpPr>
-            <a:spLocks xmlns:a="http://schemas.openxmlformats.org/drawingml/2006/main" noGrp="1"/>
-          </p:cNvSpPr>
-          <p:nvPr/>
-        </p:nvSpPr>
-        <p:spPr>
-          <a:xfrm xmlns:a="http://schemas.openxmlformats.org/drawingml/2006/main">
-            <a:off x="5429250" y="2781300"/>
+                <a16:creationId xmlns:a16="http://schemas.microsoft.com/office/drawing/2014/main" id="{623CC967-3A24-46E0-AFFB-F38012EC4100}"/>
+              </a:ext>
+            </a:extLst>
+          </p:cNvPr>
+          <p:cNvSpPr>
+            <a:spLocks xmlns:a="http://schemas.openxmlformats.org/drawingml/2006/main" noGrp="1"/>
+          </p:cNvSpPr>
+          <p:nvPr/>
+        </p:nvSpPr>
+        <p:spPr>
+          <a:xfrm xmlns:a="http://schemas.openxmlformats.org/drawingml/2006/main">
+            <a:off x="5391150" y="2562225"/>
             <a:ext cx="9525" cy="9525"/>
           </a:xfrm>
           <a:prstGeom xmlns:a="http://schemas.openxmlformats.org/drawingml/2006/main" prst="rect">
@@ -2976,18 +3026,18 @@
           <p:cNvPr id="43" name="shape-42">
             <a:extLst xmlns:a="http://schemas.openxmlformats.org/drawingml/2006/main">
               <a:ext uri="{FF2B5EF4-FFF2-40B4-BE49-F238E27FC236}">
-                <a16:creationId xmlns:a16="http://schemas.microsoft.com/office/drawing/2014/main" id="{889446D7-5073-4175-B058-B2153A143A49}"/>
-              </a:ext>
-            </a:extLst>
-          </p:cNvPr>
-          <p:cNvSpPr>
-            <a:spLocks xmlns:a="http://schemas.openxmlformats.org/drawingml/2006/main" noGrp="1"/>
-          </p:cNvSpPr>
-          <p:nvPr/>
-        </p:nvSpPr>
-        <p:spPr>
-          <a:xfrm xmlns:a="http://schemas.openxmlformats.org/drawingml/2006/main">
-            <a:off x="6877050" y="2781300"/>
+                <a16:creationId xmlns:a16="http://schemas.microsoft.com/office/drawing/2014/main" id="{8B016AEC-12A7-45E6-AD8A-24A48BB3B15C}"/>
+              </a:ext>
+            </a:extLst>
+          </p:cNvPr>
+          <p:cNvSpPr>
+            <a:spLocks xmlns:a="http://schemas.openxmlformats.org/drawingml/2006/main" noGrp="1"/>
+          </p:cNvSpPr>
+          <p:nvPr/>
+        </p:nvSpPr>
+        <p:spPr>
+          <a:xfrm xmlns:a="http://schemas.openxmlformats.org/drawingml/2006/main">
+            <a:off x="6877050" y="2562225"/>
             <a:ext cx="9525" cy="9525"/>
           </a:xfrm>
           <a:prstGeom xmlns:a="http://schemas.openxmlformats.org/drawingml/2006/main" prst="rect">
@@ -3001,7 +3051,7 @@
       </p:sp>
       <p:cxnSp>
         <p:nvCxnSpPr>
-          <p:cNvPr id="203" name=""/>
+          <p:cNvPr id="226" name=""/>
           <p:cNvCxnSpPr>
             <a:stCxn xmlns:a="http://schemas.openxmlformats.org/drawingml/2006/main" id="42" idx="3"/>
             <a:endCxn xmlns:a="http://schemas.openxmlformats.org/drawingml/2006/main" id="43" idx="1"/>
@@ -3010,8 +3060,8 @@
         </p:nvCxnSpPr>
         <p:spPr>
           <a:xfrm xmlns:a="http://schemas.openxmlformats.org/drawingml/2006/main">
-            <a:off x="5438775" y="2786063"/>
-            <a:ext cx="1438275" cy="0"/>
+            <a:off x="5400675" y="2566988"/>
+            <a:ext cx="1476375" cy="0"/>
           </a:xfrm>
           <a:prstGeom xmlns:a="http://schemas.openxmlformats.org/drawingml/2006/main" prst="straightConnector1">
             <a:avLst/>
@@ -3030,19 +3080,19 @@
           <p:cNvPr id="45" name="glyph-cloud-44">
             <a:extLst xmlns:a="http://schemas.openxmlformats.org/drawingml/2006/main">
               <a:ext uri="{FF2B5EF4-FFF2-40B4-BE49-F238E27FC236}">
-                <a16:creationId xmlns:a16="http://schemas.microsoft.com/office/drawing/2014/main" id="{CF380B4E-EA1E-48D5-9858-8FD5EBFC1EC0}"/>
-              </a:ext>
-            </a:extLst>
-          </p:cNvPr>
-          <p:cNvSpPr>
-            <a:spLocks xmlns:a="http://schemas.openxmlformats.org/drawingml/2006/main" noGrp="1"/>
-          </p:cNvSpPr>
-          <p:nvPr/>
-        </p:nvSpPr>
-        <p:spPr>
-          <a:xfrm xmlns:a="http://schemas.openxmlformats.org/drawingml/2006/main">
-            <a:off x="8743950" y="2428875"/>
-            <a:ext cx="1133475" cy="666750"/>
+                <a16:creationId xmlns:a16="http://schemas.microsoft.com/office/drawing/2014/main" id="{F06FACAF-BA39-416B-A140-C3E8EDA8B196}"/>
+              </a:ext>
+            </a:extLst>
+          </p:cNvPr>
+          <p:cNvSpPr>
+            <a:spLocks xmlns:a="http://schemas.openxmlformats.org/drawingml/2006/main" noGrp="1"/>
+          </p:cNvSpPr>
+          <p:nvPr/>
+        </p:nvSpPr>
+        <p:spPr>
+          <a:xfrm xmlns:a="http://schemas.openxmlformats.org/drawingml/2006/main">
+            <a:off x="8743950" y="2257425"/>
+            <a:ext cx="1133475" cy="590550"/>
           </a:xfrm>
           <a:prstGeom xmlns:a="http://schemas.openxmlformats.org/drawingml/2006/main" prst="cloud">
             <a:avLst/>
@@ -3062,18 +3112,18 @@
           <p:cNvPr id="46" name="text-45">
             <a:extLst xmlns:a="http://schemas.openxmlformats.org/drawingml/2006/main">
               <a:ext uri="{FF2B5EF4-FFF2-40B4-BE49-F238E27FC236}">
-                <a16:creationId xmlns:a16="http://schemas.microsoft.com/office/drawing/2014/main" id="{EAB872B8-2FF1-4D3A-8CE0-761066D8BF8D}"/>
-              </a:ext>
-            </a:extLst>
-          </p:cNvPr>
-          <p:cNvSpPr>
-            <a:spLocks xmlns:a="http://schemas.openxmlformats.org/drawingml/2006/main" noGrp="1"/>
-          </p:cNvSpPr>
-          <p:nvPr/>
-        </p:nvSpPr>
-        <p:spPr>
-          <a:xfrm xmlns:a="http://schemas.openxmlformats.org/drawingml/2006/main">
-            <a:off x="9048750" y="2619375"/>
+                <a16:creationId xmlns:a16="http://schemas.microsoft.com/office/drawing/2014/main" id="{111A181B-85CB-4BC3-861E-7A17C9930622}"/>
+              </a:ext>
+            </a:extLst>
+          </p:cNvPr>
+          <p:cNvSpPr>
+            <a:spLocks xmlns:a="http://schemas.openxmlformats.org/drawingml/2006/main" noGrp="1"/>
+          </p:cNvSpPr>
+          <p:nvPr/>
+        </p:nvSpPr>
+        <p:spPr>
+          <a:xfrm xmlns:a="http://schemas.openxmlformats.org/drawingml/2006/main">
+            <a:off x="9048750" y="2390775"/>
             <a:ext cx="552450" cy="266700"/>
           </a:xfrm>
           <a:prstGeom xmlns:a="http://schemas.openxmlformats.org/drawingml/2006/main" prst="rect">
@@ -3119,18 +3169,18 @@
           <p:cNvPr id="47" name="shape-46">
             <a:extLst xmlns:a="http://schemas.openxmlformats.org/drawingml/2006/main">
               <a:ext uri="{FF2B5EF4-FFF2-40B4-BE49-F238E27FC236}">
-                <a16:creationId xmlns:a16="http://schemas.microsoft.com/office/drawing/2014/main" id="{CB8FA4C7-ED2A-43BC-A64B-84BCE2D3149A}"/>
-              </a:ext>
-            </a:extLst>
-          </p:cNvPr>
-          <p:cNvSpPr>
-            <a:spLocks xmlns:a="http://schemas.openxmlformats.org/drawingml/2006/main" noGrp="1"/>
-          </p:cNvSpPr>
-          <p:nvPr/>
-        </p:nvSpPr>
-        <p:spPr>
-          <a:xfrm xmlns:a="http://schemas.openxmlformats.org/drawingml/2006/main">
-            <a:off x="7296150" y="2781300"/>
+                <a16:creationId xmlns:a16="http://schemas.microsoft.com/office/drawing/2014/main" id="{7AA0D54D-E707-414B-9D7E-8D5296F64E5C}"/>
+              </a:ext>
+            </a:extLst>
+          </p:cNvPr>
+          <p:cNvSpPr>
+            <a:spLocks xmlns:a="http://schemas.openxmlformats.org/drawingml/2006/main" noGrp="1"/>
+          </p:cNvSpPr>
+          <p:nvPr/>
+        </p:nvSpPr>
+        <p:spPr>
+          <a:xfrm xmlns:a="http://schemas.openxmlformats.org/drawingml/2006/main">
+            <a:off x="7296150" y="2562225"/>
             <a:ext cx="9525" cy="9525"/>
           </a:xfrm>
           <a:prstGeom xmlns:a="http://schemas.openxmlformats.org/drawingml/2006/main" prst="rect">
@@ -3147,18 +3197,18 @@
           <p:cNvPr id="48" name="shape-47">
             <a:extLst xmlns:a="http://schemas.openxmlformats.org/drawingml/2006/main">
               <a:ext uri="{FF2B5EF4-FFF2-40B4-BE49-F238E27FC236}">
-                <a16:creationId xmlns:a16="http://schemas.microsoft.com/office/drawing/2014/main" id="{A20E1CFD-A876-4CEB-B7E9-BDA7C0EF4E19}"/>
-              </a:ext>
-            </a:extLst>
-          </p:cNvPr>
-          <p:cNvSpPr>
-            <a:spLocks xmlns:a="http://schemas.openxmlformats.org/drawingml/2006/main" noGrp="1"/>
-          </p:cNvSpPr>
-          <p:nvPr/>
-        </p:nvSpPr>
-        <p:spPr>
-          <a:xfrm xmlns:a="http://schemas.openxmlformats.org/drawingml/2006/main">
-            <a:off x="8743950" y="2781300"/>
+                <a16:creationId xmlns:a16="http://schemas.microsoft.com/office/drawing/2014/main" id="{56ED3717-08D0-41D4-9784-C6C199EE2633}"/>
+              </a:ext>
+            </a:extLst>
+          </p:cNvPr>
+          <p:cNvSpPr>
+            <a:spLocks xmlns:a="http://schemas.openxmlformats.org/drawingml/2006/main" noGrp="1"/>
+          </p:cNvSpPr>
+          <p:nvPr/>
+        </p:nvSpPr>
+        <p:spPr>
+          <a:xfrm xmlns:a="http://schemas.openxmlformats.org/drawingml/2006/main">
+            <a:off x="8743950" y="2562225"/>
             <a:ext cx="9525" cy="9525"/>
           </a:xfrm>
           <a:prstGeom xmlns:a="http://schemas.openxmlformats.org/drawingml/2006/main" prst="rect">
@@ -3172,7 +3222,7 @@
       </p:sp>
       <p:cxnSp>
         <p:nvCxnSpPr>
-          <p:cNvPr id="208" name=""/>
+          <p:cNvPr id="231" name=""/>
           <p:cNvCxnSpPr>
             <a:stCxn xmlns:a="http://schemas.openxmlformats.org/drawingml/2006/main" id="47" idx="3"/>
             <a:endCxn xmlns:a="http://schemas.openxmlformats.org/drawingml/2006/main" id="48" idx="1"/>
@@ -3181,7 +3231,7 @@
         </p:nvCxnSpPr>
         <p:spPr>
           <a:xfrm xmlns:a="http://schemas.openxmlformats.org/drawingml/2006/main">
-            <a:off x="7305675" y="2786063"/>
+            <a:off x="7305675" y="2566988"/>
             <a:ext cx="1438275" cy="0"/>
           </a:xfrm>
           <a:prstGeom xmlns:a="http://schemas.openxmlformats.org/drawingml/2006/main" prst="straightConnector1">
@@ -3201,18 +3251,18 @@
           <p:cNvPr id="50" name="text-49">
             <a:extLst xmlns:a="http://schemas.openxmlformats.org/drawingml/2006/main">
               <a:ext uri="{FF2B5EF4-FFF2-40B4-BE49-F238E27FC236}">
-                <a16:creationId xmlns:a16="http://schemas.microsoft.com/office/drawing/2014/main" id="{EE71497C-C0BC-4521-ADCA-8F9820D6247D}"/>
-              </a:ext>
-            </a:extLst>
-          </p:cNvPr>
-          <p:cNvSpPr>
-            <a:spLocks xmlns:a="http://schemas.openxmlformats.org/drawingml/2006/main" noGrp="1"/>
-          </p:cNvSpPr>
-          <p:nvPr/>
-        </p:nvSpPr>
-        <p:spPr>
-          <a:xfrm xmlns:a="http://schemas.openxmlformats.org/drawingml/2006/main">
-            <a:off x="7639050" y="2476500"/>
+                <a16:creationId xmlns:a16="http://schemas.microsoft.com/office/drawing/2014/main" id="{5AD991E4-F8E0-4A94-BE90-E13E5C27DBEB}"/>
+              </a:ext>
+            </a:extLst>
+          </p:cNvPr>
+          <p:cNvSpPr>
+            <a:spLocks xmlns:a="http://schemas.openxmlformats.org/drawingml/2006/main" noGrp="1"/>
+          </p:cNvSpPr>
+          <p:nvPr/>
+        </p:nvSpPr>
+        <p:spPr>
+          <a:xfrm xmlns:a="http://schemas.openxmlformats.org/drawingml/2006/main">
+            <a:off x="7639050" y="2276475"/>
             <a:ext cx="885825" cy="228600"/>
           </a:xfrm>
           <a:prstGeom xmlns:a="http://schemas.openxmlformats.org/drawingml/2006/main" prst="rect">
@@ -3258,18 +3308,18 @@
           <p:cNvPr id="51" name="text-50">
             <a:extLst xmlns:a="http://schemas.openxmlformats.org/drawingml/2006/main">
               <a:ext uri="{FF2B5EF4-FFF2-40B4-BE49-F238E27FC236}">
-                <a16:creationId xmlns:a16="http://schemas.microsoft.com/office/drawing/2014/main" id="{90B9CDEC-9F4D-44AC-A41C-26782C77D7A8}"/>
-              </a:ext>
-            </a:extLst>
-          </p:cNvPr>
-          <p:cNvSpPr>
-            <a:spLocks xmlns:a="http://schemas.openxmlformats.org/drawingml/2006/main" noGrp="1"/>
-          </p:cNvSpPr>
-          <p:nvPr/>
-        </p:nvSpPr>
-        <p:spPr>
-          <a:xfrm xmlns:a="http://schemas.openxmlformats.org/drawingml/2006/main">
-            <a:off x="8181975" y="3105150"/>
+                <a16:creationId xmlns:a16="http://schemas.microsoft.com/office/drawing/2014/main" id="{78C3DCC8-96E9-4E70-AB2C-A31E078D5D3C}"/>
+              </a:ext>
+            </a:extLst>
+          </p:cNvPr>
+          <p:cNvSpPr>
+            <a:spLocks xmlns:a="http://schemas.openxmlformats.org/drawingml/2006/main" noGrp="1"/>
+          </p:cNvSpPr>
+          <p:nvPr/>
+        </p:nvSpPr>
+        <p:spPr>
+          <a:xfrm xmlns:a="http://schemas.openxmlformats.org/drawingml/2006/main">
+            <a:off x="8181975" y="2838450"/>
             <a:ext cx="1790700" cy="266700"/>
           </a:xfrm>
           <a:prstGeom xmlns:a="http://schemas.openxmlformats.org/drawingml/2006/main" prst="rect">
@@ -3315,18 +3365,18 @@
           <p:cNvPr id="52" name="text-51">
             <a:extLst xmlns:a="http://schemas.openxmlformats.org/drawingml/2006/main">
               <a:ext uri="{FF2B5EF4-FFF2-40B4-BE49-F238E27FC236}">
-                <a16:creationId xmlns:a16="http://schemas.microsoft.com/office/drawing/2014/main" id="{36E0B426-3C64-440B-9328-360C1BEA7983}"/>
-              </a:ext>
-            </a:extLst>
-          </p:cNvPr>
-          <p:cNvSpPr>
-            <a:spLocks xmlns:a="http://schemas.openxmlformats.org/drawingml/2006/main" noGrp="1"/>
-          </p:cNvSpPr>
-          <p:nvPr/>
-        </p:nvSpPr>
-        <p:spPr>
-          <a:xfrm xmlns:a="http://schemas.openxmlformats.org/drawingml/2006/main">
-            <a:off x="552450" y="3514725"/>
+                <a16:creationId xmlns:a16="http://schemas.microsoft.com/office/drawing/2014/main" id="{5A813115-DDF6-4A91-9285-E85674F18BA3}"/>
+              </a:ext>
+            </a:extLst>
+          </p:cNvPr>
+          <p:cNvSpPr>
+            <a:spLocks xmlns:a="http://schemas.openxmlformats.org/drawingml/2006/main" noGrp="1"/>
+          </p:cNvSpPr>
+          <p:nvPr/>
+        </p:nvSpPr>
+        <p:spPr>
+          <a:xfrm xmlns:a="http://schemas.openxmlformats.org/drawingml/2006/main">
+            <a:off x="552450" y="3267075"/>
             <a:ext cx="1438275" cy="266700"/>
           </a:xfrm>
           <a:prstGeom xmlns:a="http://schemas.openxmlformats.org/drawingml/2006/main" prst="rect">
@@ -3362,29 +3412,1148 @@
                 <a:ea typeface="Hiragino Sans GB"/>
                 <a:cs typeface="Hiragino Sans GB"/>
               </a:rPr>
-              <a:t>普通流式</a:t>
+              <a:t>普通流</a:t>
             </a:r>
           </a:p>
         </p:txBody>
       </p:sp>
       <p:sp>
         <p:nvSpPr>
-          <p:cNvPr id="53" name="glyph-ellipse-52">
-            <a:extLst xmlns:a="http://schemas.openxmlformats.org/drawingml/2006/main">
-              <a:ext uri="{FF2B5EF4-FFF2-40B4-BE49-F238E27FC236}">
-                <a16:creationId xmlns:a16="http://schemas.microsoft.com/office/drawing/2014/main" id="{7657574F-9551-4FF9-A983-36FF51B2E1CE}"/>
-              </a:ext>
-            </a:extLst>
-          </p:cNvPr>
-          <p:cNvSpPr>
-            <a:spLocks xmlns:a="http://schemas.openxmlformats.org/drawingml/2006/main" noGrp="1"/>
-          </p:cNvSpPr>
-          <p:nvPr/>
-        </p:nvSpPr>
-        <p:spPr>
-          <a:xfrm xmlns:a="http://schemas.openxmlformats.org/drawingml/2006/main">
-            <a:off x="2152650" y="3533775"/>
-            <a:ext cx="228600" cy="228600"/>
+          <p:cNvPr id="53" name="text-52">
+            <a:extLst xmlns:a="http://schemas.openxmlformats.org/drawingml/2006/main">
+              <a:ext uri="{FF2B5EF4-FFF2-40B4-BE49-F238E27FC236}">
+                <a16:creationId xmlns:a16="http://schemas.microsoft.com/office/drawing/2014/main" id="{D817238A-891C-4527-A390-A30183C32DDB}"/>
+              </a:ext>
+            </a:extLst>
+          </p:cNvPr>
+          <p:cNvSpPr>
+            <a:spLocks xmlns:a="http://schemas.openxmlformats.org/drawingml/2006/main" noGrp="1"/>
+          </p:cNvSpPr>
+          <p:nvPr/>
+        </p:nvSpPr>
+        <p:spPr>
+          <a:xfrm xmlns:a="http://schemas.openxmlformats.org/drawingml/2006/main">
+            <a:off x="2038350" y="3228975"/>
+            <a:ext cx="1724025" cy="276225"/>
+          </a:xfrm>
+          <a:prstGeom xmlns:a="http://schemas.openxmlformats.org/drawingml/2006/main" prst="rect">
+            <a:avLst/>
+          </a:prstGeom>
+          <a:noFill xmlns:a="http://schemas.openxmlformats.org/drawingml/2006/main"/>
+          <a:ln xmlns:a="http://schemas.openxmlformats.org/drawingml/2006/main" w="0">
+            <a:noFill/>
+          </a:ln>
+        </p:spPr>
+        <p:txBody>
+          <a:bodyPr xmlns:a="http://schemas.openxmlformats.org/drawingml/2006/main" lIns="0" tIns="0" rIns="0" bIns="0" anchor="ctr">
+            <a:noAutofit/>
+          </a:bodyPr>
+          <a:lstStyle xmlns:a="http://schemas.openxmlformats.org/drawingml/2006/main"/>
+          <a:p xmlns:a="http://schemas.openxmlformats.org/drawingml/2006/main">
+            <a:pPr algn="ctr">
+              <a:defRPr sz="1575" b="1">
+                <a:solidFill>
+                  <a:srgbClr val="163A63"/>
+                </a:solidFill>
+                <a:latin typeface="Hiragino Sans GB"/>
+                <a:ea typeface="Hiragino Sans GB"/>
+                <a:cs typeface="Hiragino Sans GB"/>
+              </a:defRPr>
+            </a:pPr>
+            <a:r>
+              <a:rPr sz="1575" b="1">
+                <a:solidFill>
+                  <a:srgbClr val="163A63"/>
+                </a:solidFill>
+                <a:latin typeface="Hiragino Sans GB"/>
+                <a:ea typeface="Hiragino Sans GB"/>
+                <a:cs typeface="Hiragino Sans GB"/>
+              </a:rPr>
+              <a:t>调用前等待</a:t>
+            </a:r>
+          </a:p>
+        </p:txBody>
+      </p:sp>
+      <p:sp>
+        <p:nvSpPr>
+          <p:cNvPr id="54" name="text-53">
+            <a:extLst xmlns:a="http://schemas.openxmlformats.org/drawingml/2006/main">
+              <a:ext uri="{FF2B5EF4-FFF2-40B4-BE49-F238E27FC236}">
+                <a16:creationId xmlns:a16="http://schemas.microsoft.com/office/drawing/2014/main" id="{257241A9-137F-497E-ACE5-39F719A53F2B}"/>
+              </a:ext>
+            </a:extLst>
+          </p:cNvPr>
+          <p:cNvSpPr>
+            <a:spLocks xmlns:a="http://schemas.openxmlformats.org/drawingml/2006/main" noGrp="1"/>
+          </p:cNvSpPr>
+          <p:nvPr/>
+        </p:nvSpPr>
+        <p:spPr>
+          <a:xfrm xmlns:a="http://schemas.openxmlformats.org/drawingml/2006/main">
+            <a:off x="1990725" y="3543300"/>
+            <a:ext cx="1819275" cy="238125"/>
+          </a:xfrm>
+          <a:prstGeom xmlns:a="http://schemas.openxmlformats.org/drawingml/2006/main" prst="rect">
+            <a:avLst/>
+          </a:prstGeom>
+          <a:noFill xmlns:a="http://schemas.openxmlformats.org/drawingml/2006/main"/>
+          <a:ln xmlns:a="http://schemas.openxmlformats.org/drawingml/2006/main" w="0">
+            <a:noFill/>
+          </a:ln>
+        </p:spPr>
+        <p:txBody>
+          <a:bodyPr xmlns:a="http://schemas.openxmlformats.org/drawingml/2006/main" lIns="0" tIns="0" rIns="0" bIns="0" anchor="ctr">
+            <a:noAutofit/>
+          </a:bodyPr>
+          <a:lstStyle xmlns:a="http://schemas.openxmlformats.org/drawingml/2006/main"/>
+          <a:p xmlns:a="http://schemas.openxmlformats.org/drawingml/2006/main">
+            <a:pPr algn="ctr">
+              <a:defRPr sz="1350" b="0">
+                <a:solidFill>
+                  <a:srgbClr val="2D4663"/>
+                </a:solidFill>
+                <a:latin typeface="Hiragino Sans GB"/>
+                <a:ea typeface="Hiragino Sans GB"/>
+                <a:cs typeface="Hiragino Sans GB"/>
+              </a:defRPr>
+            </a:pPr>
+            <a:r>
+              <a:rPr sz="1350" b="0">
+                <a:solidFill>
+                  <a:srgbClr val="2D4663"/>
+                </a:solidFill>
+                <a:latin typeface="Hiragino Sans GB"/>
+                <a:ea typeface="Hiragino Sans GB"/>
+                <a:cs typeface="Hiragino Sans GB"/>
+              </a:rPr>
+              <a:t>取Token / 借连接</a:t>
+            </a:r>
+          </a:p>
+        </p:txBody>
+      </p:sp>
+      <p:sp>
+        <p:nvSpPr>
+          <p:cNvPr id="55" name="text-54">
+            <a:extLst xmlns:a="http://schemas.openxmlformats.org/drawingml/2006/main">
+              <a:ext uri="{FF2B5EF4-FFF2-40B4-BE49-F238E27FC236}">
+                <a16:creationId xmlns:a16="http://schemas.microsoft.com/office/drawing/2014/main" id="{47B99339-C47B-4CD8-A971-1CEDE71B31F6}"/>
+              </a:ext>
+            </a:extLst>
+          </p:cNvPr>
+          <p:cNvSpPr>
+            <a:spLocks xmlns:a="http://schemas.openxmlformats.org/drawingml/2006/main" noGrp="1"/>
+          </p:cNvSpPr>
+          <p:nvPr/>
+        </p:nvSpPr>
+        <p:spPr>
+          <a:xfrm xmlns:a="http://schemas.openxmlformats.org/drawingml/2006/main">
+            <a:off x="4010025" y="3228975"/>
+            <a:ext cx="1952625" cy="276225"/>
+          </a:xfrm>
+          <a:prstGeom xmlns:a="http://schemas.openxmlformats.org/drawingml/2006/main" prst="rect">
+            <a:avLst/>
+          </a:prstGeom>
+          <a:noFill xmlns:a="http://schemas.openxmlformats.org/drawingml/2006/main"/>
+          <a:ln xmlns:a="http://schemas.openxmlformats.org/drawingml/2006/main" w="0">
+            <a:noFill/>
+          </a:ln>
+        </p:spPr>
+        <p:txBody>
+          <a:bodyPr xmlns:a="http://schemas.openxmlformats.org/drawingml/2006/main" lIns="0" tIns="0" rIns="0" bIns="0" anchor="ctr">
+            <a:noAutofit/>
+          </a:bodyPr>
+          <a:lstStyle xmlns:a="http://schemas.openxmlformats.org/drawingml/2006/main"/>
+          <a:p xmlns:a="http://schemas.openxmlformats.org/drawingml/2006/main">
+            <a:pPr algn="ctr">
+              <a:defRPr sz="1575" b="1">
+                <a:solidFill>
+                  <a:srgbClr val="163A63"/>
+                </a:solidFill>
+                <a:latin typeface="Hiragino Sans GB"/>
+                <a:ea typeface="Hiragino Sans GB"/>
+                <a:cs typeface="Hiragino Sans GB"/>
+              </a:defRPr>
+            </a:pPr>
+            <a:r>
+              <a:rPr sz="1575" b="1">
+                <a:solidFill>
+                  <a:srgbClr val="163A63"/>
+                </a:solidFill>
+                <a:latin typeface="Hiragino Sans GB"/>
+                <a:ea typeface="Hiragino Sans GB"/>
+                <a:cs typeface="Hiragino Sans GB"/>
+              </a:rPr>
+              <a:t>连接与发送</a:t>
+            </a:r>
+          </a:p>
+        </p:txBody>
+      </p:sp>
+      <p:sp>
+        <p:nvSpPr>
+          <p:cNvPr id="56" name="text-55">
+            <a:extLst xmlns:a="http://schemas.openxmlformats.org/drawingml/2006/main">
+              <a:ext uri="{FF2B5EF4-FFF2-40B4-BE49-F238E27FC236}">
+                <a16:creationId xmlns:a16="http://schemas.microsoft.com/office/drawing/2014/main" id="{E5E9C07B-B078-4281-A4F6-EFE9E82A2ACC}"/>
+              </a:ext>
+            </a:extLst>
+          </p:cNvPr>
+          <p:cNvSpPr>
+            <a:spLocks xmlns:a="http://schemas.openxmlformats.org/drawingml/2006/main" noGrp="1"/>
+          </p:cNvSpPr>
+          <p:nvPr/>
+        </p:nvSpPr>
+        <p:spPr>
+          <a:xfrm xmlns:a="http://schemas.openxmlformats.org/drawingml/2006/main">
+            <a:off x="3962400" y="3543300"/>
+            <a:ext cx="2047875" cy="238125"/>
+          </a:xfrm>
+          <a:prstGeom xmlns:a="http://schemas.openxmlformats.org/drawingml/2006/main" prst="rect">
+            <a:avLst/>
+          </a:prstGeom>
+          <a:noFill xmlns:a="http://schemas.openxmlformats.org/drawingml/2006/main"/>
+          <a:ln xmlns:a="http://schemas.openxmlformats.org/drawingml/2006/main" w="0">
+            <a:noFill/>
+          </a:ln>
+        </p:spPr>
+        <p:txBody>
+          <a:bodyPr xmlns:a="http://schemas.openxmlformats.org/drawingml/2006/main" lIns="0" tIns="0" rIns="0" bIns="0" anchor="ctr">
+            <a:noAutofit/>
+          </a:bodyPr>
+          <a:lstStyle xmlns:a="http://schemas.openxmlformats.org/drawingml/2006/main"/>
+          <a:p xmlns:a="http://schemas.openxmlformats.org/drawingml/2006/main">
+            <a:pPr algn="ctr">
+              <a:defRPr sz="1350" b="0">
+                <a:solidFill>
+                  <a:srgbClr val="2D4663"/>
+                </a:solidFill>
+                <a:latin typeface="Hiragino Sans GB"/>
+                <a:ea typeface="Hiragino Sans GB"/>
+                <a:cs typeface="Hiragino Sans GB"/>
+              </a:defRPr>
+            </a:pPr>
+            <a:r>
+              <a:rPr sz="1350" b="0">
+                <a:solidFill>
+                  <a:srgbClr val="2D4663"/>
+                </a:solidFill>
+                <a:latin typeface="Hiragino Sans GB"/>
+                <a:ea typeface="Hiragino Sans GB"/>
+                <a:cs typeface="Hiragino Sans GB"/>
+              </a:rPr>
+              <a:t>DNS / TCP / TLS / 发送</a:t>
+            </a:r>
+          </a:p>
+        </p:txBody>
+      </p:sp>
+      <p:sp>
+        <p:nvSpPr>
+          <p:cNvPr id="57" name="text-56">
+            <a:extLst xmlns:a="http://schemas.openxmlformats.org/drawingml/2006/main">
+              <a:ext uri="{FF2B5EF4-FFF2-40B4-BE49-F238E27FC236}">
+                <a16:creationId xmlns:a16="http://schemas.microsoft.com/office/drawing/2014/main" id="{2E8F82DF-5EC6-4F51-8C21-4668744D8EAC}"/>
+              </a:ext>
+            </a:extLst>
+          </p:cNvPr>
+          <p:cNvSpPr>
+            <a:spLocks xmlns:a="http://schemas.openxmlformats.org/drawingml/2006/main" noGrp="1"/>
+          </p:cNvSpPr>
+          <p:nvPr/>
+        </p:nvSpPr>
+        <p:spPr>
+          <a:xfrm xmlns:a="http://schemas.openxmlformats.org/drawingml/2006/main">
+            <a:off x="6238875" y="3228975"/>
+            <a:ext cx="1676400" cy="276225"/>
+          </a:xfrm>
+          <a:prstGeom xmlns:a="http://schemas.openxmlformats.org/drawingml/2006/main" prst="rect">
+            <a:avLst/>
+          </a:prstGeom>
+          <a:noFill xmlns:a="http://schemas.openxmlformats.org/drawingml/2006/main"/>
+          <a:ln xmlns:a="http://schemas.openxmlformats.org/drawingml/2006/main" w="0">
+            <a:noFill/>
+          </a:ln>
+        </p:spPr>
+        <p:txBody>
+          <a:bodyPr xmlns:a="http://schemas.openxmlformats.org/drawingml/2006/main" lIns="0" tIns="0" rIns="0" bIns="0" anchor="ctr">
+            <a:noAutofit/>
+          </a:bodyPr>
+          <a:lstStyle xmlns:a="http://schemas.openxmlformats.org/drawingml/2006/main"/>
+          <a:p xmlns:a="http://schemas.openxmlformats.org/drawingml/2006/main">
+            <a:pPr algn="ctr">
+              <a:defRPr sz="1575" b="1">
+                <a:solidFill>
+                  <a:srgbClr val="163A63"/>
+                </a:solidFill>
+                <a:latin typeface="Hiragino Sans GB"/>
+                <a:ea typeface="Hiragino Sans GB"/>
+                <a:cs typeface="Hiragino Sans GB"/>
+              </a:defRPr>
+            </a:pPr>
+            <a:r>
+              <a:rPr sz="1575" b="1">
+                <a:solidFill>
+                  <a:srgbClr val="163A63"/>
+                </a:solidFill>
+                <a:latin typeface="Hiragino Sans GB"/>
+                <a:ea typeface="Hiragino Sans GB"/>
+                <a:cs typeface="Hiragino Sans GB"/>
+              </a:rPr>
+              <a:t>首条有效响应</a:t>
+            </a:r>
+          </a:p>
+        </p:txBody>
+      </p:sp>
+      <p:sp>
+        <p:nvSpPr>
+          <p:cNvPr id="58" name="text-57">
+            <a:extLst xmlns:a="http://schemas.openxmlformats.org/drawingml/2006/main">
+              <a:ext uri="{FF2B5EF4-FFF2-40B4-BE49-F238E27FC236}">
+                <a16:creationId xmlns:a16="http://schemas.microsoft.com/office/drawing/2014/main" id="{1CA0CC4A-5E9B-4435-81BB-31579B22B3CC}"/>
+              </a:ext>
+            </a:extLst>
+          </p:cNvPr>
+          <p:cNvSpPr>
+            <a:spLocks xmlns:a="http://schemas.openxmlformats.org/drawingml/2006/main" noGrp="1"/>
+          </p:cNvSpPr>
+          <p:nvPr/>
+        </p:nvSpPr>
+        <p:spPr>
+          <a:xfrm xmlns:a="http://schemas.openxmlformats.org/drawingml/2006/main">
+            <a:off x="6191250" y="3543300"/>
+            <a:ext cx="1771650" cy="238125"/>
+          </a:xfrm>
+          <a:prstGeom xmlns:a="http://schemas.openxmlformats.org/drawingml/2006/main" prst="rect">
+            <a:avLst/>
+          </a:prstGeom>
+          <a:noFill xmlns:a="http://schemas.openxmlformats.org/drawingml/2006/main"/>
+          <a:ln xmlns:a="http://schemas.openxmlformats.org/drawingml/2006/main" w="0">
+            <a:noFill/>
+          </a:ln>
+        </p:spPr>
+        <p:txBody>
+          <a:bodyPr xmlns:a="http://schemas.openxmlformats.org/drawingml/2006/main" lIns="0" tIns="0" rIns="0" bIns="0" anchor="ctr">
+            <a:noAutofit/>
+          </a:bodyPr>
+          <a:lstStyle xmlns:a="http://schemas.openxmlformats.org/drawingml/2006/main"/>
+          <a:p xmlns:a="http://schemas.openxmlformats.org/drawingml/2006/main">
+            <a:pPr algn="ctr">
+              <a:defRPr sz="1350" b="0">
+                <a:solidFill>
+                  <a:srgbClr val="2D4663"/>
+                </a:solidFill>
+                <a:latin typeface="Hiragino Sans GB"/>
+                <a:ea typeface="Hiragino Sans GB"/>
+                <a:cs typeface="Hiragino Sans GB"/>
+              </a:defRPr>
+            </a:pPr>
+            <a:r>
+              <a:rPr sz="1350" b="0">
+                <a:solidFill>
+                  <a:srgbClr val="2D4663"/>
+                </a:solidFill>
+                <a:latin typeface="Hiragino Sans GB"/>
+                <a:ea typeface="Hiragino Sans GB"/>
+                <a:cs typeface="Hiragino Sans GB"/>
+              </a:rPr>
+              <a:t>心跳不算有效响应</a:t>
+            </a:r>
+          </a:p>
+        </p:txBody>
+      </p:sp>
+      <p:sp>
+        <p:nvSpPr>
+          <p:cNvPr id="59" name="text-58">
+            <a:extLst xmlns:a="http://schemas.openxmlformats.org/drawingml/2006/main">
+              <a:ext uri="{FF2B5EF4-FFF2-40B4-BE49-F238E27FC236}">
+                <a16:creationId xmlns:a16="http://schemas.microsoft.com/office/drawing/2014/main" id="{C542BED7-4C09-4712-9D59-3EEB7BE048B3}"/>
+              </a:ext>
+            </a:extLst>
+          </p:cNvPr>
+          <p:cNvSpPr>
+            <a:spLocks xmlns:a="http://schemas.openxmlformats.org/drawingml/2006/main" noGrp="1"/>
+          </p:cNvSpPr>
+          <p:nvPr/>
+        </p:nvSpPr>
+        <p:spPr>
+          <a:xfrm xmlns:a="http://schemas.openxmlformats.org/drawingml/2006/main">
+            <a:off x="8115300" y="3228975"/>
+            <a:ext cx="1952625" cy="276225"/>
+          </a:xfrm>
+          <a:prstGeom xmlns:a="http://schemas.openxmlformats.org/drawingml/2006/main" prst="rect">
+            <a:avLst/>
+          </a:prstGeom>
+          <a:noFill xmlns:a="http://schemas.openxmlformats.org/drawingml/2006/main"/>
+          <a:ln xmlns:a="http://schemas.openxmlformats.org/drawingml/2006/main" w="0">
+            <a:noFill/>
+          </a:ln>
+        </p:spPr>
+        <p:txBody>
+          <a:bodyPr xmlns:a="http://schemas.openxmlformats.org/drawingml/2006/main" lIns="0" tIns="0" rIns="0" bIns="0" anchor="ctr">
+            <a:noAutofit/>
+          </a:bodyPr>
+          <a:lstStyle xmlns:a="http://schemas.openxmlformats.org/drawingml/2006/main"/>
+          <a:p xmlns:a="http://schemas.openxmlformats.org/drawingml/2006/main">
+            <a:pPr algn="ctr">
+              <a:defRPr sz="1575" b="1">
+                <a:solidFill>
+                  <a:srgbClr val="163A63"/>
+                </a:solidFill>
+                <a:latin typeface="Hiragino Sans GB"/>
+                <a:ea typeface="Hiragino Sans GB"/>
+                <a:cs typeface="Hiragino Sans GB"/>
+              </a:defRPr>
+            </a:pPr>
+            <a:r>
+              <a:rPr sz="1575" b="1">
+                <a:solidFill>
+                  <a:srgbClr val="163A63"/>
+                </a:solidFill>
+                <a:latin typeface="Hiragino Sans GB"/>
+                <a:ea typeface="Hiragino Sans GB"/>
+                <a:cs typeface="Hiragino Sans GB"/>
+              </a:rPr>
+              <a:t>持续接收</a:t>
+            </a:r>
+          </a:p>
+        </p:txBody>
+      </p:sp>
+      <p:sp>
+        <p:nvSpPr>
+          <p:cNvPr id="60" name="text-59">
+            <a:extLst xmlns:a="http://schemas.openxmlformats.org/drawingml/2006/main">
+              <a:ext uri="{FF2B5EF4-FFF2-40B4-BE49-F238E27FC236}">
+                <a16:creationId xmlns:a16="http://schemas.microsoft.com/office/drawing/2014/main" id="{F7D1F05A-27A0-4F48-8B26-FC5575752081}"/>
+              </a:ext>
+            </a:extLst>
+          </p:cNvPr>
+          <p:cNvSpPr>
+            <a:spLocks xmlns:a="http://schemas.openxmlformats.org/drawingml/2006/main" noGrp="1"/>
+          </p:cNvSpPr>
+          <p:nvPr/>
+        </p:nvSpPr>
+        <p:spPr>
+          <a:xfrm xmlns:a="http://schemas.openxmlformats.org/drawingml/2006/main">
+            <a:off x="8067675" y="3543300"/>
+            <a:ext cx="2047875" cy="238125"/>
+          </a:xfrm>
+          <a:prstGeom xmlns:a="http://schemas.openxmlformats.org/drawingml/2006/main" prst="rect">
+            <a:avLst/>
+          </a:prstGeom>
+          <a:noFill xmlns:a="http://schemas.openxmlformats.org/drawingml/2006/main"/>
+          <a:ln xmlns:a="http://schemas.openxmlformats.org/drawingml/2006/main" w="0">
+            <a:noFill/>
+          </a:ln>
+        </p:spPr>
+        <p:txBody>
+          <a:bodyPr xmlns:a="http://schemas.openxmlformats.org/drawingml/2006/main" lIns="0" tIns="0" rIns="0" bIns="0" anchor="ctr">
+            <a:noAutofit/>
+          </a:bodyPr>
+          <a:lstStyle xmlns:a="http://schemas.openxmlformats.org/drawingml/2006/main"/>
+          <a:p xmlns:a="http://schemas.openxmlformats.org/drawingml/2006/main">
+            <a:pPr algn="ctr">
+              <a:defRPr sz="1350" b="0">
+                <a:solidFill>
+                  <a:srgbClr val="2D4663"/>
+                </a:solidFill>
+                <a:latin typeface="Hiragino Sans GB"/>
+                <a:ea typeface="Hiragino Sans GB"/>
+                <a:cs typeface="Hiragino Sans GB"/>
+              </a:defRPr>
+            </a:pPr>
+            <a:r>
+              <a:rPr sz="1350" b="0">
+                <a:solidFill>
+                  <a:srgbClr val="2D4663"/>
+                </a:solidFill>
+                <a:latin typeface="Hiragino Sans GB"/>
+                <a:ea typeface="Hiragino Sans GB"/>
+                <a:cs typeface="Hiragino Sans GB"/>
+              </a:rPr>
+              <a:t>空闲时限 / 一帧接收时限</a:t>
+            </a:r>
+          </a:p>
+        </p:txBody>
+      </p:sp>
+      <p:sp>
+        <p:nvSpPr>
+          <p:cNvPr id="61" name="shape-60">
+            <a:extLst xmlns:a="http://schemas.openxmlformats.org/drawingml/2006/main">
+              <a:ext uri="{FF2B5EF4-FFF2-40B4-BE49-F238E27FC236}">
+                <a16:creationId xmlns:a16="http://schemas.microsoft.com/office/drawing/2014/main" id="{5167BB7F-4E6A-42B1-B61E-7F3CF72ABBB9}"/>
+              </a:ext>
+            </a:extLst>
+          </p:cNvPr>
+          <p:cNvSpPr>
+            <a:spLocks xmlns:a="http://schemas.openxmlformats.org/drawingml/2006/main" noGrp="1"/>
+          </p:cNvSpPr>
+          <p:nvPr/>
+        </p:nvSpPr>
+        <p:spPr>
+          <a:xfrm xmlns:a="http://schemas.openxmlformats.org/drawingml/2006/main">
+            <a:off x="3762375" y="3362325"/>
+            <a:ext cx="9525" cy="9525"/>
+          </a:xfrm>
+          <a:prstGeom xmlns:a="http://schemas.openxmlformats.org/drawingml/2006/main" prst="rect">
+            <a:avLst/>
+          </a:prstGeom>
+          <a:noFill xmlns:a="http://schemas.openxmlformats.org/drawingml/2006/main"/>
+          <a:ln xmlns:a="http://schemas.openxmlformats.org/drawingml/2006/main" w="11906">
+            <a:noFill/>
+          </a:ln>
+        </p:spPr>
+      </p:sp>
+      <p:sp>
+        <p:nvSpPr>
+          <p:cNvPr id="62" name="shape-61">
+            <a:extLst xmlns:a="http://schemas.openxmlformats.org/drawingml/2006/main">
+              <a:ext uri="{FF2B5EF4-FFF2-40B4-BE49-F238E27FC236}">
+                <a16:creationId xmlns:a16="http://schemas.microsoft.com/office/drawing/2014/main" id="{78565982-DACE-4B9D-A5A4-1B5F4F85E0F1}"/>
+              </a:ext>
+            </a:extLst>
+          </p:cNvPr>
+          <p:cNvSpPr>
+            <a:spLocks xmlns:a="http://schemas.openxmlformats.org/drawingml/2006/main" noGrp="1"/>
+          </p:cNvSpPr>
+          <p:nvPr/>
+        </p:nvSpPr>
+        <p:spPr>
+          <a:xfrm xmlns:a="http://schemas.openxmlformats.org/drawingml/2006/main">
+            <a:off x="3943350" y="3362325"/>
+            <a:ext cx="9525" cy="9525"/>
+          </a:xfrm>
+          <a:prstGeom xmlns:a="http://schemas.openxmlformats.org/drawingml/2006/main" prst="rect">
+            <a:avLst/>
+          </a:prstGeom>
+          <a:noFill xmlns:a="http://schemas.openxmlformats.org/drawingml/2006/main"/>
+          <a:ln xmlns:a="http://schemas.openxmlformats.org/drawingml/2006/main" w="11906">
+            <a:noFill/>
+          </a:ln>
+        </p:spPr>
+      </p:sp>
+      <p:cxnSp>
+        <p:nvCxnSpPr>
+          <p:cNvPr id="245" name=""/>
+          <p:cNvCxnSpPr>
+            <a:stCxn xmlns:a="http://schemas.openxmlformats.org/drawingml/2006/main" id="61" idx="3"/>
+            <a:endCxn xmlns:a="http://schemas.openxmlformats.org/drawingml/2006/main" id="62" idx="1"/>
+          </p:cNvCxnSpPr>
+          <p:nvPr/>
+        </p:nvCxnSpPr>
+        <p:spPr>
+          <a:xfrm xmlns:a="http://schemas.openxmlformats.org/drawingml/2006/main">
+            <a:off x="3771900" y="3367088"/>
+            <a:ext cx="171450" cy="0"/>
+          </a:xfrm>
+          <a:prstGeom xmlns:a="http://schemas.openxmlformats.org/drawingml/2006/main" prst="straightConnector1">
+            <a:avLst/>
+          </a:prstGeom>
+          <a:ln xmlns:a="http://schemas.openxmlformats.org/drawingml/2006/main" w="20003">
+            <a:solidFill>
+              <a:srgbClr val="2166B0"/>
+            </a:solidFill>
+            <a:prstDash val="solid"/>
+            <a:tailEnd type="triangle" w="sm" len="sm"/>
+          </a:ln>
+        </p:spPr>
+      </p:cxnSp>
+      <p:sp>
+        <p:nvSpPr>
+          <p:cNvPr id="64" name="shape-63">
+            <a:extLst xmlns:a="http://schemas.openxmlformats.org/drawingml/2006/main">
+              <a:ext uri="{FF2B5EF4-FFF2-40B4-BE49-F238E27FC236}">
+                <a16:creationId xmlns:a16="http://schemas.microsoft.com/office/drawing/2014/main" id="{2F55C797-EBAA-44B6-9856-91F8B2039362}"/>
+              </a:ext>
+            </a:extLst>
+          </p:cNvPr>
+          <p:cNvSpPr>
+            <a:spLocks xmlns:a="http://schemas.openxmlformats.org/drawingml/2006/main" noGrp="1"/>
+          </p:cNvSpPr>
+          <p:nvPr/>
+        </p:nvSpPr>
+        <p:spPr>
+          <a:xfrm xmlns:a="http://schemas.openxmlformats.org/drawingml/2006/main">
+            <a:off x="5972175" y="3362325"/>
+            <a:ext cx="9525" cy="9525"/>
+          </a:xfrm>
+          <a:prstGeom xmlns:a="http://schemas.openxmlformats.org/drawingml/2006/main" prst="rect">
+            <a:avLst/>
+          </a:prstGeom>
+          <a:noFill xmlns:a="http://schemas.openxmlformats.org/drawingml/2006/main"/>
+          <a:ln xmlns:a="http://schemas.openxmlformats.org/drawingml/2006/main" w="11906">
+            <a:noFill/>
+          </a:ln>
+        </p:spPr>
+      </p:sp>
+      <p:sp>
+        <p:nvSpPr>
+          <p:cNvPr id="65" name="shape-64">
+            <a:extLst xmlns:a="http://schemas.openxmlformats.org/drawingml/2006/main">
+              <a:ext uri="{FF2B5EF4-FFF2-40B4-BE49-F238E27FC236}">
+                <a16:creationId xmlns:a16="http://schemas.microsoft.com/office/drawing/2014/main" id="{2679C9A7-CC50-4460-84BE-726CEDB772C2}"/>
+              </a:ext>
+            </a:extLst>
+          </p:cNvPr>
+          <p:cNvSpPr>
+            <a:spLocks xmlns:a="http://schemas.openxmlformats.org/drawingml/2006/main" noGrp="1"/>
+          </p:cNvSpPr>
+          <p:nvPr/>
+        </p:nvSpPr>
+        <p:spPr>
+          <a:xfrm xmlns:a="http://schemas.openxmlformats.org/drawingml/2006/main">
+            <a:off x="6162675" y="3362325"/>
+            <a:ext cx="9525" cy="9525"/>
+          </a:xfrm>
+          <a:prstGeom xmlns:a="http://schemas.openxmlformats.org/drawingml/2006/main" prst="rect">
+            <a:avLst/>
+          </a:prstGeom>
+          <a:noFill xmlns:a="http://schemas.openxmlformats.org/drawingml/2006/main"/>
+          <a:ln xmlns:a="http://schemas.openxmlformats.org/drawingml/2006/main" w="11906">
+            <a:noFill/>
+          </a:ln>
+        </p:spPr>
+      </p:sp>
+      <p:cxnSp>
+        <p:nvCxnSpPr>
+          <p:cNvPr id="248" name=""/>
+          <p:cNvCxnSpPr>
+            <a:stCxn xmlns:a="http://schemas.openxmlformats.org/drawingml/2006/main" id="64" idx="3"/>
+            <a:endCxn xmlns:a="http://schemas.openxmlformats.org/drawingml/2006/main" id="65" idx="1"/>
+          </p:cNvCxnSpPr>
+          <p:nvPr/>
+        </p:nvCxnSpPr>
+        <p:spPr>
+          <a:xfrm xmlns:a="http://schemas.openxmlformats.org/drawingml/2006/main">
+            <a:off x="5981700" y="3367088"/>
+            <a:ext cx="180975" cy="0"/>
+          </a:xfrm>
+          <a:prstGeom xmlns:a="http://schemas.openxmlformats.org/drawingml/2006/main" prst="straightConnector1">
+            <a:avLst/>
+          </a:prstGeom>
+          <a:ln xmlns:a="http://schemas.openxmlformats.org/drawingml/2006/main" w="20003">
+            <a:solidFill>
+              <a:srgbClr val="2166B0"/>
+            </a:solidFill>
+            <a:prstDash val="solid"/>
+            <a:tailEnd type="triangle" w="sm" len="sm"/>
+          </a:ln>
+        </p:spPr>
+      </p:cxnSp>
+      <p:sp>
+        <p:nvSpPr>
+          <p:cNvPr id="67" name="shape-66">
+            <a:extLst xmlns:a="http://schemas.openxmlformats.org/drawingml/2006/main">
+              <a:ext uri="{FF2B5EF4-FFF2-40B4-BE49-F238E27FC236}">
+                <a16:creationId xmlns:a16="http://schemas.microsoft.com/office/drawing/2014/main" id="{D5DE76AA-D76B-43A1-98A8-F4390FAAFD99}"/>
+              </a:ext>
+            </a:extLst>
+          </p:cNvPr>
+          <p:cNvSpPr>
+            <a:spLocks xmlns:a="http://schemas.openxmlformats.org/drawingml/2006/main" noGrp="1"/>
+          </p:cNvSpPr>
+          <p:nvPr/>
+        </p:nvSpPr>
+        <p:spPr>
+          <a:xfrm xmlns:a="http://schemas.openxmlformats.org/drawingml/2006/main">
+            <a:off x="7915275" y="3362325"/>
+            <a:ext cx="9525" cy="9525"/>
+          </a:xfrm>
+          <a:prstGeom xmlns:a="http://schemas.openxmlformats.org/drawingml/2006/main" prst="rect">
+            <a:avLst/>
+          </a:prstGeom>
+          <a:noFill xmlns:a="http://schemas.openxmlformats.org/drawingml/2006/main"/>
+          <a:ln xmlns:a="http://schemas.openxmlformats.org/drawingml/2006/main" w="11906">
+            <a:noFill/>
+          </a:ln>
+        </p:spPr>
+      </p:sp>
+      <p:sp>
+        <p:nvSpPr>
+          <p:cNvPr id="68" name="shape-67">
+            <a:extLst xmlns:a="http://schemas.openxmlformats.org/drawingml/2006/main">
+              <a:ext uri="{FF2B5EF4-FFF2-40B4-BE49-F238E27FC236}">
+                <a16:creationId xmlns:a16="http://schemas.microsoft.com/office/drawing/2014/main" id="{25D66700-4D54-4AFF-9AED-F073326AABCC}"/>
+              </a:ext>
+            </a:extLst>
+          </p:cNvPr>
+          <p:cNvSpPr>
+            <a:spLocks xmlns:a="http://schemas.openxmlformats.org/drawingml/2006/main" noGrp="1"/>
+          </p:cNvSpPr>
+          <p:nvPr/>
+        </p:nvSpPr>
+        <p:spPr>
+          <a:xfrm xmlns:a="http://schemas.openxmlformats.org/drawingml/2006/main">
+            <a:off x="8086725" y="3362325"/>
+            <a:ext cx="9525" cy="9525"/>
+          </a:xfrm>
+          <a:prstGeom xmlns:a="http://schemas.openxmlformats.org/drawingml/2006/main" prst="rect">
+            <a:avLst/>
+          </a:prstGeom>
+          <a:noFill xmlns:a="http://schemas.openxmlformats.org/drawingml/2006/main"/>
+          <a:ln xmlns:a="http://schemas.openxmlformats.org/drawingml/2006/main" w="11906">
+            <a:noFill/>
+          </a:ln>
+        </p:spPr>
+      </p:sp>
+      <p:cxnSp>
+        <p:nvCxnSpPr>
+          <p:cNvPr id="251" name=""/>
+          <p:cNvCxnSpPr>
+            <a:stCxn xmlns:a="http://schemas.openxmlformats.org/drawingml/2006/main" id="67" idx="3"/>
+            <a:endCxn xmlns:a="http://schemas.openxmlformats.org/drawingml/2006/main" id="68" idx="1"/>
+          </p:cNvCxnSpPr>
+          <p:nvPr/>
+        </p:nvCxnSpPr>
+        <p:spPr>
+          <a:xfrm xmlns:a="http://schemas.openxmlformats.org/drawingml/2006/main">
+            <a:off x="7924800" y="3367088"/>
+            <a:ext cx="161925" cy="0"/>
+          </a:xfrm>
+          <a:prstGeom xmlns:a="http://schemas.openxmlformats.org/drawingml/2006/main" prst="straightConnector1">
+            <a:avLst/>
+          </a:prstGeom>
+          <a:ln xmlns:a="http://schemas.openxmlformats.org/drawingml/2006/main" w="20003">
+            <a:solidFill>
+              <a:srgbClr val="2166B0"/>
+            </a:solidFill>
+            <a:prstDash val="solid"/>
+            <a:tailEnd type="triangle" w="sm" len="sm"/>
+          </a:ln>
+        </p:spPr>
+      </p:cxnSp>
+      <p:sp>
+        <p:nvSpPr>
+          <p:cNvPr id="70" name="shape-69">
+            <a:extLst xmlns:a="http://schemas.openxmlformats.org/drawingml/2006/main">
+              <a:ext uri="{FF2B5EF4-FFF2-40B4-BE49-F238E27FC236}">
+                <a16:creationId xmlns:a16="http://schemas.microsoft.com/office/drawing/2014/main" id="{FEC0C8D7-5904-48DC-B8DA-92143C4775A2}"/>
+              </a:ext>
+            </a:extLst>
+          </p:cNvPr>
+          <p:cNvSpPr>
+            <a:spLocks xmlns:a="http://schemas.openxmlformats.org/drawingml/2006/main" noGrp="1"/>
+          </p:cNvSpPr>
+          <p:nvPr/>
+        </p:nvSpPr>
+        <p:spPr>
+          <a:xfrm xmlns:a="http://schemas.openxmlformats.org/drawingml/2006/main">
+            <a:off x="2047875" y="3819525"/>
+            <a:ext cx="9525" cy="9525"/>
+          </a:xfrm>
+          <a:prstGeom xmlns:a="http://schemas.openxmlformats.org/drawingml/2006/main" prst="rect">
+            <a:avLst/>
+          </a:prstGeom>
+          <a:noFill xmlns:a="http://schemas.openxmlformats.org/drawingml/2006/main"/>
+          <a:ln xmlns:a="http://schemas.openxmlformats.org/drawingml/2006/main" w="11906">
+            <a:noFill/>
+          </a:ln>
+        </p:spPr>
+      </p:sp>
+      <p:sp>
+        <p:nvSpPr>
+          <p:cNvPr id="71" name="shape-70">
+            <a:extLst xmlns:a="http://schemas.openxmlformats.org/drawingml/2006/main">
+              <a:ext uri="{FF2B5EF4-FFF2-40B4-BE49-F238E27FC236}">
+                <a16:creationId xmlns:a16="http://schemas.microsoft.com/office/drawing/2014/main" id="{E5231C55-B5B7-4705-86DC-10E6102CE045}"/>
+              </a:ext>
+            </a:extLst>
+          </p:cNvPr>
+          <p:cNvSpPr>
+            <a:spLocks xmlns:a="http://schemas.openxmlformats.org/drawingml/2006/main" noGrp="1"/>
+          </p:cNvSpPr>
+          <p:nvPr/>
+        </p:nvSpPr>
+        <p:spPr>
+          <a:xfrm xmlns:a="http://schemas.openxmlformats.org/drawingml/2006/main">
+            <a:off x="2047875" y="3876675"/>
+            <a:ext cx="9525" cy="9525"/>
+          </a:xfrm>
+          <a:prstGeom xmlns:a="http://schemas.openxmlformats.org/drawingml/2006/main" prst="rect">
+            <a:avLst/>
+          </a:prstGeom>
+          <a:noFill xmlns:a="http://schemas.openxmlformats.org/drawingml/2006/main"/>
+          <a:ln xmlns:a="http://schemas.openxmlformats.org/drawingml/2006/main" w="11906">
+            <a:noFill/>
+          </a:ln>
+        </p:spPr>
+      </p:sp>
+      <p:cxnSp>
+        <p:nvCxnSpPr>
+          <p:cNvPr id="254" name=""/>
+          <p:cNvCxnSpPr>
+            <a:stCxn xmlns:a="http://schemas.openxmlformats.org/drawingml/2006/main" id="70" idx="2"/>
+            <a:endCxn xmlns:a="http://schemas.openxmlformats.org/drawingml/2006/main" id="71" idx="0"/>
+          </p:cNvCxnSpPr>
+          <p:nvPr/>
+        </p:nvCxnSpPr>
+        <p:spPr>
+          <a:xfrm xmlns:a="http://schemas.openxmlformats.org/drawingml/2006/main">
+            <a:off x="2052638" y="3829050"/>
+            <a:ext cx="0" cy="47625"/>
+          </a:xfrm>
+          <a:prstGeom xmlns:a="http://schemas.openxmlformats.org/drawingml/2006/main" prst="straightConnector1">
+            <a:avLst/>
+          </a:prstGeom>
+          <a:ln xmlns:a="http://schemas.openxmlformats.org/drawingml/2006/main" w="20003">
+            <a:solidFill>
+              <a:srgbClr val="2166B0"/>
+            </a:solidFill>
+            <a:prstDash val="solid"/>
+            <a:tailEnd type="none" w="sm" len="sm"/>
+          </a:ln>
+        </p:spPr>
+      </p:cxnSp>
+      <p:sp>
+        <p:nvSpPr>
+          <p:cNvPr id="73" name="shape-72">
+            <a:extLst xmlns:a="http://schemas.openxmlformats.org/drawingml/2006/main">
+              <a:ext uri="{FF2B5EF4-FFF2-40B4-BE49-F238E27FC236}">
+                <a16:creationId xmlns:a16="http://schemas.microsoft.com/office/drawing/2014/main" id="{BC1B2E7D-D98D-4C2A-ADE2-C36616C1BA4D}"/>
+              </a:ext>
+            </a:extLst>
+          </p:cNvPr>
+          <p:cNvSpPr>
+            <a:spLocks xmlns:a="http://schemas.openxmlformats.org/drawingml/2006/main" noGrp="1"/>
+          </p:cNvSpPr>
+          <p:nvPr/>
+        </p:nvSpPr>
+        <p:spPr>
+          <a:xfrm xmlns:a="http://schemas.openxmlformats.org/drawingml/2006/main">
+            <a:off x="2047875" y="3876675"/>
+            <a:ext cx="9525" cy="9525"/>
+          </a:xfrm>
+          <a:prstGeom xmlns:a="http://schemas.openxmlformats.org/drawingml/2006/main" prst="rect">
+            <a:avLst/>
+          </a:prstGeom>
+          <a:noFill xmlns:a="http://schemas.openxmlformats.org/drawingml/2006/main"/>
+          <a:ln xmlns:a="http://schemas.openxmlformats.org/drawingml/2006/main" w="11906">
+            <a:noFill/>
+          </a:ln>
+        </p:spPr>
+      </p:sp>
+      <p:sp>
+        <p:nvSpPr>
+          <p:cNvPr id="74" name="shape-73">
+            <a:extLst xmlns:a="http://schemas.openxmlformats.org/drawingml/2006/main">
+              <a:ext uri="{FF2B5EF4-FFF2-40B4-BE49-F238E27FC236}">
+                <a16:creationId xmlns:a16="http://schemas.microsoft.com/office/drawing/2014/main" id="{372A9E90-C68E-4751-90A2-4BF1A4A248B4}"/>
+              </a:ext>
+            </a:extLst>
+          </p:cNvPr>
+          <p:cNvSpPr>
+            <a:spLocks xmlns:a="http://schemas.openxmlformats.org/drawingml/2006/main" noGrp="1"/>
+          </p:cNvSpPr>
+          <p:nvPr/>
+        </p:nvSpPr>
+        <p:spPr>
+          <a:xfrm xmlns:a="http://schemas.openxmlformats.org/drawingml/2006/main">
+            <a:off x="10020300" y="3876675"/>
+            <a:ext cx="9525" cy="9525"/>
+          </a:xfrm>
+          <a:prstGeom xmlns:a="http://schemas.openxmlformats.org/drawingml/2006/main" prst="rect">
+            <a:avLst/>
+          </a:prstGeom>
+          <a:noFill xmlns:a="http://schemas.openxmlformats.org/drawingml/2006/main"/>
+          <a:ln xmlns:a="http://schemas.openxmlformats.org/drawingml/2006/main" w="11906">
+            <a:noFill/>
+          </a:ln>
+        </p:spPr>
+      </p:sp>
+      <p:cxnSp>
+        <p:nvCxnSpPr>
+          <p:cNvPr id="257" name=""/>
+          <p:cNvCxnSpPr>
+            <a:stCxn xmlns:a="http://schemas.openxmlformats.org/drawingml/2006/main" id="73" idx="3"/>
+            <a:endCxn xmlns:a="http://schemas.openxmlformats.org/drawingml/2006/main" id="74" idx="1"/>
+          </p:cNvCxnSpPr>
+          <p:nvPr/>
+        </p:nvCxnSpPr>
+        <p:spPr>
+          <a:xfrm xmlns:a="http://schemas.openxmlformats.org/drawingml/2006/main">
+            <a:off x="2057400" y="3881438"/>
+            <a:ext cx="7962900" cy="0"/>
+          </a:xfrm>
+          <a:prstGeom xmlns:a="http://schemas.openxmlformats.org/drawingml/2006/main" prst="straightConnector1">
+            <a:avLst/>
+          </a:prstGeom>
+          <a:ln xmlns:a="http://schemas.openxmlformats.org/drawingml/2006/main" w="20003">
+            <a:solidFill>
+              <a:srgbClr val="2166B0"/>
+            </a:solidFill>
+            <a:prstDash val="solid"/>
+            <a:tailEnd type="none" w="sm" len="sm"/>
+          </a:ln>
+        </p:spPr>
+      </p:cxnSp>
+      <p:sp>
+        <p:nvSpPr>
+          <p:cNvPr id="76" name="shape-75">
+            <a:extLst xmlns:a="http://schemas.openxmlformats.org/drawingml/2006/main">
+              <a:ext uri="{FF2B5EF4-FFF2-40B4-BE49-F238E27FC236}">
+                <a16:creationId xmlns:a16="http://schemas.microsoft.com/office/drawing/2014/main" id="{3BAC2E88-931B-40B3-A875-1D9C9DC9BFB6}"/>
+              </a:ext>
+            </a:extLst>
+          </p:cNvPr>
+          <p:cNvSpPr>
+            <a:spLocks xmlns:a="http://schemas.openxmlformats.org/drawingml/2006/main" noGrp="1"/>
+          </p:cNvSpPr>
+          <p:nvPr/>
+        </p:nvSpPr>
+        <p:spPr>
+          <a:xfrm xmlns:a="http://schemas.openxmlformats.org/drawingml/2006/main">
+            <a:off x="10020300" y="3876675"/>
+            <a:ext cx="9525" cy="9525"/>
+          </a:xfrm>
+          <a:prstGeom xmlns:a="http://schemas.openxmlformats.org/drawingml/2006/main" prst="rect">
+            <a:avLst/>
+          </a:prstGeom>
+          <a:noFill xmlns:a="http://schemas.openxmlformats.org/drawingml/2006/main"/>
+          <a:ln xmlns:a="http://schemas.openxmlformats.org/drawingml/2006/main" w="11906">
+            <a:noFill/>
+          </a:ln>
+        </p:spPr>
+      </p:sp>
+      <p:sp>
+        <p:nvSpPr>
+          <p:cNvPr id="77" name="shape-76">
+            <a:extLst xmlns:a="http://schemas.openxmlformats.org/drawingml/2006/main">
+              <a:ext uri="{FF2B5EF4-FFF2-40B4-BE49-F238E27FC236}">
+                <a16:creationId xmlns:a16="http://schemas.microsoft.com/office/drawing/2014/main" id="{644B4043-7F08-4FAB-98EB-CE8AD82A2B81}"/>
+              </a:ext>
+            </a:extLst>
+          </p:cNvPr>
+          <p:cNvSpPr>
+            <a:spLocks xmlns:a="http://schemas.openxmlformats.org/drawingml/2006/main" noGrp="1"/>
+          </p:cNvSpPr>
+          <p:nvPr/>
+        </p:nvSpPr>
+        <p:spPr>
+          <a:xfrm xmlns:a="http://schemas.openxmlformats.org/drawingml/2006/main">
+            <a:off x="10020300" y="3819525"/>
+            <a:ext cx="9525" cy="9525"/>
+          </a:xfrm>
+          <a:prstGeom xmlns:a="http://schemas.openxmlformats.org/drawingml/2006/main" prst="rect">
+            <a:avLst/>
+          </a:prstGeom>
+          <a:noFill xmlns:a="http://schemas.openxmlformats.org/drawingml/2006/main"/>
+          <a:ln xmlns:a="http://schemas.openxmlformats.org/drawingml/2006/main" w="11906">
+            <a:noFill/>
+          </a:ln>
+        </p:spPr>
+      </p:sp>
+      <p:cxnSp>
+        <p:nvCxnSpPr>
+          <p:cNvPr id="260" name=""/>
+          <p:cNvCxnSpPr>
+            <a:stCxn xmlns:a="http://schemas.openxmlformats.org/drawingml/2006/main" id="76" idx="0"/>
+            <a:endCxn xmlns:a="http://schemas.openxmlformats.org/drawingml/2006/main" id="77" idx="2"/>
+          </p:cNvCxnSpPr>
+          <p:nvPr/>
+        </p:nvCxnSpPr>
+        <p:spPr>
+          <a:xfrm xmlns:a="http://schemas.openxmlformats.org/drawingml/2006/main" flipV="1">
+            <a:off x="10025063" y="3829050"/>
+            <a:ext cx="0" cy="47625"/>
+          </a:xfrm>
+          <a:prstGeom xmlns:a="http://schemas.openxmlformats.org/drawingml/2006/main" prst="straightConnector1">
+            <a:avLst/>
+          </a:prstGeom>
+          <a:ln xmlns:a="http://schemas.openxmlformats.org/drawingml/2006/main" w="20003">
+            <a:solidFill>
+              <a:srgbClr val="2166B0"/>
+            </a:solidFill>
+            <a:prstDash val="solid"/>
+            <a:tailEnd type="none" w="sm" len="sm"/>
+          </a:ln>
+        </p:spPr>
+      </p:cxnSp>
+      <p:sp>
+        <p:nvSpPr>
+          <p:cNvPr id="79" name="text-78">
+            <a:extLst xmlns:a="http://schemas.openxmlformats.org/drawingml/2006/main">
+              <a:ext uri="{FF2B5EF4-FFF2-40B4-BE49-F238E27FC236}">
+                <a16:creationId xmlns:a16="http://schemas.microsoft.com/office/drawing/2014/main" id="{594DBF9C-414A-417C-ACCB-7BD36046E15F}"/>
+              </a:ext>
+            </a:extLst>
+          </p:cNvPr>
+          <p:cNvSpPr>
+            <a:spLocks xmlns:a="http://schemas.openxmlformats.org/drawingml/2006/main" noGrp="1"/>
+          </p:cNvSpPr>
+          <p:nvPr/>
+        </p:nvSpPr>
+        <p:spPr>
+          <a:xfrm xmlns:a="http://schemas.openxmlformats.org/drawingml/2006/main">
+            <a:off x="2124075" y="3895725"/>
+            <a:ext cx="7800975" cy="247650"/>
+          </a:xfrm>
+          <a:prstGeom xmlns:a="http://schemas.openxmlformats.org/drawingml/2006/main" prst="rect">
+            <a:avLst/>
+          </a:prstGeom>
+          <a:noFill xmlns:a="http://schemas.openxmlformats.org/drawingml/2006/main"/>
+          <a:ln xmlns:a="http://schemas.openxmlformats.org/drawingml/2006/main" w="0">
+            <a:noFill/>
+          </a:ln>
+        </p:spPr>
+        <p:txBody>
+          <a:bodyPr xmlns:a="http://schemas.openxmlformats.org/drawingml/2006/main" lIns="0" tIns="0" rIns="0" bIns="0" anchor="ctr">
+            <a:noAutofit/>
+          </a:bodyPr>
+          <a:lstStyle xmlns:a="http://schemas.openxmlformats.org/drawingml/2006/main"/>
+          <a:p xmlns:a="http://schemas.openxmlformats.org/drawingml/2006/main">
+            <a:pPr algn="ctr">
+              <a:defRPr sz="1425" b="0">
+                <a:solidFill>
+                  <a:srgbClr val="2166B0"/>
+                </a:solidFill>
+                <a:latin typeface="Hiragino Sans GB"/>
+                <a:ea typeface="Hiragino Sans GB"/>
+                <a:cs typeface="Hiragino Sans GB"/>
+              </a:defRPr>
+            </a:pPr>
+            <a:r>
+              <a:rPr sz="1425" b="0">
+                <a:solidFill>
+                  <a:srgbClr val="2166B0"/>
+                </a:solidFill>
+                <a:latin typeface="Hiragino Sans GB"/>
+                <a:ea typeface="Hiragino Sans GB"/>
+                <a:cs typeface="Hiragino Sans GB"/>
+              </a:rPr>
+              <a:t>从调用前等待开始计总时限，心跳和重试均不重置</a:t>
+            </a:r>
+          </a:p>
+        </p:txBody>
+      </p:sp>
+      <p:sp>
+        <p:nvSpPr>
+          <p:cNvPr id="80" name="text-79">
+            <a:extLst xmlns:a="http://schemas.openxmlformats.org/drawingml/2006/main">
+              <a:ext uri="{FF2B5EF4-FFF2-40B4-BE49-F238E27FC236}">
+                <a16:creationId xmlns:a16="http://schemas.microsoft.com/office/drawing/2014/main" id="{ECFE81C3-6DCC-4FC5-821A-B80F23117C22}"/>
+              </a:ext>
+            </a:extLst>
+          </p:cNvPr>
+          <p:cNvSpPr>
+            <a:spLocks xmlns:a="http://schemas.openxmlformats.org/drawingml/2006/main" noGrp="1"/>
+          </p:cNvSpPr>
+          <p:nvPr/>
+        </p:nvSpPr>
+        <p:spPr>
+          <a:xfrm xmlns:a="http://schemas.openxmlformats.org/drawingml/2006/main">
+            <a:off x="552450" y="4229100"/>
+            <a:ext cx="1457325" cy="285750"/>
+          </a:xfrm>
+          <a:prstGeom xmlns:a="http://schemas.openxmlformats.org/drawingml/2006/main" prst="rect">
+            <a:avLst/>
+          </a:prstGeom>
+          <a:noFill xmlns:a="http://schemas.openxmlformats.org/drawingml/2006/main"/>
+          <a:ln xmlns:a="http://schemas.openxmlformats.org/drawingml/2006/main" w="0">
+            <a:noFill/>
+          </a:ln>
+        </p:spPr>
+        <p:txBody>
+          <a:bodyPr xmlns:a="http://schemas.openxmlformats.org/drawingml/2006/main" lIns="0" tIns="0" rIns="0" bIns="0" anchor="ctr">
+            <a:noAutofit/>
+          </a:bodyPr>
+          <a:lstStyle xmlns:a="http://schemas.openxmlformats.org/drawingml/2006/main"/>
+          <a:p xmlns:a="http://schemas.openxmlformats.org/drawingml/2006/main">
+            <a:pPr algn="l">
+              <a:defRPr sz="1650" b="1">
+                <a:solidFill>
+                  <a:srgbClr val="2166B0"/>
+                </a:solidFill>
+                <a:latin typeface="Hiragino Sans GB"/>
+                <a:ea typeface="Hiragino Sans GB"/>
+                <a:cs typeface="Hiragino Sans GB"/>
+              </a:defRPr>
+            </a:pPr>
+            <a:r>
+              <a:rPr sz="1650" b="1">
+                <a:solidFill>
+                  <a:srgbClr val="2166B0"/>
+                </a:solidFill>
+                <a:latin typeface="Hiragino Sans GB"/>
+                <a:ea typeface="Hiragino Sans GB"/>
+                <a:cs typeface="Hiragino Sans GB"/>
+              </a:rPr>
+              <a:t>异步长任务</a:t>
+            </a:r>
+          </a:p>
+        </p:txBody>
+      </p:sp>
+      <p:sp>
+        <p:nvSpPr>
+          <p:cNvPr id="81" name="text-80">
+            <a:extLst xmlns:a="http://schemas.openxmlformats.org/drawingml/2006/main">
+              <a:ext uri="{FF2B5EF4-FFF2-40B4-BE49-F238E27FC236}">
+                <a16:creationId xmlns:a16="http://schemas.microsoft.com/office/drawing/2014/main" id="{6B9BD508-F25F-4A5E-9128-0C7158C1F4AE}"/>
+              </a:ext>
+            </a:extLst>
+          </p:cNvPr>
+          <p:cNvSpPr>
+            <a:spLocks xmlns:a="http://schemas.openxmlformats.org/drawingml/2006/main" noGrp="1"/>
+          </p:cNvSpPr>
+          <p:nvPr/>
+        </p:nvSpPr>
+        <p:spPr>
+          <a:xfrm xmlns:a="http://schemas.openxmlformats.org/drawingml/2006/main">
+            <a:off x="552450" y="4543425"/>
+            <a:ext cx="1409700" cy="238125"/>
+          </a:xfrm>
+          <a:prstGeom xmlns:a="http://schemas.openxmlformats.org/drawingml/2006/main" prst="rect">
+            <a:avLst/>
+          </a:prstGeom>
+          <a:noFill xmlns:a="http://schemas.openxmlformats.org/drawingml/2006/main"/>
+          <a:ln xmlns:a="http://schemas.openxmlformats.org/drawingml/2006/main" w="0">
+            <a:noFill/>
+          </a:ln>
+        </p:spPr>
+        <p:txBody>
+          <a:bodyPr xmlns:a="http://schemas.openxmlformats.org/drawingml/2006/main" lIns="0" tIns="0" rIns="0" bIns="0" anchor="ctr">
+            <a:noAutofit/>
+          </a:bodyPr>
+          <a:lstStyle xmlns:a="http://schemas.openxmlformats.org/drawingml/2006/main"/>
+          <a:p xmlns:a="http://schemas.openxmlformats.org/drawingml/2006/main">
+            <a:pPr algn="l">
+              <a:defRPr sz="1350" b="0">
+                <a:solidFill>
+                  <a:srgbClr val="647D99"/>
+                </a:solidFill>
+                <a:latin typeface="Hiragino Sans GB"/>
+                <a:ea typeface="Hiragino Sans GB"/>
+                <a:cs typeface="Hiragino Sans GB"/>
+              </a:defRPr>
+            </a:pPr>
+            <a:r>
+              <a:rPr sz="1350" b="0">
+                <a:solidFill>
+                  <a:srgbClr val="647D99"/>
+                </a:solidFill>
+                <a:latin typeface="Hiragino Sans GB"/>
+                <a:ea typeface="Hiragino Sans GB"/>
+                <a:cs typeface="Hiragino Sans GB"/>
+              </a:rPr>
+              <a:t>标记前同上</a:t>
+            </a:r>
+          </a:p>
+        </p:txBody>
+      </p:sp>
+      <p:sp>
+        <p:nvSpPr>
+          <p:cNvPr id="82" name="glyph-ellipse-81">
+            <a:extLst xmlns:a="http://schemas.openxmlformats.org/drawingml/2006/main">
+              <a:ext uri="{FF2B5EF4-FFF2-40B4-BE49-F238E27FC236}">
+                <a16:creationId xmlns:a16="http://schemas.microsoft.com/office/drawing/2014/main" id="{14781D6C-2830-4AF9-B472-78BFA5D6F7F2}"/>
+              </a:ext>
+            </a:extLst>
+          </p:cNvPr>
+          <p:cNvSpPr>
+            <a:spLocks xmlns:a="http://schemas.openxmlformats.org/drawingml/2006/main" noGrp="1"/>
+          </p:cNvSpPr>
+          <p:nvPr/>
+        </p:nvSpPr>
+        <p:spPr>
+          <a:xfrm xmlns:a="http://schemas.openxmlformats.org/drawingml/2006/main">
+            <a:off x="2371725" y="4276725"/>
+            <a:ext cx="295275" cy="295275"/>
           </a:xfrm>
           <a:prstGeom xmlns:a="http://schemas.openxmlformats.org/drawingml/2006/main" prst="ellipse">
             <a:avLst/>
@@ -3401,22 +4570,22 @@
       </p:sp>
       <p:sp>
         <p:nvSpPr>
-          <p:cNvPr id="54" name="line-53">
-            <a:extLst xmlns:a="http://schemas.openxmlformats.org/drawingml/2006/main">
-              <a:ext uri="{FF2B5EF4-FFF2-40B4-BE49-F238E27FC236}">
-                <a16:creationId xmlns:a16="http://schemas.microsoft.com/office/drawing/2014/main" id="{1BDF5F7E-3364-45EF-B53A-80AF73D17051}"/>
-              </a:ext>
-            </a:extLst>
-          </p:cNvPr>
-          <p:cNvSpPr>
-            <a:spLocks xmlns:a="http://schemas.openxmlformats.org/drawingml/2006/main" noGrp="1"/>
-          </p:cNvSpPr>
-          <p:nvPr/>
-        </p:nvSpPr>
-        <p:spPr>
-          <a:xfrm xmlns:a="http://schemas.openxmlformats.org/drawingml/2006/main">
-            <a:off x="2266950" y="3574923"/>
-            <a:ext cx="0" cy="73152"/>
+          <p:cNvPr id="83" name="line-82">
+            <a:extLst xmlns:a="http://schemas.openxmlformats.org/drawingml/2006/main">
+              <a:ext uri="{FF2B5EF4-FFF2-40B4-BE49-F238E27FC236}">
+                <a16:creationId xmlns:a16="http://schemas.microsoft.com/office/drawing/2014/main" id="{D3C34F35-F988-478B-855A-1D4B0505B7F2}"/>
+              </a:ext>
+            </a:extLst>
+          </p:cNvPr>
+          <p:cNvSpPr>
+            <a:spLocks xmlns:a="http://schemas.openxmlformats.org/drawingml/2006/main" noGrp="1"/>
+          </p:cNvSpPr>
+          <p:nvPr/>
+        </p:nvSpPr>
+        <p:spPr>
+          <a:xfrm xmlns:a="http://schemas.openxmlformats.org/drawingml/2006/main">
+            <a:off x="2519363" y="4329875"/>
+            <a:ext cx="0" cy="94488"/>
           </a:xfrm>
           <a:prstGeom xmlns:a="http://schemas.openxmlformats.org/drawingml/2006/main" prst="line">
             <a:avLst/>
@@ -3432,22 +4601,22 @@
       </p:sp>
       <p:sp>
         <p:nvSpPr>
-          <p:cNvPr id="55" name="line-54">
-            <a:extLst xmlns:a="http://schemas.openxmlformats.org/drawingml/2006/main">
-              <a:ext uri="{FF2B5EF4-FFF2-40B4-BE49-F238E27FC236}">
-                <a16:creationId xmlns:a16="http://schemas.microsoft.com/office/drawing/2014/main" id="{81334880-3C2B-418E-B684-7D825E91CEC2}"/>
-              </a:ext>
-            </a:extLst>
-          </p:cNvPr>
-          <p:cNvSpPr>
-            <a:spLocks xmlns:a="http://schemas.openxmlformats.org/drawingml/2006/main" noGrp="1"/>
-          </p:cNvSpPr>
-          <p:nvPr/>
-        </p:nvSpPr>
-        <p:spPr>
-          <a:xfrm xmlns:a="http://schemas.openxmlformats.org/drawingml/2006/main">
-            <a:off x="2266950" y="3648075"/>
-            <a:ext cx="59436" cy="34290"/>
+          <p:cNvPr id="84" name="line-83">
+            <a:extLst xmlns:a="http://schemas.openxmlformats.org/drawingml/2006/main">
+              <a:ext uri="{FF2B5EF4-FFF2-40B4-BE49-F238E27FC236}">
+                <a16:creationId xmlns:a16="http://schemas.microsoft.com/office/drawing/2014/main" id="{C607ED5A-5F8C-45A5-9B79-BDA24B5A7481}"/>
+              </a:ext>
+            </a:extLst>
+          </p:cNvPr>
+          <p:cNvSpPr>
+            <a:spLocks xmlns:a="http://schemas.openxmlformats.org/drawingml/2006/main" noGrp="1"/>
+          </p:cNvSpPr>
+          <p:nvPr/>
+        </p:nvSpPr>
+        <p:spPr>
+          <a:xfrm xmlns:a="http://schemas.openxmlformats.org/drawingml/2006/main">
+            <a:off x="2519363" y="4424363"/>
+            <a:ext cx="76772" cy="44291"/>
           </a:xfrm>
           <a:prstGeom xmlns:a="http://schemas.openxmlformats.org/drawingml/2006/main" prst="line">
             <a:avLst/>
@@ -3463,22 +4632,22 @@
       </p:sp>
       <p:sp>
         <p:nvSpPr>
-          <p:cNvPr id="56" name="text-55">
-            <a:extLst xmlns:a="http://schemas.openxmlformats.org/drawingml/2006/main">
-              <a:ext uri="{FF2B5EF4-FFF2-40B4-BE49-F238E27FC236}">
-                <a16:creationId xmlns:a16="http://schemas.microsoft.com/office/drawing/2014/main" id="{A50B222E-9156-4BE5-8EB4-9A28FDF46247}"/>
-              </a:ext>
-            </a:extLst>
-          </p:cNvPr>
-          <p:cNvSpPr>
-            <a:spLocks xmlns:a="http://schemas.openxmlformats.org/drawingml/2006/main" noGrp="1"/>
-          </p:cNvSpPr>
-          <p:nvPr/>
-        </p:nvSpPr>
-        <p:spPr>
-          <a:xfrm xmlns:a="http://schemas.openxmlformats.org/drawingml/2006/main">
-            <a:off x="2552700" y="3486150"/>
-            <a:ext cx="7362825" cy="295275"/>
+          <p:cNvPr id="85" name="text-84">
+            <a:extLst xmlns:a="http://schemas.openxmlformats.org/drawingml/2006/main">
+              <a:ext uri="{FF2B5EF4-FFF2-40B4-BE49-F238E27FC236}">
+                <a16:creationId xmlns:a16="http://schemas.microsoft.com/office/drawing/2014/main" id="{0D4C068A-52C5-402F-956A-9B37E297C7EE}"/>
+              </a:ext>
+            </a:extLst>
+          </p:cNvPr>
+          <p:cNvSpPr>
+            <a:spLocks xmlns:a="http://schemas.openxmlformats.org/drawingml/2006/main" noGrp="1"/>
+          </p:cNvSpPr>
+          <p:nvPr/>
+        </p:nvSpPr>
+        <p:spPr>
+          <a:xfrm xmlns:a="http://schemas.openxmlformats.org/drawingml/2006/main">
+            <a:off x="1552575" y="4619625"/>
+            <a:ext cx="2085975" cy="257175"/>
           </a:xfrm>
           <a:prstGeom xmlns:a="http://schemas.openxmlformats.org/drawingml/2006/main" prst="rect">
             <a:avLst/>
@@ -3494,10 +4663,10 @@
           </a:bodyPr>
           <a:lstStyle xmlns:a="http://schemas.openxmlformats.org/drawingml/2006/main"/>
           <a:p xmlns:a="http://schemas.openxmlformats.org/drawingml/2006/main">
-            <a:pPr algn="l">
-              <a:defRPr sz="1575" b="0">
-                <a:solidFill>
-                  <a:srgbClr val="2D4663"/>
+            <a:pPr algn="ctr">
+              <a:defRPr sz="1425" b="1">
+                <a:solidFill>
+                  <a:srgbClr val="163A63"/>
                 </a:solidFill>
                 <a:latin typeface="Hiragino Sans GB"/>
                 <a:ea typeface="Hiragino Sans GB"/>
@@ -3505,68 +4674,37 @@
               </a:defRPr>
             </a:pPr>
             <a:r>
-              <a:rPr sz="1575" b="0">
-                <a:solidFill>
-                  <a:srgbClr val="2D4663"/>
+              <a:rPr sz="1425" b="1">
+                <a:solidFill>
+                  <a:srgbClr val="163A63"/>
                 </a:solidFill>
                 <a:latin typeface="Hiragino Sans GB"/>
                 <a:ea typeface="Hiragino Sans GB"/>
                 <a:cs typeface="Hiragino Sans GB"/>
               </a:rPr>
-              <a:t>首条有效响应、无数据间隔、整次连接分别设超时</a:t>
+              <a:t>收到“后台处理中”</a:t>
             </a:r>
           </a:p>
         </p:txBody>
       </p:sp>
       <p:sp>
         <p:nvSpPr>
-          <p:cNvPr id="57" name="line-56">
-            <a:extLst xmlns:a="http://schemas.openxmlformats.org/drawingml/2006/main">
-              <a:ext uri="{FF2B5EF4-FFF2-40B4-BE49-F238E27FC236}">
-                <a16:creationId xmlns:a16="http://schemas.microsoft.com/office/drawing/2014/main" id="{532DF217-2A67-4B8F-991F-7AFE8F2E92D7}"/>
-              </a:ext>
-            </a:extLst>
-          </p:cNvPr>
-          <p:cNvSpPr>
-            <a:spLocks xmlns:a="http://schemas.openxmlformats.org/drawingml/2006/main" noGrp="1"/>
-          </p:cNvSpPr>
-          <p:nvPr/>
-        </p:nvSpPr>
-        <p:spPr>
-          <a:xfrm xmlns:a="http://schemas.openxmlformats.org/drawingml/2006/main">
-            <a:off x="523875" y="3876675"/>
-            <a:ext cx="9429750" cy="0"/>
-          </a:xfrm>
-          <a:prstGeom xmlns:a="http://schemas.openxmlformats.org/drawingml/2006/main" prst="line">
-            <a:avLst/>
-          </a:prstGeom>
-          <a:noFill xmlns:a="http://schemas.openxmlformats.org/drawingml/2006/main"/>
-          <a:ln xmlns:a="http://schemas.openxmlformats.org/drawingml/2006/main" w="9525">
-            <a:solidFill>
-              <a:srgbClr val="B9CEE5"/>
-            </a:solidFill>
-            <a:prstDash val="solid"/>
-          </a:ln>
-        </p:spPr>
-      </p:sp>
-      <p:sp>
-        <p:nvSpPr>
-          <p:cNvPr id="58" name="text-57">
-            <a:extLst xmlns:a="http://schemas.openxmlformats.org/drawingml/2006/main">
-              <a:ext uri="{FF2B5EF4-FFF2-40B4-BE49-F238E27FC236}">
-                <a16:creationId xmlns:a16="http://schemas.microsoft.com/office/drawing/2014/main" id="{B3418209-C9B0-4404-8603-173FE29F28C0}"/>
-              </a:ext>
-            </a:extLst>
-          </p:cNvPr>
-          <p:cNvSpPr>
-            <a:spLocks xmlns:a="http://schemas.openxmlformats.org/drawingml/2006/main" noGrp="1"/>
-          </p:cNvSpPr>
-          <p:nvPr/>
-        </p:nvSpPr>
-        <p:spPr>
-          <a:xfrm xmlns:a="http://schemas.openxmlformats.org/drawingml/2006/main">
-            <a:off x="552450" y="4067175"/>
-            <a:ext cx="1457325" cy="285750"/>
+          <p:cNvPr id="86" name="text-85">
+            <a:extLst xmlns:a="http://schemas.openxmlformats.org/drawingml/2006/main">
+              <a:ext uri="{FF2B5EF4-FFF2-40B4-BE49-F238E27FC236}">
+                <a16:creationId xmlns:a16="http://schemas.microsoft.com/office/drawing/2014/main" id="{0A321C90-E416-4FA8-BCC2-09C22E7A4662}"/>
+              </a:ext>
+            </a:extLst>
+          </p:cNvPr>
+          <p:cNvSpPr>
+            <a:spLocks xmlns:a="http://schemas.openxmlformats.org/drawingml/2006/main" noGrp="1"/>
+          </p:cNvSpPr>
+          <p:nvPr/>
+        </p:nvSpPr>
+        <p:spPr>
+          <a:xfrm xmlns:a="http://schemas.openxmlformats.org/drawingml/2006/main">
+            <a:off x="1600200" y="4905375"/>
+            <a:ext cx="1800225" cy="209550"/>
           </a:xfrm>
           <a:prstGeom xmlns:a="http://schemas.openxmlformats.org/drawingml/2006/main" prst="rect">
             <a:avLst/>
@@ -3582,10 +4720,10 @@
           </a:bodyPr>
           <a:lstStyle xmlns:a="http://schemas.openxmlformats.org/drawingml/2006/main"/>
           <a:p xmlns:a="http://schemas.openxmlformats.org/drawingml/2006/main">
-            <a:pPr algn="l">
-              <a:defRPr sz="1650" b="1">
-                <a:solidFill>
-                  <a:srgbClr val="2166B0"/>
+            <a:pPr algn="ctr">
+              <a:defRPr sz="1200" b="0">
+                <a:solidFill>
+                  <a:srgbClr val="647D99"/>
                 </a:solidFill>
                 <a:latin typeface="Hiragino Sans GB"/>
                 <a:ea typeface="Hiragino Sans GB"/>
@@ -3593,214 +4731,6 @@
               </a:defRPr>
             </a:pPr>
             <a:r>
-              <a:rPr sz="1650" b="1">
-                <a:solidFill>
-                  <a:srgbClr val="2166B0"/>
-                </a:solidFill>
-                <a:latin typeface="Hiragino Sans GB"/>
-                <a:ea typeface="Hiragino Sans GB"/>
-                <a:cs typeface="Hiragino Sans GB"/>
-              </a:rPr>
-              <a:t>长任务设计</a:t>
-            </a:r>
-          </a:p>
-        </p:txBody>
-      </p:sp>
-      <p:sp>
-        <p:nvSpPr>
-          <p:cNvPr id="59" name="glyph-ellipse-58">
-            <a:extLst xmlns:a="http://schemas.openxmlformats.org/drawingml/2006/main">
-              <a:ext uri="{FF2B5EF4-FFF2-40B4-BE49-F238E27FC236}">
-                <a16:creationId xmlns:a16="http://schemas.microsoft.com/office/drawing/2014/main" id="{76C4A318-EC9E-4EF9-9E73-680D27C2FCE0}"/>
-              </a:ext>
-            </a:extLst>
-          </p:cNvPr>
-          <p:cNvSpPr>
-            <a:spLocks xmlns:a="http://schemas.openxmlformats.org/drawingml/2006/main" noGrp="1"/>
-          </p:cNvSpPr>
-          <p:nvPr/>
-        </p:nvSpPr>
-        <p:spPr>
-          <a:xfrm xmlns:a="http://schemas.openxmlformats.org/drawingml/2006/main">
-            <a:off x="2371725" y="4095750"/>
-            <a:ext cx="295275" cy="295275"/>
-          </a:xfrm>
-          <a:prstGeom xmlns:a="http://schemas.openxmlformats.org/drawingml/2006/main" prst="ellipse">
-            <a:avLst/>
-          </a:prstGeom>
-          <a:solidFill xmlns:a="http://schemas.openxmlformats.org/drawingml/2006/main">
-            <a:srgbClr val="FFFFFF"/>
-          </a:solidFill>
-          <a:ln xmlns:a="http://schemas.openxmlformats.org/drawingml/2006/main" w="16193">
-            <a:solidFill>
-              <a:srgbClr val="2166B0"/>
-            </a:solidFill>
-          </a:ln>
-        </p:spPr>
-      </p:sp>
-      <p:sp>
-        <p:nvSpPr>
-          <p:cNvPr id="60" name="line-59">
-            <a:extLst xmlns:a="http://schemas.openxmlformats.org/drawingml/2006/main">
-              <a:ext uri="{FF2B5EF4-FFF2-40B4-BE49-F238E27FC236}">
-                <a16:creationId xmlns:a16="http://schemas.microsoft.com/office/drawing/2014/main" id="{9EF23FE0-4CEC-48F3-9CBA-26C1909E452A}"/>
-              </a:ext>
-            </a:extLst>
-          </p:cNvPr>
-          <p:cNvSpPr>
-            <a:spLocks xmlns:a="http://schemas.openxmlformats.org/drawingml/2006/main" noGrp="1"/>
-          </p:cNvSpPr>
-          <p:nvPr/>
-        </p:nvSpPr>
-        <p:spPr>
-          <a:xfrm xmlns:a="http://schemas.openxmlformats.org/drawingml/2006/main">
-            <a:off x="2519363" y="4148900"/>
-            <a:ext cx="0" cy="94488"/>
-          </a:xfrm>
-          <a:prstGeom xmlns:a="http://schemas.openxmlformats.org/drawingml/2006/main" prst="line">
-            <a:avLst/>
-          </a:prstGeom>
-          <a:noFill xmlns:a="http://schemas.openxmlformats.org/drawingml/2006/main"/>
-          <a:ln xmlns:a="http://schemas.openxmlformats.org/drawingml/2006/main" w="15240">
-            <a:solidFill>
-              <a:srgbClr val="2166B0"/>
-            </a:solidFill>
-            <a:prstDash val="solid"/>
-          </a:ln>
-        </p:spPr>
-      </p:sp>
-      <p:sp>
-        <p:nvSpPr>
-          <p:cNvPr id="61" name="line-60">
-            <a:extLst xmlns:a="http://schemas.openxmlformats.org/drawingml/2006/main">
-              <a:ext uri="{FF2B5EF4-FFF2-40B4-BE49-F238E27FC236}">
-                <a16:creationId xmlns:a16="http://schemas.microsoft.com/office/drawing/2014/main" id="{B0A696AF-8242-4379-9AE4-898525984E93}"/>
-              </a:ext>
-            </a:extLst>
-          </p:cNvPr>
-          <p:cNvSpPr>
-            <a:spLocks xmlns:a="http://schemas.openxmlformats.org/drawingml/2006/main" noGrp="1"/>
-          </p:cNvSpPr>
-          <p:nvPr/>
-        </p:nvSpPr>
-        <p:spPr>
-          <a:xfrm xmlns:a="http://schemas.openxmlformats.org/drawingml/2006/main">
-            <a:off x="2519363" y="4243388"/>
-            <a:ext cx="76772" cy="44291"/>
-          </a:xfrm>
-          <a:prstGeom xmlns:a="http://schemas.openxmlformats.org/drawingml/2006/main" prst="line">
-            <a:avLst/>
-          </a:prstGeom>
-          <a:noFill xmlns:a="http://schemas.openxmlformats.org/drawingml/2006/main"/>
-          <a:ln xmlns:a="http://schemas.openxmlformats.org/drawingml/2006/main" w="15240">
-            <a:solidFill>
-              <a:srgbClr val="2166B0"/>
-            </a:solidFill>
-            <a:prstDash val="solid"/>
-          </a:ln>
-        </p:spPr>
-      </p:sp>
-      <p:sp>
-        <p:nvSpPr>
-          <p:cNvPr id="62" name="text-61">
-            <a:extLst xmlns:a="http://schemas.openxmlformats.org/drawingml/2006/main">
-              <a:ext uri="{FF2B5EF4-FFF2-40B4-BE49-F238E27FC236}">
-                <a16:creationId xmlns:a16="http://schemas.microsoft.com/office/drawing/2014/main" id="{C8339F1C-A6EF-4D1A-A2B6-235804B1C3E4}"/>
-              </a:ext>
-            </a:extLst>
-          </p:cNvPr>
-          <p:cNvSpPr>
-            <a:spLocks xmlns:a="http://schemas.openxmlformats.org/drawingml/2006/main" noGrp="1"/>
-          </p:cNvSpPr>
-          <p:nvPr/>
-        </p:nvSpPr>
-        <p:spPr>
-          <a:xfrm xmlns:a="http://schemas.openxmlformats.org/drawingml/2006/main">
-            <a:off x="1552575" y="4457700"/>
-            <a:ext cx="2085975" cy="257175"/>
-          </a:xfrm>
-          <a:prstGeom xmlns:a="http://schemas.openxmlformats.org/drawingml/2006/main" prst="rect">
-            <a:avLst/>
-          </a:prstGeom>
-          <a:noFill xmlns:a="http://schemas.openxmlformats.org/drawingml/2006/main"/>
-          <a:ln xmlns:a="http://schemas.openxmlformats.org/drawingml/2006/main" w="0">
-            <a:noFill/>
-          </a:ln>
-        </p:spPr>
-        <p:txBody>
-          <a:bodyPr xmlns:a="http://schemas.openxmlformats.org/drawingml/2006/main" lIns="0" tIns="0" rIns="0" bIns="0" anchor="ctr">
-            <a:noAutofit/>
-          </a:bodyPr>
-          <a:lstStyle xmlns:a="http://schemas.openxmlformats.org/drawingml/2006/main"/>
-          <a:p xmlns:a="http://schemas.openxmlformats.org/drawingml/2006/main">
-            <a:pPr algn="ctr">
-              <a:defRPr sz="1425" b="1">
-                <a:solidFill>
-                  <a:srgbClr val="163A63"/>
-                </a:solidFill>
-                <a:latin typeface="Hiragino Sans GB"/>
-                <a:ea typeface="Hiragino Sans GB"/>
-                <a:cs typeface="Hiragino Sans GB"/>
-              </a:defRPr>
-            </a:pPr>
-            <a:r>
-              <a:rPr sz="1425" b="1">
-                <a:solidFill>
-                  <a:srgbClr val="163A63"/>
-                </a:solidFill>
-                <a:latin typeface="Hiragino Sans GB"/>
-                <a:ea typeface="Hiragino Sans GB"/>
-                <a:cs typeface="Hiragino Sans GB"/>
-              </a:rPr>
-              <a:t>收到“后台处理中”</a:t>
-            </a:r>
-          </a:p>
-        </p:txBody>
-      </p:sp>
-      <p:sp>
-        <p:nvSpPr>
-          <p:cNvPr id="63" name="text-62">
-            <a:extLst xmlns:a="http://schemas.openxmlformats.org/drawingml/2006/main">
-              <a:ext uri="{FF2B5EF4-FFF2-40B4-BE49-F238E27FC236}">
-                <a16:creationId xmlns:a16="http://schemas.microsoft.com/office/drawing/2014/main" id="{A71F8D09-5E07-44A3-BBB0-A90B0B184B2D}"/>
-              </a:ext>
-            </a:extLst>
-          </p:cNvPr>
-          <p:cNvSpPr>
-            <a:spLocks xmlns:a="http://schemas.openxmlformats.org/drawingml/2006/main" noGrp="1"/>
-          </p:cNvSpPr>
-          <p:nvPr/>
-        </p:nvSpPr>
-        <p:spPr>
-          <a:xfrm xmlns:a="http://schemas.openxmlformats.org/drawingml/2006/main">
-            <a:off x="1600200" y="4733925"/>
-            <a:ext cx="1800225" cy="209550"/>
-          </a:xfrm>
-          <a:prstGeom xmlns:a="http://schemas.openxmlformats.org/drawingml/2006/main" prst="rect">
-            <a:avLst/>
-          </a:prstGeom>
-          <a:noFill xmlns:a="http://schemas.openxmlformats.org/drawingml/2006/main"/>
-          <a:ln xmlns:a="http://schemas.openxmlformats.org/drawingml/2006/main" w="0">
-            <a:noFill/>
-          </a:ln>
-        </p:spPr>
-        <p:txBody>
-          <a:bodyPr xmlns:a="http://schemas.openxmlformats.org/drawingml/2006/main" lIns="0" tIns="0" rIns="0" bIns="0" anchor="ctr">
-            <a:noAutofit/>
-          </a:bodyPr>
-          <a:lstStyle xmlns:a="http://schemas.openxmlformats.org/drawingml/2006/main"/>
-          <a:p xmlns:a="http://schemas.openxmlformats.org/drawingml/2006/main">
-            <a:pPr algn="ctr">
-              <a:defRPr sz="1200" b="0">
-                <a:solidFill>
-                  <a:srgbClr val="647D99"/>
-                </a:solidFill>
-                <a:latin typeface="Hiragino Sans GB"/>
-                <a:ea typeface="Hiragino Sans GB"/>
-                <a:cs typeface="Hiragino Sans GB"/>
-              </a:defRPr>
-            </a:pPr>
-            <a:r>
               <a:rPr sz="1200" b="0">
                 <a:solidFill>
                   <a:srgbClr val="647D99"/>
@@ -3816,21 +4746,21 @@
       </p:sp>
       <p:sp>
         <p:nvSpPr>
-          <p:cNvPr id="64" name="shape-63">
-            <a:extLst xmlns:a="http://schemas.openxmlformats.org/drawingml/2006/main">
-              <a:ext uri="{FF2B5EF4-FFF2-40B4-BE49-F238E27FC236}">
-                <a16:creationId xmlns:a16="http://schemas.microsoft.com/office/drawing/2014/main" id="{1814BE4D-5C3B-43E0-8426-C4494A91DFAD}"/>
-              </a:ext>
-            </a:extLst>
-          </p:cNvPr>
-          <p:cNvSpPr>
-            <a:spLocks xmlns:a="http://schemas.openxmlformats.org/drawingml/2006/main" noGrp="1"/>
-          </p:cNvSpPr>
-          <p:nvPr/>
-        </p:nvSpPr>
-        <p:spPr>
-          <a:xfrm xmlns:a="http://schemas.openxmlformats.org/drawingml/2006/main">
-            <a:off x="2667000" y="4248150"/>
+          <p:cNvPr id="87" name="shape-86">
+            <a:extLst xmlns:a="http://schemas.openxmlformats.org/drawingml/2006/main">
+              <a:ext uri="{FF2B5EF4-FFF2-40B4-BE49-F238E27FC236}">
+                <a16:creationId xmlns:a16="http://schemas.microsoft.com/office/drawing/2014/main" id="{C03BE886-BB0C-449C-AFE4-BD8972212A54}"/>
+              </a:ext>
+            </a:extLst>
+          </p:cNvPr>
+          <p:cNvSpPr>
+            <a:spLocks xmlns:a="http://schemas.openxmlformats.org/drawingml/2006/main" noGrp="1"/>
+          </p:cNvSpPr>
+          <p:nvPr/>
+        </p:nvSpPr>
+        <p:spPr>
+          <a:xfrm xmlns:a="http://schemas.openxmlformats.org/drawingml/2006/main">
+            <a:off x="2667000" y="4429125"/>
             <a:ext cx="9525" cy="9525"/>
           </a:xfrm>
           <a:prstGeom xmlns:a="http://schemas.openxmlformats.org/drawingml/2006/main" prst="rect">
@@ -3844,21 +4774,21 @@
       </p:sp>
       <p:sp>
         <p:nvSpPr>
-          <p:cNvPr id="65" name="shape-64">
-            <a:extLst xmlns:a="http://schemas.openxmlformats.org/drawingml/2006/main">
-              <a:ext uri="{FF2B5EF4-FFF2-40B4-BE49-F238E27FC236}">
-                <a16:creationId xmlns:a16="http://schemas.microsoft.com/office/drawing/2014/main" id="{8B060CD1-494D-472E-B034-6EFF479710CA}"/>
-              </a:ext>
-            </a:extLst>
-          </p:cNvPr>
-          <p:cNvSpPr>
-            <a:spLocks xmlns:a="http://schemas.openxmlformats.org/drawingml/2006/main" noGrp="1"/>
-          </p:cNvSpPr>
-          <p:nvPr/>
-        </p:nvSpPr>
-        <p:spPr>
-          <a:xfrm xmlns:a="http://schemas.openxmlformats.org/drawingml/2006/main">
-            <a:off x="4114800" y="4248150"/>
+          <p:cNvPr id="88" name="shape-87">
+            <a:extLst xmlns:a="http://schemas.openxmlformats.org/drawingml/2006/main">
+              <a:ext uri="{FF2B5EF4-FFF2-40B4-BE49-F238E27FC236}">
+                <a16:creationId xmlns:a16="http://schemas.microsoft.com/office/drawing/2014/main" id="{EAA43D05-B5CF-45F6-BDC5-3B976BCD58C1}"/>
+              </a:ext>
+            </a:extLst>
+          </p:cNvPr>
+          <p:cNvSpPr>
+            <a:spLocks xmlns:a="http://schemas.openxmlformats.org/drawingml/2006/main" noGrp="1"/>
+          </p:cNvSpPr>
+          <p:nvPr/>
+        </p:nvSpPr>
+        <p:spPr>
+          <a:xfrm xmlns:a="http://schemas.openxmlformats.org/drawingml/2006/main">
+            <a:off x="4114800" y="4429125"/>
             <a:ext cx="9525" cy="9525"/>
           </a:xfrm>
           <a:prstGeom xmlns:a="http://schemas.openxmlformats.org/drawingml/2006/main" prst="rect">
@@ -3872,16 +4802,16 @@
       </p:sp>
       <p:cxnSp>
         <p:nvCxnSpPr>
-          <p:cNvPr id="225" name=""/>
+          <p:cNvPr id="271" name=""/>
           <p:cNvCxnSpPr>
-            <a:stCxn xmlns:a="http://schemas.openxmlformats.org/drawingml/2006/main" id="64" idx="3"/>
-            <a:endCxn xmlns:a="http://schemas.openxmlformats.org/drawingml/2006/main" id="65" idx="1"/>
+            <a:stCxn xmlns:a="http://schemas.openxmlformats.org/drawingml/2006/main" id="87" idx="3"/>
+            <a:endCxn xmlns:a="http://schemas.openxmlformats.org/drawingml/2006/main" id="88" idx="1"/>
           </p:cNvCxnSpPr>
           <p:nvPr/>
         </p:nvCxnSpPr>
         <p:spPr>
           <a:xfrm xmlns:a="http://schemas.openxmlformats.org/drawingml/2006/main">
-            <a:off x="2676525" y="4252913"/>
+            <a:off x="2676525" y="4433888"/>
             <a:ext cx="1438275" cy="0"/>
           </a:xfrm>
           <a:prstGeom xmlns:a="http://schemas.openxmlformats.org/drawingml/2006/main" prst="straightConnector1">
@@ -3898,21 +4828,21 @@
       </p:cxnSp>
       <p:sp>
         <p:nvSpPr>
-          <p:cNvPr id="67" name="glyph-rect-66">
-            <a:extLst xmlns:a="http://schemas.openxmlformats.org/drawingml/2006/main">
-              <a:ext uri="{FF2B5EF4-FFF2-40B4-BE49-F238E27FC236}">
-                <a16:creationId xmlns:a16="http://schemas.microsoft.com/office/drawing/2014/main" id="{9D432EE0-667F-4972-804D-1A535576F5E2}"/>
-              </a:ext>
-            </a:extLst>
-          </p:cNvPr>
-          <p:cNvSpPr>
-            <a:spLocks xmlns:a="http://schemas.openxmlformats.org/drawingml/2006/main" noGrp="1"/>
-          </p:cNvSpPr>
-          <p:nvPr/>
-        </p:nvSpPr>
-        <p:spPr>
-          <a:xfrm xmlns:a="http://schemas.openxmlformats.org/drawingml/2006/main">
-            <a:off x="4219575" y="4105275"/>
+          <p:cNvPr id="90" name="glyph-rect-89">
+            <a:extLst xmlns:a="http://schemas.openxmlformats.org/drawingml/2006/main">
+              <a:ext uri="{FF2B5EF4-FFF2-40B4-BE49-F238E27FC236}">
+                <a16:creationId xmlns:a16="http://schemas.microsoft.com/office/drawing/2014/main" id="{FB19316C-6560-4DE3-BAAF-EA43564A900A}"/>
+              </a:ext>
+            </a:extLst>
+          </p:cNvPr>
+          <p:cNvSpPr>
+            <a:spLocks xmlns:a="http://schemas.openxmlformats.org/drawingml/2006/main" noGrp="1"/>
+          </p:cNvSpPr>
+          <p:nvPr/>
+        </p:nvSpPr>
+        <p:spPr>
+          <a:xfrm xmlns:a="http://schemas.openxmlformats.org/drawingml/2006/main">
+            <a:off x="4219575" y="4286250"/>
             <a:ext cx="304800" cy="409575"/>
           </a:xfrm>
           <a:prstGeom xmlns:a="http://schemas.openxmlformats.org/drawingml/2006/main" prst="rect">
@@ -3930,21 +4860,21 @@
       </p:sp>
       <p:sp>
         <p:nvSpPr>
-          <p:cNvPr id="68" name="glyph-rect-67">
-            <a:extLst xmlns:a="http://schemas.openxmlformats.org/drawingml/2006/main">
-              <a:ext uri="{FF2B5EF4-FFF2-40B4-BE49-F238E27FC236}">
-                <a16:creationId xmlns:a16="http://schemas.microsoft.com/office/drawing/2014/main" id="{ED8651BB-E4AB-4182-8FE8-D9E58D6A07CB}"/>
-              </a:ext>
-            </a:extLst>
-          </p:cNvPr>
-          <p:cNvSpPr>
-            <a:spLocks xmlns:a="http://schemas.openxmlformats.org/drawingml/2006/main" noGrp="1"/>
-          </p:cNvSpPr>
-          <p:nvPr/>
-        </p:nvSpPr>
-        <p:spPr>
-          <a:xfrm xmlns:a="http://schemas.openxmlformats.org/drawingml/2006/main">
-            <a:off x="4181475" y="4067175"/>
+          <p:cNvPr id="91" name="glyph-rect-90">
+            <a:extLst xmlns:a="http://schemas.openxmlformats.org/drawingml/2006/main">
+              <a:ext uri="{FF2B5EF4-FFF2-40B4-BE49-F238E27FC236}">
+                <a16:creationId xmlns:a16="http://schemas.microsoft.com/office/drawing/2014/main" id="{B6950AF4-B201-4A3E-A512-DDDA8869DA96}"/>
+              </a:ext>
+            </a:extLst>
+          </p:cNvPr>
+          <p:cNvSpPr>
+            <a:spLocks xmlns:a="http://schemas.openxmlformats.org/drawingml/2006/main" noGrp="1"/>
+          </p:cNvSpPr>
+          <p:nvPr/>
+        </p:nvSpPr>
+        <p:spPr>
+          <a:xfrm xmlns:a="http://schemas.openxmlformats.org/drawingml/2006/main">
+            <a:off x="4181475" y="4248150"/>
             <a:ext cx="304800" cy="409575"/>
           </a:xfrm>
           <a:prstGeom xmlns:a="http://schemas.openxmlformats.org/drawingml/2006/main" prst="rect">
@@ -3962,21 +4892,21 @@
       </p:sp>
       <p:sp>
         <p:nvSpPr>
-          <p:cNvPr id="69" name="path-68">
-            <a:extLst xmlns:a="http://schemas.openxmlformats.org/drawingml/2006/main">
-              <a:ext uri="{FF2B5EF4-FFF2-40B4-BE49-F238E27FC236}">
-                <a16:creationId xmlns:a16="http://schemas.microsoft.com/office/drawing/2014/main" id="{9B75FEBA-D846-4520-B75E-1077329A3BA4}"/>
-              </a:ext>
-            </a:extLst>
-          </p:cNvPr>
-          <p:cNvSpPr>
-            <a:spLocks xmlns:a="http://schemas.openxmlformats.org/drawingml/2006/main" noGrp="1"/>
-          </p:cNvSpPr>
-          <p:nvPr/>
-        </p:nvSpPr>
-        <p:spPr>
-          <a:xfrm xmlns:a="http://schemas.openxmlformats.org/drawingml/2006/main">
-            <a:off x="4143375" y="4038600"/>
+          <p:cNvPr id="92" name="path-91">
+            <a:extLst xmlns:a="http://schemas.openxmlformats.org/drawingml/2006/main">
+              <a:ext uri="{FF2B5EF4-FFF2-40B4-BE49-F238E27FC236}">
+                <a16:creationId xmlns:a16="http://schemas.microsoft.com/office/drawing/2014/main" id="{D29689A3-8920-4381-8833-4A6E414392DD}"/>
+              </a:ext>
+            </a:extLst>
+          </p:cNvPr>
+          <p:cNvSpPr>
+            <a:spLocks xmlns:a="http://schemas.openxmlformats.org/drawingml/2006/main" noGrp="1"/>
+          </p:cNvSpPr>
+          <p:nvPr/>
+        </p:nvSpPr>
+        <p:spPr>
+          <a:xfrm xmlns:a="http://schemas.openxmlformats.org/drawingml/2006/main">
+            <a:off x="4143375" y="4219575"/>
             <a:ext cx="304800" cy="409575"/>
           </a:xfrm>
           <a:custGeom xmlns:a="http://schemas.openxmlformats.org/drawingml/2006/main">
@@ -4013,21 +4943,21 @@
       </p:sp>
       <p:sp>
         <p:nvSpPr>
-          <p:cNvPr id="70" name="line-69">
-            <a:extLst xmlns:a="http://schemas.openxmlformats.org/drawingml/2006/main">
-              <a:ext uri="{FF2B5EF4-FFF2-40B4-BE49-F238E27FC236}">
-                <a16:creationId xmlns:a16="http://schemas.microsoft.com/office/drawing/2014/main" id="{C142AD4A-19B0-4164-A12C-647DC0200B6B}"/>
-              </a:ext>
-            </a:extLst>
-          </p:cNvPr>
-          <p:cNvSpPr>
-            <a:spLocks xmlns:a="http://schemas.openxmlformats.org/drawingml/2006/main" noGrp="1"/>
-          </p:cNvSpPr>
-          <p:nvPr/>
-        </p:nvSpPr>
-        <p:spPr>
-          <a:xfrm xmlns:a="http://schemas.openxmlformats.org/drawingml/2006/main">
-            <a:off x="4324350" y="4038600"/>
+          <p:cNvPr id="93" name="line-92">
+            <a:extLst xmlns:a="http://schemas.openxmlformats.org/drawingml/2006/main">
+              <a:ext uri="{FF2B5EF4-FFF2-40B4-BE49-F238E27FC236}">
+                <a16:creationId xmlns:a16="http://schemas.microsoft.com/office/drawing/2014/main" id="{B5AA6B0B-D897-4278-AA37-A3A52A04EE3E}"/>
+              </a:ext>
+            </a:extLst>
+          </p:cNvPr>
+          <p:cNvSpPr>
+            <a:spLocks xmlns:a="http://schemas.openxmlformats.org/drawingml/2006/main" noGrp="1"/>
+          </p:cNvSpPr>
+          <p:nvPr/>
+        </p:nvSpPr>
+        <p:spPr>
+          <a:xfrm xmlns:a="http://schemas.openxmlformats.org/drawingml/2006/main">
+            <a:off x="4324350" y="4219575"/>
             <a:ext cx="0" cy="123825"/>
           </a:xfrm>
           <a:prstGeom xmlns:a="http://schemas.openxmlformats.org/drawingml/2006/main" prst="line">
@@ -4044,21 +4974,21 @@
       </p:sp>
       <p:sp>
         <p:nvSpPr>
-          <p:cNvPr id="71" name="line-70">
-            <a:extLst xmlns:a="http://schemas.openxmlformats.org/drawingml/2006/main">
-              <a:ext uri="{FF2B5EF4-FFF2-40B4-BE49-F238E27FC236}">
-                <a16:creationId xmlns:a16="http://schemas.microsoft.com/office/drawing/2014/main" id="{36E0EAD4-034E-4227-BD9E-390EB471E596}"/>
-              </a:ext>
-            </a:extLst>
-          </p:cNvPr>
-          <p:cNvSpPr>
-            <a:spLocks xmlns:a="http://schemas.openxmlformats.org/drawingml/2006/main" noGrp="1"/>
-          </p:cNvSpPr>
-          <p:nvPr/>
-        </p:nvSpPr>
-        <p:spPr>
-          <a:xfrm xmlns:a="http://schemas.openxmlformats.org/drawingml/2006/main">
-            <a:off x="4324350" y="4162425"/>
+          <p:cNvPr id="94" name="line-93">
+            <a:extLst xmlns:a="http://schemas.openxmlformats.org/drawingml/2006/main">
+              <a:ext uri="{FF2B5EF4-FFF2-40B4-BE49-F238E27FC236}">
+                <a16:creationId xmlns:a16="http://schemas.microsoft.com/office/drawing/2014/main" id="{F2A9C41B-44AC-4240-A06B-3D9F170F89D0}"/>
+              </a:ext>
+            </a:extLst>
+          </p:cNvPr>
+          <p:cNvSpPr>
+            <a:spLocks xmlns:a="http://schemas.openxmlformats.org/drawingml/2006/main" noGrp="1"/>
+          </p:cNvSpPr>
+          <p:nvPr/>
+        </p:nvSpPr>
+        <p:spPr>
+          <a:xfrm xmlns:a="http://schemas.openxmlformats.org/drawingml/2006/main">
+            <a:off x="4324350" y="4343400"/>
             <a:ext cx="123825" cy="0"/>
           </a:xfrm>
           <a:prstGeom xmlns:a="http://schemas.openxmlformats.org/drawingml/2006/main" prst="line">
@@ -4075,21 +5005,21 @@
       </p:sp>
       <p:sp>
         <p:nvSpPr>
-          <p:cNvPr id="72" name="line-71">
-            <a:extLst xmlns:a="http://schemas.openxmlformats.org/drawingml/2006/main">
-              <a:ext uri="{FF2B5EF4-FFF2-40B4-BE49-F238E27FC236}">
-                <a16:creationId xmlns:a16="http://schemas.microsoft.com/office/drawing/2014/main" id="{E6C278BA-C601-4034-AFE5-73ECA87D7497}"/>
-              </a:ext>
-            </a:extLst>
-          </p:cNvPr>
-          <p:cNvSpPr>
-            <a:spLocks xmlns:a="http://schemas.openxmlformats.org/drawingml/2006/main" noGrp="1"/>
-          </p:cNvSpPr>
-          <p:nvPr/>
-        </p:nvSpPr>
-        <p:spPr>
-          <a:xfrm xmlns:a="http://schemas.openxmlformats.org/drawingml/2006/main">
-            <a:off x="4238625" y="4248150"/>
+          <p:cNvPr id="95" name="line-94">
+            <a:extLst xmlns:a="http://schemas.openxmlformats.org/drawingml/2006/main">
+              <a:ext uri="{FF2B5EF4-FFF2-40B4-BE49-F238E27FC236}">
+                <a16:creationId xmlns:a16="http://schemas.microsoft.com/office/drawing/2014/main" id="{E90778BF-FDCE-4E5C-8AD7-100008FAD440}"/>
+              </a:ext>
+            </a:extLst>
+          </p:cNvPr>
+          <p:cNvSpPr>
+            <a:spLocks xmlns:a="http://schemas.openxmlformats.org/drawingml/2006/main" noGrp="1"/>
+          </p:cNvSpPr>
+          <p:nvPr/>
+        </p:nvSpPr>
+        <p:spPr>
+          <a:xfrm xmlns:a="http://schemas.openxmlformats.org/drawingml/2006/main">
+            <a:off x="4238625" y="4429125"/>
             <a:ext cx="114300" cy="0"/>
           </a:xfrm>
           <a:prstGeom xmlns:a="http://schemas.openxmlformats.org/drawingml/2006/main" prst="line">
@@ -4106,21 +5036,21 @@
       </p:sp>
       <p:sp>
         <p:nvSpPr>
-          <p:cNvPr id="73" name="line-72">
-            <a:extLst xmlns:a="http://schemas.openxmlformats.org/drawingml/2006/main">
-              <a:ext uri="{FF2B5EF4-FFF2-40B4-BE49-F238E27FC236}">
-                <a16:creationId xmlns:a16="http://schemas.microsoft.com/office/drawing/2014/main" id="{5032B506-4D3D-4B6A-BEBD-FC997C50E605}"/>
-              </a:ext>
-            </a:extLst>
-          </p:cNvPr>
-          <p:cNvSpPr>
-            <a:spLocks xmlns:a="http://schemas.openxmlformats.org/drawingml/2006/main" noGrp="1"/>
-          </p:cNvSpPr>
-          <p:nvPr/>
-        </p:nvSpPr>
-        <p:spPr>
-          <a:xfrm xmlns:a="http://schemas.openxmlformats.org/drawingml/2006/main">
-            <a:off x="4238625" y="4362450"/>
+          <p:cNvPr id="96" name="line-95">
+            <a:extLst xmlns:a="http://schemas.openxmlformats.org/drawingml/2006/main">
+              <a:ext uri="{FF2B5EF4-FFF2-40B4-BE49-F238E27FC236}">
+                <a16:creationId xmlns:a16="http://schemas.microsoft.com/office/drawing/2014/main" id="{D63E0324-B4DB-4036-B03B-E7BB7C4BB6F3}"/>
+              </a:ext>
+            </a:extLst>
+          </p:cNvPr>
+          <p:cNvSpPr>
+            <a:spLocks xmlns:a="http://schemas.openxmlformats.org/drawingml/2006/main" noGrp="1"/>
+          </p:cNvSpPr>
+          <p:nvPr/>
+        </p:nvSpPr>
+        <p:spPr>
+          <a:xfrm xmlns:a="http://schemas.openxmlformats.org/drawingml/2006/main">
+            <a:off x="4238625" y="4543425"/>
             <a:ext cx="114300" cy="0"/>
           </a:xfrm>
           <a:prstGeom xmlns:a="http://schemas.openxmlformats.org/drawingml/2006/main" prst="line">
@@ -4137,21 +5067,21 @@
       </p:sp>
       <p:sp>
         <p:nvSpPr>
-          <p:cNvPr id="74" name="line-73">
-            <a:extLst xmlns:a="http://schemas.openxmlformats.org/drawingml/2006/main">
-              <a:ext uri="{FF2B5EF4-FFF2-40B4-BE49-F238E27FC236}">
-                <a16:creationId xmlns:a16="http://schemas.microsoft.com/office/drawing/2014/main" id="{6D54AD2B-924D-44C4-8B99-4E62050E0233}"/>
-              </a:ext>
-            </a:extLst>
-          </p:cNvPr>
-          <p:cNvSpPr>
-            <a:spLocks xmlns:a="http://schemas.openxmlformats.org/drawingml/2006/main" noGrp="1"/>
-          </p:cNvSpPr>
-          <p:nvPr/>
-        </p:nvSpPr>
-        <p:spPr>
-          <a:xfrm xmlns:a="http://schemas.openxmlformats.org/drawingml/2006/main">
-            <a:off x="4238625" y="4476750"/>
+          <p:cNvPr id="97" name="line-96">
+            <a:extLst xmlns:a="http://schemas.openxmlformats.org/drawingml/2006/main">
+              <a:ext uri="{FF2B5EF4-FFF2-40B4-BE49-F238E27FC236}">
+                <a16:creationId xmlns:a16="http://schemas.microsoft.com/office/drawing/2014/main" id="{509B3864-6097-41BF-989B-03684A6BE644}"/>
+              </a:ext>
+            </a:extLst>
+          </p:cNvPr>
+          <p:cNvSpPr>
+            <a:spLocks xmlns:a="http://schemas.openxmlformats.org/drawingml/2006/main" noGrp="1"/>
+          </p:cNvSpPr>
+          <p:nvPr/>
+        </p:nvSpPr>
+        <p:spPr>
+          <a:xfrm xmlns:a="http://schemas.openxmlformats.org/drawingml/2006/main">
+            <a:off x="4238625" y="4657725"/>
             <a:ext cx="114300" cy="0"/>
           </a:xfrm>
           <a:prstGeom xmlns:a="http://schemas.openxmlformats.org/drawingml/2006/main" prst="line">
@@ -4168,22 +5098,22 @@
       </p:sp>
       <p:sp>
         <p:nvSpPr>
-          <p:cNvPr id="75" name="text-74">
-            <a:extLst xmlns:a="http://schemas.openxmlformats.org/drawingml/2006/main">
-              <a:ext uri="{FF2B5EF4-FFF2-40B4-BE49-F238E27FC236}">
-                <a16:creationId xmlns:a16="http://schemas.microsoft.com/office/drawing/2014/main" id="{C312B864-DFFB-484A-B65F-FC36F4302C45}"/>
-              </a:ext>
-            </a:extLst>
-          </p:cNvPr>
-          <p:cNvSpPr>
-            <a:spLocks xmlns:a="http://schemas.openxmlformats.org/drawingml/2006/main" noGrp="1"/>
-          </p:cNvSpPr>
-          <p:nvPr/>
-        </p:nvSpPr>
-        <p:spPr>
-          <a:xfrm xmlns:a="http://schemas.openxmlformats.org/drawingml/2006/main">
-            <a:off x="3505200" y="4524375"/>
-            <a:ext cx="2238375" cy="266700"/>
+          <p:cNvPr id="98" name="text-97">
+            <a:extLst xmlns:a="http://schemas.openxmlformats.org/drawingml/2006/main">
+              <a:ext uri="{FF2B5EF4-FFF2-40B4-BE49-F238E27FC236}">
+                <a16:creationId xmlns:a16="http://schemas.microsoft.com/office/drawing/2014/main" id="{0F2E7FD2-0EAC-4BED-832C-DF20AE139372}"/>
+              </a:ext>
+            </a:extLst>
+          </p:cNvPr>
+          <p:cNvSpPr>
+            <a:spLocks xmlns:a="http://schemas.openxmlformats.org/drawingml/2006/main" noGrp="1"/>
+          </p:cNvSpPr>
+          <p:nvPr/>
+        </p:nvSpPr>
+        <p:spPr>
+          <a:xfrm xmlns:a="http://schemas.openxmlformats.org/drawingml/2006/main">
+            <a:off x="3467100" y="4657725"/>
+            <a:ext cx="2266950" cy="266700"/>
           </a:xfrm>
           <a:prstGeom xmlns:a="http://schemas.openxmlformats.org/drawingml/2006/main" prst="rect">
             <a:avLst/>
@@ -4218,28 +5148,28 @@
                 <a:ea typeface="Hiragino Sans GB"/>
                 <a:cs typeface="Hiragino Sans GB"/>
               </a:rPr>
-              <a:t>记录后台任务状态</a:t>
+              <a:t>按runId等待结果</a:t>
             </a:r>
           </a:p>
         </p:txBody>
       </p:sp>
       <p:sp>
         <p:nvSpPr>
-          <p:cNvPr id="76" name="text-75">
-            <a:extLst xmlns:a="http://schemas.openxmlformats.org/drawingml/2006/main">
-              <a:ext uri="{FF2B5EF4-FFF2-40B4-BE49-F238E27FC236}">
-                <a16:creationId xmlns:a16="http://schemas.microsoft.com/office/drawing/2014/main" id="{7CBB2335-9B4D-43E1-BE75-6ACE55E64645}"/>
-              </a:ext>
-            </a:extLst>
-          </p:cNvPr>
-          <p:cNvSpPr>
-            <a:spLocks xmlns:a="http://schemas.openxmlformats.org/drawingml/2006/main" noGrp="1"/>
-          </p:cNvSpPr>
-          <p:nvPr/>
-        </p:nvSpPr>
-        <p:spPr>
-          <a:xfrm xmlns:a="http://schemas.openxmlformats.org/drawingml/2006/main">
-            <a:off x="3543300" y="4800600"/>
+          <p:cNvPr id="99" name="text-98">
+            <a:extLst xmlns:a="http://schemas.openxmlformats.org/drawingml/2006/main">
+              <a:ext uri="{FF2B5EF4-FFF2-40B4-BE49-F238E27FC236}">
+                <a16:creationId xmlns:a16="http://schemas.microsoft.com/office/drawing/2014/main" id="{AFD036BB-850D-4845-A6E8-8BEBA12F057E}"/>
+              </a:ext>
+            </a:extLst>
+          </p:cNvPr>
+          <p:cNvSpPr>
+            <a:spLocks xmlns:a="http://schemas.openxmlformats.org/drawingml/2006/main" noGrp="1"/>
+          </p:cNvSpPr>
+          <p:nvPr/>
+        </p:nvSpPr>
+        <p:spPr>
+          <a:xfrm xmlns:a="http://schemas.openxmlformats.org/drawingml/2006/main">
+            <a:off x="3543300" y="4933950"/>
             <a:ext cx="2133600" cy="219075"/>
           </a:xfrm>
           <a:prstGeom xmlns:a="http://schemas.openxmlformats.org/drawingml/2006/main" prst="rect">
@@ -4275,29 +5205,29 @@
                 <a:ea typeface="Hiragino Sans GB"/>
                 <a:cs typeface="Hiragino Sans GB"/>
               </a:rPr>
-              <a:t>runId + 等待截止时间</a:t>
+              <a:t>挂起时设置截止时间</a:t>
             </a:r>
           </a:p>
         </p:txBody>
       </p:sp>
       <p:sp>
         <p:nvSpPr>
-          <p:cNvPr id="77" name="text-76">
-            <a:extLst xmlns:a="http://schemas.openxmlformats.org/drawingml/2006/main">
-              <a:ext uri="{FF2B5EF4-FFF2-40B4-BE49-F238E27FC236}">
-                <a16:creationId xmlns:a16="http://schemas.microsoft.com/office/drawing/2014/main" id="{D2087274-CDAB-40AA-83A0-D6AF6E4283D5}"/>
-              </a:ext>
-            </a:extLst>
-          </p:cNvPr>
-          <p:cNvSpPr>
-            <a:spLocks xmlns:a="http://schemas.openxmlformats.org/drawingml/2006/main" noGrp="1"/>
-          </p:cNvSpPr>
-          <p:nvPr/>
-        </p:nvSpPr>
-        <p:spPr>
-          <a:xfrm xmlns:a="http://schemas.openxmlformats.org/drawingml/2006/main">
-            <a:off x="4772025" y="3971925"/>
-            <a:ext cx="2257425" cy="247650"/>
+          <p:cNvPr id="100" name="text-99">
+            <a:extLst xmlns:a="http://schemas.openxmlformats.org/drawingml/2006/main">
+              <a:ext uri="{FF2B5EF4-FFF2-40B4-BE49-F238E27FC236}">
+                <a16:creationId xmlns:a16="http://schemas.microsoft.com/office/drawing/2014/main" id="{EE1BDEC8-A555-486F-B1B0-8F3F10A20298}"/>
+              </a:ext>
+            </a:extLst>
+          </p:cNvPr>
+          <p:cNvSpPr>
+            <a:spLocks xmlns:a="http://schemas.openxmlformats.org/drawingml/2006/main" noGrp="1"/>
+          </p:cNvSpPr>
+          <p:nvPr/>
+        </p:nvSpPr>
+        <p:spPr>
+          <a:xfrm xmlns:a="http://schemas.openxmlformats.org/drawingml/2006/main">
+            <a:off x="4772025" y="4210050"/>
+            <a:ext cx="2343150" cy="247650"/>
           </a:xfrm>
           <a:prstGeom xmlns:a="http://schemas.openxmlformats.org/drawingml/2006/main" prst="rect">
             <a:avLst/>
@@ -4332,28 +5262,28 @@
                 <a:ea typeface="Hiragino Sans GB"/>
                 <a:cs typeface="Hiragino Sans GB"/>
               </a:rPr>
-              <a:t>结束本次HTTP连接</a:t>
+              <a:t>异步标记触发HTTP结束</a:t>
             </a:r>
           </a:p>
         </p:txBody>
       </p:sp>
       <p:sp>
         <p:nvSpPr>
-          <p:cNvPr id="78" name="glyph-cloud-77">
-            <a:extLst xmlns:a="http://schemas.openxmlformats.org/drawingml/2006/main">
-              <a:ext uri="{FF2B5EF4-FFF2-40B4-BE49-F238E27FC236}">
-                <a16:creationId xmlns:a16="http://schemas.microsoft.com/office/drawing/2014/main" id="{E8361C78-B80F-4E40-A48A-9F0CF528908B}"/>
-              </a:ext>
-            </a:extLst>
-          </p:cNvPr>
-          <p:cNvSpPr>
-            <a:spLocks xmlns:a="http://schemas.openxmlformats.org/drawingml/2006/main" noGrp="1"/>
-          </p:cNvSpPr>
-          <p:nvPr/>
-        </p:nvSpPr>
-        <p:spPr>
-          <a:xfrm xmlns:a="http://schemas.openxmlformats.org/drawingml/2006/main">
-            <a:off x="7162800" y="3981450"/>
+          <p:cNvPr id="101" name="glyph-cloud-100">
+            <a:extLst xmlns:a="http://schemas.openxmlformats.org/drawingml/2006/main">
+              <a:ext uri="{FF2B5EF4-FFF2-40B4-BE49-F238E27FC236}">
+                <a16:creationId xmlns:a16="http://schemas.microsoft.com/office/drawing/2014/main" id="{A35B4BDD-AB61-4B69-AD4B-457EB054AB22}"/>
+              </a:ext>
+            </a:extLst>
+          </p:cNvPr>
+          <p:cNvSpPr>
+            <a:spLocks xmlns:a="http://schemas.openxmlformats.org/drawingml/2006/main" noGrp="1"/>
+          </p:cNvSpPr>
+          <p:nvPr/>
+        </p:nvSpPr>
+        <p:spPr>
+          <a:xfrm xmlns:a="http://schemas.openxmlformats.org/drawingml/2006/main">
+            <a:off x="7162800" y="4210050"/>
             <a:ext cx="1076325" cy="590550"/>
           </a:xfrm>
           <a:prstGeom xmlns:a="http://schemas.openxmlformats.org/drawingml/2006/main" prst="cloud">
@@ -4371,21 +5301,21 @@
       </p:sp>
       <p:sp>
         <p:nvSpPr>
-          <p:cNvPr id="79" name="text-78">
-            <a:extLst xmlns:a="http://schemas.openxmlformats.org/drawingml/2006/main">
-              <a:ext uri="{FF2B5EF4-FFF2-40B4-BE49-F238E27FC236}">
-                <a16:creationId xmlns:a16="http://schemas.microsoft.com/office/drawing/2014/main" id="{7276FBB1-8FDA-4B40-9824-6AC4A092CF05}"/>
-              </a:ext>
-            </a:extLst>
-          </p:cNvPr>
-          <p:cNvSpPr>
-            <a:spLocks xmlns:a="http://schemas.openxmlformats.org/drawingml/2006/main" noGrp="1"/>
-          </p:cNvSpPr>
-          <p:nvPr/>
-        </p:nvSpPr>
-        <p:spPr>
-          <a:xfrm xmlns:a="http://schemas.openxmlformats.org/drawingml/2006/main">
-            <a:off x="7372350" y="4143375"/>
+          <p:cNvPr id="102" name="text-101">
+            <a:extLst xmlns:a="http://schemas.openxmlformats.org/drawingml/2006/main">
+              <a:ext uri="{FF2B5EF4-FFF2-40B4-BE49-F238E27FC236}">
+                <a16:creationId xmlns:a16="http://schemas.microsoft.com/office/drawing/2014/main" id="{81F12133-89D7-4E21-83C2-30A463E47A3E}"/>
+              </a:ext>
+            </a:extLst>
+          </p:cNvPr>
+          <p:cNvSpPr>
+            <a:spLocks xmlns:a="http://schemas.openxmlformats.org/drawingml/2006/main" noGrp="1"/>
+          </p:cNvSpPr>
+          <p:nvPr/>
+        </p:nvSpPr>
+        <p:spPr>
+          <a:xfrm xmlns:a="http://schemas.openxmlformats.org/drawingml/2006/main">
+            <a:off x="7372350" y="4371975"/>
             <a:ext cx="714375" cy="238125"/>
           </a:xfrm>
           <a:prstGeom xmlns:a="http://schemas.openxmlformats.org/drawingml/2006/main" prst="rect">
@@ -4428,21 +5358,21 @@
       </p:sp>
       <p:sp>
         <p:nvSpPr>
-          <p:cNvPr id="80" name="text-79">
-            <a:extLst xmlns:a="http://schemas.openxmlformats.org/drawingml/2006/main">
-              <a:ext uri="{FF2B5EF4-FFF2-40B4-BE49-F238E27FC236}">
-                <a16:creationId xmlns:a16="http://schemas.microsoft.com/office/drawing/2014/main" id="{44C8E26F-51F1-424A-832D-3637C18EFC71}"/>
-              </a:ext>
-            </a:extLst>
-          </p:cNvPr>
-          <p:cNvSpPr>
-            <a:spLocks xmlns:a="http://schemas.openxmlformats.org/drawingml/2006/main" noGrp="1"/>
-          </p:cNvSpPr>
-          <p:nvPr/>
-        </p:nvSpPr>
-        <p:spPr>
-          <a:xfrm xmlns:a="http://schemas.openxmlformats.org/drawingml/2006/main">
-            <a:off x="6858000" y="4572000"/>
+          <p:cNvPr id="103" name="text-102">
+            <a:extLst xmlns:a="http://schemas.openxmlformats.org/drawingml/2006/main">
+              <a:ext uri="{FF2B5EF4-FFF2-40B4-BE49-F238E27FC236}">
+                <a16:creationId xmlns:a16="http://schemas.microsoft.com/office/drawing/2014/main" id="{512966F4-6B6E-4753-868F-67AE39504D45}"/>
+              </a:ext>
+            </a:extLst>
+          </p:cNvPr>
+          <p:cNvSpPr>
+            <a:spLocks xmlns:a="http://schemas.openxmlformats.org/drawingml/2006/main" noGrp="1"/>
+          </p:cNvSpPr>
+          <p:nvPr/>
+        </p:nvSpPr>
+        <p:spPr>
+          <a:xfrm xmlns:a="http://schemas.openxmlformats.org/drawingml/2006/main">
+            <a:off x="6858000" y="4800600"/>
             <a:ext cx="1685925" cy="257175"/>
           </a:xfrm>
           <a:prstGeom xmlns:a="http://schemas.openxmlformats.org/drawingml/2006/main" prst="rect">
@@ -4485,21 +5415,21 @@
       </p:sp>
       <p:sp>
         <p:nvSpPr>
-          <p:cNvPr id="81" name="text-80">
-            <a:extLst xmlns:a="http://schemas.openxmlformats.org/drawingml/2006/main">
-              <a:ext uri="{FF2B5EF4-FFF2-40B4-BE49-F238E27FC236}">
-                <a16:creationId xmlns:a16="http://schemas.microsoft.com/office/drawing/2014/main" id="{3C57E81F-C76E-4BD6-ACC9-6EB10A07B4F7}"/>
-              </a:ext>
-            </a:extLst>
-          </p:cNvPr>
-          <p:cNvSpPr>
-            <a:spLocks xmlns:a="http://schemas.openxmlformats.org/drawingml/2006/main" noGrp="1"/>
-          </p:cNvSpPr>
-          <p:nvPr/>
-        </p:nvSpPr>
-        <p:spPr>
-          <a:xfrm xmlns:a="http://schemas.openxmlformats.org/drawingml/2006/main">
-            <a:off x="8410575" y="4114800"/>
+          <p:cNvPr id="104" name="text-103">
+            <a:extLst xmlns:a="http://schemas.openxmlformats.org/drawingml/2006/main">
+              <a:ext uri="{FF2B5EF4-FFF2-40B4-BE49-F238E27FC236}">
+                <a16:creationId xmlns:a16="http://schemas.microsoft.com/office/drawing/2014/main" id="{1E9B03F7-CAE2-4A4C-8518-80F3C965BAA7}"/>
+              </a:ext>
+            </a:extLst>
+          </p:cNvPr>
+          <p:cNvSpPr>
+            <a:spLocks xmlns:a="http://schemas.openxmlformats.org/drawingml/2006/main" noGrp="1"/>
+          </p:cNvSpPr>
+          <p:nvPr/>
+        </p:nvSpPr>
+        <p:spPr>
+          <a:xfrm xmlns:a="http://schemas.openxmlformats.org/drawingml/2006/main">
+            <a:off x="8410575" y="4305300"/>
             <a:ext cx="1638300" cy="552450"/>
           </a:xfrm>
           <a:prstGeom xmlns:a="http://schemas.openxmlformats.org/drawingml/2006/main" prst="rect">
@@ -4535,7 +5465,7 @@
                 <a:ea typeface="Hiragino Sans GB"/>
                 <a:cs typeface="Hiragino Sans GB"/>
               </a:rPr>
-              <a:t>结果等待设时限</a:t>
+              <a:t>后台任务数设上限</a:t>
             </a:r>
           </a:p>
           <a:p xmlns:a="http://schemas.openxmlformats.org/drawingml/2006/main">
@@ -4558,28 +5488,28 @@
                 <a:ea typeface="Hiragino Sans GB"/>
                 <a:cs typeface="Hiragino Sans GB"/>
               </a:rPr>
-              <a:t>限制未完成任务数</a:t>
+              <a:t>结果等待设时限</a:t>
             </a:r>
           </a:p>
         </p:txBody>
       </p:sp>
       <p:sp>
         <p:nvSpPr>
-          <p:cNvPr id="82" name="shape-81">
-            <a:extLst xmlns:a="http://schemas.openxmlformats.org/drawingml/2006/main">
-              <a:ext uri="{FF2B5EF4-FFF2-40B4-BE49-F238E27FC236}">
-                <a16:creationId xmlns:a16="http://schemas.microsoft.com/office/drawing/2014/main" id="{B500BF4F-E997-4F81-8DD2-9005EFDE6688}"/>
-              </a:ext>
-            </a:extLst>
-          </p:cNvPr>
-          <p:cNvSpPr>
-            <a:spLocks xmlns:a="http://schemas.openxmlformats.org/drawingml/2006/main" noGrp="1"/>
-          </p:cNvSpPr>
-          <p:nvPr/>
-        </p:nvSpPr>
-        <p:spPr>
-          <a:xfrm xmlns:a="http://schemas.openxmlformats.org/drawingml/2006/main">
-            <a:off x="7696200" y="4857750"/>
+          <p:cNvPr id="105" name="shape-104">
+            <a:extLst xmlns:a="http://schemas.openxmlformats.org/drawingml/2006/main">
+              <a:ext uri="{FF2B5EF4-FFF2-40B4-BE49-F238E27FC236}">
+                <a16:creationId xmlns:a16="http://schemas.microsoft.com/office/drawing/2014/main" id="{D7BB5A64-70D7-4194-812A-406CFF55ADF7}"/>
+              </a:ext>
+            </a:extLst>
+          </p:cNvPr>
+          <p:cNvSpPr>
+            <a:spLocks xmlns:a="http://schemas.openxmlformats.org/drawingml/2006/main" noGrp="1"/>
+          </p:cNvSpPr>
+          <p:nvPr/>
+        </p:nvSpPr>
+        <p:spPr>
+          <a:xfrm xmlns:a="http://schemas.openxmlformats.org/drawingml/2006/main">
+            <a:off x="7696200" y="5067300"/>
             <a:ext cx="9525" cy="9525"/>
           </a:xfrm>
           <a:prstGeom xmlns:a="http://schemas.openxmlformats.org/drawingml/2006/main" prst="rect">
@@ -4593,21 +5523,21 @@
       </p:sp>
       <p:sp>
         <p:nvSpPr>
-          <p:cNvPr id="83" name="shape-82">
-            <a:extLst xmlns:a="http://schemas.openxmlformats.org/drawingml/2006/main">
-              <a:ext uri="{FF2B5EF4-FFF2-40B4-BE49-F238E27FC236}">
-                <a16:creationId xmlns:a16="http://schemas.microsoft.com/office/drawing/2014/main" id="{4815ACD4-7C7E-4651-BD11-2A06270EC981}"/>
-              </a:ext>
-            </a:extLst>
-          </p:cNvPr>
-          <p:cNvSpPr>
-            <a:spLocks xmlns:a="http://schemas.openxmlformats.org/drawingml/2006/main" noGrp="1"/>
-          </p:cNvSpPr>
-          <p:nvPr/>
-        </p:nvSpPr>
-        <p:spPr>
-          <a:xfrm xmlns:a="http://schemas.openxmlformats.org/drawingml/2006/main">
-            <a:off x="7696200" y="5133975"/>
+          <p:cNvPr id="106" name="shape-105">
+            <a:extLst xmlns:a="http://schemas.openxmlformats.org/drawingml/2006/main">
+              <a:ext uri="{FF2B5EF4-FFF2-40B4-BE49-F238E27FC236}">
+                <a16:creationId xmlns:a16="http://schemas.microsoft.com/office/drawing/2014/main" id="{9AC60363-8C98-484C-8AF3-4E1E9494C19A}"/>
+              </a:ext>
+            </a:extLst>
+          </p:cNvPr>
+          <p:cNvSpPr>
+            <a:spLocks xmlns:a="http://schemas.openxmlformats.org/drawingml/2006/main" noGrp="1"/>
+          </p:cNvSpPr>
+          <p:nvPr/>
+        </p:nvSpPr>
+        <p:spPr>
+          <a:xfrm xmlns:a="http://schemas.openxmlformats.org/drawingml/2006/main">
+            <a:off x="7696200" y="5305425"/>
             <a:ext cx="9525" cy="9525"/>
           </a:xfrm>
           <a:prstGeom xmlns:a="http://schemas.openxmlformats.org/drawingml/2006/main" prst="rect">
@@ -4621,17 +5551,17 @@
       </p:sp>
       <p:cxnSp>
         <p:nvCxnSpPr>
-          <p:cNvPr id="243" name=""/>
+          <p:cNvPr id="289" name=""/>
           <p:cNvCxnSpPr>
-            <a:stCxn xmlns:a="http://schemas.openxmlformats.org/drawingml/2006/main" id="82" idx="2"/>
-            <a:endCxn xmlns:a="http://schemas.openxmlformats.org/drawingml/2006/main" id="83" idx="0"/>
+            <a:stCxn xmlns:a="http://schemas.openxmlformats.org/drawingml/2006/main" id="105" idx="2"/>
+            <a:endCxn xmlns:a="http://schemas.openxmlformats.org/drawingml/2006/main" id="106" idx="0"/>
           </p:cNvCxnSpPr>
           <p:nvPr/>
         </p:nvCxnSpPr>
         <p:spPr>
           <a:xfrm xmlns:a="http://schemas.openxmlformats.org/drawingml/2006/main">
-            <a:off x="7700963" y="4867275"/>
-            <a:ext cx="0" cy="266700"/>
+            <a:off x="7700963" y="5076825"/>
+            <a:ext cx="0" cy="228600"/>
           </a:xfrm>
           <a:prstGeom xmlns:a="http://schemas.openxmlformats.org/drawingml/2006/main" prst="straightConnector1">
             <a:avLst/>
@@ -4647,21 +5577,21 @@
       </p:cxnSp>
       <p:sp>
         <p:nvSpPr>
-          <p:cNvPr id="85" name="shape-84">
-            <a:extLst xmlns:a="http://schemas.openxmlformats.org/drawingml/2006/main">
-              <a:ext uri="{FF2B5EF4-FFF2-40B4-BE49-F238E27FC236}">
-                <a16:creationId xmlns:a16="http://schemas.microsoft.com/office/drawing/2014/main" id="{EBDC965A-81B2-4851-A7E5-6AF474CBAB4B}"/>
-              </a:ext>
-            </a:extLst>
-          </p:cNvPr>
-          <p:cNvSpPr>
-            <a:spLocks xmlns:a="http://schemas.openxmlformats.org/drawingml/2006/main" noGrp="1"/>
-          </p:cNvSpPr>
-          <p:nvPr/>
-        </p:nvSpPr>
-        <p:spPr>
-          <a:xfrm xmlns:a="http://schemas.openxmlformats.org/drawingml/2006/main">
-            <a:off x="7696200" y="5133975"/>
+          <p:cNvPr id="108" name="shape-107">
+            <a:extLst xmlns:a="http://schemas.openxmlformats.org/drawingml/2006/main">
+              <a:ext uri="{FF2B5EF4-FFF2-40B4-BE49-F238E27FC236}">
+                <a16:creationId xmlns:a16="http://schemas.microsoft.com/office/drawing/2014/main" id="{595A0D4A-DCA2-43D3-8D63-A6EE4BFA4F34}"/>
+              </a:ext>
+            </a:extLst>
+          </p:cNvPr>
+          <p:cNvSpPr>
+            <a:spLocks xmlns:a="http://schemas.openxmlformats.org/drawingml/2006/main" noGrp="1"/>
+          </p:cNvSpPr>
+          <p:nvPr/>
+        </p:nvSpPr>
+        <p:spPr>
+          <a:xfrm xmlns:a="http://schemas.openxmlformats.org/drawingml/2006/main">
+            <a:off x="7696200" y="5305425"/>
             <a:ext cx="9525" cy="9525"/>
           </a:xfrm>
           <a:prstGeom xmlns:a="http://schemas.openxmlformats.org/drawingml/2006/main" prst="rect">
@@ -4675,21 +5605,21 @@
       </p:sp>
       <p:sp>
         <p:nvSpPr>
-          <p:cNvPr id="86" name="shape-85">
-            <a:extLst xmlns:a="http://schemas.openxmlformats.org/drawingml/2006/main">
-              <a:ext uri="{FF2B5EF4-FFF2-40B4-BE49-F238E27FC236}">
-                <a16:creationId xmlns:a16="http://schemas.microsoft.com/office/drawing/2014/main" id="{5F2699B5-8C04-4FF2-9015-A96C3D1678EB}"/>
-              </a:ext>
-            </a:extLst>
-          </p:cNvPr>
-          <p:cNvSpPr>
-            <a:spLocks xmlns:a="http://schemas.openxmlformats.org/drawingml/2006/main" noGrp="1"/>
-          </p:cNvSpPr>
-          <p:nvPr/>
-        </p:nvSpPr>
-        <p:spPr>
-          <a:xfrm xmlns:a="http://schemas.openxmlformats.org/drawingml/2006/main">
-            <a:off x="3333750" y="5133975"/>
+          <p:cNvPr id="109" name="shape-108">
+            <a:extLst xmlns:a="http://schemas.openxmlformats.org/drawingml/2006/main">
+              <a:ext uri="{FF2B5EF4-FFF2-40B4-BE49-F238E27FC236}">
+                <a16:creationId xmlns:a16="http://schemas.microsoft.com/office/drawing/2014/main" id="{ECA8C678-ED6F-4383-AADC-9982CEA55926}"/>
+              </a:ext>
+            </a:extLst>
+          </p:cNvPr>
+          <p:cNvSpPr>
+            <a:spLocks xmlns:a="http://schemas.openxmlformats.org/drawingml/2006/main" noGrp="1"/>
+          </p:cNvSpPr>
+          <p:nvPr/>
+        </p:nvSpPr>
+        <p:spPr>
+          <a:xfrm xmlns:a="http://schemas.openxmlformats.org/drawingml/2006/main">
+            <a:off x="3333750" y="5305425"/>
             <a:ext cx="9525" cy="9525"/>
           </a:xfrm>
           <a:prstGeom xmlns:a="http://schemas.openxmlformats.org/drawingml/2006/main" prst="rect">
@@ -4703,16 +5633,16 @@
       </p:sp>
       <p:cxnSp>
         <p:nvCxnSpPr>
-          <p:cNvPr id="246" name=""/>
+          <p:cNvPr id="292" name=""/>
           <p:cNvCxnSpPr>
-            <a:stCxn xmlns:a="http://schemas.openxmlformats.org/drawingml/2006/main" id="85" idx="1"/>
-            <a:endCxn xmlns:a="http://schemas.openxmlformats.org/drawingml/2006/main" id="86" idx="3"/>
+            <a:stCxn xmlns:a="http://schemas.openxmlformats.org/drawingml/2006/main" id="108" idx="1"/>
+            <a:endCxn xmlns:a="http://schemas.openxmlformats.org/drawingml/2006/main" id="109" idx="3"/>
           </p:cNvCxnSpPr>
           <p:nvPr/>
         </p:nvCxnSpPr>
         <p:spPr>
           <a:xfrm xmlns:a="http://schemas.openxmlformats.org/drawingml/2006/main" flipH="1">
-            <a:off x="3343275" y="5138738"/>
+            <a:off x="3343275" y="5310188"/>
             <a:ext cx="4352925" cy="0"/>
           </a:xfrm>
           <a:prstGeom xmlns:a="http://schemas.openxmlformats.org/drawingml/2006/main" prst="straightConnector1">
@@ -4729,21 +5659,21 @@
       </p:cxnSp>
       <p:sp>
         <p:nvSpPr>
-          <p:cNvPr id="88" name="shape-87">
-            <a:extLst xmlns:a="http://schemas.openxmlformats.org/drawingml/2006/main">
-              <a:ext uri="{FF2B5EF4-FFF2-40B4-BE49-F238E27FC236}">
-                <a16:creationId xmlns:a16="http://schemas.microsoft.com/office/drawing/2014/main" id="{7CE34D1D-D1FB-41DF-98B1-6018FF14F1BB}"/>
-              </a:ext>
-            </a:extLst>
-          </p:cNvPr>
-          <p:cNvSpPr>
-            <a:spLocks xmlns:a="http://schemas.openxmlformats.org/drawingml/2006/main" noGrp="1"/>
-          </p:cNvSpPr>
-          <p:nvPr/>
-        </p:nvSpPr>
-        <p:spPr>
-          <a:xfrm xmlns:a="http://schemas.openxmlformats.org/drawingml/2006/main">
-            <a:off x="3333750" y="5133975"/>
+          <p:cNvPr id="111" name="shape-110">
+            <a:extLst xmlns:a="http://schemas.openxmlformats.org/drawingml/2006/main">
+              <a:ext uri="{FF2B5EF4-FFF2-40B4-BE49-F238E27FC236}">
+                <a16:creationId xmlns:a16="http://schemas.microsoft.com/office/drawing/2014/main" id="{39AA8C1F-40E2-47FC-8E11-91559569A364}"/>
+              </a:ext>
+            </a:extLst>
+          </p:cNvPr>
+          <p:cNvSpPr>
+            <a:spLocks xmlns:a="http://schemas.openxmlformats.org/drawingml/2006/main" noGrp="1"/>
+          </p:cNvSpPr>
+          <p:nvPr/>
+        </p:nvSpPr>
+        <p:spPr>
+          <a:xfrm xmlns:a="http://schemas.openxmlformats.org/drawingml/2006/main">
+            <a:off x="3333750" y="5305425"/>
             <a:ext cx="9525" cy="9525"/>
           </a:xfrm>
           <a:prstGeom xmlns:a="http://schemas.openxmlformats.org/drawingml/2006/main" prst="rect">
@@ -4757,21 +5687,21 @@
       </p:sp>
       <p:sp>
         <p:nvSpPr>
-          <p:cNvPr id="89" name="shape-88">
-            <a:extLst xmlns:a="http://schemas.openxmlformats.org/drawingml/2006/main">
-              <a:ext uri="{FF2B5EF4-FFF2-40B4-BE49-F238E27FC236}">
-                <a16:creationId xmlns:a16="http://schemas.microsoft.com/office/drawing/2014/main" id="{2531E4FB-DDF6-4B09-A21B-3EB117EF59E2}"/>
-              </a:ext>
-            </a:extLst>
-          </p:cNvPr>
-          <p:cNvSpPr>
-            <a:spLocks xmlns:a="http://schemas.openxmlformats.org/drawingml/2006/main" noGrp="1"/>
-          </p:cNvSpPr>
-          <p:nvPr/>
-        </p:nvSpPr>
-        <p:spPr>
-          <a:xfrm xmlns:a="http://schemas.openxmlformats.org/drawingml/2006/main">
-            <a:off x="3333750" y="4248150"/>
+          <p:cNvPr id="112" name="shape-111">
+            <a:extLst xmlns:a="http://schemas.openxmlformats.org/drawingml/2006/main">
+              <a:ext uri="{FF2B5EF4-FFF2-40B4-BE49-F238E27FC236}">
+                <a16:creationId xmlns:a16="http://schemas.microsoft.com/office/drawing/2014/main" id="{BB389E33-BBED-4183-9CE2-491DCE45E395}"/>
+              </a:ext>
+            </a:extLst>
+          </p:cNvPr>
+          <p:cNvSpPr>
+            <a:spLocks xmlns:a="http://schemas.openxmlformats.org/drawingml/2006/main" noGrp="1"/>
+          </p:cNvSpPr>
+          <p:nvPr/>
+        </p:nvSpPr>
+        <p:spPr>
+          <a:xfrm xmlns:a="http://schemas.openxmlformats.org/drawingml/2006/main">
+            <a:off x="3333750" y="4429125"/>
             <a:ext cx="9525" cy="9525"/>
           </a:xfrm>
           <a:prstGeom xmlns:a="http://schemas.openxmlformats.org/drawingml/2006/main" prst="rect">
@@ -4785,17 +5715,17 @@
       </p:sp>
       <p:cxnSp>
         <p:nvCxnSpPr>
-          <p:cNvPr id="249" name=""/>
+          <p:cNvPr id="295" name=""/>
           <p:cNvCxnSpPr>
-            <a:stCxn xmlns:a="http://schemas.openxmlformats.org/drawingml/2006/main" id="88" idx="0"/>
-            <a:endCxn xmlns:a="http://schemas.openxmlformats.org/drawingml/2006/main" id="89" idx="2"/>
+            <a:stCxn xmlns:a="http://schemas.openxmlformats.org/drawingml/2006/main" id="111" idx="0"/>
+            <a:endCxn xmlns:a="http://schemas.openxmlformats.org/drawingml/2006/main" id="112" idx="2"/>
           </p:cNvCxnSpPr>
           <p:nvPr/>
         </p:nvCxnSpPr>
         <p:spPr>
           <a:xfrm xmlns:a="http://schemas.openxmlformats.org/drawingml/2006/main" flipV="1">
-            <a:off x="3338513" y="4257675"/>
-            <a:ext cx="0" cy="876300"/>
+            <a:off x="3338513" y="4438650"/>
+            <a:ext cx="0" cy="866775"/>
           </a:xfrm>
           <a:prstGeom xmlns:a="http://schemas.openxmlformats.org/drawingml/2006/main" prst="straightConnector1">
             <a:avLst/>
@@ -4811,21 +5741,21 @@
       </p:cxnSp>
       <p:sp>
         <p:nvSpPr>
-          <p:cNvPr id="91" name="shape-90">
-            <a:extLst xmlns:a="http://schemas.openxmlformats.org/drawingml/2006/main">
-              <a:ext uri="{FF2B5EF4-FFF2-40B4-BE49-F238E27FC236}">
-                <a16:creationId xmlns:a16="http://schemas.microsoft.com/office/drawing/2014/main" id="{46A7FB5D-EC61-465D-A659-718E11C0EA1D}"/>
-              </a:ext>
-            </a:extLst>
-          </p:cNvPr>
-          <p:cNvSpPr>
-            <a:spLocks xmlns:a="http://schemas.openxmlformats.org/drawingml/2006/main" noGrp="1"/>
-          </p:cNvSpPr>
-          <p:nvPr/>
-        </p:nvSpPr>
-        <p:spPr>
-          <a:xfrm xmlns:a="http://schemas.openxmlformats.org/drawingml/2006/main">
-            <a:off x="3333750" y="4248150"/>
+          <p:cNvPr id="114" name="shape-113">
+            <a:extLst xmlns:a="http://schemas.openxmlformats.org/drawingml/2006/main">
+              <a:ext uri="{FF2B5EF4-FFF2-40B4-BE49-F238E27FC236}">
+                <a16:creationId xmlns:a16="http://schemas.microsoft.com/office/drawing/2014/main" id="{4FCD7110-D653-4184-BB54-2B58F6CE4293}"/>
+              </a:ext>
+            </a:extLst>
+          </p:cNvPr>
+          <p:cNvSpPr>
+            <a:spLocks xmlns:a="http://schemas.openxmlformats.org/drawingml/2006/main" noGrp="1"/>
+          </p:cNvSpPr>
+          <p:nvPr/>
+        </p:nvSpPr>
+        <p:spPr>
+          <a:xfrm xmlns:a="http://schemas.openxmlformats.org/drawingml/2006/main">
+            <a:off x="3333750" y="4429125"/>
             <a:ext cx="9525" cy="9525"/>
           </a:xfrm>
           <a:prstGeom xmlns:a="http://schemas.openxmlformats.org/drawingml/2006/main" prst="rect">
@@ -4839,21 +5769,21 @@
       </p:sp>
       <p:sp>
         <p:nvSpPr>
-          <p:cNvPr id="92" name="shape-91">
-            <a:extLst xmlns:a="http://schemas.openxmlformats.org/drawingml/2006/main">
-              <a:ext uri="{FF2B5EF4-FFF2-40B4-BE49-F238E27FC236}">
-                <a16:creationId xmlns:a16="http://schemas.microsoft.com/office/drawing/2014/main" id="{0606EFDA-F28C-40A2-B6B0-EE659F08FEBA}"/>
-              </a:ext>
-            </a:extLst>
-          </p:cNvPr>
-          <p:cNvSpPr>
-            <a:spLocks xmlns:a="http://schemas.openxmlformats.org/drawingml/2006/main" noGrp="1"/>
-          </p:cNvSpPr>
-          <p:nvPr/>
-        </p:nvSpPr>
-        <p:spPr>
-          <a:xfrm xmlns:a="http://schemas.openxmlformats.org/drawingml/2006/main">
-            <a:off x="4114800" y="4248150"/>
+          <p:cNvPr id="115" name="shape-114">
+            <a:extLst xmlns:a="http://schemas.openxmlformats.org/drawingml/2006/main">
+              <a:ext uri="{FF2B5EF4-FFF2-40B4-BE49-F238E27FC236}">
+                <a16:creationId xmlns:a16="http://schemas.microsoft.com/office/drawing/2014/main" id="{B379FAF5-63D3-4D47-8D00-2A18FC07D02D}"/>
+              </a:ext>
+            </a:extLst>
+          </p:cNvPr>
+          <p:cNvSpPr>
+            <a:spLocks xmlns:a="http://schemas.openxmlformats.org/drawingml/2006/main" noGrp="1"/>
+          </p:cNvSpPr>
+          <p:nvPr/>
+        </p:nvSpPr>
+        <p:spPr>
+          <a:xfrm xmlns:a="http://schemas.openxmlformats.org/drawingml/2006/main">
+            <a:off x="4114800" y="4429125"/>
             <a:ext cx="9525" cy="9525"/>
           </a:xfrm>
           <a:prstGeom xmlns:a="http://schemas.openxmlformats.org/drawingml/2006/main" prst="rect">
@@ -4867,16 +5797,16 @@
       </p:sp>
       <p:cxnSp>
         <p:nvCxnSpPr>
-          <p:cNvPr id="252" name=""/>
+          <p:cNvPr id="298" name=""/>
           <p:cNvCxnSpPr>
-            <a:stCxn xmlns:a="http://schemas.openxmlformats.org/drawingml/2006/main" id="91" idx="3"/>
-            <a:endCxn xmlns:a="http://schemas.openxmlformats.org/drawingml/2006/main" id="92" idx="1"/>
+            <a:stCxn xmlns:a="http://schemas.openxmlformats.org/drawingml/2006/main" id="114" idx="3"/>
+            <a:endCxn xmlns:a="http://schemas.openxmlformats.org/drawingml/2006/main" id="115" idx="1"/>
           </p:cNvCxnSpPr>
           <p:nvPr/>
         </p:nvCxnSpPr>
         <p:spPr>
           <a:xfrm xmlns:a="http://schemas.openxmlformats.org/drawingml/2006/main">
-            <a:off x="3343275" y="4252913"/>
+            <a:off x="3343275" y="4433888"/>
             <a:ext cx="771525" cy="0"/>
           </a:xfrm>
           <a:prstGeom xmlns:a="http://schemas.openxmlformats.org/drawingml/2006/main" prst="straightConnector1">
@@ -4893,21 +5823,21 @@
       </p:cxnSp>
       <p:sp>
         <p:nvSpPr>
-          <p:cNvPr id="94" name="text-93">
-            <a:extLst xmlns:a="http://schemas.openxmlformats.org/drawingml/2006/main">
-              <a:ext uri="{FF2B5EF4-FFF2-40B4-BE49-F238E27FC236}">
-                <a16:creationId xmlns:a16="http://schemas.microsoft.com/office/drawing/2014/main" id="{23BC9958-179E-4514-9AFC-0FC34D2C0E8C}"/>
-              </a:ext>
-            </a:extLst>
-          </p:cNvPr>
-          <p:cNvSpPr>
-            <a:spLocks xmlns:a="http://schemas.openxmlformats.org/drawingml/2006/main" noGrp="1"/>
-          </p:cNvSpPr>
-          <p:nvPr/>
-        </p:nvSpPr>
-        <p:spPr>
-          <a:xfrm xmlns:a="http://schemas.openxmlformats.org/drawingml/2006/main">
-            <a:off x="5476875" y="4857750"/>
+          <p:cNvPr id="117" name="text-116">
+            <a:extLst xmlns:a="http://schemas.openxmlformats.org/drawingml/2006/main">
+              <a:ext uri="{FF2B5EF4-FFF2-40B4-BE49-F238E27FC236}">
+                <a16:creationId xmlns:a16="http://schemas.microsoft.com/office/drawing/2014/main" id="{4833855A-CD05-4FE9-B6A1-BFEC9071D390}"/>
+              </a:ext>
+            </a:extLst>
+          </p:cNvPr>
+          <p:cNvSpPr>
+            <a:spLocks xmlns:a="http://schemas.openxmlformats.org/drawingml/2006/main" noGrp="1"/>
+          </p:cNvSpPr>
+          <p:nvPr/>
+        </p:nvSpPr>
+        <p:spPr>
+          <a:xfrm xmlns:a="http://schemas.openxmlformats.org/drawingml/2006/main">
+            <a:off x="5476875" y="5067300"/>
             <a:ext cx="3000375" cy="228600"/>
           </a:xfrm>
           <a:prstGeom xmlns:a="http://schemas.openxmlformats.org/drawingml/2006/main" prst="rect">
@@ -4950,10 +5880,10 @@
       </p:sp>
       <p:sp>
         <p:nvSpPr>
-          <p:cNvPr id="95" name="line-94">
-            <a:extLst xmlns:a="http://schemas.openxmlformats.org/drawingml/2006/main">
-              <a:ext uri="{FF2B5EF4-FFF2-40B4-BE49-F238E27FC236}">
-                <a16:creationId xmlns:a16="http://schemas.microsoft.com/office/drawing/2014/main" id="{80669BF1-E4A2-4E7C-8DE2-AF29C8E12E87}"/>
+          <p:cNvPr id="118" name="line-117">
+            <a:extLst xmlns:a="http://schemas.openxmlformats.org/drawingml/2006/main">
+              <a:ext uri="{FF2B5EF4-FFF2-40B4-BE49-F238E27FC236}">
+                <a16:creationId xmlns:a16="http://schemas.microsoft.com/office/drawing/2014/main" id="{E73C9B6D-17D5-40DB-882D-5E3048247E82}"/>
               </a:ext>
             </a:extLst>
           </p:cNvPr>
@@ -4981,10 +5911,10 @@
       </p:sp>
       <p:sp>
         <p:nvSpPr>
-          <p:cNvPr id="96" name="text-95">
-            <a:extLst xmlns:a="http://schemas.openxmlformats.org/drawingml/2006/main">
-              <a:ext uri="{FF2B5EF4-FFF2-40B4-BE49-F238E27FC236}">
-                <a16:creationId xmlns:a16="http://schemas.microsoft.com/office/drawing/2014/main" id="{608CEAC3-ADC5-4996-9661-BBEE28E35213}"/>
+          <p:cNvPr id="119" name="text-118">
+            <a:extLst xmlns:a="http://schemas.openxmlformats.org/drawingml/2006/main">
+              <a:ext uri="{FF2B5EF4-FFF2-40B4-BE49-F238E27FC236}">
+                <a16:creationId xmlns:a16="http://schemas.microsoft.com/office/drawing/2014/main" id="{0D6CB361-E387-4CFD-A3A0-798EB13BA2FC}"/>
               </a:ext>
             </a:extLst>
           </p:cNvPr>
@@ -5038,10 +5968,10 @@
       </p:sp>
       <p:sp>
         <p:nvSpPr>
-          <p:cNvPr id="97" name="text-96">
-            <a:extLst xmlns:a="http://schemas.openxmlformats.org/drawingml/2006/main">
-              <a:ext uri="{FF2B5EF4-FFF2-40B4-BE49-F238E27FC236}">
-                <a16:creationId xmlns:a16="http://schemas.microsoft.com/office/drawing/2014/main" id="{E988D4C8-E082-41FF-9278-649D0F567CC2}"/>
+          <p:cNvPr id="120" name="text-119">
+            <a:extLst xmlns:a="http://schemas.openxmlformats.org/drawingml/2006/main">
+              <a:ext uri="{FF2B5EF4-FFF2-40B4-BE49-F238E27FC236}">
+                <a16:creationId xmlns:a16="http://schemas.microsoft.com/office/drawing/2014/main" id="{0F84ADDA-BC5C-4F15-8A64-C80C11057529}"/>
               </a:ext>
             </a:extLst>
           </p:cNvPr>
@@ -5095,10 +6025,10 @@
       </p:sp>
       <p:sp>
         <p:nvSpPr>
-          <p:cNvPr id="98" name="shape-97">
-            <a:extLst xmlns:a="http://schemas.openxmlformats.org/drawingml/2006/main">
-              <a:ext uri="{FF2B5EF4-FFF2-40B4-BE49-F238E27FC236}">
-                <a16:creationId xmlns:a16="http://schemas.microsoft.com/office/drawing/2014/main" id="{FF026FE3-A8DF-4986-BD6D-D08B66CE5FDC}"/>
+          <p:cNvPr id="121" name="shape-120">
+            <a:extLst xmlns:a="http://schemas.openxmlformats.org/drawingml/2006/main">
+              <a:ext uri="{FF2B5EF4-FFF2-40B4-BE49-F238E27FC236}">
+                <a16:creationId xmlns:a16="http://schemas.microsoft.com/office/drawing/2014/main" id="{E66D79B4-FD87-48A1-B18A-150DA8CBCF3B}"/>
               </a:ext>
             </a:extLst>
           </p:cNvPr>
@@ -5127,10 +6057,10 @@
       </p:sp>
       <p:sp>
         <p:nvSpPr>
-          <p:cNvPr id="99" name="text-98">
-            <a:extLst xmlns:a="http://schemas.openxmlformats.org/drawingml/2006/main">
-              <a:ext uri="{FF2B5EF4-FFF2-40B4-BE49-F238E27FC236}">
-                <a16:creationId xmlns:a16="http://schemas.microsoft.com/office/drawing/2014/main" id="{D9D334C3-3F78-47A9-8E92-DB20ACF82D02}"/>
+          <p:cNvPr id="122" name="text-121">
+            <a:extLst xmlns:a="http://schemas.openxmlformats.org/drawingml/2006/main">
+              <a:ext uri="{FF2B5EF4-FFF2-40B4-BE49-F238E27FC236}">
+                <a16:creationId xmlns:a16="http://schemas.microsoft.com/office/drawing/2014/main" id="{E2B4F37D-CDC9-4351-8838-C8204C014440}"/>
               </a:ext>
             </a:extLst>
           </p:cNvPr>
@@ -5184,10 +6114,10 @@
       </p:sp>
       <p:sp>
         <p:nvSpPr>
-          <p:cNvPr id="100" name="shape-99">
-            <a:extLst xmlns:a="http://schemas.openxmlformats.org/drawingml/2006/main">
-              <a:ext uri="{FF2B5EF4-FFF2-40B4-BE49-F238E27FC236}">
-                <a16:creationId xmlns:a16="http://schemas.microsoft.com/office/drawing/2014/main" id="{ED5E1A13-96E8-41BF-B6CE-BB250922C28C}"/>
+          <p:cNvPr id="123" name="shape-122">
+            <a:extLst xmlns:a="http://schemas.openxmlformats.org/drawingml/2006/main">
+              <a:ext uri="{FF2B5EF4-FFF2-40B4-BE49-F238E27FC236}">
+                <a16:creationId xmlns:a16="http://schemas.microsoft.com/office/drawing/2014/main" id="{C339760C-AE49-47D8-8D73-2200194AEBB9}"/>
               </a:ext>
             </a:extLst>
           </p:cNvPr>
@@ -5216,10 +6146,10 @@
       </p:sp>
       <p:sp>
         <p:nvSpPr>
-          <p:cNvPr id="101" name="shape-100">
-            <a:extLst xmlns:a="http://schemas.openxmlformats.org/drawingml/2006/main">
-              <a:ext uri="{FF2B5EF4-FFF2-40B4-BE49-F238E27FC236}">
-                <a16:creationId xmlns:a16="http://schemas.microsoft.com/office/drawing/2014/main" id="{AA1173B0-4019-4023-9681-5A7E2175E352}"/>
+          <p:cNvPr id="124" name="shape-123">
+            <a:extLst xmlns:a="http://schemas.openxmlformats.org/drawingml/2006/main">
+              <a:ext uri="{FF2B5EF4-FFF2-40B4-BE49-F238E27FC236}">
+                <a16:creationId xmlns:a16="http://schemas.microsoft.com/office/drawing/2014/main" id="{4768EB54-CF59-44D0-9504-59EE48E6D105}"/>
               </a:ext>
             </a:extLst>
           </p:cNvPr>
@@ -5248,10 +6178,10 @@
       </p:sp>
       <p:sp>
         <p:nvSpPr>
-          <p:cNvPr id="102" name="shape-101">
-            <a:extLst xmlns:a="http://schemas.openxmlformats.org/drawingml/2006/main">
-              <a:ext uri="{FF2B5EF4-FFF2-40B4-BE49-F238E27FC236}">
-                <a16:creationId xmlns:a16="http://schemas.microsoft.com/office/drawing/2014/main" id="{5AA1E5B0-47DC-4D1D-8570-2380C121D593}"/>
+          <p:cNvPr id="125" name="shape-124">
+            <a:extLst xmlns:a="http://schemas.openxmlformats.org/drawingml/2006/main">
+              <a:ext uri="{FF2B5EF4-FFF2-40B4-BE49-F238E27FC236}">
+                <a16:creationId xmlns:a16="http://schemas.microsoft.com/office/drawing/2014/main" id="{065416DF-D4F0-4ED7-AB2E-BD171A7441A4}"/>
               </a:ext>
             </a:extLst>
           </p:cNvPr>
@@ -5280,10 +6210,10 @@
       </p:sp>
       <p:sp>
         <p:nvSpPr>
-          <p:cNvPr id="103" name="shape-102">
-            <a:extLst xmlns:a="http://schemas.openxmlformats.org/drawingml/2006/main">
-              <a:ext uri="{FF2B5EF4-FFF2-40B4-BE49-F238E27FC236}">
-                <a16:creationId xmlns:a16="http://schemas.microsoft.com/office/drawing/2014/main" id="{5F3E525B-6496-45B5-AF3B-54DD2FCD1847}"/>
+          <p:cNvPr id="126" name="shape-125">
+            <a:extLst xmlns:a="http://schemas.openxmlformats.org/drawingml/2006/main">
+              <a:ext uri="{FF2B5EF4-FFF2-40B4-BE49-F238E27FC236}">
+                <a16:creationId xmlns:a16="http://schemas.microsoft.com/office/drawing/2014/main" id="{466ED6A1-2CAB-44DE-8033-417EC8DEC033}"/>
               </a:ext>
             </a:extLst>
           </p:cNvPr>
@@ -5312,10 +6242,10 @@
       </p:sp>
       <p:sp>
         <p:nvSpPr>
-          <p:cNvPr id="104" name="text-103">
-            <a:extLst xmlns:a="http://schemas.openxmlformats.org/drawingml/2006/main">
-              <a:ext uri="{FF2B5EF4-FFF2-40B4-BE49-F238E27FC236}">
-                <a16:creationId xmlns:a16="http://schemas.microsoft.com/office/drawing/2014/main" id="{1ADAF9D6-A1DF-49E9-B6BE-1EEC46D79D5C}"/>
+          <p:cNvPr id="127" name="text-126">
+            <a:extLst xmlns:a="http://schemas.openxmlformats.org/drawingml/2006/main">
+              <a:ext uri="{FF2B5EF4-FFF2-40B4-BE49-F238E27FC236}">
+                <a16:creationId xmlns:a16="http://schemas.microsoft.com/office/drawing/2014/main" id="{D91BA5D4-E91D-41CC-B00C-26757BEE1E8E}"/>
               </a:ext>
             </a:extLst>
           </p:cNvPr>
@@ -5369,10 +6299,10 @@
       </p:sp>
       <p:sp>
         <p:nvSpPr>
-          <p:cNvPr id="105" name="text-104">
-            <a:extLst xmlns:a="http://schemas.openxmlformats.org/drawingml/2006/main">
-              <a:ext uri="{FF2B5EF4-FFF2-40B4-BE49-F238E27FC236}">
-                <a16:creationId xmlns:a16="http://schemas.microsoft.com/office/drawing/2014/main" id="{5E16FD0B-9BFB-4CB4-AE55-D5C034F0EE30}"/>
+          <p:cNvPr id="128" name="text-127">
+            <a:extLst xmlns:a="http://schemas.openxmlformats.org/drawingml/2006/main">
+              <a:ext uri="{FF2B5EF4-FFF2-40B4-BE49-F238E27FC236}">
+                <a16:creationId xmlns:a16="http://schemas.microsoft.com/office/drawing/2014/main" id="{0D98F647-2D5F-4910-8CE4-54259B921F3E}"/>
               </a:ext>
             </a:extLst>
           </p:cNvPr>
@@ -5426,10 +6356,10 @@
       </p:sp>
       <p:sp>
         <p:nvSpPr>
-          <p:cNvPr id="106" name="glyph-trapezoid-105">
-            <a:extLst xmlns:a="http://schemas.openxmlformats.org/drawingml/2006/main">
-              <a:ext uri="{FF2B5EF4-FFF2-40B4-BE49-F238E27FC236}">
-                <a16:creationId xmlns:a16="http://schemas.microsoft.com/office/drawing/2014/main" id="{954C418C-00DB-4E06-B95E-1538B184ABC6}"/>
+          <p:cNvPr id="129" name="glyph-trapezoid-128">
+            <a:extLst xmlns:a="http://schemas.openxmlformats.org/drawingml/2006/main">
+              <a:ext uri="{FF2B5EF4-FFF2-40B4-BE49-F238E27FC236}">
+                <a16:creationId xmlns:a16="http://schemas.microsoft.com/office/drawing/2014/main" id="{6E238D65-2A38-4A7B-AF20-422787B1995B}"/>
               </a:ext>
             </a:extLst>
           </p:cNvPr>
@@ -5458,10 +6388,10 @@
       </p:sp>
       <p:sp>
         <p:nvSpPr>
-          <p:cNvPr id="107" name="text-106">
-            <a:extLst xmlns:a="http://schemas.openxmlformats.org/drawingml/2006/main">
-              <a:ext uri="{FF2B5EF4-FFF2-40B4-BE49-F238E27FC236}">
-                <a16:creationId xmlns:a16="http://schemas.microsoft.com/office/drawing/2014/main" id="{363B693C-0E3B-4B9C-9456-7F971CE0D66B}"/>
+          <p:cNvPr id="130" name="text-129">
+            <a:extLst xmlns:a="http://schemas.openxmlformats.org/drawingml/2006/main">
+              <a:ext uri="{FF2B5EF4-FFF2-40B4-BE49-F238E27FC236}">
+                <a16:creationId xmlns:a16="http://schemas.microsoft.com/office/drawing/2014/main" id="{060ACB9E-BFC8-4AC0-8508-93E7F85D9A46}"/>
               </a:ext>
             </a:extLst>
           </p:cNvPr>
@@ -5515,10 +6445,10 @@
       </p:sp>
       <p:sp>
         <p:nvSpPr>
-          <p:cNvPr id="108" name="shape-107">
-            <a:extLst xmlns:a="http://schemas.openxmlformats.org/drawingml/2006/main">
-              <a:ext uri="{FF2B5EF4-FFF2-40B4-BE49-F238E27FC236}">
-                <a16:creationId xmlns:a16="http://schemas.microsoft.com/office/drawing/2014/main" id="{A9406C05-7595-4FB7-8BF5-CB06E6A99BB8}"/>
+          <p:cNvPr id="131" name="shape-130">
+            <a:extLst xmlns:a="http://schemas.openxmlformats.org/drawingml/2006/main">
+              <a:ext uri="{FF2B5EF4-FFF2-40B4-BE49-F238E27FC236}">
+                <a16:creationId xmlns:a16="http://schemas.microsoft.com/office/drawing/2014/main" id="{624164CD-B4C2-4CA6-8717-63D758CE4C76}"/>
               </a:ext>
             </a:extLst>
           </p:cNvPr>
@@ -5543,10 +6473,10 @@
       </p:sp>
       <p:sp>
         <p:nvSpPr>
-          <p:cNvPr id="109" name="shape-108">
-            <a:extLst xmlns:a="http://schemas.openxmlformats.org/drawingml/2006/main">
-              <a:ext uri="{FF2B5EF4-FFF2-40B4-BE49-F238E27FC236}">
-                <a16:creationId xmlns:a16="http://schemas.microsoft.com/office/drawing/2014/main" id="{26E55823-F9BA-41C8-8DA6-184BC3A6032B}"/>
+          <p:cNvPr id="132" name="shape-131">
+            <a:extLst xmlns:a="http://schemas.openxmlformats.org/drawingml/2006/main">
+              <a:ext uri="{FF2B5EF4-FFF2-40B4-BE49-F238E27FC236}">
+                <a16:creationId xmlns:a16="http://schemas.microsoft.com/office/drawing/2014/main" id="{65C13241-3A2B-49F2-98ED-414B1FCE8F1E}"/>
               </a:ext>
             </a:extLst>
           </p:cNvPr>
@@ -5571,10 +6501,10 @@
       </p:sp>
       <p:cxnSp>
         <p:nvCxnSpPr>
-          <p:cNvPr id="269" name=""/>
+          <p:cNvPr id="315" name=""/>
           <p:cNvCxnSpPr>
-            <a:stCxn xmlns:a="http://schemas.openxmlformats.org/drawingml/2006/main" id="108" idx="3"/>
-            <a:endCxn xmlns:a="http://schemas.openxmlformats.org/drawingml/2006/main" id="109" idx="1"/>
+            <a:stCxn xmlns:a="http://schemas.openxmlformats.org/drawingml/2006/main" id="131" idx="3"/>
+            <a:endCxn xmlns:a="http://schemas.openxmlformats.org/drawingml/2006/main" id="132" idx="1"/>
           </p:cNvCxnSpPr>
           <p:nvPr/>
         </p:nvCxnSpPr>
@@ -5597,10 +6527,10 @@
       </p:cxnSp>
       <p:sp>
         <p:nvSpPr>
-          <p:cNvPr id="111" name="text-110">
-            <a:extLst xmlns:a="http://schemas.openxmlformats.org/drawingml/2006/main">
-              <a:ext uri="{FF2B5EF4-FFF2-40B4-BE49-F238E27FC236}">
-                <a16:creationId xmlns:a16="http://schemas.microsoft.com/office/drawing/2014/main" id="{CC27383D-6FF0-4CF4-A4BB-E4DF83E6C42A}"/>
+          <p:cNvPr id="134" name="text-133">
+            <a:extLst xmlns:a="http://schemas.openxmlformats.org/drawingml/2006/main">
+              <a:ext uri="{FF2B5EF4-FFF2-40B4-BE49-F238E27FC236}">
+                <a16:creationId xmlns:a16="http://schemas.microsoft.com/office/drawing/2014/main" id="{C1A7081A-DE98-4EA3-981A-11333858CA76}"/>
               </a:ext>
             </a:extLst>
           </p:cNvPr>
@@ -5647,7 +6577,7 @@
                 <a:ea typeface="Hiragino Sans GB"/>
                 <a:cs typeface="Hiragino Sans GB"/>
               </a:rPr>
-              <a:t>单帧大小 + 接收时限</a:t>
+              <a:t>帧大小 + 一帧接收时限</a:t>
             </a:r>
           </a:p>
           <a:p xmlns:a="http://schemas.openxmlformats.org/drawingml/2006/main">
@@ -5677,10 +6607,10 @@
       </p:sp>
       <p:sp>
         <p:nvSpPr>
-          <p:cNvPr id="112" name="text-111">
-            <a:extLst xmlns:a="http://schemas.openxmlformats.org/drawingml/2006/main">
-              <a:ext uri="{FF2B5EF4-FFF2-40B4-BE49-F238E27FC236}">
-                <a16:creationId xmlns:a16="http://schemas.microsoft.com/office/drawing/2014/main" id="{4C1DABBE-6777-4993-A549-911E670CD9BA}"/>
+          <p:cNvPr id="135" name="text-134">
+            <a:extLst xmlns:a="http://schemas.openxmlformats.org/drawingml/2006/main">
+              <a:ext uri="{FF2B5EF4-FFF2-40B4-BE49-F238E27FC236}">
+                <a16:creationId xmlns:a16="http://schemas.microsoft.com/office/drawing/2014/main" id="{ADB4BC91-02AE-4B3A-9AF2-06305D3A5849}"/>
               </a:ext>
             </a:extLst>
           </p:cNvPr>
@@ -5734,10 +6664,10 @@
       </p:sp>
       <p:sp>
         <p:nvSpPr>
-          <p:cNvPr id="113" name="shape-112">
-            <a:extLst xmlns:a="http://schemas.openxmlformats.org/drawingml/2006/main">
-              <a:ext uri="{FF2B5EF4-FFF2-40B4-BE49-F238E27FC236}">
-                <a16:creationId xmlns:a16="http://schemas.microsoft.com/office/drawing/2014/main" id="{0D141AB9-2D21-45DE-B2FB-E07D23E161D4}"/>
+          <p:cNvPr id="136" name="shape-135">
+            <a:extLst xmlns:a="http://schemas.openxmlformats.org/drawingml/2006/main">
+              <a:ext uri="{FF2B5EF4-FFF2-40B4-BE49-F238E27FC236}">
+                <a16:creationId xmlns:a16="http://schemas.microsoft.com/office/drawing/2014/main" id="{25609C58-180A-4BBF-81E1-AC70857F9BC3}"/>
               </a:ext>
             </a:extLst>
           </p:cNvPr>
@@ -5766,10 +6696,10 @@
       </p:sp>
       <p:sp>
         <p:nvSpPr>
-          <p:cNvPr id="114" name="shape-113">
-            <a:extLst xmlns:a="http://schemas.openxmlformats.org/drawingml/2006/main">
-              <a:ext uri="{FF2B5EF4-FFF2-40B4-BE49-F238E27FC236}">
-                <a16:creationId xmlns:a16="http://schemas.microsoft.com/office/drawing/2014/main" id="{ED3AA9E2-FE32-43A2-A67F-ED82BB069614}"/>
+          <p:cNvPr id="137" name="shape-136">
+            <a:extLst xmlns:a="http://schemas.openxmlformats.org/drawingml/2006/main">
+              <a:ext uri="{FF2B5EF4-FFF2-40B4-BE49-F238E27FC236}">
+                <a16:creationId xmlns:a16="http://schemas.microsoft.com/office/drawing/2014/main" id="{5EEAB9DD-B061-4347-8396-2348087F5ED6}"/>
               </a:ext>
             </a:extLst>
           </p:cNvPr>
@@ -5798,10 +6728,10 @@
       </p:sp>
       <p:sp>
         <p:nvSpPr>
-          <p:cNvPr id="115" name="shape-114">
-            <a:extLst xmlns:a="http://schemas.openxmlformats.org/drawingml/2006/main">
-              <a:ext uri="{FF2B5EF4-FFF2-40B4-BE49-F238E27FC236}">
-                <a16:creationId xmlns:a16="http://schemas.microsoft.com/office/drawing/2014/main" id="{5A37F231-7A5E-49EA-8117-910344F09F89}"/>
+          <p:cNvPr id="138" name="shape-137">
+            <a:extLst xmlns:a="http://schemas.openxmlformats.org/drawingml/2006/main">
+              <a:ext uri="{FF2B5EF4-FFF2-40B4-BE49-F238E27FC236}">
+                <a16:creationId xmlns:a16="http://schemas.microsoft.com/office/drawing/2014/main" id="{4718C39B-A8A9-4F42-B2BD-ED59C8068591}"/>
               </a:ext>
             </a:extLst>
           </p:cNvPr>
@@ -5830,10 +6760,10 @@
       </p:sp>
       <p:sp>
         <p:nvSpPr>
-          <p:cNvPr id="116" name="shape-115">
-            <a:extLst xmlns:a="http://schemas.openxmlformats.org/drawingml/2006/main">
-              <a:ext uri="{FF2B5EF4-FFF2-40B4-BE49-F238E27FC236}">
-                <a16:creationId xmlns:a16="http://schemas.microsoft.com/office/drawing/2014/main" id="{A5BB0B25-F395-45E8-8F3E-1FE8954E5F64}"/>
+          <p:cNvPr id="139" name="shape-138">
+            <a:extLst xmlns:a="http://schemas.openxmlformats.org/drawingml/2006/main">
+              <a:ext uri="{FF2B5EF4-FFF2-40B4-BE49-F238E27FC236}">
+                <a16:creationId xmlns:a16="http://schemas.microsoft.com/office/drawing/2014/main" id="{3ABB6A65-EC0F-4F53-96C5-43EDB382A7F7}"/>
               </a:ext>
             </a:extLst>
           </p:cNvPr>
@@ -5862,10 +6792,10 @@
       </p:sp>
       <p:sp>
         <p:nvSpPr>
-          <p:cNvPr id="117" name="shape-116">
-            <a:extLst xmlns:a="http://schemas.openxmlformats.org/drawingml/2006/main">
-              <a:ext uri="{FF2B5EF4-FFF2-40B4-BE49-F238E27FC236}">
-                <a16:creationId xmlns:a16="http://schemas.microsoft.com/office/drawing/2014/main" id="{2C63CDAB-84EA-465E-B02B-CC5504BF0EFA}"/>
+          <p:cNvPr id="140" name="shape-139">
+            <a:extLst xmlns:a="http://schemas.openxmlformats.org/drawingml/2006/main">
+              <a:ext uri="{FF2B5EF4-FFF2-40B4-BE49-F238E27FC236}">
+                <a16:creationId xmlns:a16="http://schemas.microsoft.com/office/drawing/2014/main" id="{C0B1DB53-682C-477D-B7F7-758EDC85752A}"/>
               </a:ext>
             </a:extLst>
           </p:cNvPr>
@@ -5894,10 +6824,10 @@
       </p:sp>
       <p:sp>
         <p:nvSpPr>
-          <p:cNvPr id="118" name="shape-117">
-            <a:extLst xmlns:a="http://schemas.openxmlformats.org/drawingml/2006/main">
-              <a:ext uri="{FF2B5EF4-FFF2-40B4-BE49-F238E27FC236}">
-                <a16:creationId xmlns:a16="http://schemas.microsoft.com/office/drawing/2014/main" id="{B6E0DDF3-84B1-46AF-B050-1C9FE3D96189}"/>
+          <p:cNvPr id="141" name="shape-140">
+            <a:extLst xmlns:a="http://schemas.openxmlformats.org/drawingml/2006/main">
+              <a:ext uri="{FF2B5EF4-FFF2-40B4-BE49-F238E27FC236}">
+                <a16:creationId xmlns:a16="http://schemas.microsoft.com/office/drawing/2014/main" id="{2F5B0540-78B8-4990-93B9-395232F128E5}"/>
               </a:ext>
             </a:extLst>
           </p:cNvPr>
@@ -5922,10 +6852,10 @@
       </p:sp>
       <p:sp>
         <p:nvSpPr>
-          <p:cNvPr id="119" name="shape-118">
-            <a:extLst xmlns:a="http://schemas.openxmlformats.org/drawingml/2006/main">
-              <a:ext uri="{FF2B5EF4-FFF2-40B4-BE49-F238E27FC236}">
-                <a16:creationId xmlns:a16="http://schemas.microsoft.com/office/drawing/2014/main" id="{948D2764-5661-4AAF-A029-74988CE02EED}"/>
+          <p:cNvPr id="142" name="shape-141">
+            <a:extLst xmlns:a="http://schemas.openxmlformats.org/drawingml/2006/main">
+              <a:ext uri="{FF2B5EF4-FFF2-40B4-BE49-F238E27FC236}">
+                <a16:creationId xmlns:a16="http://schemas.microsoft.com/office/drawing/2014/main" id="{865EB39B-AD4D-47D4-96CB-4637DD7D4856}"/>
               </a:ext>
             </a:extLst>
           </p:cNvPr>
@@ -5950,10 +6880,10 @@
       </p:sp>
       <p:cxnSp>
         <p:nvCxnSpPr>
-          <p:cNvPr id="279" name=""/>
+          <p:cNvPr id="325" name=""/>
           <p:cNvCxnSpPr>
-            <a:stCxn xmlns:a="http://schemas.openxmlformats.org/drawingml/2006/main" id="118" idx="3"/>
-            <a:endCxn xmlns:a="http://schemas.openxmlformats.org/drawingml/2006/main" id="119" idx="1"/>
+            <a:stCxn xmlns:a="http://schemas.openxmlformats.org/drawingml/2006/main" id="141" idx="3"/>
+            <a:endCxn xmlns:a="http://schemas.openxmlformats.org/drawingml/2006/main" id="142" idx="1"/>
           </p:cNvCxnSpPr>
           <p:nvPr/>
         </p:nvCxnSpPr>
@@ -5976,10 +6906,10 @@
       </p:cxnSp>
       <p:sp>
         <p:nvSpPr>
-          <p:cNvPr id="121" name="shape-120">
-            <a:extLst xmlns:a="http://schemas.openxmlformats.org/drawingml/2006/main">
-              <a:ext uri="{FF2B5EF4-FFF2-40B4-BE49-F238E27FC236}">
-                <a16:creationId xmlns:a16="http://schemas.microsoft.com/office/drawing/2014/main" id="{F76645F3-6F7A-4828-95C8-E5B4A560ED0A}"/>
+          <p:cNvPr id="144" name="shape-143">
+            <a:extLst xmlns:a="http://schemas.openxmlformats.org/drawingml/2006/main">
+              <a:ext uri="{FF2B5EF4-FFF2-40B4-BE49-F238E27FC236}">
+                <a16:creationId xmlns:a16="http://schemas.microsoft.com/office/drawing/2014/main" id="{4AF7DFE7-D983-4587-8860-8FF3D5A66063}"/>
               </a:ext>
             </a:extLst>
           </p:cNvPr>
@@ -6008,10 +6938,10 @@
       </p:sp>
       <p:sp>
         <p:nvSpPr>
-          <p:cNvPr id="122" name="shape-121">
-            <a:extLst xmlns:a="http://schemas.openxmlformats.org/drawingml/2006/main">
-              <a:ext uri="{FF2B5EF4-FFF2-40B4-BE49-F238E27FC236}">
-                <a16:creationId xmlns:a16="http://schemas.microsoft.com/office/drawing/2014/main" id="{0D1E7385-9005-4309-AA5A-F4930D872622}"/>
+          <p:cNvPr id="145" name="shape-144">
+            <a:extLst xmlns:a="http://schemas.openxmlformats.org/drawingml/2006/main">
+              <a:ext uri="{FF2B5EF4-FFF2-40B4-BE49-F238E27FC236}">
+                <a16:creationId xmlns:a16="http://schemas.microsoft.com/office/drawing/2014/main" id="{B31DDC52-D128-4398-9B6E-3537887DAE23}"/>
               </a:ext>
             </a:extLst>
           </p:cNvPr>
@@ -6040,10 +6970,10 @@
       </p:sp>
       <p:sp>
         <p:nvSpPr>
-          <p:cNvPr id="123" name="shape-122">
-            <a:extLst xmlns:a="http://schemas.openxmlformats.org/drawingml/2006/main">
-              <a:ext uri="{FF2B5EF4-FFF2-40B4-BE49-F238E27FC236}">
-                <a16:creationId xmlns:a16="http://schemas.microsoft.com/office/drawing/2014/main" id="{61776C86-D4CD-4C3F-A55C-68BBF567446A}"/>
+          <p:cNvPr id="146" name="shape-145">
+            <a:extLst xmlns:a="http://schemas.openxmlformats.org/drawingml/2006/main">
+              <a:ext uri="{FF2B5EF4-FFF2-40B4-BE49-F238E27FC236}">
+                <a16:creationId xmlns:a16="http://schemas.microsoft.com/office/drawing/2014/main" id="{DD18FB5C-1FAD-4A4D-B884-2FC25B01CE8A}"/>
               </a:ext>
             </a:extLst>
           </p:cNvPr>
@@ -6072,10 +7002,10 @@
       </p:sp>
       <p:sp>
         <p:nvSpPr>
-          <p:cNvPr id="124" name="shape-123">
-            <a:extLst xmlns:a="http://schemas.openxmlformats.org/drawingml/2006/main">
-              <a:ext uri="{FF2B5EF4-FFF2-40B4-BE49-F238E27FC236}">
-                <a16:creationId xmlns:a16="http://schemas.microsoft.com/office/drawing/2014/main" id="{2A0536BE-EA2B-4FB3-875F-A0F83BC5F398}"/>
+          <p:cNvPr id="147" name="shape-146">
+            <a:extLst xmlns:a="http://schemas.openxmlformats.org/drawingml/2006/main">
+              <a:ext uri="{FF2B5EF4-FFF2-40B4-BE49-F238E27FC236}">
+                <a16:creationId xmlns:a16="http://schemas.microsoft.com/office/drawing/2014/main" id="{7FFEFE4D-902E-45AD-8E44-9478905B9634}"/>
               </a:ext>
             </a:extLst>
           </p:cNvPr>
@@ -6100,10 +7030,10 @@
       </p:sp>
       <p:sp>
         <p:nvSpPr>
-          <p:cNvPr id="125" name="shape-124">
-            <a:extLst xmlns:a="http://schemas.openxmlformats.org/drawingml/2006/main">
-              <a:ext uri="{FF2B5EF4-FFF2-40B4-BE49-F238E27FC236}">
-                <a16:creationId xmlns:a16="http://schemas.microsoft.com/office/drawing/2014/main" id="{89EEB2BB-C058-47B8-8D99-4AD663F73338}"/>
+          <p:cNvPr id="148" name="shape-147">
+            <a:extLst xmlns:a="http://schemas.openxmlformats.org/drawingml/2006/main">
+              <a:ext uri="{FF2B5EF4-FFF2-40B4-BE49-F238E27FC236}">
+                <a16:creationId xmlns:a16="http://schemas.microsoft.com/office/drawing/2014/main" id="{666A5330-8357-49DE-AC43-7172AD76334E}"/>
               </a:ext>
             </a:extLst>
           </p:cNvPr>
@@ -6128,10 +7058,10 @@
       </p:sp>
       <p:cxnSp>
         <p:nvCxnSpPr>
-          <p:cNvPr id="285" name=""/>
+          <p:cNvPr id="331" name=""/>
           <p:cNvCxnSpPr>
-            <a:stCxn xmlns:a="http://schemas.openxmlformats.org/drawingml/2006/main" id="124" idx="2"/>
-            <a:endCxn xmlns:a="http://schemas.openxmlformats.org/drawingml/2006/main" id="125" idx="0"/>
+            <a:stCxn xmlns:a="http://schemas.openxmlformats.org/drawingml/2006/main" id="147" idx="2"/>
+            <a:endCxn xmlns:a="http://schemas.openxmlformats.org/drawingml/2006/main" id="148" idx="0"/>
           </p:cNvCxnSpPr>
           <p:nvPr/>
         </p:nvCxnSpPr>
@@ -6154,10 +7084,10 @@
       </p:cxnSp>
       <p:sp>
         <p:nvSpPr>
-          <p:cNvPr id="127" name="text-126">
-            <a:extLst xmlns:a="http://schemas.openxmlformats.org/drawingml/2006/main">
-              <a:ext uri="{FF2B5EF4-FFF2-40B4-BE49-F238E27FC236}">
-                <a16:creationId xmlns:a16="http://schemas.microsoft.com/office/drawing/2014/main" id="{BAB3A168-4788-4EED-87E4-0DB5B9EFC716}"/>
+          <p:cNvPr id="150" name="text-149">
+            <a:extLst xmlns:a="http://schemas.openxmlformats.org/drawingml/2006/main">
+              <a:ext uri="{FF2B5EF4-FFF2-40B4-BE49-F238E27FC236}">
+                <a16:creationId xmlns:a16="http://schemas.microsoft.com/office/drawing/2014/main" id="{78FA7984-6457-4426-A2E9-A418A2A5443D}"/>
               </a:ext>
             </a:extLst>
           </p:cNvPr>
@@ -6234,10 +7164,10 @@
       </p:sp>
       <p:sp>
         <p:nvSpPr>
-          <p:cNvPr id="128" name="text-127">
-            <a:extLst xmlns:a="http://schemas.openxmlformats.org/drawingml/2006/main">
-              <a:ext uri="{FF2B5EF4-FFF2-40B4-BE49-F238E27FC236}">
-                <a16:creationId xmlns:a16="http://schemas.microsoft.com/office/drawing/2014/main" id="{EC9481C5-C916-4A44-BB9A-FE3AC82C7B08}"/>
+          <p:cNvPr id="151" name="text-150">
+            <a:extLst xmlns:a="http://schemas.openxmlformats.org/drawingml/2006/main">
+              <a:ext uri="{FF2B5EF4-FFF2-40B4-BE49-F238E27FC236}">
+                <a16:creationId xmlns:a16="http://schemas.microsoft.com/office/drawing/2014/main" id="{E544D01A-2464-4C65-9870-A1AB9237865F}"/>
               </a:ext>
             </a:extLst>
           </p:cNvPr>
@@ -6291,10 +7221,10 @@
       </p:sp>
       <p:sp>
         <p:nvSpPr>
-          <p:cNvPr id="129" name="glyph-rect-128">
-            <a:extLst xmlns:a="http://schemas.openxmlformats.org/drawingml/2006/main">
-              <a:ext uri="{FF2B5EF4-FFF2-40B4-BE49-F238E27FC236}">
-                <a16:creationId xmlns:a16="http://schemas.microsoft.com/office/drawing/2014/main" id="{242170A3-BDF8-42E0-B47C-84AE47ABD3BA}"/>
+          <p:cNvPr id="152" name="glyph-rect-151">
+            <a:extLst xmlns:a="http://schemas.openxmlformats.org/drawingml/2006/main">
+              <a:ext uri="{FF2B5EF4-FFF2-40B4-BE49-F238E27FC236}">
+                <a16:creationId xmlns:a16="http://schemas.microsoft.com/office/drawing/2014/main" id="{8A545DD2-15CC-4495-B122-9449455E27C8}"/>
               </a:ext>
             </a:extLst>
           </p:cNvPr>
@@ -6323,10 +7253,10 @@
       </p:sp>
       <p:sp>
         <p:nvSpPr>
-          <p:cNvPr id="130" name="glyph-rect-129">
-            <a:extLst xmlns:a="http://schemas.openxmlformats.org/drawingml/2006/main">
-              <a:ext uri="{FF2B5EF4-FFF2-40B4-BE49-F238E27FC236}">
-                <a16:creationId xmlns:a16="http://schemas.microsoft.com/office/drawing/2014/main" id="{C53960F0-06B1-49C6-B540-C3B1894612AE}"/>
+          <p:cNvPr id="153" name="glyph-rect-152">
+            <a:extLst xmlns:a="http://schemas.openxmlformats.org/drawingml/2006/main">
+              <a:ext uri="{FF2B5EF4-FFF2-40B4-BE49-F238E27FC236}">
+                <a16:creationId xmlns:a16="http://schemas.microsoft.com/office/drawing/2014/main" id="{F2F98F05-B77C-42DA-AD45-405F71828BEB}"/>
               </a:ext>
             </a:extLst>
           </p:cNvPr>
@@ -6355,10 +7285,10 @@
       </p:sp>
       <p:sp>
         <p:nvSpPr>
-          <p:cNvPr id="131" name="path-130">
-            <a:extLst xmlns:a="http://schemas.openxmlformats.org/drawingml/2006/main">
-              <a:ext uri="{FF2B5EF4-FFF2-40B4-BE49-F238E27FC236}">
-                <a16:creationId xmlns:a16="http://schemas.microsoft.com/office/drawing/2014/main" id="{63B8584F-FDF8-4967-A286-6955826F27E9}"/>
+          <p:cNvPr id="154" name="path-153">
+            <a:extLst xmlns:a="http://schemas.openxmlformats.org/drawingml/2006/main">
+              <a:ext uri="{FF2B5EF4-FFF2-40B4-BE49-F238E27FC236}">
+                <a16:creationId xmlns:a16="http://schemas.microsoft.com/office/drawing/2014/main" id="{FB36DE1C-B87D-4889-9437-3177B9E84C4F}"/>
               </a:ext>
             </a:extLst>
           </p:cNvPr>
@@ -6406,10 +7336,10 @@
       </p:sp>
       <p:sp>
         <p:nvSpPr>
-          <p:cNvPr id="132" name="line-131">
-            <a:extLst xmlns:a="http://schemas.openxmlformats.org/drawingml/2006/main">
-              <a:ext uri="{FF2B5EF4-FFF2-40B4-BE49-F238E27FC236}">
-                <a16:creationId xmlns:a16="http://schemas.microsoft.com/office/drawing/2014/main" id="{33766102-9EEE-4F1C-B21B-92E872214977}"/>
+          <p:cNvPr id="155" name="line-154">
+            <a:extLst xmlns:a="http://schemas.openxmlformats.org/drawingml/2006/main">
+              <a:ext uri="{FF2B5EF4-FFF2-40B4-BE49-F238E27FC236}">
+                <a16:creationId xmlns:a16="http://schemas.microsoft.com/office/drawing/2014/main" id="{2628F6D6-C1CD-4B10-80C4-CBE7F9666495}"/>
               </a:ext>
             </a:extLst>
           </p:cNvPr>
@@ -6437,10 +7367,10 @@
       </p:sp>
       <p:sp>
         <p:nvSpPr>
-          <p:cNvPr id="133" name="line-132">
-            <a:extLst xmlns:a="http://schemas.openxmlformats.org/drawingml/2006/main">
-              <a:ext uri="{FF2B5EF4-FFF2-40B4-BE49-F238E27FC236}">
-                <a16:creationId xmlns:a16="http://schemas.microsoft.com/office/drawing/2014/main" id="{053998E7-20CE-4379-A83F-0DDBD36B8FC6}"/>
+          <p:cNvPr id="156" name="line-155">
+            <a:extLst xmlns:a="http://schemas.openxmlformats.org/drawingml/2006/main">
+              <a:ext uri="{FF2B5EF4-FFF2-40B4-BE49-F238E27FC236}">
+                <a16:creationId xmlns:a16="http://schemas.microsoft.com/office/drawing/2014/main" id="{309B57EC-9659-437A-9361-95A7E32A6CD8}"/>
               </a:ext>
             </a:extLst>
           </p:cNvPr>
@@ -6468,10 +7398,10 @@
       </p:sp>
       <p:sp>
         <p:nvSpPr>
-          <p:cNvPr id="134" name="line-133">
-            <a:extLst xmlns:a="http://schemas.openxmlformats.org/drawingml/2006/main">
-              <a:ext uri="{FF2B5EF4-FFF2-40B4-BE49-F238E27FC236}">
-                <a16:creationId xmlns:a16="http://schemas.microsoft.com/office/drawing/2014/main" id="{E015AEF1-EFE9-4D0F-B53C-533C988BB9DA}"/>
+          <p:cNvPr id="157" name="line-156">
+            <a:extLst xmlns:a="http://schemas.openxmlformats.org/drawingml/2006/main">
+              <a:ext uri="{FF2B5EF4-FFF2-40B4-BE49-F238E27FC236}">
+                <a16:creationId xmlns:a16="http://schemas.microsoft.com/office/drawing/2014/main" id="{DCC59409-85AB-4FAE-8FC9-91CBEEA98C2E}"/>
               </a:ext>
             </a:extLst>
           </p:cNvPr>
@@ -6499,10 +7429,10 @@
       </p:sp>
       <p:sp>
         <p:nvSpPr>
-          <p:cNvPr id="135" name="line-134">
-            <a:extLst xmlns:a="http://schemas.openxmlformats.org/drawingml/2006/main">
-              <a:ext uri="{FF2B5EF4-FFF2-40B4-BE49-F238E27FC236}">
-                <a16:creationId xmlns:a16="http://schemas.microsoft.com/office/drawing/2014/main" id="{50B27AFA-3799-4977-92DF-45426EF739AC}"/>
+          <p:cNvPr id="158" name="line-157">
+            <a:extLst xmlns:a="http://schemas.openxmlformats.org/drawingml/2006/main">
+              <a:ext uri="{FF2B5EF4-FFF2-40B4-BE49-F238E27FC236}">
+                <a16:creationId xmlns:a16="http://schemas.microsoft.com/office/drawing/2014/main" id="{34D70541-C354-43FD-9796-99F5E1D3783D}"/>
               </a:ext>
             </a:extLst>
           </p:cNvPr>
@@ -6530,10 +7460,10 @@
       </p:sp>
       <p:sp>
         <p:nvSpPr>
-          <p:cNvPr id="136" name="line-135">
-            <a:extLst xmlns:a="http://schemas.openxmlformats.org/drawingml/2006/main">
-              <a:ext uri="{FF2B5EF4-FFF2-40B4-BE49-F238E27FC236}">
-                <a16:creationId xmlns:a16="http://schemas.microsoft.com/office/drawing/2014/main" id="{2AE13D5C-5E20-4BA9-A44E-C3B0A3FB1967}"/>
+          <p:cNvPr id="159" name="line-158">
+            <a:extLst xmlns:a="http://schemas.openxmlformats.org/drawingml/2006/main">
+              <a:ext uri="{FF2B5EF4-FFF2-40B4-BE49-F238E27FC236}">
+                <a16:creationId xmlns:a16="http://schemas.microsoft.com/office/drawing/2014/main" id="{825AA2FC-68D4-4E87-8E12-D1562A412200}"/>
               </a:ext>
             </a:extLst>
           </p:cNvPr>
@@ -6561,10 +7491,10 @@
       </p:sp>
       <p:sp>
         <p:nvSpPr>
-          <p:cNvPr id="137" name="shape-136">
-            <a:extLst xmlns:a="http://schemas.openxmlformats.org/drawingml/2006/main">
-              <a:ext uri="{FF2B5EF4-FFF2-40B4-BE49-F238E27FC236}">
-                <a16:creationId xmlns:a16="http://schemas.microsoft.com/office/drawing/2014/main" id="{1084F645-AC73-42FF-A1ED-342202CFD6C3}"/>
+          <p:cNvPr id="160" name="shape-159">
+            <a:extLst xmlns:a="http://schemas.openxmlformats.org/drawingml/2006/main">
+              <a:ext uri="{FF2B5EF4-FFF2-40B4-BE49-F238E27FC236}">
+                <a16:creationId xmlns:a16="http://schemas.microsoft.com/office/drawing/2014/main" id="{E3635956-0E29-4614-AFD7-B993823136A4}"/>
               </a:ext>
             </a:extLst>
           </p:cNvPr>
@@ -6589,10 +7519,10 @@
       </p:sp>
       <p:sp>
         <p:nvSpPr>
-          <p:cNvPr id="138" name="shape-137">
-            <a:extLst xmlns:a="http://schemas.openxmlformats.org/drawingml/2006/main">
-              <a:ext uri="{FF2B5EF4-FFF2-40B4-BE49-F238E27FC236}">
-                <a16:creationId xmlns:a16="http://schemas.microsoft.com/office/drawing/2014/main" id="{FFA3B04C-1401-473A-962E-2B8D98A3B871}"/>
+          <p:cNvPr id="161" name="shape-160">
+            <a:extLst xmlns:a="http://schemas.openxmlformats.org/drawingml/2006/main">
+              <a:ext uri="{FF2B5EF4-FFF2-40B4-BE49-F238E27FC236}">
+                <a16:creationId xmlns:a16="http://schemas.microsoft.com/office/drawing/2014/main" id="{FE38719F-335E-46FB-8687-806119A28018}"/>
               </a:ext>
             </a:extLst>
           </p:cNvPr>
@@ -6617,10 +7547,10 @@
       </p:sp>
       <p:cxnSp>
         <p:nvCxnSpPr>
-          <p:cNvPr id="298" name=""/>
+          <p:cNvPr id="344" name=""/>
           <p:cNvCxnSpPr>
-            <a:stCxn xmlns:a="http://schemas.openxmlformats.org/drawingml/2006/main" id="137" idx="3"/>
-            <a:endCxn xmlns:a="http://schemas.openxmlformats.org/drawingml/2006/main" id="138" idx="1"/>
+            <a:stCxn xmlns:a="http://schemas.openxmlformats.org/drawingml/2006/main" id="160" idx="3"/>
+            <a:endCxn xmlns:a="http://schemas.openxmlformats.org/drawingml/2006/main" id="161" idx="1"/>
           </p:cNvCxnSpPr>
           <p:nvPr/>
         </p:nvCxnSpPr>
@@ -6643,10 +7573,10 @@
       </p:cxnSp>
       <p:sp>
         <p:nvSpPr>
-          <p:cNvPr id="140" name="shape-139">
-            <a:extLst xmlns:a="http://schemas.openxmlformats.org/drawingml/2006/main">
-              <a:ext uri="{FF2B5EF4-FFF2-40B4-BE49-F238E27FC236}">
-                <a16:creationId xmlns:a16="http://schemas.microsoft.com/office/drawing/2014/main" id="{FA4B4D32-303E-496B-9463-94445351E6BC}"/>
+          <p:cNvPr id="163" name="shape-162">
+            <a:extLst xmlns:a="http://schemas.openxmlformats.org/drawingml/2006/main">
+              <a:ext uri="{FF2B5EF4-FFF2-40B4-BE49-F238E27FC236}">
+                <a16:creationId xmlns:a16="http://schemas.microsoft.com/office/drawing/2014/main" id="{9E9C4C7C-A970-4E27-A85F-E95A623DD542}"/>
               </a:ext>
             </a:extLst>
           </p:cNvPr>
@@ -6671,10 +7601,10 @@
       </p:sp>
       <p:sp>
         <p:nvSpPr>
-          <p:cNvPr id="141" name="shape-140">
-            <a:extLst xmlns:a="http://schemas.openxmlformats.org/drawingml/2006/main">
-              <a:ext uri="{FF2B5EF4-FFF2-40B4-BE49-F238E27FC236}">
-                <a16:creationId xmlns:a16="http://schemas.microsoft.com/office/drawing/2014/main" id="{1B37697B-9E76-4531-8710-33C6D96CF735}"/>
+          <p:cNvPr id="164" name="shape-163">
+            <a:extLst xmlns:a="http://schemas.openxmlformats.org/drawingml/2006/main">
+              <a:ext uri="{FF2B5EF4-FFF2-40B4-BE49-F238E27FC236}">
+                <a16:creationId xmlns:a16="http://schemas.microsoft.com/office/drawing/2014/main" id="{00A0D0D6-0803-4C4D-B2B8-0717E8B4EBB4}"/>
               </a:ext>
             </a:extLst>
           </p:cNvPr>
@@ -6699,10 +7629,10 @@
       </p:sp>
       <p:cxnSp>
         <p:nvCxnSpPr>
-          <p:cNvPr id="301" name=""/>
+          <p:cNvPr id="347" name=""/>
           <p:cNvCxnSpPr>
-            <a:stCxn xmlns:a="http://schemas.openxmlformats.org/drawingml/2006/main" id="140" idx="0"/>
-            <a:endCxn xmlns:a="http://schemas.openxmlformats.org/drawingml/2006/main" id="141" idx="2"/>
+            <a:stCxn xmlns:a="http://schemas.openxmlformats.org/drawingml/2006/main" id="163" idx="0"/>
+            <a:endCxn xmlns:a="http://schemas.openxmlformats.org/drawingml/2006/main" id="164" idx="2"/>
           </p:cNvCxnSpPr>
           <p:nvPr/>
         </p:nvCxnSpPr>
@@ -6725,10 +7655,10 @@
       </p:cxnSp>
       <p:sp>
         <p:nvSpPr>
-          <p:cNvPr id="143" name="shape-142">
-            <a:extLst xmlns:a="http://schemas.openxmlformats.org/drawingml/2006/main">
-              <a:ext uri="{FF2B5EF4-FFF2-40B4-BE49-F238E27FC236}">
-                <a16:creationId xmlns:a16="http://schemas.microsoft.com/office/drawing/2014/main" id="{6ADBA4F3-4FB3-441B-893D-73A6D35BFB85}"/>
+          <p:cNvPr id="166" name="shape-165">
+            <a:extLst xmlns:a="http://schemas.openxmlformats.org/drawingml/2006/main">
+              <a:ext uri="{FF2B5EF4-FFF2-40B4-BE49-F238E27FC236}">
+                <a16:creationId xmlns:a16="http://schemas.microsoft.com/office/drawing/2014/main" id="{562B5F55-268E-41B9-AA4D-F4784FA23F50}"/>
               </a:ext>
             </a:extLst>
           </p:cNvPr>
@@ -6753,10 +7683,10 @@
       </p:sp>
       <p:sp>
         <p:nvSpPr>
-          <p:cNvPr id="144" name="shape-143">
-            <a:extLst xmlns:a="http://schemas.openxmlformats.org/drawingml/2006/main">
-              <a:ext uri="{FF2B5EF4-FFF2-40B4-BE49-F238E27FC236}">
-                <a16:creationId xmlns:a16="http://schemas.microsoft.com/office/drawing/2014/main" id="{846B64BC-865F-4731-BFD2-5E608D7C64C2}"/>
+          <p:cNvPr id="167" name="shape-166">
+            <a:extLst xmlns:a="http://schemas.openxmlformats.org/drawingml/2006/main">
+              <a:ext uri="{FF2B5EF4-FFF2-40B4-BE49-F238E27FC236}">
+                <a16:creationId xmlns:a16="http://schemas.microsoft.com/office/drawing/2014/main" id="{1834806E-86C9-4A97-9555-256DF0F3F51A}"/>
               </a:ext>
             </a:extLst>
           </p:cNvPr>
@@ -6781,10 +7711,10 @@
       </p:sp>
       <p:cxnSp>
         <p:nvCxnSpPr>
-          <p:cNvPr id="304" name=""/>
+          <p:cNvPr id="350" name=""/>
           <p:cNvCxnSpPr>
-            <a:stCxn xmlns:a="http://schemas.openxmlformats.org/drawingml/2006/main" id="143" idx="3"/>
-            <a:endCxn xmlns:a="http://schemas.openxmlformats.org/drawingml/2006/main" id="144" idx="1"/>
+            <a:stCxn xmlns:a="http://schemas.openxmlformats.org/drawingml/2006/main" id="166" idx="3"/>
+            <a:endCxn xmlns:a="http://schemas.openxmlformats.org/drawingml/2006/main" id="167" idx="1"/>
           </p:cNvCxnSpPr>
           <p:nvPr/>
         </p:nvCxnSpPr>
@@ -6807,10 +7737,10 @@
       </p:cxnSp>
       <p:sp>
         <p:nvSpPr>
-          <p:cNvPr id="146" name="text-145">
-            <a:extLst xmlns:a="http://schemas.openxmlformats.org/drawingml/2006/main">
-              <a:ext uri="{FF2B5EF4-FFF2-40B4-BE49-F238E27FC236}">
-                <a16:creationId xmlns:a16="http://schemas.microsoft.com/office/drawing/2014/main" id="{0ECD30D9-A601-4804-8BD9-7759CFE202D2}"/>
+          <p:cNvPr id="169" name="text-168">
+            <a:extLst xmlns:a="http://schemas.openxmlformats.org/drawingml/2006/main">
+              <a:ext uri="{FF2B5EF4-FFF2-40B4-BE49-F238E27FC236}">
+                <a16:creationId xmlns:a16="http://schemas.microsoft.com/office/drawing/2014/main" id="{FAEC69AA-94D6-4F77-B065-5852D5B5CD8B}"/>
               </a:ext>
             </a:extLst>
           </p:cNvPr>
@@ -6887,10 +7817,10 @@
       </p:sp>
       <p:sp>
         <p:nvSpPr>
-          <p:cNvPr id="147" name="text-146">
-            <a:extLst xmlns:a="http://schemas.openxmlformats.org/drawingml/2006/main">
-              <a:ext uri="{FF2B5EF4-FFF2-40B4-BE49-F238E27FC236}">
-                <a16:creationId xmlns:a16="http://schemas.microsoft.com/office/drawing/2014/main" id="{C6D2552F-E28C-4DBA-9F57-52B45A96D7E6}"/>
+          <p:cNvPr id="170" name="text-169">
+            <a:extLst xmlns:a="http://schemas.openxmlformats.org/drawingml/2006/main">
+              <a:ext uri="{FF2B5EF4-FFF2-40B4-BE49-F238E27FC236}">
+                <a16:creationId xmlns:a16="http://schemas.microsoft.com/office/drawing/2014/main" id="{25A31637-1F49-4B5E-B7D9-B748F53BA4B4}"/>
               </a:ext>
             </a:extLst>
           </p:cNvPr>
@@ -6937,17 +7867,17 @@
                 <a:ea typeface="Hiragino Sans GB"/>
                 <a:cs typeface="Hiragino Sans GB"/>
               </a:rPr>
-              <a:t>01  限制同时调用数与等待时间</a:t>
+              <a:t>01  并发限制与普通流超时</a:t>
             </a:r>
           </a:p>
         </p:txBody>
       </p:sp>
       <p:sp>
         <p:nvSpPr>
-          <p:cNvPr id="148" name="text-147">
-            <a:extLst xmlns:a="http://schemas.openxmlformats.org/drawingml/2006/main">
-              <a:ext uri="{FF2B5EF4-FFF2-40B4-BE49-F238E27FC236}">
-                <a16:creationId xmlns:a16="http://schemas.microsoft.com/office/drawing/2014/main" id="{F3266E9D-401C-44D3-B41C-DA80D90DA3A6}"/>
+          <p:cNvPr id="171" name="text-170">
+            <a:extLst xmlns:a="http://schemas.openxmlformats.org/drawingml/2006/main">
+              <a:ext uri="{FF2B5EF4-FFF2-40B4-BE49-F238E27FC236}">
+                <a16:creationId xmlns:a16="http://schemas.microsoft.com/office/drawing/2014/main" id="{D94EF54E-E397-4836-963D-9797E2A9934D}"/>
               </a:ext>
             </a:extLst>
           </p:cNvPr>
@@ -6994,7 +7924,7 @@
                 <a:ea typeface="Hiragino Sans GB"/>
                 <a:cs typeface="Hiragino Sans GB"/>
               </a:rPr>
-              <a:t>整台实例和单个Agent分别限并发。</a:t>
+              <a:t>实例、单Agent分别限并发，满则拒绝。</a:t>
             </a:r>
           </a:p>
           <a:p xmlns:a="http://schemas.openxmlformats.org/drawingml/2006/main">
@@ -7017,7 +7947,7 @@
                 <a:ea typeface="Hiragino Sans GB"/>
                 <a:cs typeface="Hiragino Sans GB"/>
               </a:rPr>
-              <a:t>超出并发上限，直接拒绝新调用。</a:t>
+              <a:t>各阶段有超时，整次调用另设总时限。</a:t>
             </a:r>
           </a:p>
           <a:p xmlns:a="http://schemas.openxmlformats.org/drawingml/2006/main">
@@ -7040,17 +7970,17 @@
                 <a:ea typeface="Hiragino Sans GB"/>
                 <a:cs typeface="Hiragino Sans GB"/>
               </a:rPr>
-              <a:t>调用超时后释放本地连接和调用名额。</a:t>
+              <a:t>超时后停止等待，释放本地连接与名额。</a:t>
             </a:r>
           </a:p>
         </p:txBody>
       </p:sp>
       <p:sp>
         <p:nvSpPr>
-          <p:cNvPr id="149" name="text-148">
-            <a:extLst xmlns:a="http://schemas.openxmlformats.org/drawingml/2006/main">
-              <a:ext uri="{FF2B5EF4-FFF2-40B4-BE49-F238E27FC236}">
-                <a16:creationId xmlns:a16="http://schemas.microsoft.com/office/drawing/2014/main" id="{C0E462C6-5F46-4A7D-8F7D-4F9C18C5DC0C}"/>
+          <p:cNvPr id="172" name="text-171">
+            <a:extLst xmlns:a="http://schemas.openxmlformats.org/drawingml/2006/main">
+              <a:ext uri="{FF2B5EF4-FFF2-40B4-BE49-F238E27FC236}">
+                <a16:creationId xmlns:a16="http://schemas.microsoft.com/office/drawing/2014/main" id="{6CCF7341-E20A-4591-91F9-84BCA32B7EAD}"/>
               </a:ext>
             </a:extLst>
           </p:cNvPr>
@@ -7097,17 +8027,17 @@
                 <a:ea typeface="Hiragino Sans GB"/>
                 <a:cs typeface="Hiragino Sans GB"/>
               </a:rPr>
-              <a:t>02  长任务在后台继续执行</a:t>
+              <a:t>02  异步任务使用独立等待期限</a:t>
             </a:r>
           </a:p>
         </p:txBody>
       </p:sp>
       <p:sp>
         <p:nvSpPr>
-          <p:cNvPr id="150" name="text-149">
-            <a:extLst xmlns:a="http://schemas.openxmlformats.org/drawingml/2006/main">
-              <a:ext uri="{FF2B5EF4-FFF2-40B4-BE49-F238E27FC236}">
-                <a16:creationId xmlns:a16="http://schemas.microsoft.com/office/drawing/2014/main" id="{14272CDA-8A22-44C0-862C-769E2AAA078A}"/>
+          <p:cNvPr id="173" name="text-172">
+            <a:extLst xmlns:a="http://schemas.openxmlformats.org/drawingml/2006/main">
+              <a:ext uri="{FF2B5EF4-FFF2-40B4-BE49-F238E27FC236}">
+                <a16:creationId xmlns:a16="http://schemas.microsoft.com/office/drawing/2014/main" id="{C4EF6C29-A9F0-467A-B520-63ACBFE81C35}"/>
               </a:ext>
             </a:extLst>
           </p:cNvPr>
@@ -7119,7 +8049,7 @@
         <p:spPr>
           <a:xfrm xmlns:a="http://schemas.openxmlformats.org/drawingml/2006/main">
             <a:off x="10668000" y="3476625"/>
-            <a:ext cx="4048125" cy="742950"/>
+            <a:ext cx="4048125" cy="952500"/>
           </a:xfrm>
           <a:prstGeom xmlns:a="http://schemas.openxmlformats.org/drawingml/2006/main" prst="rect">
             <a:avLst/>
@@ -7154,7 +8084,7 @@
                 <a:ea typeface="Hiragino Sans GB"/>
                 <a:cs typeface="Hiragino Sans GB"/>
               </a:rPr>
-              <a:t>Agent返回“后台处理中”，结束HTTP。</a:t>
+              <a:t>标记返回前，按普通流的期限等待。</a:t>
             </a:r>
           </a:p>
           <a:p xmlns:a="http://schemas.openxmlformats.org/drawingml/2006/main">
@@ -7177,7 +8107,7 @@
                 <a:ea typeface="Hiragino Sans GB"/>
                 <a:cs typeface="Hiragino Sans GB"/>
               </a:rPr>
-              <a:t>ChatService记录runId及等待截止时间。</a:t>
+              <a:t>收到标记后结束HTTP，后台继续运行。</a:t>
             </a:r>
           </a:p>
           <a:p xmlns:a="http://schemas.openxmlformats.org/drawingml/2006/main">
@@ -7200,28 +8130,51 @@
                 <a:ea typeface="Hiragino Sans GB"/>
                 <a:cs typeface="Hiragino Sans GB"/>
               </a:rPr>
-              <a:t>Agent完成或失败后，按runId通知结果。</a:t>
+              <a:t>单次回调处理限时，按runId匹配。</a:t>
+            </a:r>
+          </a:p>
+          <a:p xmlns:a="http://schemas.openxmlformats.org/drawingml/2006/main">
+            <a:pPr algn="l">
+              <a:defRPr sz="1500" b="0">
+                <a:solidFill>
+                  <a:srgbClr val="2D4663"/>
+                </a:solidFill>
+                <a:latin typeface="Hiragino Sans GB"/>
+                <a:ea typeface="Hiragino Sans GB"/>
+                <a:cs typeface="Hiragino Sans GB"/>
+              </a:defRPr>
+            </a:pPr>
+            <a:r>
+              <a:rPr sz="1500" b="0">
+                <a:solidFill>
+                  <a:srgbClr val="2D4663"/>
+                </a:solidFill>
+                <a:latin typeface="Hiragino Sans GB"/>
+                <a:ea typeface="Hiragino Sans GB"/>
+                <a:cs typeface="Hiragino Sans GB"/>
+              </a:rPr>
+              <a:t>到期结束本地任务，远端状态另确认。</a:t>
             </a:r>
           </a:p>
         </p:txBody>
       </p:sp>
       <p:sp>
         <p:nvSpPr>
-          <p:cNvPr id="151" name="text-150">
-            <a:extLst xmlns:a="http://schemas.openxmlformats.org/drawingml/2006/main">
-              <a:ext uri="{FF2B5EF4-FFF2-40B4-BE49-F238E27FC236}">
-                <a16:creationId xmlns:a16="http://schemas.microsoft.com/office/drawing/2014/main" id="{7857F4DB-DA5B-4A4E-A935-FD0DDC1F64FA}"/>
-              </a:ext>
-            </a:extLst>
-          </p:cNvPr>
-          <p:cNvSpPr>
-            <a:spLocks xmlns:a="http://schemas.openxmlformats.org/drawingml/2006/main" noGrp="1"/>
-          </p:cNvSpPr>
-          <p:nvPr/>
-        </p:nvSpPr>
-        <p:spPr>
-          <a:xfrm xmlns:a="http://schemas.openxmlformats.org/drawingml/2006/main">
-            <a:off x="10668000" y="4257675"/>
+          <p:cNvPr id="174" name="text-173">
+            <a:extLst xmlns:a="http://schemas.openxmlformats.org/drawingml/2006/main">
+              <a:ext uri="{FF2B5EF4-FFF2-40B4-BE49-F238E27FC236}">
+                <a16:creationId xmlns:a16="http://schemas.microsoft.com/office/drawing/2014/main" id="{34DFBD4F-980F-429A-98D7-DCF409DBEED5}"/>
+              </a:ext>
+            </a:extLst>
+          </p:cNvPr>
+          <p:cNvSpPr>
+            <a:spLocks xmlns:a="http://schemas.openxmlformats.org/drawingml/2006/main" noGrp="1"/>
+          </p:cNvSpPr>
+          <p:nvPr/>
+        </p:nvSpPr>
+        <p:spPr>
+          <a:xfrm xmlns:a="http://schemas.openxmlformats.org/drawingml/2006/main">
+            <a:off x="10668000" y="4486275"/>
             <a:ext cx="4048125" cy="295275"/>
           </a:xfrm>
           <a:prstGeom xmlns:a="http://schemas.openxmlformats.org/drawingml/2006/main" prst="rect">
@@ -7257,29 +8210,29 @@
                 <a:ea typeface="Hiragino Sans GB"/>
                 <a:cs typeface="Hiragino Sans GB"/>
               </a:rPr>
-              <a:t>03  后台任务限量，结果只记一次</a:t>
+              <a:t>03  后台任务限量与取消超时</a:t>
             </a:r>
           </a:p>
         </p:txBody>
       </p:sp>
       <p:sp>
         <p:nvSpPr>
-          <p:cNvPr id="152" name="text-151">
-            <a:extLst xmlns:a="http://schemas.openxmlformats.org/drawingml/2006/main">
-              <a:ext uri="{FF2B5EF4-FFF2-40B4-BE49-F238E27FC236}">
-                <a16:creationId xmlns:a16="http://schemas.microsoft.com/office/drawing/2014/main" id="{DD3E993F-CC90-45E1-B33A-626829C06037}"/>
-              </a:ext>
-            </a:extLst>
-          </p:cNvPr>
-          <p:cNvSpPr>
-            <a:spLocks xmlns:a="http://schemas.openxmlformats.org/drawingml/2006/main" noGrp="1"/>
-          </p:cNvSpPr>
-          <p:nvPr/>
-        </p:nvSpPr>
-        <p:spPr>
-          <a:xfrm xmlns:a="http://schemas.openxmlformats.org/drawingml/2006/main">
-            <a:off x="10668000" y="4591050"/>
-            <a:ext cx="4048125" cy="952500"/>
+          <p:cNvPr id="175" name="text-174">
+            <a:extLst xmlns:a="http://schemas.openxmlformats.org/drawingml/2006/main">
+              <a:ext uri="{FF2B5EF4-FFF2-40B4-BE49-F238E27FC236}">
+                <a16:creationId xmlns:a16="http://schemas.microsoft.com/office/drawing/2014/main" id="{7123B49D-AC80-49F6-A79A-A94FFA453474}"/>
+              </a:ext>
+            </a:extLst>
+          </p:cNvPr>
+          <p:cNvSpPr>
+            <a:spLocks xmlns:a="http://schemas.openxmlformats.org/drawingml/2006/main" noGrp="1"/>
+          </p:cNvSpPr>
+          <p:nvPr/>
+        </p:nvSpPr>
+        <p:spPr>
+          <a:xfrm xmlns:a="http://schemas.openxmlformats.org/drawingml/2006/main">
+            <a:off x="10668000" y="4819650"/>
+            <a:ext cx="4048125" cy="742950"/>
           </a:xfrm>
           <a:prstGeom xmlns:a="http://schemas.openxmlformats.org/drawingml/2006/main" prst="rect">
             <a:avLst/>
@@ -7314,7 +8267,7 @@
                 <a:ea typeface="Hiragino Sans GB"/>
                 <a:cs typeface="Hiragino Sans GB"/>
               </a:rPr>
-              <a:t>按用户、租户、Agent限制未完成任务数。</a:t>
+              <a:t>按用户、租户和Agent限制未完成任务数。</a:t>
             </a:r>
           </a:p>
           <a:p xmlns:a="http://schemas.openxmlformats.org/drawingml/2006/main">
@@ -7337,7 +8290,7 @@
                 <a:ea typeface="Hiragino Sans GB"/>
                 <a:cs typeface="Hiragino Sans GB"/>
               </a:rPr>
-              <a:t>状态未准备好时，通知下游稍后重试。</a:t>
+              <a:t>达到上限，暂不发起新的后台任务。</a:t>
             </a:r>
           </a:p>
           <a:p xmlns:a="http://schemas.openxmlformats.org/drawingml/2006/main">
@@ -7360,40 +8313,17 @@
                 <a:ea typeface="Hiragino Sans GB"/>
                 <a:cs typeface="Hiragino Sans GB"/>
               </a:rPr>
-              <a:t>重复通知、完成与超时同时发生，</a:t>
-            </a:r>
-          </a:p>
-          <a:p xmlns:a="http://schemas.openxmlformats.org/drawingml/2006/main">
-            <a:pPr algn="l">
-              <a:defRPr sz="1500" b="0">
-                <a:solidFill>
-                  <a:srgbClr val="2D4663"/>
-                </a:solidFill>
-                <a:latin typeface="Hiragino Sans GB"/>
-                <a:ea typeface="Hiragino Sans GB"/>
-                <a:cs typeface="Hiragino Sans GB"/>
-              </a:defRPr>
-            </a:pPr>
-            <a:r>
-              <a:rPr sz="1500" b="0">
-                <a:solidFill>
-                  <a:srgbClr val="2D4663"/>
-                </a:solidFill>
-                <a:latin typeface="Hiragino Sans GB"/>
-                <a:ea typeface="Hiragino Sans GB"/>
-                <a:cs typeface="Hiragino Sans GB"/>
-              </a:rPr>
-              <a:t>任务最终状态只写入一次。</a:t>
+              <a:t>取消超时先查任务状态，不自动重跑。</a:t>
             </a:r>
           </a:p>
         </p:txBody>
       </p:sp>
       <p:sp>
         <p:nvSpPr>
-          <p:cNvPr id="153" name="text-152">
-            <a:extLst xmlns:a="http://schemas.openxmlformats.org/drawingml/2006/main">
-              <a:ext uri="{FF2B5EF4-FFF2-40B4-BE49-F238E27FC236}">
-                <a16:creationId xmlns:a16="http://schemas.microsoft.com/office/drawing/2014/main" id="{850E260C-9A5F-48DD-B2C6-228465512D0A}"/>
+          <p:cNvPr id="176" name="text-175">
+            <a:extLst xmlns:a="http://schemas.openxmlformats.org/drawingml/2006/main">
+              <a:ext uri="{FF2B5EF4-FFF2-40B4-BE49-F238E27FC236}">
+                <a16:creationId xmlns:a16="http://schemas.microsoft.com/office/drawing/2014/main" id="{D9AB372E-817A-4069-AA84-F22EFD2D12F8}"/>
               </a:ext>
             </a:extLst>
           </p:cNvPr>
@@ -7447,10 +8377,10 @@
       </p:sp>
       <p:sp>
         <p:nvSpPr>
-          <p:cNvPr id="154" name="text-153">
-            <a:extLst xmlns:a="http://schemas.openxmlformats.org/drawingml/2006/main">
-              <a:ext uri="{FF2B5EF4-FFF2-40B4-BE49-F238E27FC236}">
-                <a16:creationId xmlns:a16="http://schemas.microsoft.com/office/drawing/2014/main" id="{FBDC487F-ED48-4DC7-9459-CF48ED69EC3B}"/>
+          <p:cNvPr id="177" name="text-176">
+            <a:extLst xmlns:a="http://schemas.openxmlformats.org/drawingml/2006/main">
+              <a:ext uri="{FF2B5EF4-FFF2-40B4-BE49-F238E27FC236}">
+                <a16:creationId xmlns:a16="http://schemas.microsoft.com/office/drawing/2014/main" id="{26038464-3D80-478C-8E36-CFE1F6588737}"/>
               </a:ext>
             </a:extLst>
           </p:cNvPr>
@@ -7550,10 +8480,10 @@
       </p:sp>
       <p:sp>
         <p:nvSpPr>
-          <p:cNvPr id="155" name="text-154">
-            <a:extLst xmlns:a="http://schemas.openxmlformats.org/drawingml/2006/main">
-              <a:ext uri="{FF2B5EF4-FFF2-40B4-BE49-F238E27FC236}">
-                <a16:creationId xmlns:a16="http://schemas.microsoft.com/office/drawing/2014/main" id="{C6461271-E4BD-4EB4-B1BA-163931ACFE40}"/>
+          <p:cNvPr id="178" name="text-177">
+            <a:extLst xmlns:a="http://schemas.openxmlformats.org/drawingml/2006/main">
+              <a:ext uri="{FF2B5EF4-FFF2-40B4-BE49-F238E27FC236}">
+                <a16:creationId xmlns:a16="http://schemas.microsoft.com/office/drawing/2014/main" id="{919C4C14-2AA9-4A3A-88A4-D6AC5ACBF5AD}"/>
               </a:ext>
             </a:extLst>
           </p:cNvPr>
@@ -7607,10 +8537,10 @@
       </p:sp>
       <p:sp>
         <p:nvSpPr>
-          <p:cNvPr id="156" name="text-155">
-            <a:extLst xmlns:a="http://schemas.openxmlformats.org/drawingml/2006/main">
-              <a:ext uri="{FF2B5EF4-FFF2-40B4-BE49-F238E27FC236}">
-                <a16:creationId xmlns:a16="http://schemas.microsoft.com/office/drawing/2014/main" id="{33E27068-CAC2-45FC-8683-1345C8DC85F6}"/>
+          <p:cNvPr id="179" name="text-178">
+            <a:extLst xmlns:a="http://schemas.openxmlformats.org/drawingml/2006/main">
+              <a:ext uri="{FF2B5EF4-FFF2-40B4-BE49-F238E27FC236}">
+                <a16:creationId xmlns:a16="http://schemas.microsoft.com/office/drawing/2014/main" id="{783C89AD-9F30-4C20-8FFC-FB4BB562864D}"/>
               </a:ext>
             </a:extLst>
           </p:cNvPr>
@@ -7710,10 +8640,10 @@
       </p:sp>
       <p:sp>
         <p:nvSpPr>
-          <p:cNvPr id="157" name="line-156">
-            <a:extLst xmlns:a="http://schemas.openxmlformats.org/drawingml/2006/main">
-              <a:ext uri="{FF2B5EF4-FFF2-40B4-BE49-F238E27FC236}">
-                <a16:creationId xmlns:a16="http://schemas.microsoft.com/office/drawing/2014/main" id="{77A3C610-FEF0-427C-AAB3-2BD74D64D287}"/>
+          <p:cNvPr id="180" name="line-179">
+            <a:extLst xmlns:a="http://schemas.openxmlformats.org/drawingml/2006/main">
+              <a:ext uri="{FF2B5EF4-FFF2-40B4-BE49-F238E27FC236}">
+                <a16:creationId xmlns:a16="http://schemas.microsoft.com/office/drawing/2014/main" id="{46BCD39C-2C75-40AD-84F1-D49900BA0D7B}"/>
               </a:ext>
             </a:extLst>
           </p:cNvPr>
@@ -7741,10 +8671,10 @@
       </p:sp>
       <p:sp>
         <p:nvSpPr>
-          <p:cNvPr id="158" name="text-157">
-            <a:extLst xmlns:a="http://schemas.openxmlformats.org/drawingml/2006/main">
-              <a:ext uri="{FF2B5EF4-FFF2-40B4-BE49-F238E27FC236}">
-                <a16:creationId xmlns:a16="http://schemas.microsoft.com/office/drawing/2014/main" id="{5F4C809D-3D9F-4B19-9EDC-34561F4E6E39}"/>
+          <p:cNvPr id="181" name="text-180">
+            <a:extLst xmlns:a="http://schemas.openxmlformats.org/drawingml/2006/main">
+              <a:ext uri="{FF2B5EF4-FFF2-40B4-BE49-F238E27FC236}">
+                <a16:creationId xmlns:a16="http://schemas.microsoft.com/office/drawing/2014/main" id="{F0AA7ED8-EDF4-43F3-83AF-AF2EC6673839}"/>
               </a:ext>
             </a:extLst>
           </p:cNvPr>
@@ -7791,17 +8721,17 @@
                 <a:ea typeface="Hiragino Sans GB"/>
                 <a:cs typeface="Hiragino Sans GB"/>
               </a:rPr>
-              <a:t>下游协议：三方确认帧大小、发送速度、JSON结构和任务时限并联测。符合约定却被误拒，由本方修复。</a:t>
+              <a:t>下游协议：三方确认数据限制、各段超时和后台任务期限并联测。符合约定却被误拒，由本方修复。</a:t>
             </a:r>
           </a:p>
         </p:txBody>
       </p:sp>
       <p:sp>
         <p:nvSpPr>
-          <p:cNvPr id="159" name="text-158">
-            <a:extLst xmlns:a="http://schemas.openxmlformats.org/drawingml/2006/main">
-              <a:ext uri="{FF2B5EF4-FFF2-40B4-BE49-F238E27FC236}">
-                <a16:creationId xmlns:a16="http://schemas.microsoft.com/office/drawing/2014/main" id="{83EA061B-6742-42C1-BDEA-9D18717BAEF6}"/>
+          <p:cNvPr id="182" name="text-181">
+            <a:extLst xmlns:a="http://schemas.openxmlformats.org/drawingml/2006/main">
+              <a:ext uri="{FF2B5EF4-FFF2-40B4-BE49-F238E27FC236}">
+                <a16:creationId xmlns:a16="http://schemas.microsoft.com/office/drawing/2014/main" id="{2FEF3F19-26FC-4953-9949-9BAFFEC5AA5F}"/>
               </a:ext>
             </a:extLst>
           </p:cNvPr>
@@ -7848,7 +8778,7 @@
                 <a:ea typeface="Hiragino Sans GB"/>
                 <a:cs typeface="Hiragino Sans GB"/>
               </a:rPr>
-              <a:t>待补充：查询远端任务状态、确认取消是否成功。连接结束不代表远端任务停止。FULL / no-store规则不变。</a:t>
+              <a:t>本页为加固设计。后台任务限量、远端查询与取消确认待补充。连接结束不代表任务停止。FULL / no-store规则不变。</a:t>
             </a:r>
           </a:p>
         </p:txBody>

--- a/docs/presentations/Agent高可用加固.pptx
+++ b/docs/presentations/Agent高可用加固.pptx
@@ -2,13 +2,13 @@
 <file path=ppt/presentation.xml><?xml version="1.0" encoding="utf-8"?>
 <p:presentation xmlns:p="http://schemas.openxmlformats.org/presentationml/2006/main">
   <p:sldMasterIdLst>
-    <p:sldMasterId xmlns:r="http://schemas.openxmlformats.org/officeDocument/2006/relationships" id="2147483648" r:id="Ra38dafb9b9c04909"/>
+    <p:sldMasterId xmlns:r="http://schemas.openxmlformats.org/officeDocument/2006/relationships" id="2147483648" r:id="R52b20cd093614509"/>
   </p:sldMasterIdLst>
   <p:notesMasterIdLst>
-    <p:notesMasterId xmlns:r="http://schemas.openxmlformats.org/officeDocument/2006/relationships" r:id="R39d0bb2c99054db6"/>
+    <p:notesMasterId xmlns:r="http://schemas.openxmlformats.org/officeDocument/2006/relationships" r:id="Rbe278d6521514525"/>
   </p:notesMasterIdLst>
   <p:sldIdLst>
-    <p:sldId xmlns:r="http://schemas.openxmlformats.org/officeDocument/2006/relationships" id="256" r:id="R9846a9ee71894317"/>
+    <p:sldId xmlns:r="http://schemas.openxmlformats.org/officeDocument/2006/relationships" id="256" r:id="R0ac4de4f1c2c451a"/>
   </p:sldIdLst>
   <p:sldSz cx="15240000" cy="8572500"/>
   <p:notesSz cx="6858000" cy="9144000"/>
@@ -457,7 +457,7 @@
           </a:p>
           <a:p xmlns:a="http://schemas.openxmlformats.org/drawingml/2006/main">
             <a:r>
-              <a:t>本页沿用当前ChatService到agentService再到DomainAgent的调用关系，以及现有的异步标记、Execution挂起和终态回调。异步链以现有runId关联，不要求增加一个远端任务ID作为前置条件。图中连接并发、帧速率、组帧期限、解析任务P和总驻留字节等为按现有代码缺口设计的加固机制，不宣称已经全部实现。长任务行描述runId关联的异步执行方案，启用状态以生产配置为准。新增保护与协议能力需实施和验证。</a:t>
+              <a:t>本页沿用当前ChatService到agentService再到DomainAgent的调用关系，以及现有的异步标记、Execution挂起和终态回调。异步链以现有runId关联，不要求增加一个远端任务ID作为前置条件。图中连接并发、单帧大小、组帧期限、解析任务P和总驻留字节等为按现有代码缺口设计的加固机制，不宣称已经全部实现。长任务行描述runId关联的异步执行方案，启用状态以生产配置为准。新增保护与协议能力需实施和验证。</a:t>
             </a:r>
           </a:p>
           <a:p xmlns:a="http://schemas.openxmlformats.org/drawingml/2006/main">
@@ -557,7 +557,7 @@
           </a:p>
           <a:p xmlns:a="http://schemas.openxmlformats.org/drawingml/2006/main">
             <a:r>
-              <a:t>超大帧、高频帧、长帧及长文本可能导致解析/序列化工作量、驻留缓冲、正文与编码副本增长，进而CPU、堆内存与GC压力升高，不把代码模式直接写为已复现OOM。现有帧和回调上限保留，拟补充速率、队列字节、处理并行和累计正文等总预算。单帧UTF-8字节、组帧期限、帧速率/字节速率及突发量须三方签认并按版本联测。持续有字节但不形成完整逻辑帧时，组帧期限从帧起始计时，不随每个chunk无限刷新。</a:t>
+              <a:t>超大帧、高频帧、长帧及长文本可能导致解析/序列化工作量、驻留缓冲、正文与编码副本增长，进而CPU、堆内存与GC压力升高，不把代码模式直接写为已复现OOM。现有帧和回调上限保留，拟补充队列字节、处理并行和累计正文等总预算。单帧UTF-8字节上限、组帧期限及异常处理方式须三方签认并按版本联测。持续有字节但不形成完整逻辑帧时，组帧期限从帧起始计时，不随每个chunk无限刷新。</a:t>
             </a:r>
           </a:p>
           <a:p xmlns:a="http://schemas.openxmlformats.org/drawingml/2006/main">
@@ -707,127 +707,27 @@
           </a:p>
           <a:p xmlns:a="http://schemas.openxmlformats.org/drawingml/2006/main">
             <a:r>
-              <a:t>01  并发限制与普通流超时</a:t>
-            </a:r>
-          </a:p>
-          <a:p xmlns:a="http://schemas.openxmlformats.org/drawingml/2006/main">
-            <a:r>
-              <a:t>实例、单Agent分别限并发，满则拒绝。</a:t>
-            </a:r>
-          </a:p>
-          <a:p xmlns:a="http://schemas.openxmlformats.org/drawingml/2006/main">
-            <a:r>
-              <a:t>各阶段有超时，整次调用另设总时限。</a:t>
-            </a:r>
-          </a:p>
-          <a:p xmlns:a="http://schemas.openxmlformats.org/drawingml/2006/main">
-            <a:r>
-              <a:t>超时后停止等待，释放本地连接与名额。</a:t>
-            </a:r>
-          </a:p>
-          <a:p xmlns:a="http://schemas.openxmlformats.org/drawingml/2006/main">
-            <a:r>
               <a:t/>
             </a:r>
           </a:p>
           <a:p xmlns:a="http://schemas.openxmlformats.org/drawingml/2006/main">
             <a:r>
-              <a:t>02  异步任务使用独立等待期限</a:t>
-            </a:r>
-          </a:p>
-          <a:p xmlns:a="http://schemas.openxmlformats.org/drawingml/2006/main">
-            <a:r>
-              <a:t>标记返回前，按普通流的期限等待。</a:t>
-            </a:r>
-          </a:p>
-          <a:p xmlns:a="http://schemas.openxmlformats.org/drawingml/2006/main">
-            <a:r>
-              <a:t>收到标记后结束HTTP，后台继续运行。</a:t>
-            </a:r>
-          </a:p>
-          <a:p xmlns:a="http://schemas.openxmlformats.org/drawingml/2006/main">
-            <a:r>
-              <a:t>单次回调处理限时，按runId匹配。</a:t>
-            </a:r>
-          </a:p>
-          <a:p xmlns:a="http://schemas.openxmlformats.org/drawingml/2006/main">
-            <a:r>
-              <a:t>到期结束本地任务，远端状态另确认。</a:t>
-            </a:r>
-          </a:p>
-          <a:p xmlns:a="http://schemas.openxmlformats.org/drawingml/2006/main">
-            <a:r>
-              <a:t/>
-            </a:r>
-          </a:p>
-          <a:p xmlns:a="http://schemas.openxmlformats.org/drawingml/2006/main">
-            <a:r>
-              <a:t>03  后台任务限量与取消超时</a:t>
-            </a:r>
-          </a:p>
-          <a:p xmlns:a="http://schemas.openxmlformats.org/drawingml/2006/main">
-            <a:r>
-              <a:t>按用户、租户和Agent限制未完成任务数。</a:t>
-            </a:r>
-          </a:p>
-          <a:p xmlns:a="http://schemas.openxmlformats.org/drawingml/2006/main">
-            <a:r>
-              <a:t>达到上限，暂不发起新的后台任务。</a:t>
-            </a:r>
-          </a:p>
-          <a:p xmlns:a="http://schemas.openxmlformats.org/drawingml/2006/main">
-            <a:r>
-              <a:t>取消超时先查任务状态，不自动重跑。</a:t>
-            </a:r>
-          </a:p>
-          <a:p xmlns:a="http://schemas.openxmlformats.org/drawingml/2006/main">
-            <a:r>
-              <a:t/>
-            </a:r>
-          </a:p>
-          <a:p xmlns:a="http://schemas.openxmlformats.org/drawingml/2006/main">
-            <a:r>
-              <a:t>04  限制处理量和内存增长</a:t>
-            </a:r>
-          </a:p>
-          <a:p xmlns:a="http://schemas.openxmlformats.org/drawingml/2006/main">
-            <a:r>
-              <a:t>队列同时限制条数和字节数。</a:t>
-            </a:r>
-          </a:p>
-          <a:p xmlns:a="http://schemas.openxmlformats.org/drawingml/2006/main">
-            <a:r>
-              <a:t>最多P个任务同时处理，限制JSON层数。</a:t>
-            </a:r>
-          </a:p>
-          <a:p xmlns:a="http://schemas.openxmlformats.org/drawingml/2006/main">
-            <a:r>
-              <a:t>正文和编码副本都计入内存上限。</a:t>
-            </a:r>
-          </a:p>
-          <a:p xmlns:a="http://schemas.openxmlformats.org/drawingml/2006/main">
-            <a:r>
-              <a:t/>
-            </a:r>
-          </a:p>
-          <a:p xmlns:a="http://schemas.openxmlformats.org/drawingml/2006/main">
-            <a:r>
-              <a:t>05  积压先暂停，超限明确报错</a:t>
-            </a:r>
-          </a:p>
-          <a:p xmlns:a="http://schemas.openxmlformats.org/drawingml/2006/main">
-            <a:r>
-              <a:t>队列接近上限时暂停接收，减少后恢复。</a:t>
-            </a:r>
-          </a:p>
-          <a:p xmlns:a="http://schemas.openxmlformats.org/drawingml/2006/main">
-            <a:r>
-              <a:t>超过上限或暂停太久，停止本次调用。</a:t>
-            </a:r>
-          </a:p>
-          <a:p xmlns:a="http://schemas.openxmlformats.org/drawingml/2006/main">
-            <a:r>
-              <a:t>不丢帧、不截断后再向前端报告成功。</a:t>
+              <a:t>右侧讲解顺序</a:t>
+            </a:r>
+          </a:p>
+          <a:p xmlns:a="http://schemas.openxmlformats.org/drawingml/2006/main">
+            <a:r>
+              <a:t>① 连接与长任务控制：并发准入、普通流各阶段和整体期限、异步标记及后台任务限量与独立等待期限。</a:t>
+            </a:r>
+          </a:p>
+          <a:p xmlns:a="http://schemas.openxmlformats.org/drawingml/2006/main">
+            <a:r>
+              <a:t>② 响应结果消费控制：单帧接收、排队与处理、正文内存。两组顺序与左图一致。</a:t>
+            </a:r>
+          </a:p>
+          <a:p xmlns:a="http://schemas.openxmlformats.org/drawingml/2006/main">
+            <a:r>
+              <a:t>具体限制与暂停策略须与下游协议签认；达到硬上限或暂停超时应明确失败，不能静默丢帧或截断后报成功。单次回调处理限时、JSON结构复杂度限制、远端查询和取消确认的实现及验证要求保留在上述详细备注中。</a:t>
             </a:r>
           </a:p>
         </p:txBody>
@@ -895,7 +795,7 @@
   </p:cSld>
   <p:clrMap bg1="lt1" tx1="dk1" bg2="lt2" tx2="dk2" accent1="accent1" accent2="accent2" accent3="accent3" accent4="accent4" accent5="accent5" accent6="accent6" hlink="hlink" folHlink="folHlink"/>
   <p:sldLayoutIdLst>
-    <p:sldLayoutId xmlns:r="http://schemas.openxmlformats.org/officeDocument/2006/relationships" id="2147483649" r:id="Rc4cec6f1bee3463b"/>
+    <p:sldLayoutId xmlns:r="http://schemas.openxmlformats.org/officeDocument/2006/relationships" id="2147483649" r:id="R0dfa498bb8f84a06"/>
   </p:sldLayoutIdLst>
   <p:txStyles>
     <p:titleStyle>
@@ -1475,6 +1375,7 @@
           <a:lstStyle xmlns:a="http://schemas.openxmlformats.org/drawingml/2006/main"/>
           <a:p xmlns:a="http://schemas.openxmlformats.org/drawingml/2006/main">
             <a:pPr algn="l">
+              <a:buNone/>
               <a:defRPr sz="3225" b="1">
                 <a:solidFill>
                   <a:srgbClr val="163A63"/>
@@ -1532,6 +1433,7 @@
           <a:lstStyle xmlns:a="http://schemas.openxmlformats.org/drawingml/2006/main"/>
           <a:p xmlns:a="http://schemas.openxmlformats.org/drawingml/2006/main">
             <a:pPr algn="l">
+              <a:buNone/>
               <a:defRPr sz="1875" b="0">
                 <a:solidFill>
                   <a:srgbClr val="2166B0"/>
@@ -1620,6 +1522,7 @@
           <a:lstStyle xmlns:a="http://schemas.openxmlformats.org/drawingml/2006/main"/>
           <a:p xmlns:a="http://schemas.openxmlformats.org/drawingml/2006/main">
             <a:pPr algn="l">
+              <a:buNone/>
               <a:defRPr sz="2100" b="1">
                 <a:solidFill>
                   <a:srgbClr val="163A63"/>
@@ -1677,6 +1580,7 @@
           <a:lstStyle xmlns:a="http://schemas.openxmlformats.org/drawingml/2006/main"/>
           <a:p xmlns:a="http://schemas.openxmlformats.org/drawingml/2006/main">
             <a:pPr algn="l">
+              <a:buNone/>
               <a:defRPr sz="2100" b="1">
                 <a:solidFill>
                   <a:srgbClr val="163A63"/>
@@ -1734,6 +1638,7 @@
           <a:lstStyle xmlns:a="http://schemas.openxmlformats.org/drawingml/2006/main"/>
           <a:p xmlns:a="http://schemas.openxmlformats.org/drawingml/2006/main">
             <a:pPr algn="l">
+              <a:buNone/>
               <a:defRPr sz="1875" b="1">
                 <a:solidFill>
                   <a:srgbClr val="2166B0"/>
@@ -2110,6 +2015,7 @@
           <a:lstStyle xmlns:a="http://schemas.openxmlformats.org/drawingml/2006/main"/>
           <a:p xmlns:a="http://schemas.openxmlformats.org/drawingml/2006/main">
             <a:pPr algn="ctr">
+              <a:buNone/>
               <a:defRPr sz="1725" b="1">
                 <a:solidFill>
                   <a:srgbClr val="163A63"/>
@@ -2199,6 +2105,7 @@
           <a:lstStyle xmlns:a="http://schemas.openxmlformats.org/drawingml/2006/main"/>
           <a:p xmlns:a="http://schemas.openxmlformats.org/drawingml/2006/main">
             <a:pPr algn="ctr">
+              <a:buNone/>
               <a:defRPr sz="1500" b="1">
                 <a:solidFill>
                   <a:srgbClr val="163A63"/>
@@ -2222,6 +2129,7 @@
           </a:p>
           <a:p xmlns:a="http://schemas.openxmlformats.org/drawingml/2006/main">
             <a:pPr algn="ctr">
+              <a:buNone/>
               <a:defRPr sz="1500" b="1">
                 <a:solidFill>
                   <a:srgbClr val="163A63"/>
@@ -2303,7 +2211,7 @@
       </p:sp>
       <p:cxnSp>
         <p:nvCxnSpPr>
-          <p:cNvPr id="204" name=""/>
+          <p:cNvPr id="549" name=""/>
           <p:cNvCxnSpPr>
             <a:stCxn xmlns:a="http://schemas.openxmlformats.org/drawingml/2006/main" id="20" idx="3"/>
             <a:endCxn xmlns:a="http://schemas.openxmlformats.org/drawingml/2006/main" id="21" idx="1"/>
@@ -2361,6 +2269,7 @@
           <a:lstStyle xmlns:a="http://schemas.openxmlformats.org/drawingml/2006/main"/>
           <a:p xmlns:a="http://schemas.openxmlformats.org/drawingml/2006/main">
             <a:pPr algn="ctr">
+              <a:buNone/>
               <a:defRPr sz="1425" b="0">
                 <a:solidFill>
                   <a:srgbClr val="647D99"/>
@@ -2536,7 +2445,7 @@
       </p:sp>
       <p:cxnSp>
         <p:nvCxnSpPr>
-          <p:cNvPr id="211" name=""/>
+          <p:cNvPr id="556" name=""/>
           <p:cNvCxnSpPr>
             <a:stCxn xmlns:a="http://schemas.openxmlformats.org/drawingml/2006/main" id="27" idx="3"/>
             <a:endCxn xmlns:a="http://schemas.openxmlformats.org/drawingml/2006/main" id="28" idx="1"/>
@@ -2594,6 +2503,7 @@
           <a:lstStyle xmlns:a="http://schemas.openxmlformats.org/drawingml/2006/main"/>
           <a:p xmlns:a="http://schemas.openxmlformats.org/drawingml/2006/main">
             <a:pPr algn="ctr">
+              <a:buNone/>
               <a:defRPr sz="1575" b="1">
                 <a:solidFill>
                   <a:srgbClr val="163A63"/>
@@ -2970,6 +2880,7 @@
           <a:lstStyle xmlns:a="http://schemas.openxmlformats.org/drawingml/2006/main"/>
           <a:p xmlns:a="http://schemas.openxmlformats.org/drawingml/2006/main">
             <a:pPr algn="ctr">
+              <a:buNone/>
               <a:defRPr sz="1725" b="1">
                 <a:solidFill>
                   <a:srgbClr val="163A63"/>
@@ -3051,7 +2962,7 @@
       </p:sp>
       <p:cxnSp>
         <p:nvCxnSpPr>
-          <p:cNvPr id="226" name=""/>
+          <p:cNvPr id="571" name=""/>
           <p:cNvCxnSpPr>
             <a:stCxn xmlns:a="http://schemas.openxmlformats.org/drawingml/2006/main" id="42" idx="3"/>
             <a:endCxn xmlns:a="http://schemas.openxmlformats.org/drawingml/2006/main" id="43" idx="1"/>
@@ -3141,6 +3052,7 @@
           <a:lstStyle xmlns:a="http://schemas.openxmlformats.org/drawingml/2006/main"/>
           <a:p xmlns:a="http://schemas.openxmlformats.org/drawingml/2006/main">
             <a:pPr algn="ctr">
+              <a:buNone/>
               <a:defRPr sz="1650" b="1">
                 <a:solidFill>
                   <a:srgbClr val="2166B0"/>
@@ -3222,7 +3134,7 @@
       </p:sp>
       <p:cxnSp>
         <p:nvCxnSpPr>
-          <p:cNvPr id="231" name=""/>
+          <p:cNvPr id="576" name=""/>
           <p:cNvCxnSpPr>
             <a:stCxn xmlns:a="http://schemas.openxmlformats.org/drawingml/2006/main" id="47" idx="3"/>
             <a:endCxn xmlns:a="http://schemas.openxmlformats.org/drawingml/2006/main" id="48" idx="1"/>
@@ -3280,6 +3192,7 @@
           <a:lstStyle xmlns:a="http://schemas.openxmlformats.org/drawingml/2006/main"/>
           <a:p xmlns:a="http://schemas.openxmlformats.org/drawingml/2006/main">
             <a:pPr algn="ctr">
+              <a:buNone/>
               <a:defRPr sz="1425" b="0">
                 <a:solidFill>
                   <a:srgbClr val="647D99"/>
@@ -3337,6 +3250,7 @@
           <a:lstStyle xmlns:a="http://schemas.openxmlformats.org/drawingml/2006/main"/>
           <a:p xmlns:a="http://schemas.openxmlformats.org/drawingml/2006/main">
             <a:pPr algn="ctr">
+              <a:buNone/>
               <a:defRPr sz="1725" b="1">
                 <a:solidFill>
                   <a:srgbClr val="163A63"/>
@@ -3394,6 +3308,7 @@
           <a:lstStyle xmlns:a="http://schemas.openxmlformats.org/drawingml/2006/main"/>
           <a:p xmlns:a="http://schemas.openxmlformats.org/drawingml/2006/main">
             <a:pPr algn="l">
+              <a:buNone/>
               <a:defRPr sz="1650" b="1">
                 <a:solidFill>
                   <a:srgbClr val="2166B0"/>
@@ -3451,6 +3366,7 @@
           <a:lstStyle xmlns:a="http://schemas.openxmlformats.org/drawingml/2006/main"/>
           <a:p xmlns:a="http://schemas.openxmlformats.org/drawingml/2006/main">
             <a:pPr algn="ctr">
+              <a:buNone/>
               <a:defRPr sz="1575" b="1">
                 <a:solidFill>
                   <a:srgbClr val="163A63"/>
@@ -3508,6 +3424,7 @@
           <a:lstStyle xmlns:a="http://schemas.openxmlformats.org/drawingml/2006/main"/>
           <a:p xmlns:a="http://schemas.openxmlformats.org/drawingml/2006/main">
             <a:pPr algn="ctr">
+              <a:buNone/>
               <a:defRPr sz="1350" b="0">
                 <a:solidFill>
                   <a:srgbClr val="2D4663"/>
@@ -3565,6 +3482,7 @@
           <a:lstStyle xmlns:a="http://schemas.openxmlformats.org/drawingml/2006/main"/>
           <a:p xmlns:a="http://schemas.openxmlformats.org/drawingml/2006/main">
             <a:pPr algn="ctr">
+              <a:buNone/>
               <a:defRPr sz="1575" b="1">
                 <a:solidFill>
                   <a:srgbClr val="163A63"/>
@@ -3622,6 +3540,7 @@
           <a:lstStyle xmlns:a="http://schemas.openxmlformats.org/drawingml/2006/main"/>
           <a:p xmlns:a="http://schemas.openxmlformats.org/drawingml/2006/main">
             <a:pPr algn="ctr">
+              <a:buNone/>
               <a:defRPr sz="1350" b="0">
                 <a:solidFill>
                   <a:srgbClr val="2D4663"/>
@@ -3679,6 +3598,7 @@
           <a:lstStyle xmlns:a="http://schemas.openxmlformats.org/drawingml/2006/main"/>
           <a:p xmlns:a="http://schemas.openxmlformats.org/drawingml/2006/main">
             <a:pPr algn="ctr">
+              <a:buNone/>
               <a:defRPr sz="1575" b="1">
                 <a:solidFill>
                   <a:srgbClr val="163A63"/>
@@ -3736,6 +3656,7 @@
           <a:lstStyle xmlns:a="http://schemas.openxmlformats.org/drawingml/2006/main"/>
           <a:p xmlns:a="http://schemas.openxmlformats.org/drawingml/2006/main">
             <a:pPr algn="ctr">
+              <a:buNone/>
               <a:defRPr sz="1350" b="0">
                 <a:solidFill>
                   <a:srgbClr val="2D4663"/>
@@ -3793,6 +3714,7 @@
           <a:lstStyle xmlns:a="http://schemas.openxmlformats.org/drawingml/2006/main"/>
           <a:p xmlns:a="http://schemas.openxmlformats.org/drawingml/2006/main">
             <a:pPr algn="ctr">
+              <a:buNone/>
               <a:defRPr sz="1575" b="1">
                 <a:solidFill>
                   <a:srgbClr val="163A63"/>
@@ -3850,6 +3772,7 @@
           <a:lstStyle xmlns:a="http://schemas.openxmlformats.org/drawingml/2006/main"/>
           <a:p xmlns:a="http://schemas.openxmlformats.org/drawingml/2006/main">
             <a:pPr algn="ctr">
+              <a:buNone/>
               <a:defRPr sz="1350" b="0">
                 <a:solidFill>
                   <a:srgbClr val="2D4663"/>
@@ -3931,7 +3854,7 @@
       </p:sp>
       <p:cxnSp>
         <p:nvCxnSpPr>
-          <p:cNvPr id="245" name=""/>
+          <p:cNvPr id="590" name=""/>
           <p:cNvCxnSpPr>
             <a:stCxn xmlns:a="http://schemas.openxmlformats.org/drawingml/2006/main" id="61" idx="3"/>
             <a:endCxn xmlns:a="http://schemas.openxmlformats.org/drawingml/2006/main" id="62" idx="1"/>
@@ -4013,7 +3936,7 @@
       </p:sp>
       <p:cxnSp>
         <p:nvCxnSpPr>
-          <p:cNvPr id="248" name=""/>
+          <p:cNvPr id="593" name=""/>
           <p:cNvCxnSpPr>
             <a:stCxn xmlns:a="http://schemas.openxmlformats.org/drawingml/2006/main" id="64" idx="3"/>
             <a:endCxn xmlns:a="http://schemas.openxmlformats.org/drawingml/2006/main" id="65" idx="1"/>
@@ -4095,7 +4018,7 @@
       </p:sp>
       <p:cxnSp>
         <p:nvCxnSpPr>
-          <p:cNvPr id="251" name=""/>
+          <p:cNvPr id="596" name=""/>
           <p:cNvCxnSpPr>
             <a:stCxn xmlns:a="http://schemas.openxmlformats.org/drawingml/2006/main" id="67" idx="3"/>
             <a:endCxn xmlns:a="http://schemas.openxmlformats.org/drawingml/2006/main" id="68" idx="1"/>
@@ -4177,7 +4100,7 @@
       </p:sp>
       <p:cxnSp>
         <p:nvCxnSpPr>
-          <p:cNvPr id="254" name=""/>
+          <p:cNvPr id="599" name=""/>
           <p:cNvCxnSpPr>
             <a:stCxn xmlns:a="http://schemas.openxmlformats.org/drawingml/2006/main" id="70" idx="2"/>
             <a:endCxn xmlns:a="http://schemas.openxmlformats.org/drawingml/2006/main" id="71" idx="0"/>
@@ -4259,7 +4182,7 @@
       </p:sp>
       <p:cxnSp>
         <p:nvCxnSpPr>
-          <p:cNvPr id="257" name=""/>
+          <p:cNvPr id="602" name=""/>
           <p:cNvCxnSpPr>
             <a:stCxn xmlns:a="http://schemas.openxmlformats.org/drawingml/2006/main" id="73" idx="3"/>
             <a:endCxn xmlns:a="http://schemas.openxmlformats.org/drawingml/2006/main" id="74" idx="1"/>
@@ -4341,7 +4264,7 @@
       </p:sp>
       <p:cxnSp>
         <p:nvCxnSpPr>
-          <p:cNvPr id="260" name=""/>
+          <p:cNvPr id="605" name=""/>
           <p:cNvCxnSpPr>
             <a:stCxn xmlns:a="http://schemas.openxmlformats.org/drawingml/2006/main" id="76" idx="0"/>
             <a:endCxn xmlns:a="http://schemas.openxmlformats.org/drawingml/2006/main" id="77" idx="2"/>
@@ -4399,6 +4322,7 @@
           <a:lstStyle xmlns:a="http://schemas.openxmlformats.org/drawingml/2006/main"/>
           <a:p xmlns:a="http://schemas.openxmlformats.org/drawingml/2006/main">
             <a:pPr algn="ctr">
+              <a:buNone/>
               <a:defRPr sz="1425" b="0">
                 <a:solidFill>
                   <a:srgbClr val="2166B0"/>
@@ -4456,6 +4380,7 @@
           <a:lstStyle xmlns:a="http://schemas.openxmlformats.org/drawingml/2006/main"/>
           <a:p xmlns:a="http://schemas.openxmlformats.org/drawingml/2006/main">
             <a:pPr algn="l">
+              <a:buNone/>
               <a:defRPr sz="1650" b="1">
                 <a:solidFill>
                   <a:srgbClr val="2166B0"/>
@@ -4513,6 +4438,7 @@
           <a:lstStyle xmlns:a="http://schemas.openxmlformats.org/drawingml/2006/main"/>
           <a:p xmlns:a="http://schemas.openxmlformats.org/drawingml/2006/main">
             <a:pPr algn="l">
+              <a:buNone/>
               <a:defRPr sz="1350" b="0">
                 <a:solidFill>
                   <a:srgbClr val="647D99"/>
@@ -4664,6 +4590,7 @@
           <a:lstStyle xmlns:a="http://schemas.openxmlformats.org/drawingml/2006/main"/>
           <a:p xmlns:a="http://schemas.openxmlformats.org/drawingml/2006/main">
             <a:pPr algn="ctr">
+              <a:buNone/>
               <a:defRPr sz="1425" b="1">
                 <a:solidFill>
                   <a:srgbClr val="163A63"/>
@@ -4721,6 +4648,7 @@
           <a:lstStyle xmlns:a="http://schemas.openxmlformats.org/drawingml/2006/main"/>
           <a:p xmlns:a="http://schemas.openxmlformats.org/drawingml/2006/main">
             <a:pPr algn="ctr">
+              <a:buNone/>
               <a:defRPr sz="1200" b="0">
                 <a:solidFill>
                   <a:srgbClr val="647D99"/>
@@ -4802,7 +4730,7 @@
       </p:sp>
       <p:cxnSp>
         <p:nvCxnSpPr>
-          <p:cNvPr id="271" name=""/>
+          <p:cNvPr id="616" name=""/>
           <p:cNvCxnSpPr>
             <a:stCxn xmlns:a="http://schemas.openxmlformats.org/drawingml/2006/main" id="87" idx="3"/>
             <a:endCxn xmlns:a="http://schemas.openxmlformats.org/drawingml/2006/main" id="88" idx="1"/>
@@ -5130,6 +5058,7 @@
           <a:lstStyle xmlns:a="http://schemas.openxmlformats.org/drawingml/2006/main"/>
           <a:p xmlns:a="http://schemas.openxmlformats.org/drawingml/2006/main">
             <a:pPr algn="ctr">
+              <a:buNone/>
               <a:defRPr sz="1500" b="1">
                 <a:solidFill>
                   <a:srgbClr val="163A63"/>
@@ -5187,6 +5116,7 @@
           <a:lstStyle xmlns:a="http://schemas.openxmlformats.org/drawingml/2006/main"/>
           <a:p xmlns:a="http://schemas.openxmlformats.org/drawingml/2006/main">
             <a:pPr algn="ctr">
+              <a:buNone/>
               <a:defRPr sz="1275" b="0">
                 <a:solidFill>
                   <a:srgbClr val="647D99"/>
@@ -5244,6 +5174,7 @@
           <a:lstStyle xmlns:a="http://schemas.openxmlformats.org/drawingml/2006/main"/>
           <a:p xmlns:a="http://schemas.openxmlformats.org/drawingml/2006/main">
             <a:pPr algn="ctr">
+              <a:buNone/>
               <a:defRPr sz="1350" b="0">
                 <a:solidFill>
                   <a:srgbClr val="647D99"/>
@@ -5333,6 +5264,7 @@
           <a:lstStyle xmlns:a="http://schemas.openxmlformats.org/drawingml/2006/main"/>
           <a:p xmlns:a="http://schemas.openxmlformats.org/drawingml/2006/main">
             <a:pPr algn="ctr">
+              <a:buNone/>
               <a:defRPr sz="1500" b="1">
                 <a:solidFill>
                   <a:srgbClr val="2166B0"/>
@@ -5390,6 +5322,7 @@
           <a:lstStyle xmlns:a="http://schemas.openxmlformats.org/drawingml/2006/main"/>
           <a:p xmlns:a="http://schemas.openxmlformats.org/drawingml/2006/main">
             <a:pPr algn="ctr">
+              <a:buNone/>
               <a:defRPr sz="1500" b="1">
                 <a:solidFill>
                   <a:srgbClr val="163A63"/>
@@ -5447,6 +5380,7 @@
           <a:lstStyle xmlns:a="http://schemas.openxmlformats.org/drawingml/2006/main"/>
           <a:p xmlns:a="http://schemas.openxmlformats.org/drawingml/2006/main">
             <a:pPr algn="ctr">
+              <a:buNone/>
               <a:defRPr sz="1425" b="1">
                 <a:solidFill>
                   <a:srgbClr val="163A63"/>
@@ -5470,6 +5404,7 @@
           </a:p>
           <a:p xmlns:a="http://schemas.openxmlformats.org/drawingml/2006/main">
             <a:pPr algn="ctr">
+              <a:buNone/>
               <a:defRPr sz="1425" b="1">
                 <a:solidFill>
                   <a:srgbClr val="163A63"/>
@@ -5551,7 +5486,7 @@
       </p:sp>
       <p:cxnSp>
         <p:nvCxnSpPr>
-          <p:cNvPr id="289" name=""/>
+          <p:cNvPr id="634" name=""/>
           <p:cNvCxnSpPr>
             <a:stCxn xmlns:a="http://schemas.openxmlformats.org/drawingml/2006/main" id="105" idx="2"/>
             <a:endCxn xmlns:a="http://schemas.openxmlformats.org/drawingml/2006/main" id="106" idx="0"/>
@@ -5633,7 +5568,7 @@
       </p:sp>
       <p:cxnSp>
         <p:nvCxnSpPr>
-          <p:cNvPr id="292" name=""/>
+          <p:cNvPr id="637" name=""/>
           <p:cNvCxnSpPr>
             <a:stCxn xmlns:a="http://schemas.openxmlformats.org/drawingml/2006/main" id="108" idx="1"/>
             <a:endCxn xmlns:a="http://schemas.openxmlformats.org/drawingml/2006/main" id="109" idx="3"/>
@@ -5715,7 +5650,7 @@
       </p:sp>
       <p:cxnSp>
         <p:nvCxnSpPr>
-          <p:cNvPr id="295" name=""/>
+          <p:cNvPr id="640" name=""/>
           <p:cNvCxnSpPr>
             <a:stCxn xmlns:a="http://schemas.openxmlformats.org/drawingml/2006/main" id="111" idx="0"/>
             <a:endCxn xmlns:a="http://schemas.openxmlformats.org/drawingml/2006/main" id="112" idx="2"/>
@@ -5797,7 +5732,7 @@
       </p:sp>
       <p:cxnSp>
         <p:nvCxnSpPr>
-          <p:cNvPr id="298" name=""/>
+          <p:cNvPr id="643" name=""/>
           <p:cNvCxnSpPr>
             <a:stCxn xmlns:a="http://schemas.openxmlformats.org/drawingml/2006/main" id="114" idx="3"/>
             <a:endCxn xmlns:a="http://schemas.openxmlformats.org/drawingml/2006/main" id="115" idx="1"/>
@@ -5855,6 +5790,7 @@
           <a:lstStyle xmlns:a="http://schemas.openxmlformats.org/drawingml/2006/main"/>
           <a:p xmlns:a="http://schemas.openxmlformats.org/drawingml/2006/main">
             <a:pPr algn="ctr">
+              <a:buNone/>
               <a:defRPr sz="1350" b="1">
                 <a:solidFill>
                   <a:srgbClr val="2166B0"/>
@@ -5943,6 +5879,7 @@
           <a:lstStyle xmlns:a="http://schemas.openxmlformats.org/drawingml/2006/main"/>
           <a:p xmlns:a="http://schemas.openxmlformats.org/drawingml/2006/main">
             <a:pPr algn="l">
+              <a:buNone/>
               <a:defRPr sz="1875" b="1">
                 <a:solidFill>
                   <a:srgbClr val="2166B0"/>
@@ -5961,7 +5898,7 @@
                 <a:ea typeface="Hiragino Sans GB"/>
                 <a:cs typeface="Hiragino Sans GB"/>
               </a:rPr>
-              <a:t>② 返回数据：限制接收速度、排队数量和正文大小</a:t>
+              <a:t>② 返回数据：限制单帧大小、排队数量和正文内存</a:t>
             </a:r>
           </a:p>
         </p:txBody>
@@ -6000,6 +5937,7 @@
           <a:lstStyle xmlns:a="http://schemas.openxmlformats.org/drawingml/2006/main"/>
           <a:p xmlns:a="http://schemas.openxmlformats.org/drawingml/2006/main">
             <a:pPr algn="ctr">
+              <a:buNone/>
               <a:defRPr sz="1650" b="1">
                 <a:solidFill>
                   <a:srgbClr val="163A63"/>
@@ -6089,6 +6027,7 @@
           <a:lstStyle xmlns:a="http://schemas.openxmlformats.org/drawingml/2006/main"/>
           <a:p xmlns:a="http://schemas.openxmlformats.org/drawingml/2006/main">
             <a:pPr algn="ctr">
+              <a:buNone/>
               <a:defRPr sz="1350" b="1">
                 <a:solidFill>
                   <a:srgbClr val="2166B0"/>
@@ -6274,6 +6213,7 @@
           <a:lstStyle xmlns:a="http://schemas.openxmlformats.org/drawingml/2006/main"/>
           <a:p xmlns:a="http://schemas.openxmlformats.org/drawingml/2006/main">
             <a:pPr algn="ctr">
+              <a:buNone/>
               <a:defRPr sz="1425" b="0">
                 <a:solidFill>
                   <a:srgbClr val="647D99"/>
@@ -6331,6 +6271,7 @@
           <a:lstStyle xmlns:a="http://schemas.openxmlformats.org/drawingml/2006/main"/>
           <a:p xmlns:a="http://schemas.openxmlformats.org/drawingml/2006/main">
             <a:pPr algn="ctr">
+              <a:buNone/>
               <a:defRPr sz="1725" b="1">
                 <a:solidFill>
                   <a:srgbClr val="163A63"/>
@@ -6349,7 +6290,7 @@
                 <a:ea typeface="Hiragino Sans GB"/>
                 <a:cs typeface="Hiragino Sans GB"/>
               </a:rPr>
-              <a:t>限制大小与速度</a:t>
+              <a:t>限制单帧接收</a:t>
             </a:r>
           </a:p>
         </p:txBody>
@@ -6420,6 +6361,7 @@
           <a:lstStyle xmlns:a="http://schemas.openxmlformats.org/drawingml/2006/main"/>
           <a:p xmlns:a="http://schemas.openxmlformats.org/drawingml/2006/main">
             <a:pPr algn="ctr">
+              <a:buNone/>
               <a:defRPr sz="1650" b="1">
                 <a:solidFill>
                   <a:srgbClr val="2166B0"/>
@@ -6501,7 +6443,7 @@
       </p:sp>
       <p:cxnSp>
         <p:nvCxnSpPr>
-          <p:cNvPr id="315" name=""/>
+          <p:cNvPr id="660" name=""/>
           <p:cNvCxnSpPr>
             <a:stCxn xmlns:a="http://schemas.openxmlformats.org/drawingml/2006/main" id="131" idx="3"/>
             <a:endCxn xmlns:a="http://schemas.openxmlformats.org/drawingml/2006/main" id="132" idx="1"/>
@@ -6559,6 +6501,7 @@
           <a:lstStyle xmlns:a="http://schemas.openxmlformats.org/drawingml/2006/main"/>
           <a:p xmlns:a="http://schemas.openxmlformats.org/drawingml/2006/main">
             <a:pPr algn="ctr">
+              <a:buNone/>
               <a:defRPr sz="1425" b="0">
                 <a:solidFill>
                   <a:srgbClr val="2D4663"/>
@@ -6577,11 +6520,12 @@
                 <a:ea typeface="Hiragino Sans GB"/>
                 <a:cs typeface="Hiragino Sans GB"/>
               </a:rPr>
-              <a:t>帧大小 + 一帧接收时限</a:t>
+              <a:t>单帧大小设上限</a:t>
             </a:r>
           </a:p>
           <a:p xmlns:a="http://schemas.openxmlformats.org/drawingml/2006/main">
             <a:pPr algn="ctr">
+              <a:buNone/>
               <a:defRPr sz="1425" b="0">
                 <a:solidFill>
                   <a:srgbClr val="2D4663"/>
@@ -6600,7 +6544,7 @@
                 <a:ea typeface="Hiragino Sans GB"/>
                 <a:cs typeface="Hiragino Sans GB"/>
               </a:rPr>
-              <a:t>每秒帧数 + 每秒字节数</a:t>
+              <a:t>每帧设置接收时限</a:t>
             </a:r>
           </a:p>
         </p:txBody>
@@ -6639,6 +6583,7 @@
           <a:lstStyle xmlns:a="http://schemas.openxmlformats.org/drawingml/2006/main"/>
           <a:p xmlns:a="http://schemas.openxmlformats.org/drawingml/2006/main">
             <a:pPr algn="ctr">
+              <a:buNone/>
               <a:defRPr sz="1725" b="1">
                 <a:solidFill>
                   <a:srgbClr val="163A63"/>
@@ -6880,7 +6825,7 @@
       </p:sp>
       <p:cxnSp>
         <p:nvCxnSpPr>
-          <p:cNvPr id="325" name=""/>
+          <p:cNvPr id="670" name=""/>
           <p:cNvCxnSpPr>
             <a:stCxn xmlns:a="http://schemas.openxmlformats.org/drawingml/2006/main" id="141" idx="3"/>
             <a:endCxn xmlns:a="http://schemas.openxmlformats.org/drawingml/2006/main" id="142" idx="1"/>
@@ -7058,7 +7003,7 @@
       </p:sp>
       <p:cxnSp>
         <p:nvCxnSpPr>
-          <p:cNvPr id="331" name=""/>
+          <p:cNvPr id="676" name=""/>
           <p:cNvCxnSpPr>
             <a:stCxn xmlns:a="http://schemas.openxmlformats.org/drawingml/2006/main" id="147" idx="2"/>
             <a:endCxn xmlns:a="http://schemas.openxmlformats.org/drawingml/2006/main" id="148" idx="0"/>
@@ -7116,6 +7061,7 @@
           <a:lstStyle xmlns:a="http://schemas.openxmlformats.org/drawingml/2006/main"/>
           <a:p xmlns:a="http://schemas.openxmlformats.org/drawingml/2006/main">
             <a:pPr algn="ctr">
+              <a:buNone/>
               <a:defRPr sz="1425" b="0">
                 <a:solidFill>
                   <a:srgbClr val="2D4663"/>
@@ -7139,6 +7085,7 @@
           </a:p>
           <a:p xmlns:a="http://schemas.openxmlformats.org/drawingml/2006/main">
             <a:pPr algn="ctr">
+              <a:buNone/>
               <a:defRPr sz="1425" b="0">
                 <a:solidFill>
                   <a:srgbClr val="2D4663"/>
@@ -7196,6 +7143,7 @@
           <a:lstStyle xmlns:a="http://schemas.openxmlformats.org/drawingml/2006/main"/>
           <a:p xmlns:a="http://schemas.openxmlformats.org/drawingml/2006/main">
             <a:pPr algn="ctr">
+              <a:buNone/>
               <a:defRPr sz="1725" b="1">
                 <a:solidFill>
                   <a:srgbClr val="163A63"/>
@@ -7547,7 +7495,7 @@
       </p:sp>
       <p:cxnSp>
         <p:nvCxnSpPr>
-          <p:cNvPr id="344" name=""/>
+          <p:cNvPr id="689" name=""/>
           <p:cNvCxnSpPr>
             <a:stCxn xmlns:a="http://schemas.openxmlformats.org/drawingml/2006/main" id="160" idx="3"/>
             <a:endCxn xmlns:a="http://schemas.openxmlformats.org/drawingml/2006/main" id="161" idx="1"/>
@@ -7629,7 +7577,7 @@
       </p:sp>
       <p:cxnSp>
         <p:nvCxnSpPr>
-          <p:cNvPr id="347" name=""/>
+          <p:cNvPr id="692" name=""/>
           <p:cNvCxnSpPr>
             <a:stCxn xmlns:a="http://schemas.openxmlformats.org/drawingml/2006/main" id="163" idx="0"/>
             <a:endCxn xmlns:a="http://schemas.openxmlformats.org/drawingml/2006/main" id="164" idx="2"/>
@@ -7711,7 +7659,7 @@
       </p:sp>
       <p:cxnSp>
         <p:nvCxnSpPr>
-          <p:cNvPr id="350" name=""/>
+          <p:cNvPr id="695" name=""/>
           <p:cNvCxnSpPr>
             <a:stCxn xmlns:a="http://schemas.openxmlformats.org/drawingml/2006/main" id="166" idx="3"/>
             <a:endCxn xmlns:a="http://schemas.openxmlformats.org/drawingml/2006/main" id="167" idx="1"/>
@@ -7769,6 +7717,7 @@
           <a:lstStyle xmlns:a="http://schemas.openxmlformats.org/drawingml/2006/main"/>
           <a:p xmlns:a="http://schemas.openxmlformats.org/drawingml/2006/main">
             <a:pPr algn="ctr">
+              <a:buNone/>
               <a:defRPr sz="1425" b="0">
                 <a:solidFill>
                   <a:srgbClr val="2D4663"/>
@@ -7792,6 +7741,7 @@
           </a:p>
           <a:p xmlns:a="http://schemas.openxmlformats.org/drawingml/2006/main">
             <a:pPr algn="ctr">
+              <a:buNone/>
               <a:defRPr sz="1425" b="0">
                 <a:solidFill>
                   <a:srgbClr val="2D4663"/>
@@ -7817,22 +7767,53 @@
       </p:sp>
       <p:sp>
         <p:nvSpPr>
-          <p:cNvPr id="170" name="text-169">
-            <a:extLst xmlns:a="http://schemas.openxmlformats.org/drawingml/2006/main">
-              <a:ext uri="{FF2B5EF4-FFF2-40B4-BE49-F238E27FC236}">
-                <a16:creationId xmlns:a16="http://schemas.microsoft.com/office/drawing/2014/main" id="{25A31637-1F49-4B5E-B7D9-B748F53BA4B4}"/>
-              </a:ext>
-            </a:extLst>
-          </p:cNvPr>
-          <p:cNvSpPr>
-            <a:spLocks xmlns:a="http://schemas.openxmlformats.org/drawingml/2006/main" noGrp="1"/>
-          </p:cNvSpPr>
-          <p:nvPr/>
-        </p:nvSpPr>
-        <p:spPr>
-          <a:xfrm xmlns:a="http://schemas.openxmlformats.org/drawingml/2006/main">
-            <a:off x="10668000" y="2028825"/>
-            <a:ext cx="4048125" cy="295275"/>
+          <p:cNvPr id="180" name="line-179">
+            <a:extLst xmlns:a="http://schemas.openxmlformats.org/drawingml/2006/main">
+              <a:ext uri="{FF2B5EF4-FFF2-40B4-BE49-F238E27FC236}">
+                <a16:creationId xmlns:a16="http://schemas.microsoft.com/office/drawing/2014/main" id="{46BCD39C-2C75-40AD-84F1-D49900BA0D7B}"/>
+              </a:ext>
+            </a:extLst>
+          </p:cNvPr>
+          <p:cNvSpPr>
+            <a:spLocks xmlns:a="http://schemas.openxmlformats.org/drawingml/2006/main" noGrp="1"/>
+          </p:cNvSpPr>
+          <p:nvPr/>
+        </p:nvSpPr>
+        <p:spPr>
+          <a:xfrm xmlns:a="http://schemas.openxmlformats.org/drawingml/2006/main">
+            <a:off x="523875" y="7800975"/>
+            <a:ext cx="14192250" cy="0"/>
+          </a:xfrm>
+          <a:prstGeom xmlns:a="http://schemas.openxmlformats.org/drawingml/2006/main" prst="line">
+            <a:avLst/>
+          </a:prstGeom>
+          <a:noFill xmlns:a="http://schemas.openxmlformats.org/drawingml/2006/main"/>
+          <a:ln xmlns:a="http://schemas.openxmlformats.org/drawingml/2006/main" w="14288">
+            <a:solidFill>
+              <a:srgbClr val="B9CEE5"/>
+            </a:solidFill>
+            <a:prstDash val="solid"/>
+          </a:ln>
+        </p:spPr>
+      </p:sp>
+      <p:sp>
+        <p:nvSpPr>
+          <p:cNvPr id="181" name="text-180">
+            <a:extLst xmlns:a="http://schemas.openxmlformats.org/drawingml/2006/main">
+              <a:ext uri="{FF2B5EF4-FFF2-40B4-BE49-F238E27FC236}">
+                <a16:creationId xmlns:a16="http://schemas.microsoft.com/office/drawing/2014/main" id="{F0AA7ED8-EDF4-43F3-83AF-AF2EC6673839}"/>
+              </a:ext>
+            </a:extLst>
+          </p:cNvPr>
+          <p:cNvSpPr>
+            <a:spLocks xmlns:a="http://schemas.openxmlformats.org/drawingml/2006/main" noGrp="1"/>
+          </p:cNvSpPr>
+          <p:nvPr/>
+        </p:nvSpPr>
+        <p:spPr>
+          <a:xfrm xmlns:a="http://schemas.openxmlformats.org/drawingml/2006/main">
+            <a:off x="533400" y="7877175"/>
+            <a:ext cx="14182725" cy="285750"/>
           </a:xfrm>
           <a:prstGeom xmlns:a="http://schemas.openxmlformats.org/drawingml/2006/main" prst="rect">
             <a:avLst/>
@@ -7849,9 +7830,10 @@
           <a:lstStyle xmlns:a="http://schemas.openxmlformats.org/drawingml/2006/main"/>
           <a:p xmlns:a="http://schemas.openxmlformats.org/drawingml/2006/main">
             <a:pPr algn="l">
-              <a:defRPr sz="1800" b="1">
-                <a:solidFill>
-                  <a:srgbClr val="2166B0"/>
+              <a:buNone/>
+              <a:defRPr sz="1500" b="0">
+                <a:solidFill>
+                  <a:srgbClr val="163A63"/>
                 </a:solidFill>
                 <a:latin typeface="Hiragino Sans GB"/>
                 <a:ea typeface="Hiragino Sans GB"/>
@@ -7859,37 +7841,37 @@
               </a:defRPr>
             </a:pPr>
             <a:r>
-              <a:rPr sz="1800" b="1">
-                <a:solidFill>
-                  <a:srgbClr val="2166B0"/>
+              <a:rPr sz="1500" b="0">
+                <a:solidFill>
+                  <a:srgbClr val="163A63"/>
                 </a:solidFill>
                 <a:latin typeface="Hiragino Sans GB"/>
                 <a:ea typeface="Hiragino Sans GB"/>
                 <a:cs typeface="Hiragino Sans GB"/>
               </a:rPr>
-              <a:t>01  并发限制与普通流超时</a:t>
+              <a:t>下游协议：三方确认数据限制、各段超时和后台任务期限并联测。符合约定却被误拒，由本方修复。</a:t>
             </a:r>
           </a:p>
         </p:txBody>
       </p:sp>
       <p:sp>
         <p:nvSpPr>
-          <p:cNvPr id="171" name="text-170">
-            <a:extLst xmlns:a="http://schemas.openxmlformats.org/drawingml/2006/main">
-              <a:ext uri="{FF2B5EF4-FFF2-40B4-BE49-F238E27FC236}">
-                <a16:creationId xmlns:a16="http://schemas.microsoft.com/office/drawing/2014/main" id="{D94EF54E-E397-4836-963D-9797E2A9934D}"/>
-              </a:ext>
-            </a:extLst>
-          </p:cNvPr>
-          <p:cNvSpPr>
-            <a:spLocks xmlns:a="http://schemas.openxmlformats.org/drawingml/2006/main" noGrp="1"/>
-          </p:cNvSpPr>
-          <p:nvPr/>
-        </p:nvSpPr>
-        <p:spPr>
-          <a:xfrm xmlns:a="http://schemas.openxmlformats.org/drawingml/2006/main">
-            <a:off x="10668000" y="2362200"/>
-            <a:ext cx="4048125" cy="742950"/>
+          <p:cNvPr id="182" name="text-181">
+            <a:extLst xmlns:a="http://schemas.openxmlformats.org/drawingml/2006/main">
+              <a:ext uri="{FF2B5EF4-FFF2-40B4-BE49-F238E27FC236}">
+                <a16:creationId xmlns:a16="http://schemas.microsoft.com/office/drawing/2014/main" id="{2FEF3F19-26FC-4953-9949-9BAFFEC5AA5F}"/>
+              </a:ext>
+            </a:extLst>
+          </p:cNvPr>
+          <p:cNvSpPr>
+            <a:spLocks xmlns:a="http://schemas.openxmlformats.org/drawingml/2006/main" noGrp="1"/>
+          </p:cNvSpPr>
+          <p:nvPr/>
+        </p:nvSpPr>
+        <p:spPr>
+          <a:xfrm xmlns:a="http://schemas.openxmlformats.org/drawingml/2006/main">
+            <a:off x="533400" y="8220075"/>
+            <a:ext cx="14182725" cy="247650"/>
           </a:xfrm>
           <a:prstGeom xmlns:a="http://schemas.openxmlformats.org/drawingml/2006/main" prst="rect">
             <a:avLst/>
@@ -7906,9 +7888,10 @@
           <a:lstStyle xmlns:a="http://schemas.openxmlformats.org/drawingml/2006/main"/>
           <a:p xmlns:a="http://schemas.openxmlformats.org/drawingml/2006/main">
             <a:pPr algn="l">
-              <a:defRPr sz="1500" b="0">
-                <a:solidFill>
-                  <a:srgbClr val="2D4663"/>
+              <a:buNone/>
+              <a:defRPr sz="1425" b="0">
+                <a:solidFill>
+                  <a:srgbClr val="647D99"/>
                 </a:solidFill>
                 <a:latin typeface="Hiragino Sans GB"/>
                 <a:ea typeface="Hiragino Sans GB"/>
@@ -7916,83 +7899,37 @@
               </a:defRPr>
             </a:pPr>
             <a:r>
-              <a:rPr sz="1500" b="0">
-                <a:solidFill>
-                  <a:srgbClr val="2D4663"/>
+              <a:rPr sz="1425" b="0">
+                <a:solidFill>
+                  <a:srgbClr val="647D99"/>
                 </a:solidFill>
                 <a:latin typeface="Hiragino Sans GB"/>
                 <a:ea typeface="Hiragino Sans GB"/>
                 <a:cs typeface="Hiragino Sans GB"/>
               </a:rPr>
-              <a:t>实例、单Agent分别限并发，满则拒绝。</a:t>
-            </a:r>
-          </a:p>
-          <a:p xmlns:a="http://schemas.openxmlformats.org/drawingml/2006/main">
-            <a:pPr algn="l">
-              <a:defRPr sz="1500" b="0">
-                <a:solidFill>
-                  <a:srgbClr val="2D4663"/>
-                </a:solidFill>
-                <a:latin typeface="Hiragino Sans GB"/>
-                <a:ea typeface="Hiragino Sans GB"/>
-                <a:cs typeface="Hiragino Sans GB"/>
-              </a:defRPr>
-            </a:pPr>
-            <a:r>
-              <a:rPr sz="1500" b="0">
-                <a:solidFill>
-                  <a:srgbClr val="2D4663"/>
-                </a:solidFill>
-                <a:latin typeface="Hiragino Sans GB"/>
-                <a:ea typeface="Hiragino Sans GB"/>
-                <a:cs typeface="Hiragino Sans GB"/>
-              </a:rPr>
-              <a:t>各阶段有超时，整次调用另设总时限。</a:t>
-            </a:r>
-          </a:p>
-          <a:p xmlns:a="http://schemas.openxmlformats.org/drawingml/2006/main">
-            <a:pPr algn="l">
-              <a:defRPr sz="1500" b="0">
-                <a:solidFill>
-                  <a:srgbClr val="2D4663"/>
-                </a:solidFill>
-                <a:latin typeface="Hiragino Sans GB"/>
-                <a:ea typeface="Hiragino Sans GB"/>
-                <a:cs typeface="Hiragino Sans GB"/>
-              </a:defRPr>
-            </a:pPr>
-            <a:r>
-              <a:rPr sz="1500" b="0">
-                <a:solidFill>
-                  <a:srgbClr val="2D4663"/>
-                </a:solidFill>
-                <a:latin typeface="Hiragino Sans GB"/>
-                <a:ea typeface="Hiragino Sans GB"/>
-                <a:cs typeface="Hiragino Sans GB"/>
-              </a:rPr>
-              <a:t>超时后停止等待，释放本地连接与名额。</a:t>
+              <a:t>本页为加固设计。后台任务限量、远端查询与取消确认待补充。连接结束不代表任务停止。FULL / no-store规则不变。</a:t>
             </a:r>
           </a:p>
         </p:txBody>
       </p:sp>
       <p:sp>
         <p:nvSpPr>
-          <p:cNvPr id="172" name="text-171">
-            <a:extLst xmlns:a="http://schemas.openxmlformats.org/drawingml/2006/main">
-              <a:ext uri="{FF2B5EF4-FFF2-40B4-BE49-F238E27FC236}">
-                <a16:creationId xmlns:a16="http://schemas.microsoft.com/office/drawing/2014/main" id="{6CCF7341-E20A-4591-91F9-84BCA32B7EAD}"/>
-              </a:ext>
-            </a:extLst>
-          </p:cNvPr>
-          <p:cNvSpPr>
-            <a:spLocks xmlns:a="http://schemas.openxmlformats.org/drawingml/2006/main" noGrp="1"/>
-          </p:cNvSpPr>
-          <p:nvPr/>
-        </p:nvSpPr>
-        <p:spPr>
-          <a:xfrm xmlns:a="http://schemas.openxmlformats.org/drawingml/2006/main">
-            <a:off x="10668000" y="3143250"/>
-            <a:ext cx="4048125" cy="295275"/>
+          <p:cNvPr id="351" name="right-group-1">
+            <a:extLst xmlns:a="http://schemas.openxmlformats.org/drawingml/2006/main">
+              <a:ext uri="{FF2B5EF4-FFF2-40B4-BE49-F238E27FC236}">
+                <a16:creationId xmlns:a16="http://schemas.microsoft.com/office/drawing/2014/main" id="{E3151E57-3A24-4759-ADC9-0B3244729C87}"/>
+              </a:ext>
+            </a:extLst>
+          </p:cNvPr>
+          <p:cNvSpPr>
+            <a:spLocks xmlns:a="http://schemas.openxmlformats.org/drawingml/2006/main" noGrp="1"/>
+          </p:cNvSpPr>
+          <p:nvPr/>
+        </p:nvSpPr>
+        <p:spPr>
+          <a:xfrm xmlns:a="http://schemas.openxmlformats.org/drawingml/2006/main">
+            <a:off x="10668000" y="1952625"/>
+            <a:ext cx="4048125" cy="323850"/>
           </a:xfrm>
           <a:prstGeom xmlns:a="http://schemas.openxmlformats.org/drawingml/2006/main" prst="rect">
             <a:avLst/>
@@ -8003,13 +7940,14 @@
           </a:ln>
         </p:spPr>
         <p:txBody>
-          <a:bodyPr xmlns:a="http://schemas.openxmlformats.org/drawingml/2006/main" lIns="0" tIns="0" rIns="0" bIns="0" anchor="ctr">
+          <a:bodyPr xmlns:a="http://schemas.openxmlformats.org/drawingml/2006/main" lIns="0" tIns="0" rIns="0" bIns="0" anchor="t">
             <a:noAutofit/>
           </a:bodyPr>
           <a:lstStyle xmlns:a="http://schemas.openxmlformats.org/drawingml/2006/main"/>
           <a:p xmlns:a="http://schemas.openxmlformats.org/drawingml/2006/main">
             <a:pPr algn="l">
-              <a:defRPr sz="1800" b="1">
+              <a:buNone/>
+              <a:defRPr sz="1875" b="1">
                 <a:solidFill>
                   <a:srgbClr val="2166B0"/>
                 </a:solidFill>
@@ -8019,7 +7957,7 @@
               </a:defRPr>
             </a:pPr>
             <a:r>
-              <a:rPr sz="1800" b="1">
+              <a:rPr sz="1875" b="1">
                 <a:solidFill>
                   <a:srgbClr val="2166B0"/>
                 </a:solidFill>
@@ -8027,29 +7965,29 @@
                 <a:ea typeface="Hiragino Sans GB"/>
                 <a:cs typeface="Hiragino Sans GB"/>
               </a:rPr>
-              <a:t>02  异步任务使用独立等待期限</a:t>
+              <a:t>① 连接与长任务控制</a:t>
             </a:r>
           </a:p>
         </p:txBody>
       </p:sp>
       <p:sp>
         <p:nvSpPr>
-          <p:cNvPr id="173" name="text-172">
-            <a:extLst xmlns:a="http://schemas.openxmlformats.org/drawingml/2006/main">
-              <a:ext uri="{FF2B5EF4-FFF2-40B4-BE49-F238E27FC236}">
-                <a16:creationId xmlns:a16="http://schemas.microsoft.com/office/drawing/2014/main" id="{C4EF6C29-A9F0-467A-B520-63ACBFE81C35}"/>
-              </a:ext>
-            </a:extLst>
-          </p:cNvPr>
-          <p:cNvSpPr>
-            <a:spLocks xmlns:a="http://schemas.openxmlformats.org/drawingml/2006/main" noGrp="1"/>
-          </p:cNvSpPr>
-          <p:nvPr/>
-        </p:nvSpPr>
-        <p:spPr>
-          <a:xfrm xmlns:a="http://schemas.openxmlformats.org/drawingml/2006/main">
-            <a:off x="10668000" y="3476625"/>
-            <a:ext cx="4048125" cy="952500"/>
+          <p:cNvPr id="352" name="right-admission">
+            <a:extLst xmlns:a="http://schemas.openxmlformats.org/drawingml/2006/main">
+              <a:ext uri="{FF2B5EF4-FFF2-40B4-BE49-F238E27FC236}">
+                <a16:creationId xmlns:a16="http://schemas.microsoft.com/office/drawing/2014/main" id="{61975D0E-AF7D-4D64-8B64-2C5761FAD74E}"/>
+              </a:ext>
+            </a:extLst>
+          </p:cNvPr>
+          <p:cNvSpPr>
+            <a:spLocks xmlns:a="http://schemas.openxmlformats.org/drawingml/2006/main" noGrp="1"/>
+          </p:cNvSpPr>
+          <p:nvPr/>
+        </p:nvSpPr>
+        <p:spPr>
+          <a:xfrm xmlns:a="http://schemas.openxmlformats.org/drawingml/2006/main">
+            <a:off x="10668000" y="2381250"/>
+            <a:ext cx="4048125" cy="552450"/>
           </a:xfrm>
           <a:prstGeom xmlns:a="http://schemas.openxmlformats.org/drawingml/2006/main" prst="rect">
             <a:avLst/>
@@ -8060,12 +7998,13 @@
           </a:ln>
         </p:spPr>
         <p:txBody>
-          <a:bodyPr xmlns:a="http://schemas.openxmlformats.org/drawingml/2006/main" lIns="0" tIns="0" rIns="0" bIns="0" anchor="ctr">
+          <a:bodyPr xmlns:a="http://schemas.openxmlformats.org/drawingml/2006/main" lIns="0" tIns="0" rIns="0" bIns="0" anchor="t">
             <a:noAutofit/>
           </a:bodyPr>
           <a:lstStyle xmlns:a="http://schemas.openxmlformats.org/drawingml/2006/main"/>
           <a:p xmlns:a="http://schemas.openxmlformats.org/drawingml/2006/main">
             <a:pPr algn="l">
+              <a:buNone/>
               <a:defRPr sz="1500" b="0">
                 <a:solidFill>
                   <a:srgbClr val="2D4663"/>
@@ -8076,7 +8015,18 @@
               </a:defRPr>
             </a:pPr>
             <a:r>
-              <a:rPr sz="1500" b="0">
+              <a:rPr sz="1500" b="1">
+                <a:solidFill>
+                  <a:srgbClr val="163A63"/>
+                </a:solidFill>
+                <a:latin typeface="Hiragino Sans GB"/>
+                <a:ea typeface="Hiragino Sans GB"/>
+                <a:cs typeface="Hiragino Sans GB"/>
+              </a:rPr>
+              <a:t>并发准入：</a:t>
+            </a:r>
+            <a:r>
+              <a:rPr sz="1500">
                 <a:solidFill>
                   <a:srgbClr val="2D4663"/>
                 </a:solidFill>
@@ -8084,11 +8034,12 @@
                 <a:ea typeface="Hiragino Sans GB"/>
                 <a:cs typeface="Hiragino Sans GB"/>
               </a:rPr>
-              <a:t>标记返回前，按普通流的期限等待。</a:t>
+              <a:t>实例、单Agent分别限并发；</a:t>
             </a:r>
           </a:p>
           <a:p xmlns:a="http://schemas.openxmlformats.org/drawingml/2006/main">
             <a:pPr algn="l">
+              <a:buNone/>
               <a:defRPr sz="1500" b="0">
                 <a:solidFill>
                   <a:srgbClr val="2D4663"/>
@@ -8099,7 +8050,7 @@
               </a:defRPr>
             </a:pPr>
             <a:r>
-              <a:rPr sz="1500" b="0">
+              <a:rPr sz="1500">
                 <a:solidFill>
                   <a:srgbClr val="2D4663"/>
                 </a:solidFill>
@@ -8107,75 +8058,29 @@
                 <a:ea typeface="Hiragino Sans GB"/>
                 <a:cs typeface="Hiragino Sans GB"/>
               </a:rPr>
-              <a:t>收到标记后结束HTTP，后台继续运行。</a:t>
-            </a:r>
-          </a:p>
-          <a:p xmlns:a="http://schemas.openxmlformats.org/drawingml/2006/main">
-            <a:pPr algn="l">
-              <a:defRPr sz="1500" b="0">
-                <a:solidFill>
-                  <a:srgbClr val="2D4663"/>
-                </a:solidFill>
-                <a:latin typeface="Hiragino Sans GB"/>
-                <a:ea typeface="Hiragino Sans GB"/>
-                <a:cs typeface="Hiragino Sans GB"/>
-              </a:defRPr>
-            </a:pPr>
-            <a:r>
-              <a:rPr sz="1500" b="0">
-                <a:solidFill>
-                  <a:srgbClr val="2D4663"/>
-                </a:solidFill>
-                <a:latin typeface="Hiragino Sans GB"/>
-                <a:ea typeface="Hiragino Sans GB"/>
-                <a:cs typeface="Hiragino Sans GB"/>
-              </a:rPr>
-              <a:t>单次回调处理限时，按runId匹配。</a:t>
-            </a:r>
-          </a:p>
-          <a:p xmlns:a="http://schemas.openxmlformats.org/drawingml/2006/main">
-            <a:pPr algn="l">
-              <a:defRPr sz="1500" b="0">
-                <a:solidFill>
-                  <a:srgbClr val="2D4663"/>
-                </a:solidFill>
-                <a:latin typeface="Hiragino Sans GB"/>
-                <a:ea typeface="Hiragino Sans GB"/>
-                <a:cs typeface="Hiragino Sans GB"/>
-              </a:defRPr>
-            </a:pPr>
-            <a:r>
-              <a:rPr sz="1500" b="0">
-                <a:solidFill>
-                  <a:srgbClr val="2D4663"/>
-                </a:solidFill>
-                <a:latin typeface="Hiragino Sans GB"/>
-                <a:ea typeface="Hiragino Sans GB"/>
-                <a:cs typeface="Hiragino Sans GB"/>
-              </a:rPr>
-              <a:t>到期结束本地任务，远端状态另确认。</a:t>
+              <a:t>达到上限则拒绝，调用结束释放资源。</a:t>
             </a:r>
           </a:p>
         </p:txBody>
       </p:sp>
       <p:sp>
         <p:nvSpPr>
-          <p:cNvPr id="174" name="text-173">
-            <a:extLst xmlns:a="http://schemas.openxmlformats.org/drawingml/2006/main">
-              <a:ext uri="{FF2B5EF4-FFF2-40B4-BE49-F238E27FC236}">
-                <a16:creationId xmlns:a16="http://schemas.microsoft.com/office/drawing/2014/main" id="{34DFBD4F-980F-429A-98D7-DCF409DBEED5}"/>
-              </a:ext>
-            </a:extLst>
-          </p:cNvPr>
-          <p:cNvSpPr>
-            <a:spLocks xmlns:a="http://schemas.openxmlformats.org/drawingml/2006/main" noGrp="1"/>
-          </p:cNvSpPr>
-          <p:nvPr/>
-        </p:nvSpPr>
-        <p:spPr>
-          <a:xfrm xmlns:a="http://schemas.openxmlformats.org/drawingml/2006/main">
-            <a:off x="10668000" y="4486275"/>
-            <a:ext cx="4048125" cy="295275"/>
+          <p:cNvPr id="353" name="right-stream-timeouts">
+            <a:extLst xmlns:a="http://schemas.openxmlformats.org/drawingml/2006/main">
+              <a:ext uri="{FF2B5EF4-FFF2-40B4-BE49-F238E27FC236}">
+                <a16:creationId xmlns:a16="http://schemas.microsoft.com/office/drawing/2014/main" id="{8D498851-A57E-4793-94E0-F9E2C2060D1E}"/>
+              </a:ext>
+            </a:extLst>
+          </p:cNvPr>
+          <p:cNvSpPr>
+            <a:spLocks xmlns:a="http://schemas.openxmlformats.org/drawingml/2006/main" noGrp="1"/>
+          </p:cNvSpPr>
+          <p:nvPr/>
+        </p:nvSpPr>
+        <p:spPr>
+          <a:xfrm xmlns:a="http://schemas.openxmlformats.org/drawingml/2006/main">
+            <a:off x="10668000" y="3171825"/>
+            <a:ext cx="4048125" cy="790575"/>
           </a:xfrm>
           <a:prstGeom xmlns:a="http://schemas.openxmlformats.org/drawingml/2006/main" prst="rect">
             <a:avLst/>
@@ -8186,15 +8091,16 @@
           </a:ln>
         </p:spPr>
         <p:txBody>
-          <a:bodyPr xmlns:a="http://schemas.openxmlformats.org/drawingml/2006/main" lIns="0" tIns="0" rIns="0" bIns="0" anchor="ctr">
+          <a:bodyPr xmlns:a="http://schemas.openxmlformats.org/drawingml/2006/main" lIns="0" tIns="0" rIns="0" bIns="0" anchor="t">
             <a:noAutofit/>
           </a:bodyPr>
           <a:lstStyle xmlns:a="http://schemas.openxmlformats.org/drawingml/2006/main"/>
           <a:p xmlns:a="http://schemas.openxmlformats.org/drawingml/2006/main">
             <a:pPr algn="l">
-              <a:defRPr sz="1800" b="1">
-                <a:solidFill>
-                  <a:srgbClr val="2166B0"/>
+              <a:buNone/>
+              <a:defRPr sz="1500" b="0">
+                <a:solidFill>
+                  <a:srgbClr val="2D4663"/>
                 </a:solidFill>
                 <a:latin typeface="Hiragino Sans GB"/>
                 <a:ea typeface="Hiragino Sans GB"/>
@@ -8202,37 +8108,96 @@
               </a:defRPr>
             </a:pPr>
             <a:r>
-              <a:rPr sz="1800" b="1">
-                <a:solidFill>
-                  <a:srgbClr val="2166B0"/>
+              <a:rPr sz="1500" b="1">
+                <a:solidFill>
+                  <a:srgbClr val="163A63"/>
                 </a:solidFill>
                 <a:latin typeface="Hiragino Sans GB"/>
                 <a:ea typeface="Hiragino Sans GB"/>
                 <a:cs typeface="Hiragino Sans GB"/>
               </a:rPr>
-              <a:t>03  后台任务限量与取消超时</a:t>
+              <a:t>普通流期限：</a:t>
+            </a:r>
+            <a:r>
+              <a:rPr sz="1500">
+                <a:solidFill>
+                  <a:srgbClr val="2D4663"/>
+                </a:solidFill>
+                <a:latin typeface="Hiragino Sans GB"/>
+                <a:ea typeface="Hiragino Sans GB"/>
+                <a:cs typeface="Hiragino Sans GB"/>
+              </a:rPr>
+              <a:t>调用前等待、建连发送、</a:t>
+            </a:r>
+          </a:p>
+          <a:p xmlns:a="http://schemas.openxmlformats.org/drawingml/2006/main">
+            <a:pPr algn="l">
+              <a:buNone/>
+              <a:defRPr sz="1500" b="0">
+                <a:solidFill>
+                  <a:srgbClr val="2D4663"/>
+                </a:solidFill>
+                <a:latin typeface="Hiragino Sans GB"/>
+                <a:ea typeface="Hiragino Sans GB"/>
+                <a:cs typeface="Hiragino Sans GB"/>
+              </a:defRPr>
+            </a:pPr>
+            <a:r>
+              <a:rPr sz="1500">
+                <a:solidFill>
+                  <a:srgbClr val="2D4663"/>
+                </a:solidFill>
+                <a:latin typeface="Hiragino Sans GB"/>
+                <a:ea typeface="Hiragino Sans GB"/>
+                <a:cs typeface="Hiragino Sans GB"/>
+              </a:rPr>
+              <a:t>首条有效响应、持续接收分别设超时；</a:t>
+            </a:r>
+          </a:p>
+          <a:p xmlns:a="http://schemas.openxmlformats.org/drawingml/2006/main">
+            <a:pPr algn="l">
+              <a:buNone/>
+              <a:defRPr sz="1500" b="0">
+                <a:solidFill>
+                  <a:srgbClr val="2D4663"/>
+                </a:solidFill>
+                <a:latin typeface="Hiragino Sans GB"/>
+                <a:ea typeface="Hiragino Sans GB"/>
+                <a:cs typeface="Hiragino Sans GB"/>
+              </a:defRPr>
+            </a:pPr>
+            <a:r>
+              <a:rPr sz="1500">
+                <a:solidFill>
+                  <a:srgbClr val="2D4663"/>
+                </a:solidFill>
+                <a:latin typeface="Hiragino Sans GB"/>
+                <a:ea typeface="Hiragino Sans GB"/>
+                <a:cs typeface="Hiragino Sans GB"/>
+              </a:rPr>
+              <a:t>全程另设总时限，心跳与重试不重置。</a:t>
             </a:r>
           </a:p>
         </p:txBody>
       </p:sp>
       <p:sp>
         <p:nvSpPr>
-          <p:cNvPr id="175" name="text-174">
-            <a:extLst xmlns:a="http://schemas.openxmlformats.org/drawingml/2006/main">
-              <a:ext uri="{FF2B5EF4-FFF2-40B4-BE49-F238E27FC236}">
-                <a16:creationId xmlns:a16="http://schemas.microsoft.com/office/drawing/2014/main" id="{7123B49D-AC80-49F6-A79A-A94FFA453474}"/>
-              </a:ext>
-            </a:extLst>
-          </p:cNvPr>
-          <p:cNvSpPr>
-            <a:spLocks xmlns:a="http://schemas.openxmlformats.org/drawingml/2006/main" noGrp="1"/>
-          </p:cNvSpPr>
-          <p:nvPr/>
-        </p:nvSpPr>
-        <p:spPr>
-          <a:xfrm xmlns:a="http://schemas.openxmlformats.org/drawingml/2006/main">
-            <a:off x="10668000" y="4819650"/>
-            <a:ext cx="4048125" cy="742950"/>
+          <p:cNvPr id="354" name="right-async">
+            <a:extLst xmlns:a="http://schemas.openxmlformats.org/drawingml/2006/main">
+              <a:ext uri="{FF2B5EF4-FFF2-40B4-BE49-F238E27FC236}">
+                <a16:creationId xmlns:a16="http://schemas.microsoft.com/office/drawing/2014/main" id="{373DFD5A-EE9E-43A7-8D7A-516CA2536BE6}"/>
+              </a:ext>
+            </a:extLst>
+          </p:cNvPr>
+          <p:cNvSpPr>
+            <a:spLocks xmlns:a="http://schemas.openxmlformats.org/drawingml/2006/main" noGrp="1"/>
+          </p:cNvSpPr>
+          <p:nvPr/>
+        </p:nvSpPr>
+        <p:spPr>
+          <a:xfrm xmlns:a="http://schemas.openxmlformats.org/drawingml/2006/main">
+            <a:off x="10668000" y="4152900"/>
+            <a:ext cx="4048125" cy="1190625"/>
           </a:xfrm>
           <a:prstGeom xmlns:a="http://schemas.openxmlformats.org/drawingml/2006/main" prst="rect">
             <a:avLst/>
@@ -8243,12 +8208,13 @@
           </a:ln>
         </p:spPr>
         <p:txBody>
-          <a:bodyPr xmlns:a="http://schemas.openxmlformats.org/drawingml/2006/main" lIns="0" tIns="0" rIns="0" bIns="0" anchor="ctr">
+          <a:bodyPr xmlns:a="http://schemas.openxmlformats.org/drawingml/2006/main" lIns="0" tIns="0" rIns="0" bIns="0" anchor="t">
             <a:noAutofit/>
           </a:bodyPr>
           <a:lstStyle xmlns:a="http://schemas.openxmlformats.org/drawingml/2006/main"/>
           <a:p xmlns:a="http://schemas.openxmlformats.org/drawingml/2006/main">
             <a:pPr algn="l">
+              <a:buNone/>
               <a:defRPr sz="1500" b="0">
                 <a:solidFill>
                   <a:srgbClr val="2D4663"/>
@@ -8259,7 +8225,18 @@
               </a:defRPr>
             </a:pPr>
             <a:r>
-              <a:rPr sz="1500" b="0">
+              <a:rPr sz="1500" b="1">
+                <a:solidFill>
+                  <a:srgbClr val="163A63"/>
+                </a:solidFill>
+                <a:latin typeface="Hiragino Sans GB"/>
+                <a:ea typeface="Hiragino Sans GB"/>
+                <a:cs typeface="Hiragino Sans GB"/>
+              </a:rPr>
+              <a:t>异步长任务：</a:t>
+            </a:r>
+            <a:r>
+              <a:rPr sz="1500">
                 <a:solidFill>
                   <a:srgbClr val="2D4663"/>
                 </a:solidFill>
@@ -8267,11 +8244,12 @@
                 <a:ea typeface="Hiragino Sans GB"/>
                 <a:cs typeface="Hiragino Sans GB"/>
               </a:rPr>
-              <a:t>按用户、租户和Agent限制未完成任务数。</a:t>
+              <a:t>标记前沿用普通流期限，</a:t>
             </a:r>
           </a:p>
           <a:p xmlns:a="http://schemas.openxmlformats.org/drawingml/2006/main">
             <a:pPr algn="l">
+              <a:buNone/>
               <a:defRPr sz="1500" b="0">
                 <a:solidFill>
                   <a:srgbClr val="2D4663"/>
@@ -8282,7 +8260,7 @@
               </a:defRPr>
             </a:pPr>
             <a:r>
-              <a:rPr sz="1500" b="0">
+              <a:rPr sz="1500">
                 <a:solidFill>
                   <a:srgbClr val="2D4663"/>
                 </a:solidFill>
@@ -8290,11 +8268,12 @@
                 <a:ea typeface="Hiragino Sans GB"/>
                 <a:cs typeface="Hiragino Sans GB"/>
               </a:rPr>
-              <a:t>达到上限，暂不发起新的后台任务。</a:t>
+              <a:t>标记后结束HTTP，按runId等待结果。</a:t>
             </a:r>
           </a:p>
           <a:p xmlns:a="http://schemas.openxmlformats.org/drawingml/2006/main">
             <a:pPr algn="l">
+              <a:buNone/>
               <a:defRPr sz="1500" b="0">
                 <a:solidFill>
                   <a:srgbClr val="2D4663"/>
@@ -8305,7 +8284,7 @@
               </a:defRPr>
             </a:pPr>
             <a:r>
-              <a:rPr sz="1500" b="0">
+              <a:rPr sz="1500">
                 <a:solidFill>
                   <a:srgbClr val="2D4663"/>
                 </a:solidFill>
@@ -8313,29 +8292,107 @@
                 <a:ea typeface="Hiragino Sans GB"/>
                 <a:cs typeface="Hiragino Sans GB"/>
               </a:rPr>
-              <a:t>取消超时先查任务状态，不自动重跑。</a:t>
+              <a:t>按用户、租户和Agent限制未完成任务数；</a:t>
+            </a:r>
+          </a:p>
+          <a:p xmlns:a="http://schemas.openxmlformats.org/drawingml/2006/main">
+            <a:pPr algn="l">
+              <a:buNone/>
+              <a:defRPr sz="1500" b="0">
+                <a:solidFill>
+                  <a:srgbClr val="2D4663"/>
+                </a:solidFill>
+                <a:latin typeface="Hiragino Sans GB"/>
+                <a:ea typeface="Hiragino Sans GB"/>
+                <a:cs typeface="Hiragino Sans GB"/>
+              </a:defRPr>
+            </a:pPr>
+            <a:r>
+              <a:rPr sz="1500">
+                <a:solidFill>
+                  <a:srgbClr val="2D4663"/>
+                </a:solidFill>
+                <a:latin typeface="Hiragino Sans GB"/>
+                <a:ea typeface="Hiragino Sans GB"/>
+                <a:cs typeface="Hiragino Sans GB"/>
+              </a:rPr>
+              <a:t>后台等待另设截止时间，到期本地结束。</a:t>
+            </a:r>
+          </a:p>
+          <a:p xmlns:a="http://schemas.openxmlformats.org/drawingml/2006/main">
+            <a:pPr algn="l">
+              <a:buNone/>
+              <a:defRPr sz="1500" b="0">
+                <a:solidFill>
+                  <a:srgbClr val="2D4663"/>
+                </a:solidFill>
+                <a:latin typeface="Hiragino Sans GB"/>
+                <a:ea typeface="Hiragino Sans GB"/>
+                <a:cs typeface="Hiragino Sans GB"/>
+              </a:defRPr>
+            </a:pPr>
+            <a:r>
+              <a:rPr sz="1500">
+                <a:solidFill>
+                  <a:srgbClr val="2D4663"/>
+                </a:solidFill>
+                <a:latin typeface="Hiragino Sans GB"/>
+                <a:ea typeface="Hiragino Sans GB"/>
+                <a:cs typeface="Hiragino Sans GB"/>
+              </a:rPr>
+              <a:t>远端状态另核对，未知结果不重跑。</a:t>
             </a:r>
           </a:p>
         </p:txBody>
       </p:sp>
       <p:sp>
         <p:nvSpPr>
-          <p:cNvPr id="176" name="text-175">
-            <a:extLst xmlns:a="http://schemas.openxmlformats.org/drawingml/2006/main">
-              <a:ext uri="{FF2B5EF4-FFF2-40B4-BE49-F238E27FC236}">
-                <a16:creationId xmlns:a16="http://schemas.microsoft.com/office/drawing/2014/main" id="{D9AB372E-817A-4069-AA84-F22EFD2D12F8}"/>
-              </a:ext>
-            </a:extLst>
-          </p:cNvPr>
-          <p:cNvSpPr>
-            <a:spLocks xmlns:a="http://schemas.openxmlformats.org/drawingml/2006/main" noGrp="1"/>
-          </p:cNvSpPr>
-          <p:nvPr/>
-        </p:nvSpPr>
-        <p:spPr>
-          <a:xfrm xmlns:a="http://schemas.openxmlformats.org/drawingml/2006/main">
-            <a:off x="10668000" y="5600700"/>
-            <a:ext cx="4048125" cy="295275"/>
+          <p:cNvPr id="355" name="right-group-divider">
+            <a:extLst xmlns:a="http://schemas.openxmlformats.org/drawingml/2006/main">
+              <a:ext uri="{FF2B5EF4-FFF2-40B4-BE49-F238E27FC236}">
+                <a16:creationId xmlns:a16="http://schemas.microsoft.com/office/drawing/2014/main" id="{0094830E-041D-4105-B690-4C35FB198886}"/>
+              </a:ext>
+            </a:extLst>
+          </p:cNvPr>
+          <p:cNvSpPr>
+            <a:spLocks xmlns:a="http://schemas.openxmlformats.org/drawingml/2006/main" noGrp="1"/>
+          </p:cNvSpPr>
+          <p:nvPr/>
+        </p:nvSpPr>
+        <p:spPr>
+          <a:xfrm xmlns:a="http://schemas.openxmlformats.org/drawingml/2006/main">
+            <a:off x="10668000" y="5391150"/>
+            <a:ext cx="4048125" cy="0"/>
+          </a:xfrm>
+          <a:prstGeom xmlns:a="http://schemas.openxmlformats.org/drawingml/2006/main" prst="line">
+            <a:avLst/>
+          </a:prstGeom>
+          <a:noFill xmlns:a="http://schemas.openxmlformats.org/drawingml/2006/main"/>
+          <a:ln xmlns:a="http://schemas.openxmlformats.org/drawingml/2006/main" w="12383">
+            <a:solidFill>
+              <a:srgbClr val="B9CEE5"/>
+            </a:solidFill>
+          </a:ln>
+        </p:spPr>
+      </p:sp>
+      <p:sp>
+        <p:nvSpPr>
+          <p:cNvPr id="356" name="right-group-2">
+            <a:extLst xmlns:a="http://schemas.openxmlformats.org/drawingml/2006/main">
+              <a:ext uri="{FF2B5EF4-FFF2-40B4-BE49-F238E27FC236}">
+                <a16:creationId xmlns:a16="http://schemas.microsoft.com/office/drawing/2014/main" id="{5B99D50E-C9E9-46CB-A8FA-D9040835CEC8}"/>
+              </a:ext>
+            </a:extLst>
+          </p:cNvPr>
+          <p:cNvSpPr>
+            <a:spLocks xmlns:a="http://schemas.openxmlformats.org/drawingml/2006/main" noGrp="1"/>
+          </p:cNvSpPr>
+          <p:nvPr/>
+        </p:nvSpPr>
+        <p:spPr>
+          <a:xfrm xmlns:a="http://schemas.openxmlformats.org/drawingml/2006/main">
+            <a:off x="10668000" y="5534025"/>
+            <a:ext cx="4048125" cy="323850"/>
           </a:xfrm>
           <a:prstGeom xmlns:a="http://schemas.openxmlformats.org/drawingml/2006/main" prst="rect">
             <a:avLst/>
@@ -8346,13 +8403,14 @@
           </a:ln>
         </p:spPr>
         <p:txBody>
-          <a:bodyPr xmlns:a="http://schemas.openxmlformats.org/drawingml/2006/main" lIns="0" tIns="0" rIns="0" bIns="0" anchor="ctr">
+          <a:bodyPr xmlns:a="http://schemas.openxmlformats.org/drawingml/2006/main" lIns="0" tIns="0" rIns="0" bIns="0" anchor="t">
             <a:noAutofit/>
           </a:bodyPr>
           <a:lstStyle xmlns:a="http://schemas.openxmlformats.org/drawingml/2006/main"/>
           <a:p xmlns:a="http://schemas.openxmlformats.org/drawingml/2006/main">
             <a:pPr algn="l">
-              <a:defRPr sz="1800" b="1">
+              <a:buNone/>
+              <a:defRPr sz="1875" b="1">
                 <a:solidFill>
                   <a:srgbClr val="2166B0"/>
                 </a:solidFill>
@@ -8362,7 +8420,7 @@
               </a:defRPr>
             </a:pPr>
             <a:r>
-              <a:rPr sz="1800" b="1">
+              <a:rPr sz="1875" b="1">
                 <a:solidFill>
                   <a:srgbClr val="2166B0"/>
                 </a:solidFill>
@@ -8370,29 +8428,29 @@
                 <a:ea typeface="Hiragino Sans GB"/>
                 <a:cs typeface="Hiragino Sans GB"/>
               </a:rPr>
-              <a:t>04  限制处理量和内存增长</a:t>
+              <a:t>② 响应结果消费控制</a:t>
             </a:r>
           </a:p>
         </p:txBody>
       </p:sp>
       <p:sp>
         <p:nvSpPr>
-          <p:cNvPr id="177" name="text-176">
-            <a:extLst xmlns:a="http://schemas.openxmlformats.org/drawingml/2006/main">
-              <a:ext uri="{FF2B5EF4-FFF2-40B4-BE49-F238E27FC236}">
-                <a16:creationId xmlns:a16="http://schemas.microsoft.com/office/drawing/2014/main" id="{26038464-3D80-478C-8E36-CFE1F6588737}"/>
-              </a:ext>
-            </a:extLst>
-          </p:cNvPr>
-          <p:cNvSpPr>
-            <a:spLocks xmlns:a="http://schemas.openxmlformats.org/drawingml/2006/main" noGrp="1"/>
-          </p:cNvSpPr>
-          <p:nvPr/>
-        </p:nvSpPr>
-        <p:spPr>
-          <a:xfrm xmlns:a="http://schemas.openxmlformats.org/drawingml/2006/main">
-            <a:off x="10668000" y="5934075"/>
-            <a:ext cx="4048125" cy="742950"/>
+          <p:cNvPr id="357" name="right-size-rate">
+            <a:extLst xmlns:a="http://schemas.openxmlformats.org/drawingml/2006/main">
+              <a:ext uri="{FF2B5EF4-FFF2-40B4-BE49-F238E27FC236}">
+                <a16:creationId xmlns:a16="http://schemas.microsoft.com/office/drawing/2014/main" id="{C444C3F7-0ED7-488D-86D9-935F552209BF}"/>
+              </a:ext>
+            </a:extLst>
+          </p:cNvPr>
+          <p:cNvSpPr>
+            <a:spLocks xmlns:a="http://schemas.openxmlformats.org/drawingml/2006/main" noGrp="1"/>
+          </p:cNvSpPr>
+          <p:nvPr/>
+        </p:nvSpPr>
+        <p:spPr>
+          <a:xfrm xmlns:a="http://schemas.openxmlformats.org/drawingml/2006/main">
+            <a:off x="10668000" y="5924550"/>
+            <a:ext cx="4048125" cy="485775"/>
           </a:xfrm>
           <a:prstGeom xmlns:a="http://schemas.openxmlformats.org/drawingml/2006/main" prst="rect">
             <a:avLst/>
@@ -8403,23 +8461,37 @@
           </a:ln>
         </p:spPr>
         <p:txBody>
-          <a:bodyPr xmlns:a="http://schemas.openxmlformats.org/drawingml/2006/main" lIns="0" tIns="0" rIns="0" bIns="0" anchor="ctr">
+          <a:bodyPr xmlns:a="http://schemas.openxmlformats.org/drawingml/2006/main" lIns="0" tIns="0" rIns="0" bIns="0" anchor="t">
             <a:noAutofit/>
           </a:bodyPr>
           <a:lstStyle xmlns:a="http://schemas.openxmlformats.org/drawingml/2006/main"/>
           <a:p xmlns:a="http://schemas.openxmlformats.org/drawingml/2006/main">
-            <a:pPr algn="l">
-              <a:defRPr sz="1500" b="0">
+            <a:r>
+              <a:rPr sz="1500" b="1">
+                <a:solidFill>
+                  <a:srgbClr val="163A63"/>
+                </a:solidFill>
+                <a:latin typeface="Hiragino Sans GB"/>
+                <a:ea typeface="Hiragino Sans GB"/>
+                <a:cs typeface="Hiragino Sans GB"/>
+              </a:rPr>
+              <a:t>单帧接收：</a:t>
+            </a:r>
+            <a:r>
+              <a:rPr sz="1500">
                 <a:solidFill>
                   <a:srgbClr val="2D4663"/>
                 </a:solidFill>
                 <a:latin typeface="Hiragino Sans GB"/>
                 <a:ea typeface="Hiragino Sans GB"/>
                 <a:cs typeface="Hiragino Sans GB"/>
-              </a:defRPr>
-            </a:pPr>
-            <a:r>
-              <a:rPr sz="1500" b="0">
+              </a:rPr>
+              <a:t>限制单帧大小；</a:t>
+            </a:r>
+          </a:p>
+          <a:p xmlns:a="http://schemas.openxmlformats.org/drawingml/2006/main">
+            <a:r>
+              <a:rPr sz="1500">
                 <a:solidFill>
                   <a:srgbClr val="2D4663"/>
                 </a:solidFill>
@@ -8427,75 +8499,29 @@
                 <a:ea typeface="Hiragino Sans GB"/>
                 <a:cs typeface="Hiragino Sans GB"/>
               </a:rPr>
-              <a:t>队列同时限制条数和字节数。</a:t>
-            </a:r>
-          </a:p>
-          <a:p xmlns:a="http://schemas.openxmlformats.org/drawingml/2006/main">
-            <a:pPr algn="l">
-              <a:defRPr sz="1500" b="0">
-                <a:solidFill>
-                  <a:srgbClr val="2D4663"/>
-                </a:solidFill>
-                <a:latin typeface="Hiragino Sans GB"/>
-                <a:ea typeface="Hiragino Sans GB"/>
-                <a:cs typeface="Hiragino Sans GB"/>
-              </a:defRPr>
-            </a:pPr>
-            <a:r>
-              <a:rPr sz="1500" b="0">
-                <a:solidFill>
-                  <a:srgbClr val="2D4663"/>
-                </a:solidFill>
-                <a:latin typeface="Hiragino Sans GB"/>
-                <a:ea typeface="Hiragino Sans GB"/>
-                <a:cs typeface="Hiragino Sans GB"/>
-              </a:rPr>
-              <a:t>最多P个任务同时处理，限制JSON层数。</a:t>
-            </a:r>
-          </a:p>
-          <a:p xmlns:a="http://schemas.openxmlformats.org/drawingml/2006/main">
-            <a:pPr algn="l">
-              <a:defRPr sz="1500" b="0">
-                <a:solidFill>
-                  <a:srgbClr val="2D4663"/>
-                </a:solidFill>
-                <a:latin typeface="Hiragino Sans GB"/>
-                <a:ea typeface="Hiragino Sans GB"/>
-                <a:cs typeface="Hiragino Sans GB"/>
-              </a:defRPr>
-            </a:pPr>
-            <a:r>
-              <a:rPr sz="1500" b="0">
-                <a:solidFill>
-                  <a:srgbClr val="2D4663"/>
-                </a:solidFill>
-                <a:latin typeface="Hiragino Sans GB"/>
-                <a:ea typeface="Hiragino Sans GB"/>
-                <a:cs typeface="Hiragino Sans GB"/>
-              </a:rPr>
-              <a:t>正文和编码副本都计入内存上限。</a:t>
+              <a:t>每帧设置接收时限。</a:t>
             </a:r>
           </a:p>
         </p:txBody>
       </p:sp>
       <p:sp>
         <p:nvSpPr>
-          <p:cNvPr id="178" name="text-177">
-            <a:extLst xmlns:a="http://schemas.openxmlformats.org/drawingml/2006/main">
-              <a:ext uri="{FF2B5EF4-FFF2-40B4-BE49-F238E27FC236}">
-                <a16:creationId xmlns:a16="http://schemas.microsoft.com/office/drawing/2014/main" id="{919C4C14-2AA9-4A3A-88A4-D6AC5ACBF5AD}"/>
-              </a:ext>
-            </a:extLst>
-          </p:cNvPr>
-          <p:cNvSpPr>
-            <a:spLocks xmlns:a="http://schemas.openxmlformats.org/drawingml/2006/main" noGrp="1"/>
-          </p:cNvSpPr>
-          <p:nvPr/>
-        </p:nvSpPr>
-        <p:spPr>
-          <a:xfrm xmlns:a="http://schemas.openxmlformats.org/drawingml/2006/main">
-            <a:off x="10668000" y="6715125"/>
-            <a:ext cx="4048125" cy="295275"/>
+          <p:cNvPr id="358" name="right-queue-processing">
+            <a:extLst xmlns:a="http://schemas.openxmlformats.org/drawingml/2006/main">
+              <a:ext uri="{FF2B5EF4-FFF2-40B4-BE49-F238E27FC236}">
+                <a16:creationId xmlns:a16="http://schemas.microsoft.com/office/drawing/2014/main" id="{366478B4-4DF7-4E9B-959A-15D8E16101B6}"/>
+              </a:ext>
+            </a:extLst>
+          </p:cNvPr>
+          <p:cNvSpPr>
+            <a:spLocks xmlns:a="http://schemas.openxmlformats.org/drawingml/2006/main" noGrp="1"/>
+          </p:cNvSpPr>
+          <p:nvPr/>
+        </p:nvSpPr>
+        <p:spPr>
+          <a:xfrm xmlns:a="http://schemas.openxmlformats.org/drawingml/2006/main">
+            <a:off x="10668000" y="6486525"/>
+            <a:ext cx="4048125" cy="695325"/>
           </a:xfrm>
           <a:prstGeom xmlns:a="http://schemas.openxmlformats.org/drawingml/2006/main" prst="rect">
             <a:avLst/>
@@ -8506,15 +8532,16 @@
           </a:ln>
         </p:spPr>
         <p:txBody>
-          <a:bodyPr xmlns:a="http://schemas.openxmlformats.org/drawingml/2006/main" lIns="0" tIns="0" rIns="0" bIns="0" anchor="ctr">
+          <a:bodyPr xmlns:a="http://schemas.openxmlformats.org/drawingml/2006/main" lIns="0" tIns="0" rIns="0" bIns="0" anchor="t">
             <a:noAutofit/>
           </a:bodyPr>
           <a:lstStyle xmlns:a="http://schemas.openxmlformats.org/drawingml/2006/main"/>
           <a:p xmlns:a="http://schemas.openxmlformats.org/drawingml/2006/main">
             <a:pPr algn="l">
-              <a:defRPr sz="1800" b="1">
-                <a:solidFill>
-                  <a:srgbClr val="2166B0"/>
+              <a:buNone/>
+              <a:defRPr sz="1500" b="0">
+                <a:solidFill>
+                  <a:srgbClr val="2D4663"/>
                 </a:solidFill>
                 <a:latin typeface="Hiragino Sans GB"/>
                 <a:ea typeface="Hiragino Sans GB"/>
@@ -8522,37 +8549,96 @@
               </a:defRPr>
             </a:pPr>
             <a:r>
-              <a:rPr sz="1800" b="1">
-                <a:solidFill>
-                  <a:srgbClr val="2166B0"/>
+              <a:rPr sz="1500" b="1">
+                <a:solidFill>
+                  <a:srgbClr val="163A63"/>
                 </a:solidFill>
                 <a:latin typeface="Hiragino Sans GB"/>
                 <a:ea typeface="Hiragino Sans GB"/>
                 <a:cs typeface="Hiragino Sans GB"/>
               </a:rPr>
-              <a:t>05  积压先暂停，超限明确报错</a:t>
+              <a:t>排队与处理：</a:t>
+            </a:r>
+            <a:r>
+              <a:rPr sz="1500">
+                <a:solidFill>
+                  <a:srgbClr val="2D4663"/>
+                </a:solidFill>
+                <a:latin typeface="Hiragino Sans GB"/>
+                <a:ea typeface="Hiragino Sans GB"/>
+                <a:cs typeface="Hiragino Sans GB"/>
+              </a:rPr>
+              <a:t>队列限条数和字节数，</a:t>
+            </a:r>
+          </a:p>
+          <a:p xmlns:a="http://schemas.openxmlformats.org/drawingml/2006/main">
+            <a:pPr algn="l">
+              <a:buNone/>
+              <a:defRPr sz="1500" b="0">
+                <a:solidFill>
+                  <a:srgbClr val="2D4663"/>
+                </a:solidFill>
+                <a:latin typeface="Hiragino Sans GB"/>
+                <a:ea typeface="Hiragino Sans GB"/>
+                <a:cs typeface="Hiragino Sans GB"/>
+              </a:defRPr>
+            </a:pPr>
+            <a:r>
+              <a:rPr sz="1500">
+                <a:solidFill>
+                  <a:srgbClr val="2D4663"/>
+                </a:solidFill>
+                <a:latin typeface="Hiragino Sans GB"/>
+                <a:ea typeface="Hiragino Sans GB"/>
+                <a:cs typeface="Hiragino Sans GB"/>
+              </a:rPr>
+              <a:t>最多P个任务并行，同Run串行。</a:t>
+            </a:r>
+          </a:p>
+          <a:p xmlns:a="http://schemas.openxmlformats.org/drawingml/2006/main">
+            <a:pPr algn="l">
+              <a:buNone/>
+              <a:defRPr sz="1500" b="0">
+                <a:solidFill>
+                  <a:srgbClr val="2D4663"/>
+                </a:solidFill>
+                <a:latin typeface="Hiragino Sans GB"/>
+                <a:ea typeface="Hiragino Sans GB"/>
+                <a:cs typeface="Hiragino Sans GB"/>
+              </a:defRPr>
+            </a:pPr>
+            <a:r>
+              <a:rPr sz="1500">
+                <a:solidFill>
+                  <a:srgbClr val="2D4663"/>
+                </a:solidFill>
+                <a:latin typeface="Hiragino Sans GB"/>
+                <a:ea typeface="Hiragino Sans GB"/>
+                <a:cs typeface="Hiragino Sans GB"/>
+              </a:rPr>
+              <a:t>积压先暂停，超限或暂停过久则报错终止。</a:t>
             </a:r>
           </a:p>
         </p:txBody>
       </p:sp>
       <p:sp>
         <p:nvSpPr>
-          <p:cNvPr id="179" name="text-178">
-            <a:extLst xmlns:a="http://schemas.openxmlformats.org/drawingml/2006/main">
-              <a:ext uri="{FF2B5EF4-FFF2-40B4-BE49-F238E27FC236}">
-                <a16:creationId xmlns:a16="http://schemas.microsoft.com/office/drawing/2014/main" id="{783C89AD-9F30-4C20-8FFC-FB4BB562864D}"/>
-              </a:ext>
-            </a:extLst>
-          </p:cNvPr>
-          <p:cNvSpPr>
-            <a:spLocks xmlns:a="http://schemas.openxmlformats.org/drawingml/2006/main" noGrp="1"/>
-          </p:cNvSpPr>
-          <p:nvPr/>
-        </p:nvSpPr>
-        <p:spPr>
-          <a:xfrm xmlns:a="http://schemas.openxmlformats.org/drawingml/2006/main">
-            <a:off x="10668000" y="7048500"/>
-            <a:ext cx="4048125" cy="742950"/>
+          <p:cNvPr id="359" name="right-body-memory">
+            <a:extLst xmlns:a="http://schemas.openxmlformats.org/drawingml/2006/main">
+              <a:ext uri="{FF2B5EF4-FFF2-40B4-BE49-F238E27FC236}">
+                <a16:creationId xmlns:a16="http://schemas.microsoft.com/office/drawing/2014/main" id="{C6B08142-ADDE-4DC5-BAEC-04C235FC87AF}"/>
+              </a:ext>
+            </a:extLst>
+          </p:cNvPr>
+          <p:cNvSpPr>
+            <a:spLocks xmlns:a="http://schemas.openxmlformats.org/drawingml/2006/main" noGrp="1"/>
+          </p:cNvSpPr>
+          <p:nvPr/>
+        </p:nvSpPr>
+        <p:spPr>
+          <a:xfrm xmlns:a="http://schemas.openxmlformats.org/drawingml/2006/main">
+            <a:off x="10668000" y="7229475"/>
+            <a:ext cx="4048125" cy="485775"/>
           </a:xfrm>
           <a:prstGeom xmlns:a="http://schemas.openxmlformats.org/drawingml/2006/main" prst="rect">
             <a:avLst/>
@@ -8563,12 +8649,13 @@
           </a:ln>
         </p:spPr>
         <p:txBody>
-          <a:bodyPr xmlns:a="http://schemas.openxmlformats.org/drawingml/2006/main" lIns="0" tIns="0" rIns="0" bIns="0" anchor="ctr">
+          <a:bodyPr xmlns:a="http://schemas.openxmlformats.org/drawingml/2006/main" lIns="0" tIns="0" rIns="0" bIns="0" anchor="t">
             <a:noAutofit/>
           </a:bodyPr>
           <a:lstStyle xmlns:a="http://schemas.openxmlformats.org/drawingml/2006/main"/>
           <a:p xmlns:a="http://schemas.openxmlformats.org/drawingml/2006/main">
             <a:pPr algn="l">
+              <a:buNone/>
               <a:defRPr sz="1500" b="0">
                 <a:solidFill>
                   <a:srgbClr val="2D4663"/>
@@ -8579,7 +8666,18 @@
               </a:defRPr>
             </a:pPr>
             <a:r>
-              <a:rPr sz="1500" b="0">
+              <a:rPr sz="1500" b="1">
+                <a:solidFill>
+                  <a:srgbClr val="163A63"/>
+                </a:solidFill>
+                <a:latin typeface="Hiragino Sans GB"/>
+                <a:ea typeface="Hiragino Sans GB"/>
+                <a:cs typeface="Hiragino Sans GB"/>
+              </a:rPr>
+              <a:t>正文内存：</a:t>
+            </a:r>
+            <a:r>
+              <a:rPr sz="1500">
                 <a:solidFill>
                   <a:srgbClr val="2D4663"/>
                 </a:solidFill>
@@ -8587,11 +8685,12 @@
                 <a:ea typeface="Hiragino Sans GB"/>
                 <a:cs typeface="Hiragino Sans GB"/>
               </a:rPr>
-              <a:t>队列接近上限时暂停接收，减少后恢复。</a:t>
+              <a:t>正文及编码副本计入Run</a:t>
             </a:r>
           </a:p>
           <a:p xmlns:a="http://schemas.openxmlformats.org/drawingml/2006/main">
             <a:pPr algn="l">
+              <a:buNone/>
               <a:defRPr sz="1500" b="0">
                 <a:solidFill>
                   <a:srgbClr val="2D4663"/>
@@ -8602,7 +8701,7 @@
               </a:defRPr>
             </a:pPr>
             <a:r>
-              <a:rPr sz="1500" b="0">
+              <a:rPr sz="1500">
                 <a:solidFill>
                   <a:srgbClr val="2D4663"/>
                 </a:solidFill>
@@ -8610,175 +8709,7 @@
                 <a:ea typeface="Hiragino Sans GB"/>
                 <a:cs typeface="Hiragino Sans GB"/>
               </a:rPr>
-              <a:t>超过上限或暂停太久，停止本次调用。</a:t>
-            </a:r>
-          </a:p>
-          <a:p xmlns:a="http://schemas.openxmlformats.org/drawingml/2006/main">
-            <a:pPr algn="l">
-              <a:defRPr sz="1500" b="0">
-                <a:solidFill>
-                  <a:srgbClr val="2D4663"/>
-                </a:solidFill>
-                <a:latin typeface="Hiragino Sans GB"/>
-                <a:ea typeface="Hiragino Sans GB"/>
-                <a:cs typeface="Hiragino Sans GB"/>
-              </a:defRPr>
-            </a:pPr>
-            <a:r>
-              <a:rPr sz="1500" b="0">
-                <a:solidFill>
-                  <a:srgbClr val="2D4663"/>
-                </a:solidFill>
-                <a:latin typeface="Hiragino Sans GB"/>
-                <a:ea typeface="Hiragino Sans GB"/>
-                <a:cs typeface="Hiragino Sans GB"/>
-              </a:rPr>
-              <a:t>不丢帧、不截断后再向前端报告成功。</a:t>
-            </a:r>
-          </a:p>
-        </p:txBody>
-      </p:sp>
-      <p:sp>
-        <p:nvSpPr>
-          <p:cNvPr id="180" name="line-179">
-            <a:extLst xmlns:a="http://schemas.openxmlformats.org/drawingml/2006/main">
-              <a:ext uri="{FF2B5EF4-FFF2-40B4-BE49-F238E27FC236}">
-                <a16:creationId xmlns:a16="http://schemas.microsoft.com/office/drawing/2014/main" id="{46BCD39C-2C75-40AD-84F1-D49900BA0D7B}"/>
-              </a:ext>
-            </a:extLst>
-          </p:cNvPr>
-          <p:cNvSpPr>
-            <a:spLocks xmlns:a="http://schemas.openxmlformats.org/drawingml/2006/main" noGrp="1"/>
-          </p:cNvSpPr>
-          <p:nvPr/>
-        </p:nvSpPr>
-        <p:spPr>
-          <a:xfrm xmlns:a="http://schemas.openxmlformats.org/drawingml/2006/main">
-            <a:off x="523875" y="7800975"/>
-            <a:ext cx="14192250" cy="0"/>
-          </a:xfrm>
-          <a:prstGeom xmlns:a="http://schemas.openxmlformats.org/drawingml/2006/main" prst="line">
-            <a:avLst/>
-          </a:prstGeom>
-          <a:noFill xmlns:a="http://schemas.openxmlformats.org/drawingml/2006/main"/>
-          <a:ln xmlns:a="http://schemas.openxmlformats.org/drawingml/2006/main" w="14288">
-            <a:solidFill>
-              <a:srgbClr val="B9CEE5"/>
-            </a:solidFill>
-            <a:prstDash val="solid"/>
-          </a:ln>
-        </p:spPr>
-      </p:sp>
-      <p:sp>
-        <p:nvSpPr>
-          <p:cNvPr id="181" name="text-180">
-            <a:extLst xmlns:a="http://schemas.openxmlformats.org/drawingml/2006/main">
-              <a:ext uri="{FF2B5EF4-FFF2-40B4-BE49-F238E27FC236}">
-                <a16:creationId xmlns:a16="http://schemas.microsoft.com/office/drawing/2014/main" id="{F0AA7ED8-EDF4-43F3-83AF-AF2EC6673839}"/>
-              </a:ext>
-            </a:extLst>
-          </p:cNvPr>
-          <p:cNvSpPr>
-            <a:spLocks xmlns:a="http://schemas.openxmlformats.org/drawingml/2006/main" noGrp="1"/>
-          </p:cNvSpPr>
-          <p:nvPr/>
-        </p:nvSpPr>
-        <p:spPr>
-          <a:xfrm xmlns:a="http://schemas.openxmlformats.org/drawingml/2006/main">
-            <a:off x="533400" y="7877175"/>
-            <a:ext cx="14182725" cy="285750"/>
-          </a:xfrm>
-          <a:prstGeom xmlns:a="http://schemas.openxmlformats.org/drawingml/2006/main" prst="rect">
-            <a:avLst/>
-          </a:prstGeom>
-          <a:noFill xmlns:a="http://schemas.openxmlformats.org/drawingml/2006/main"/>
-          <a:ln xmlns:a="http://schemas.openxmlformats.org/drawingml/2006/main" w="0">
-            <a:noFill/>
-          </a:ln>
-        </p:spPr>
-        <p:txBody>
-          <a:bodyPr xmlns:a="http://schemas.openxmlformats.org/drawingml/2006/main" lIns="0" tIns="0" rIns="0" bIns="0" anchor="ctr">
-            <a:noAutofit/>
-          </a:bodyPr>
-          <a:lstStyle xmlns:a="http://schemas.openxmlformats.org/drawingml/2006/main"/>
-          <a:p xmlns:a="http://schemas.openxmlformats.org/drawingml/2006/main">
-            <a:pPr algn="l">
-              <a:defRPr sz="1500" b="0">
-                <a:solidFill>
-                  <a:srgbClr val="163A63"/>
-                </a:solidFill>
-                <a:latin typeface="Hiragino Sans GB"/>
-                <a:ea typeface="Hiragino Sans GB"/>
-                <a:cs typeface="Hiragino Sans GB"/>
-              </a:defRPr>
-            </a:pPr>
-            <a:r>
-              <a:rPr sz="1500" b="0">
-                <a:solidFill>
-                  <a:srgbClr val="163A63"/>
-                </a:solidFill>
-                <a:latin typeface="Hiragino Sans GB"/>
-                <a:ea typeface="Hiragino Sans GB"/>
-                <a:cs typeface="Hiragino Sans GB"/>
-              </a:rPr>
-              <a:t>下游协议：三方确认数据限制、各段超时和后台任务期限并联测。符合约定却被误拒，由本方修复。</a:t>
-            </a:r>
-          </a:p>
-        </p:txBody>
-      </p:sp>
-      <p:sp>
-        <p:nvSpPr>
-          <p:cNvPr id="182" name="text-181">
-            <a:extLst xmlns:a="http://schemas.openxmlformats.org/drawingml/2006/main">
-              <a:ext uri="{FF2B5EF4-FFF2-40B4-BE49-F238E27FC236}">
-                <a16:creationId xmlns:a16="http://schemas.microsoft.com/office/drawing/2014/main" id="{2FEF3F19-26FC-4953-9949-9BAFFEC5AA5F}"/>
-              </a:ext>
-            </a:extLst>
-          </p:cNvPr>
-          <p:cNvSpPr>
-            <a:spLocks xmlns:a="http://schemas.openxmlformats.org/drawingml/2006/main" noGrp="1"/>
-          </p:cNvSpPr>
-          <p:nvPr/>
-        </p:nvSpPr>
-        <p:spPr>
-          <a:xfrm xmlns:a="http://schemas.openxmlformats.org/drawingml/2006/main">
-            <a:off x="533400" y="8220075"/>
-            <a:ext cx="14182725" cy="247650"/>
-          </a:xfrm>
-          <a:prstGeom xmlns:a="http://schemas.openxmlformats.org/drawingml/2006/main" prst="rect">
-            <a:avLst/>
-          </a:prstGeom>
-          <a:noFill xmlns:a="http://schemas.openxmlformats.org/drawingml/2006/main"/>
-          <a:ln xmlns:a="http://schemas.openxmlformats.org/drawingml/2006/main" w="0">
-            <a:noFill/>
-          </a:ln>
-        </p:spPr>
-        <p:txBody>
-          <a:bodyPr xmlns:a="http://schemas.openxmlformats.org/drawingml/2006/main" lIns="0" tIns="0" rIns="0" bIns="0" anchor="ctr">
-            <a:noAutofit/>
-          </a:bodyPr>
-          <a:lstStyle xmlns:a="http://schemas.openxmlformats.org/drawingml/2006/main"/>
-          <a:p xmlns:a="http://schemas.openxmlformats.org/drawingml/2006/main">
-            <a:pPr algn="l">
-              <a:defRPr sz="1425" b="0">
-                <a:solidFill>
-                  <a:srgbClr val="647D99"/>
-                </a:solidFill>
-                <a:latin typeface="Hiragino Sans GB"/>
-                <a:ea typeface="Hiragino Sans GB"/>
-                <a:cs typeface="Hiragino Sans GB"/>
-              </a:defRPr>
-            </a:pPr>
-            <a:r>
-              <a:rPr sz="1425" b="0">
-                <a:solidFill>
-                  <a:srgbClr val="647D99"/>
-                </a:solidFill>
-                <a:latin typeface="Hiragino Sans GB"/>
-                <a:ea typeface="Hiragino Sans GB"/>
-                <a:cs typeface="Hiragino Sans GB"/>
-              </a:rPr>
-              <a:t>本页为加固设计。后台任务限量、远端查询与取消确认待补充。连接结束不代表任务停止。FULL / no-store规则不变。</a:t>
+              <a:t>与实例上限；超限报错，不截断。</a:t>
             </a:r>
           </a:p>
         </p:txBody>

--- a/docs/presentations/Agent高可用加固.pptx
+++ b/docs/presentations/Agent高可用加固.pptx
@@ -2,13 +2,13 @@
 <file path=ppt/presentation.xml><?xml version="1.0" encoding="utf-8"?>
 <p:presentation xmlns:p="http://schemas.openxmlformats.org/presentationml/2006/main">
   <p:sldMasterIdLst>
-    <p:sldMasterId xmlns:r="http://schemas.openxmlformats.org/officeDocument/2006/relationships" id="2147483648" r:id="R52b20cd093614509"/>
+    <p:sldMasterId xmlns:r="http://schemas.openxmlformats.org/officeDocument/2006/relationships" id="2147483648" r:id="Rdaaca6f61a3c4eed"/>
   </p:sldMasterIdLst>
   <p:notesMasterIdLst>
-    <p:notesMasterId xmlns:r="http://schemas.openxmlformats.org/officeDocument/2006/relationships" r:id="Rbe278d6521514525"/>
+    <p:notesMasterId xmlns:r="http://schemas.openxmlformats.org/officeDocument/2006/relationships" r:id="R493329723b3c4388"/>
   </p:notesMasterIdLst>
   <p:sldIdLst>
-    <p:sldId xmlns:r="http://schemas.openxmlformats.org/officeDocument/2006/relationships" id="256" r:id="R0ac4de4f1c2c451a"/>
+    <p:sldId xmlns:r="http://schemas.openxmlformats.org/officeDocument/2006/relationships" id="256" r:id="Rcd07613d55904504"/>
   </p:sldIdLst>
   <p:sldSz cx="15240000" cy="8572500"/>
   <p:notesSz cx="6858000" cy="9144000"/>
@@ -612,7 +612,7 @@
           </a:p>
           <a:p xmlns:a="http://schemas.openxmlformats.org/drawingml/2006/main">
             <a:r>
-              <a:t>首条有效响应由三方契约定义，不要求必须是首段正文。合法agent.async_started属于异步受理的有效响应，心跳与空字节不能替代。数据空闲时限限制相邻原始数据之间的停顿。单帧接收时限从该帧起始计算，收到零碎字节不能刷新它；最大帧字节数独立执行。从调用前起算的绝对总时限不因任何数据、心跳或重试重置。仅对双方协议允许的安全请求重试，重试也消费剩余总时限；未知副作用不得自动重放。自发背压暂停与网络空闲应分开计量，暂停期限独立限制且绝对总时限继续走时，避免误判下游责任。</a:t>
+              <a:t>首条有效响应由三方契约定义，不要求必须是首段正文。合法agent.async_started属于异步受理的有效响应，心跳与空字节不能替代。数据空闲时限限制相邻原始数据之间的停顿。消息接收时限从一条业务消息首字节到达到完整接收结束计时；超时仍未收完整时终止本次调用并报错。零碎字节不能反复刷新期限，这不是要求Agent固定间隔生成消息。帧按协议的完整业务消息界定，不按单次网络读取的chunk划分；单帧大小上限独立执行。从调用前起算的绝对总时限不因任何数据、心跳或重试重置。仅对双方协议允许的安全请求重试，重试也消费剩余总时限；未知副作用不得自动重放。自发背压暂停与网络空闲应分开计量，暂停期限独立限制且绝对总时限继续走时，避免误判下游责任。</a:t>
             </a:r>
           </a:p>
           <a:p xmlns:a="http://schemas.openxmlformats.org/drawingml/2006/main">
@@ -795,7 +795,7 @@
   </p:cSld>
   <p:clrMap bg1="lt1" tx1="dk1" bg2="lt2" tx2="dk2" accent1="accent1" accent2="accent2" accent3="accent3" accent4="accent4" accent5="accent5" accent6="accent6" hlink="hlink" folHlink="folHlink"/>
   <p:sldLayoutIdLst>
-    <p:sldLayoutId xmlns:r="http://schemas.openxmlformats.org/officeDocument/2006/relationships" id="2147483649" r:id="R0dfa498bb8f84a06"/>
+    <p:sldLayoutId xmlns:r="http://schemas.openxmlformats.org/officeDocument/2006/relationships" id="2147483649" r:id="Red57d21d9bc04520"/>
   </p:sldLayoutIdLst>
   <p:txStyles>
     <p:titleStyle>
@@ -2211,7 +2211,7 @@
       </p:sp>
       <p:cxnSp>
         <p:nvCxnSpPr>
-          <p:cNvPr id="549" name=""/>
+          <p:cNvPr id="717" name=""/>
           <p:cNvCxnSpPr>
             <a:stCxn xmlns:a="http://schemas.openxmlformats.org/drawingml/2006/main" id="20" idx="3"/>
             <a:endCxn xmlns:a="http://schemas.openxmlformats.org/drawingml/2006/main" id="21" idx="1"/>
@@ -2445,7 +2445,7 @@
       </p:sp>
       <p:cxnSp>
         <p:nvCxnSpPr>
-          <p:cNvPr id="556" name=""/>
+          <p:cNvPr id="724" name=""/>
           <p:cNvCxnSpPr>
             <a:stCxn xmlns:a="http://schemas.openxmlformats.org/drawingml/2006/main" id="27" idx="3"/>
             <a:endCxn xmlns:a="http://schemas.openxmlformats.org/drawingml/2006/main" id="28" idx="1"/>
@@ -2962,7 +2962,7 @@
       </p:sp>
       <p:cxnSp>
         <p:nvCxnSpPr>
-          <p:cNvPr id="571" name=""/>
+          <p:cNvPr id="739" name=""/>
           <p:cNvCxnSpPr>
             <a:stCxn xmlns:a="http://schemas.openxmlformats.org/drawingml/2006/main" id="42" idx="3"/>
             <a:endCxn xmlns:a="http://schemas.openxmlformats.org/drawingml/2006/main" id="43" idx="1"/>
@@ -3134,7 +3134,7 @@
       </p:sp>
       <p:cxnSp>
         <p:nvCxnSpPr>
-          <p:cNvPr id="576" name=""/>
+          <p:cNvPr id="744" name=""/>
           <p:cNvCxnSpPr>
             <a:stCxn xmlns:a="http://schemas.openxmlformats.org/drawingml/2006/main" id="47" idx="3"/>
             <a:endCxn xmlns:a="http://schemas.openxmlformats.org/drawingml/2006/main" id="48" idx="1"/>
@@ -3791,7 +3791,7 @@
                 <a:ea typeface="Hiragino Sans GB"/>
                 <a:cs typeface="Hiragino Sans GB"/>
               </a:rPr>
-              <a:t>空闲时限 / 一帧接收时限</a:t>
+              <a:t>空闲时限 / 消息接收时限</a:t>
             </a:r>
           </a:p>
         </p:txBody>
@@ -3854,7 +3854,7 @@
       </p:sp>
       <p:cxnSp>
         <p:nvCxnSpPr>
-          <p:cNvPr id="590" name=""/>
+          <p:cNvPr id="758" name=""/>
           <p:cNvCxnSpPr>
             <a:stCxn xmlns:a="http://schemas.openxmlformats.org/drawingml/2006/main" id="61" idx="3"/>
             <a:endCxn xmlns:a="http://schemas.openxmlformats.org/drawingml/2006/main" id="62" idx="1"/>
@@ -3936,7 +3936,7 @@
       </p:sp>
       <p:cxnSp>
         <p:nvCxnSpPr>
-          <p:cNvPr id="593" name=""/>
+          <p:cNvPr id="761" name=""/>
           <p:cNvCxnSpPr>
             <a:stCxn xmlns:a="http://schemas.openxmlformats.org/drawingml/2006/main" id="64" idx="3"/>
             <a:endCxn xmlns:a="http://schemas.openxmlformats.org/drawingml/2006/main" id="65" idx="1"/>
@@ -4018,7 +4018,7 @@
       </p:sp>
       <p:cxnSp>
         <p:nvCxnSpPr>
-          <p:cNvPr id="596" name=""/>
+          <p:cNvPr id="764" name=""/>
           <p:cNvCxnSpPr>
             <a:stCxn xmlns:a="http://schemas.openxmlformats.org/drawingml/2006/main" id="67" idx="3"/>
             <a:endCxn xmlns:a="http://schemas.openxmlformats.org/drawingml/2006/main" id="68" idx="1"/>
@@ -4100,7 +4100,7 @@
       </p:sp>
       <p:cxnSp>
         <p:nvCxnSpPr>
-          <p:cNvPr id="599" name=""/>
+          <p:cNvPr id="767" name=""/>
           <p:cNvCxnSpPr>
             <a:stCxn xmlns:a="http://schemas.openxmlformats.org/drawingml/2006/main" id="70" idx="2"/>
             <a:endCxn xmlns:a="http://schemas.openxmlformats.org/drawingml/2006/main" id="71" idx="0"/>
@@ -4182,7 +4182,7 @@
       </p:sp>
       <p:cxnSp>
         <p:nvCxnSpPr>
-          <p:cNvPr id="602" name=""/>
+          <p:cNvPr id="770" name=""/>
           <p:cNvCxnSpPr>
             <a:stCxn xmlns:a="http://schemas.openxmlformats.org/drawingml/2006/main" id="73" idx="3"/>
             <a:endCxn xmlns:a="http://schemas.openxmlformats.org/drawingml/2006/main" id="74" idx="1"/>
@@ -4264,7 +4264,7 @@
       </p:sp>
       <p:cxnSp>
         <p:nvCxnSpPr>
-          <p:cNvPr id="605" name=""/>
+          <p:cNvPr id="773" name=""/>
           <p:cNvCxnSpPr>
             <a:stCxn xmlns:a="http://schemas.openxmlformats.org/drawingml/2006/main" id="76" idx="0"/>
             <a:endCxn xmlns:a="http://schemas.openxmlformats.org/drawingml/2006/main" id="77" idx="2"/>
@@ -4730,7 +4730,7 @@
       </p:sp>
       <p:cxnSp>
         <p:nvCxnSpPr>
-          <p:cNvPr id="616" name=""/>
+          <p:cNvPr id="784" name=""/>
           <p:cNvCxnSpPr>
             <a:stCxn xmlns:a="http://schemas.openxmlformats.org/drawingml/2006/main" id="87" idx="3"/>
             <a:endCxn xmlns:a="http://schemas.openxmlformats.org/drawingml/2006/main" id="88" idx="1"/>
@@ -5486,7 +5486,7 @@
       </p:sp>
       <p:cxnSp>
         <p:nvCxnSpPr>
-          <p:cNvPr id="634" name=""/>
+          <p:cNvPr id="802" name=""/>
           <p:cNvCxnSpPr>
             <a:stCxn xmlns:a="http://schemas.openxmlformats.org/drawingml/2006/main" id="105" idx="2"/>
             <a:endCxn xmlns:a="http://schemas.openxmlformats.org/drawingml/2006/main" id="106" idx="0"/>
@@ -5568,7 +5568,7 @@
       </p:sp>
       <p:cxnSp>
         <p:nvCxnSpPr>
-          <p:cNvPr id="637" name=""/>
+          <p:cNvPr id="805" name=""/>
           <p:cNvCxnSpPr>
             <a:stCxn xmlns:a="http://schemas.openxmlformats.org/drawingml/2006/main" id="108" idx="1"/>
             <a:endCxn xmlns:a="http://schemas.openxmlformats.org/drawingml/2006/main" id="109" idx="3"/>
@@ -5650,7 +5650,7 @@
       </p:sp>
       <p:cxnSp>
         <p:nvCxnSpPr>
-          <p:cNvPr id="640" name=""/>
+          <p:cNvPr id="808" name=""/>
           <p:cNvCxnSpPr>
             <a:stCxn xmlns:a="http://schemas.openxmlformats.org/drawingml/2006/main" id="111" idx="0"/>
             <a:endCxn xmlns:a="http://schemas.openxmlformats.org/drawingml/2006/main" id="112" idx="2"/>
@@ -5732,7 +5732,7 @@
       </p:sp>
       <p:cxnSp>
         <p:nvCxnSpPr>
-          <p:cNvPr id="643" name=""/>
+          <p:cNvPr id="811" name=""/>
           <p:cNvCxnSpPr>
             <a:stCxn xmlns:a="http://schemas.openxmlformats.org/drawingml/2006/main" id="114" idx="3"/>
             <a:endCxn xmlns:a="http://schemas.openxmlformats.org/drawingml/2006/main" id="115" idx="1"/>
@@ -6443,7 +6443,7 @@
       </p:sp>
       <p:cxnSp>
         <p:nvCxnSpPr>
-          <p:cNvPr id="660" name=""/>
+          <p:cNvPr id="828" name=""/>
           <p:cNvCxnSpPr>
             <a:stCxn xmlns:a="http://schemas.openxmlformats.org/drawingml/2006/main" id="131" idx="3"/>
             <a:endCxn xmlns:a="http://schemas.openxmlformats.org/drawingml/2006/main" id="132" idx="1"/>
@@ -6544,7 +6544,7 @@
                 <a:ea typeface="Hiragino Sans GB"/>
                 <a:cs typeface="Hiragino Sans GB"/>
               </a:rPr>
-              <a:t>每帧设置接收时限</a:t>
+              <a:t>单条消息超时未收完整则终止</a:t>
             </a:r>
           </a:p>
         </p:txBody>
@@ -6825,7 +6825,7 @@
       </p:sp>
       <p:cxnSp>
         <p:nvCxnSpPr>
-          <p:cNvPr id="670" name=""/>
+          <p:cNvPr id="838" name=""/>
           <p:cNvCxnSpPr>
             <a:stCxn xmlns:a="http://schemas.openxmlformats.org/drawingml/2006/main" id="141" idx="3"/>
             <a:endCxn xmlns:a="http://schemas.openxmlformats.org/drawingml/2006/main" id="142" idx="1"/>
@@ -7003,7 +7003,7 @@
       </p:sp>
       <p:cxnSp>
         <p:nvCxnSpPr>
-          <p:cNvPr id="676" name=""/>
+          <p:cNvPr id="844" name=""/>
           <p:cNvCxnSpPr>
             <a:stCxn xmlns:a="http://schemas.openxmlformats.org/drawingml/2006/main" id="147" idx="2"/>
             <a:endCxn xmlns:a="http://schemas.openxmlformats.org/drawingml/2006/main" id="148" idx="0"/>
@@ -7495,7 +7495,7 @@
       </p:sp>
       <p:cxnSp>
         <p:nvCxnSpPr>
-          <p:cNvPr id="689" name=""/>
+          <p:cNvPr id="857" name=""/>
           <p:cNvCxnSpPr>
             <a:stCxn xmlns:a="http://schemas.openxmlformats.org/drawingml/2006/main" id="160" idx="3"/>
             <a:endCxn xmlns:a="http://schemas.openxmlformats.org/drawingml/2006/main" id="161" idx="1"/>
@@ -7577,7 +7577,7 @@
       </p:sp>
       <p:cxnSp>
         <p:nvCxnSpPr>
-          <p:cNvPr id="692" name=""/>
+          <p:cNvPr id="860" name=""/>
           <p:cNvCxnSpPr>
             <a:stCxn xmlns:a="http://schemas.openxmlformats.org/drawingml/2006/main" id="163" idx="0"/>
             <a:endCxn xmlns:a="http://schemas.openxmlformats.org/drawingml/2006/main" id="164" idx="2"/>
@@ -7659,7 +7659,7 @@
       </p:sp>
       <p:cxnSp>
         <p:nvCxnSpPr>
-          <p:cNvPr id="695" name=""/>
+          <p:cNvPr id="863" name=""/>
           <p:cNvCxnSpPr>
             <a:stCxn xmlns:a="http://schemas.openxmlformats.org/drawingml/2006/main" id="166" idx="3"/>
             <a:endCxn xmlns:a="http://schemas.openxmlformats.org/drawingml/2006/main" id="167" idx="1"/>
@@ -8499,7 +8499,7 @@
                 <a:ea typeface="Hiragino Sans GB"/>
                 <a:cs typeface="Hiragino Sans GB"/>
               </a:rPr>
-              <a:t>每帧设置接收时限。</a:t>
+              <a:t>单条消息超时未收完整，终止本次调用。</a:t>
             </a:r>
           </a:p>
         </p:txBody>
